--- a/deliverables/CINEMATCH-Presentation.pptx
+++ b/deliverables/CINEMATCH-Presentation.pptx
@@ -17,9 +17,12 @@
     <p:sldId id="265" r:id="rId11"/>
     <p:sldId id="266" r:id="rId12"/>
     <p:sldId id="267" r:id="rId13"/>
+    <p:sldId id="268" r:id="rId14"/>
+    <p:sldId id="269" r:id="rId15"/>
+    <p:sldId id="270" r:id="rId16"/>
   </p:sldIdLst>
   <p:notesMasterIdLst>
-    <p:notesMasterId r:id="rId14"/>
+    <p:notesMasterId r:id="rId17"/>
   </p:notesMasterIdLst>
   <p:sldSz cx="12192000" cy="6858000"/>
   <p:notesSz cx="6858000" cy="12192000"/>
@@ -1114,6 +1117,270 @@
             <a:fld id="{F7021451-1387-4CA6-816F-3879F97B5CBC}" type="slidenum">
               <a:rPr lang="en-US"/>
               <a:t>12</a:t>
+            </a:fld>
+            <a:endParaRPr lang="en-US"/>
+          </a:p>
+        </p:txBody>
+      </p:sp>
+    </p:spTree>
+    <p:extLst>
+      <p:ext uri="{BB962C8B-B14F-4D97-AF65-F5344CB8AC3E}">
+        <p14:creationId xmlns:p14="http://schemas.microsoft.com/office/powerpoint/2010/main" val="1024086991"/>
+      </p:ext>
+    </p:extLst>
+  </p:cSld>
+  <p:clrMapOvr>
+    <a:masterClrMapping/>
+  </p:clrMapOvr>
+</p:notes>
+</file>
+
+<file path=ppt/notesSlides/notesSlide13.xml><?xml version="1.0" encoding="utf-8"?>
+<p:notes xmlns:a="http://schemas.openxmlformats.org/drawingml/2006/main" xmlns:r="http://schemas.openxmlformats.org/officeDocument/2006/relationships" xmlns:p="http://schemas.openxmlformats.org/presentationml/2006/main">
+  <p:cSld>
+    <p:spTree>
+      <p:nvGrpSpPr>
+        <p:cNvPr id="1" name=""/>
+        <p:cNvGrpSpPr/>
+        <p:nvPr/>
+      </p:nvGrpSpPr>
+      <p:grpSpPr>
+        <a:xfrm>
+          <a:off x="0" y="0"/>
+          <a:ext cx="0" cy="0"/>
+          <a:chOff x="0" y="0"/>
+          <a:chExt cx="0" cy="0"/>
+        </a:xfrm>
+      </p:grpSpPr>
+      <p:sp>
+        <p:nvSpPr>
+          <p:cNvPr id="2" name="Slide Image Placeholder 1"/>
+          <p:cNvSpPr>
+            <a:spLocks noGrp="1" noRot="1" noChangeAspect="1"/>
+          </p:cNvSpPr>
+          <p:nvPr>
+            <p:ph type="sldImg"/>
+          </p:nvPr>
+        </p:nvSpPr>
+        <p:spPr/>
+      </p:sp>
+      <p:sp>
+        <p:nvSpPr>
+          <p:cNvPr id="3" name="Notes Placeholder 2"/>
+          <p:cNvSpPr>
+            <a:spLocks noGrp="1"/>
+          </p:cNvSpPr>
+          <p:nvPr>
+            <p:ph type="body" idx="1"/>
+          </p:nvPr>
+        </p:nvSpPr>
+        <p:spPr/>
+        <p:txBody>
+          <a:bodyPr/>
+          <a:lstStyle/>
+          <a:p>
+            <a:r>
+              <a:rPr lang="en-US" dirty="0"/>
+              <a:t/>
+            </a:r>
+            <a:endParaRPr lang="en-US" dirty="0"/>
+          </a:p>
+        </p:txBody>
+      </p:sp>
+      <p:sp>
+        <p:nvSpPr>
+          <p:cNvPr id="4" name="Slide Number Placeholder 3"/>
+          <p:cNvSpPr>
+            <a:spLocks noGrp="1"/>
+          </p:cNvSpPr>
+          <p:nvPr>
+            <p:ph type="sldNum" sz="quarter" idx="10"/>
+          </p:nvPr>
+        </p:nvSpPr>
+        <p:spPr/>
+        <p:txBody>
+          <a:bodyPr/>
+          <a:lstStyle/>
+          <a:p>
+            <a:fld id="{F7021451-1387-4CA6-816F-3879F97B5CBC}" type="slidenum">
+              <a:rPr lang="en-US"/>
+              <a:t>13</a:t>
+            </a:fld>
+            <a:endParaRPr lang="en-US"/>
+          </a:p>
+        </p:txBody>
+      </p:sp>
+    </p:spTree>
+    <p:extLst>
+      <p:ext uri="{BB962C8B-B14F-4D97-AF65-F5344CB8AC3E}">
+        <p14:creationId xmlns:p14="http://schemas.microsoft.com/office/powerpoint/2010/main" val="1024086991"/>
+      </p:ext>
+    </p:extLst>
+  </p:cSld>
+  <p:clrMapOvr>
+    <a:masterClrMapping/>
+  </p:clrMapOvr>
+</p:notes>
+</file>
+
+<file path=ppt/notesSlides/notesSlide14.xml><?xml version="1.0" encoding="utf-8"?>
+<p:notes xmlns:a="http://schemas.openxmlformats.org/drawingml/2006/main" xmlns:r="http://schemas.openxmlformats.org/officeDocument/2006/relationships" xmlns:p="http://schemas.openxmlformats.org/presentationml/2006/main">
+  <p:cSld>
+    <p:spTree>
+      <p:nvGrpSpPr>
+        <p:cNvPr id="1" name=""/>
+        <p:cNvGrpSpPr/>
+        <p:nvPr/>
+      </p:nvGrpSpPr>
+      <p:grpSpPr>
+        <a:xfrm>
+          <a:off x="0" y="0"/>
+          <a:ext cx="0" cy="0"/>
+          <a:chOff x="0" y="0"/>
+          <a:chExt cx="0" cy="0"/>
+        </a:xfrm>
+      </p:grpSpPr>
+      <p:sp>
+        <p:nvSpPr>
+          <p:cNvPr id="2" name="Slide Image Placeholder 1"/>
+          <p:cNvSpPr>
+            <a:spLocks noGrp="1" noRot="1" noChangeAspect="1"/>
+          </p:cNvSpPr>
+          <p:nvPr>
+            <p:ph type="sldImg"/>
+          </p:nvPr>
+        </p:nvSpPr>
+        <p:spPr/>
+      </p:sp>
+      <p:sp>
+        <p:nvSpPr>
+          <p:cNvPr id="3" name="Notes Placeholder 2"/>
+          <p:cNvSpPr>
+            <a:spLocks noGrp="1"/>
+          </p:cNvSpPr>
+          <p:nvPr>
+            <p:ph type="body" idx="1"/>
+          </p:nvPr>
+        </p:nvSpPr>
+        <p:spPr/>
+        <p:txBody>
+          <a:bodyPr/>
+          <a:lstStyle/>
+          <a:p>
+            <a:r>
+              <a:rPr lang="en-US" dirty="0"/>
+              <a:t/>
+            </a:r>
+            <a:endParaRPr lang="en-US" dirty="0"/>
+          </a:p>
+        </p:txBody>
+      </p:sp>
+      <p:sp>
+        <p:nvSpPr>
+          <p:cNvPr id="4" name="Slide Number Placeholder 3"/>
+          <p:cNvSpPr>
+            <a:spLocks noGrp="1"/>
+          </p:cNvSpPr>
+          <p:nvPr>
+            <p:ph type="sldNum" sz="quarter" idx="10"/>
+          </p:nvPr>
+        </p:nvSpPr>
+        <p:spPr/>
+        <p:txBody>
+          <a:bodyPr/>
+          <a:lstStyle/>
+          <a:p>
+            <a:fld id="{F7021451-1387-4CA6-816F-3879F97B5CBC}" type="slidenum">
+              <a:rPr lang="en-US"/>
+              <a:t>14</a:t>
+            </a:fld>
+            <a:endParaRPr lang="en-US"/>
+          </a:p>
+        </p:txBody>
+      </p:sp>
+    </p:spTree>
+    <p:extLst>
+      <p:ext uri="{BB962C8B-B14F-4D97-AF65-F5344CB8AC3E}">
+        <p14:creationId xmlns:p14="http://schemas.microsoft.com/office/powerpoint/2010/main" val="1024086991"/>
+      </p:ext>
+    </p:extLst>
+  </p:cSld>
+  <p:clrMapOvr>
+    <a:masterClrMapping/>
+  </p:clrMapOvr>
+</p:notes>
+</file>
+
+<file path=ppt/notesSlides/notesSlide15.xml><?xml version="1.0" encoding="utf-8"?>
+<p:notes xmlns:a="http://schemas.openxmlformats.org/drawingml/2006/main" xmlns:r="http://schemas.openxmlformats.org/officeDocument/2006/relationships" xmlns:p="http://schemas.openxmlformats.org/presentationml/2006/main">
+  <p:cSld>
+    <p:spTree>
+      <p:nvGrpSpPr>
+        <p:cNvPr id="1" name=""/>
+        <p:cNvGrpSpPr/>
+        <p:nvPr/>
+      </p:nvGrpSpPr>
+      <p:grpSpPr>
+        <a:xfrm>
+          <a:off x="0" y="0"/>
+          <a:ext cx="0" cy="0"/>
+          <a:chOff x="0" y="0"/>
+          <a:chExt cx="0" cy="0"/>
+        </a:xfrm>
+      </p:grpSpPr>
+      <p:sp>
+        <p:nvSpPr>
+          <p:cNvPr id="2" name="Slide Image Placeholder 1"/>
+          <p:cNvSpPr>
+            <a:spLocks noGrp="1" noRot="1" noChangeAspect="1"/>
+          </p:cNvSpPr>
+          <p:nvPr>
+            <p:ph type="sldImg"/>
+          </p:nvPr>
+        </p:nvSpPr>
+        <p:spPr/>
+      </p:sp>
+      <p:sp>
+        <p:nvSpPr>
+          <p:cNvPr id="3" name="Notes Placeholder 2"/>
+          <p:cNvSpPr>
+            <a:spLocks noGrp="1"/>
+          </p:cNvSpPr>
+          <p:nvPr>
+            <p:ph type="body" idx="1"/>
+          </p:nvPr>
+        </p:nvSpPr>
+        <p:spPr/>
+        <p:txBody>
+          <a:bodyPr/>
+          <a:lstStyle/>
+          <a:p>
+            <a:r>
+              <a:rPr lang="en-US" dirty="0"/>
+              <a:t/>
+            </a:r>
+            <a:endParaRPr lang="en-US" dirty="0"/>
+          </a:p>
+        </p:txBody>
+      </p:sp>
+      <p:sp>
+        <p:nvSpPr>
+          <p:cNvPr id="4" name="Slide Number Placeholder 3"/>
+          <p:cNvSpPr>
+            <a:spLocks noGrp="1"/>
+          </p:cNvSpPr>
+          <p:nvPr>
+            <p:ph type="sldNum" sz="quarter" idx="10"/>
+          </p:nvPr>
+        </p:nvSpPr>
+        <p:spPr/>
+        <p:txBody>
+          <a:bodyPr/>
+          <a:lstStyle/>
+          <a:p>
+            <a:fld id="{F7021451-1387-4CA6-816F-3879F97B5CBC}" type="slidenum">
+              <a:rPr lang="en-US"/>
+              <a:t>15</a:t>
             </a:fld>
             <a:endParaRPr lang="en-US"/>
           </a:p>
@@ -2526,7 +2793,7 @@
                 <a:ea typeface="Calibri" pitchFamily="34" charset="-122"/>
                 <a:cs typeface="Calibri" pitchFamily="34" charset="-120"/>
               </a:rPr>
-              <a:t>LIVE DEMO</a:t>
+              <a:t>ADVANCED C · SYSTEMS</a:t>
             </a:r>
             <a:endParaRPr lang="en-US" sz="1200" dirty="0"/>
           </a:p>
@@ -2565,7 +2832,7 @@
                 <a:ea typeface="Georgia" pitchFamily="34" charset="-122"/>
                 <a:cs typeface="Georgia" pitchFamily="34" charset="-120"/>
               </a:rPr>
-              <a:t>Rehearsed and reliable</a:t>
+              <a:t>One program, two modes — the C↔JS bridge</a:t>
             </a:r>
             <a:endParaRPr lang="en-US" sz="3200" dirty="0"/>
           </a:p>
@@ -2579,12 +2846,388 @@
         </p:nvSpPr>
         <p:spPr>
           <a:xfrm>
-            <a:off x="640080" y="2103120"/>
-            <a:ext cx="3322320" cy="3291840"/>
+            <a:off x="640080" y="1783080"/>
+            <a:ext cx="6858000" cy="3566160"/>
           </a:xfrm>
           <a:prstGeom prst="roundRect">
             <a:avLst>
-              <a:gd name="adj" fmla="val 2222"/>
+              <a:gd name="adj" fmla="val 1538"/>
+            </a:avLst>
+          </a:prstGeom>
+          <a:solidFill>
+            <a:srgbClr val="0A0C12"/>
+          </a:solidFill>
+          <a:ln w="12700">
+            <a:solidFill>
+              <a:srgbClr val="2A2F3E"/>
+            </a:solidFill>
+            <a:prstDash val="solid"/>
+          </a:ln>
+          <a:effectLst>
+            <a:outerShdw sx="100000" sy="100000" kx="0" ky="0" algn="bl" rotWithShape="0" blurRad="101600" dist="38100" dir="8100000">
+              <a:srgbClr val="000000">
+                <a:alpha val="35000"/>
+              </a:srgbClr>
+            </a:outerShdw>
+          </a:effectLst>
+        </p:spPr>
+      </p:sp>
+      <p:sp>
+        <p:nvSpPr>
+          <p:cNvPr id="6" name="Shape 4"/>
+          <p:cNvSpPr/>
+          <p:nvPr/>
+        </p:nvSpPr>
+        <p:spPr>
+          <a:xfrm>
+            <a:off x="841248" y="1947672"/>
+            <a:ext cx="91440" cy="91440"/>
+          </a:xfrm>
+          <a:prstGeom prst="ellipse">
+            <a:avLst/>
+          </a:prstGeom>
+          <a:solidFill>
+            <a:srgbClr val="E0696A"/>
+          </a:solidFill>
+          <a:ln/>
+        </p:spPr>
+      </p:sp>
+      <p:sp>
+        <p:nvSpPr>
+          <p:cNvPr id="7" name="Shape 5"/>
+          <p:cNvSpPr/>
+          <p:nvPr/>
+        </p:nvSpPr>
+        <p:spPr>
+          <a:xfrm>
+            <a:off x="987552" y="1947672"/>
+            <a:ext cx="91440" cy="91440"/>
+          </a:xfrm>
+          <a:prstGeom prst="ellipse">
+            <a:avLst/>
+          </a:prstGeom>
+          <a:solidFill>
+            <a:srgbClr val="E8B14C"/>
+          </a:solidFill>
+          <a:ln/>
+        </p:spPr>
+      </p:sp>
+      <p:sp>
+        <p:nvSpPr>
+          <p:cNvPr id="8" name="Shape 6"/>
+          <p:cNvSpPr/>
+          <p:nvPr/>
+        </p:nvSpPr>
+        <p:spPr>
+          <a:xfrm>
+            <a:off x="1133856" y="1947672"/>
+            <a:ext cx="91440" cy="91440"/>
+          </a:xfrm>
+          <a:prstGeom prst="ellipse">
+            <a:avLst/>
+          </a:prstGeom>
+          <a:solidFill>
+            <a:srgbClr val="6FB39A"/>
+          </a:solidFill>
+          <a:ln/>
+        </p:spPr>
+      </p:sp>
+      <p:sp>
+        <p:nvSpPr>
+          <p:cNvPr id="9" name="Text 7"/>
+          <p:cNvSpPr/>
+          <p:nvPr/>
+        </p:nvSpPr>
+        <p:spPr>
+          <a:xfrm>
+            <a:off x="914400" y="2194560"/>
+            <a:ext cx="6355080" cy="2971800"/>
+          </a:xfrm>
+          <a:prstGeom prst="rect">
+            <a:avLst/>
+          </a:prstGeom>
+          <a:noFill/>
+          <a:ln/>
+        </p:spPr>
+        <p:txBody>
+          <a:bodyPr wrap="square" lIns="0" tIns="0" rIns="0" bIns="0" rtlCol="0" anchor="t"/>
+          <a:lstStyle/>
+          <a:p>
+            <a:pPr algn="l" indent="0" marL="0">
+              <a:lnSpc>
+                <a:spcPct val="102000"/>
+              </a:lnSpc>
+              <a:buNone/>
+            </a:pPr>
+            <a:r>
+              <a:rPr lang="en-US" sz="1150" b="1" dirty="0">
+                <a:solidFill>
+                  <a:srgbClr val="FFCB7A"/>
+                </a:solidFill>
+                <a:latin typeface="Consolas" pitchFamily="34" charset="0"/>
+                <a:ea typeface="Consolas" pitchFamily="34" charset="-122"/>
+                <a:cs typeface="Consolas" pitchFamily="34" charset="-120"/>
+              </a:rPr>
+              <a:t>int main(int argc, char **argv) {</a:t>
+            </a:r>
+            <a:endParaRPr lang="en-US" sz="1150" dirty="0"/>
+          </a:p>
+          <a:p>
+            <a:pPr algn="l" indent="0" marL="0">
+              <a:lnSpc>
+                <a:spcPct val="102000"/>
+              </a:lnSpc>
+              <a:buNone/>
+            </a:pPr>
+            <a:r>
+              <a:rPr lang="en-US" sz="1150" dirty="0">
+                <a:solidFill>
+                  <a:srgbClr val="6FB39A"/>
+                </a:solidFill>
+                <a:latin typeface="Consolas" pitchFamily="34" charset="0"/>
+                <a:ea typeface="Consolas" pitchFamily="34" charset="-122"/>
+                <a:cs typeface="Consolas" pitchFamily="34" charset="-120"/>
+              </a:rPr>
+              <a:t>  /* Engine mode: Node runs the program as</a:t>
+            </a:r>
+            <a:endParaRPr lang="en-US" sz="1150" dirty="0"/>
+          </a:p>
+          <a:p>
+            <a:pPr algn="l" indent="0" marL="0">
+              <a:lnSpc>
+                <a:spcPct val="102000"/>
+              </a:lnSpc>
+              <a:buNone/>
+            </a:pPr>
+            <a:r>
+              <a:rPr lang="en-US" sz="1150" dirty="0">
+                <a:solidFill>
+                  <a:srgbClr val="6FB39A"/>
+                </a:solidFill>
+                <a:latin typeface="Consolas" pitchFamily="34" charset="0"/>
+                <a:ea typeface="Consolas" pitchFamily="34" charset="-122"/>
+                <a:cs typeface="Consolas" pitchFamily="34" charset="-120"/>
+              </a:rPr>
+              <a:t>     cinematch &lt;medium&gt; &lt;genre&gt; &lt;time&gt;</a:t>
+            </a:r>
+            <a:endParaRPr lang="en-US" sz="1150" dirty="0"/>
+          </a:p>
+          <a:p>
+            <a:pPr algn="l" indent="0" marL="0">
+              <a:lnSpc>
+                <a:spcPct val="102000"/>
+              </a:lnSpc>
+              <a:buNone/>
+            </a:pPr>
+            <a:r>
+              <a:rPr lang="en-US" sz="1150" dirty="0">
+                <a:solidFill>
+                  <a:srgbClr val="6FB39A"/>
+                </a:solidFill>
+                <a:latin typeface="Consolas" pitchFamily="34" charset="0"/>
+                <a:ea typeface="Consolas" pitchFamily="34" charset="-122"/>
+                <a:cs typeface="Consolas" pitchFamily="34" charset="-120"/>
+              </a:rPr>
+              <a:t>     &lt;mood&gt; &lt;social&gt;  */</a:t>
+            </a:r>
+            <a:endParaRPr lang="en-US" sz="1150" dirty="0"/>
+          </a:p>
+          <a:p>
+            <a:pPr algn="l" indent="0" marL="0">
+              <a:lnSpc>
+                <a:spcPct val="102000"/>
+              </a:lnSpc>
+              <a:buNone/>
+            </a:pPr>
+            <a:r>
+              <a:rPr lang="en-US" sz="1150" dirty="0">
+                <a:solidFill>
+                  <a:srgbClr val="DCDFE8"/>
+                </a:solidFill>
+                <a:latin typeface="Consolas" pitchFamily="34" charset="0"/>
+                <a:ea typeface="Consolas" pitchFamily="34" charset="-122"/>
+                <a:cs typeface="Consolas" pitchFamily="34" charset="-120"/>
+              </a:rPr>
+              <a:t>  if (argc == 6) {</a:t>
+            </a:r>
+            <a:endParaRPr lang="en-US" sz="1150" dirty="0"/>
+          </a:p>
+          <a:p>
+            <a:pPr algn="l" indent="0" marL="0">
+              <a:lnSpc>
+                <a:spcPct val="102000"/>
+              </a:lnSpc>
+              <a:buNone/>
+            </a:pPr>
+            <a:r>
+              <a:rPr lang="en-US" sz="1150" dirty="0">
+                <a:solidFill>
+                  <a:srgbClr val="DCDFE8"/>
+                </a:solidFill>
+                <a:latin typeface="Consolas" pitchFamily="34" charset="0"/>
+                <a:ea typeface="Consolas" pitchFamily="34" charset="-122"/>
+                <a:cs typeface="Consolas" pitchFamily="34" charset="-120"/>
+              </a:rPr>
+              <a:t>    recommendJson(argv[1], argv[2],</a:t>
+            </a:r>
+            <a:endParaRPr lang="en-US" sz="1150" dirty="0"/>
+          </a:p>
+          <a:p>
+            <a:pPr algn="l" indent="0" marL="0">
+              <a:lnSpc>
+                <a:spcPct val="102000"/>
+              </a:lnSpc>
+              <a:buNone/>
+            </a:pPr>
+            <a:r>
+              <a:rPr lang="en-US" sz="1150" dirty="0">
+                <a:solidFill>
+                  <a:srgbClr val="DCDFE8"/>
+                </a:solidFill>
+                <a:latin typeface="Consolas" pitchFamily="34" charset="0"/>
+                <a:ea typeface="Consolas" pitchFamily="34" charset="-122"/>
+                <a:cs typeface="Consolas" pitchFamily="34" charset="-120"/>
+              </a:rPr>
+              <a:t>                  argv[3], argv[4],</a:t>
+            </a:r>
+            <a:endParaRPr lang="en-US" sz="1150" dirty="0"/>
+          </a:p>
+          <a:p>
+            <a:pPr algn="l" indent="0" marL="0">
+              <a:lnSpc>
+                <a:spcPct val="102000"/>
+              </a:lnSpc>
+              <a:buNone/>
+            </a:pPr>
+            <a:r>
+              <a:rPr lang="en-US" sz="1150" dirty="0">
+                <a:solidFill>
+                  <a:srgbClr val="DCDFE8"/>
+                </a:solidFill>
+                <a:latin typeface="Consolas" pitchFamily="34" charset="0"/>
+                <a:ea typeface="Consolas" pitchFamily="34" charset="-122"/>
+                <a:cs typeface="Consolas" pitchFamily="34" charset="-120"/>
+              </a:rPr>
+              <a:t>                  argv[5]);</a:t>
+            </a:r>
+            <a:endParaRPr lang="en-US" sz="1150" dirty="0"/>
+          </a:p>
+          <a:p>
+            <a:pPr algn="l" indent="0" marL="0">
+              <a:lnSpc>
+                <a:spcPct val="102000"/>
+              </a:lnSpc>
+              <a:buNone/>
+            </a:pPr>
+            <a:r>
+              <a:rPr lang="en-US" sz="1150" dirty="0">
+                <a:solidFill>
+                  <a:srgbClr val="DCDFE8"/>
+                </a:solidFill>
+                <a:latin typeface="Consolas" pitchFamily="34" charset="0"/>
+                <a:ea typeface="Consolas" pitchFamily="34" charset="-122"/>
+                <a:cs typeface="Consolas" pitchFamily="34" charset="-120"/>
+              </a:rPr>
+              <a:t>    return 0;</a:t>
+            </a:r>
+            <a:endParaRPr lang="en-US" sz="1150" dirty="0"/>
+          </a:p>
+          <a:p>
+            <a:pPr algn="l" indent="0" marL="0">
+              <a:lnSpc>
+                <a:spcPct val="102000"/>
+              </a:lnSpc>
+              <a:buNone/>
+            </a:pPr>
+            <a:r>
+              <a:rPr lang="en-US" sz="1150" dirty="0">
+                <a:solidFill>
+                  <a:srgbClr val="DCDFE8"/>
+                </a:solidFill>
+                <a:latin typeface="Consolas" pitchFamily="34" charset="0"/>
+                <a:ea typeface="Consolas" pitchFamily="34" charset="-122"/>
+                <a:cs typeface="Consolas" pitchFamily="34" charset="-120"/>
+              </a:rPr>
+              <a:t>  }</a:t>
+            </a:r>
+            <a:endParaRPr lang="en-US" sz="1150" dirty="0"/>
+          </a:p>
+          <a:p>
+            <a:pPr algn="l" indent="0" marL="0">
+              <a:lnSpc>
+                <a:spcPct val="102000"/>
+              </a:lnSpc>
+              <a:buNone/>
+            </a:pPr>
+            <a:r>
+              <a:rPr lang="en-US" sz="1150" dirty="0">
+                <a:solidFill>
+                  <a:srgbClr val="6FB39A"/>
+                </a:solidFill>
+                <a:latin typeface="Consolas" pitchFamily="34" charset="0"/>
+                <a:ea typeface="Consolas" pitchFamily="34" charset="-122"/>
+                <a:cs typeface="Consolas" pitchFamily="34" charset="-120"/>
+              </a:rPr>
+              <a:t>  /* else: ask 5 questions, then</a:t>
+            </a:r>
+            <a:endParaRPr lang="en-US" sz="1150" dirty="0"/>
+          </a:p>
+          <a:p>
+            <a:pPr algn="l" indent="0" marL="0">
+              <a:lnSpc>
+                <a:spcPct val="102000"/>
+              </a:lnSpc>
+              <a:buNone/>
+            </a:pPr>
+            <a:r>
+              <a:rPr lang="en-US" sz="1150" dirty="0">
+                <a:solidFill>
+                  <a:srgbClr val="6FB39A"/>
+                </a:solidFill>
+                <a:latin typeface="Consolas" pitchFamily="34" charset="0"/>
+                <a:ea typeface="Consolas" pitchFamily="34" charset="-122"/>
+                <a:cs typeface="Consolas" pitchFamily="34" charset="-120"/>
+              </a:rPr>
+              <a:t>     recommend(...) prints to screen */</a:t>
+            </a:r>
+            <a:endParaRPr lang="en-US" sz="1150" dirty="0"/>
+          </a:p>
+          <a:p>
+            <a:pPr algn="l" indent="0" marL="0">
+              <a:lnSpc>
+                <a:spcPct val="102000"/>
+              </a:lnSpc>
+              <a:buNone/>
+            </a:pPr>
+            <a:r>
+              <a:rPr lang="en-US" sz="1150" b="1" dirty="0">
+                <a:solidFill>
+                  <a:srgbClr val="FFCB7A"/>
+                </a:solidFill>
+                <a:latin typeface="Consolas" pitchFamily="34" charset="0"/>
+                <a:ea typeface="Consolas" pitchFamily="34" charset="-122"/>
+                <a:cs typeface="Consolas" pitchFamily="34" charset="-120"/>
+              </a:rPr>
+              <a:t>}</a:t>
+            </a:r>
+            <a:endParaRPr lang="en-US" sz="1150" dirty="0"/>
+          </a:p>
+        </p:txBody>
+      </p:sp>
+      <p:sp>
+        <p:nvSpPr>
+          <p:cNvPr id="10" name="Shape 8"/>
+          <p:cNvSpPr/>
+          <p:nvPr/>
+        </p:nvSpPr>
+        <p:spPr>
+          <a:xfrm>
+            <a:off x="7772400" y="1783080"/>
+            <a:ext cx="3749040" cy="3566160"/>
+          </a:xfrm>
+          <a:prstGeom prst="roundRect">
+            <a:avLst>
+              <a:gd name="adj" fmla="val 2051"/>
             </a:avLst>
           </a:prstGeom>
           <a:solidFill>
@@ -2607,14 +3250,14 @@
       </p:sp>
       <p:sp>
         <p:nvSpPr>
-          <p:cNvPr id="6" name="Text 4"/>
-          <p:cNvSpPr/>
-          <p:nvPr/>
-        </p:nvSpPr>
-        <p:spPr>
-          <a:xfrm>
-            <a:off x="960120" y="2377440"/>
-            <a:ext cx="2682240" cy="822960"/>
+          <p:cNvPr id="11" name="Text 9"/>
+          <p:cNvSpPr/>
+          <p:nvPr/>
+        </p:nvSpPr>
+        <p:spPr>
+          <a:xfrm>
+            <a:off x="8046720" y="2011680"/>
+            <a:ext cx="3200400" cy="365760"/>
           </a:xfrm>
           <a:prstGeom prst="rect">
             <a:avLst/>
@@ -2627,111 +3270,10 @@
           <a:lstStyle/>
           <a:p>
             <a:pPr indent="0" marL="0">
-              <a:lnSpc>
-                <a:spcPct val="110000"/>
-              </a:lnSpc>
-              <a:buNone/>
-            </a:pPr>
-            <a:r>
-              <a:rPr lang="en-US" sz="1600" i="1" dirty="0">
-                <a:solidFill>
-                  <a:srgbClr val="9AA0B4"/>
-                </a:solidFill>
-                <a:latin typeface="Georgia" pitchFamily="34" charset="0"/>
-                <a:ea typeface="Georgia" pitchFamily="34" charset="-122"/>
-                <a:cs typeface="Georgia" pitchFamily="34" charset="-120"/>
-              </a:rPr>
-              <a:t>“relaxing cozy solo night”</a:t>
-            </a:r>
-            <a:endParaRPr lang="en-US" sz="1600" dirty="0"/>
-          </a:p>
-        </p:txBody>
-      </p:sp>
-      <p:sp>
-        <p:nvSpPr>
-          <p:cNvPr id="7" name="Shape 5"/>
-          <p:cNvSpPr/>
-          <p:nvPr/>
-        </p:nvSpPr>
-        <p:spPr>
-          <a:xfrm>
-            <a:off x="960120" y="3291840"/>
-            <a:ext cx="2682240" cy="0"/>
-          </a:xfrm>
-          <a:prstGeom prst="line">
-            <a:avLst/>
-          </a:prstGeom>
-          <a:noFill/>
-          <a:ln w="12700">
-            <a:solidFill>
-              <a:srgbClr val="2A2F3E"/>
-            </a:solidFill>
-            <a:prstDash val="solid"/>
-          </a:ln>
-        </p:spPr>
-      </p:sp>
-      <p:sp>
-        <p:nvSpPr>
-          <p:cNvPr id="8" name="Text 6"/>
-          <p:cNvSpPr/>
-          <p:nvPr/>
-        </p:nvSpPr>
-        <p:spPr>
-          <a:xfrm>
-            <a:off x="640080" y="3474720"/>
-            <a:ext cx="3322320" cy="822960"/>
-          </a:xfrm>
-          <a:prstGeom prst="rect">
-            <a:avLst/>
-          </a:prstGeom>
-          <a:noFill/>
-          <a:ln/>
-        </p:spPr>
-        <p:txBody>
-          <a:bodyPr wrap="square" lIns="0" tIns="0" rIns="0" bIns="0" rtlCol="0" anchor="ctr"/>
-          <a:lstStyle/>
-          <a:p>
-            <a:pPr algn="ctr" indent="0" marL="0">
-              <a:buNone/>
-            </a:pPr>
-            <a:r>
-              <a:rPr lang="en-US" sz="4400" dirty="0">
-                <a:solidFill>
-                  <a:srgbClr val="000000"/>
-                </a:solidFill>
-              </a:rPr>
-              <a:t>🎮</a:t>
-            </a:r>
-            <a:endParaRPr lang="en-US" sz="4400" dirty="0"/>
-          </a:p>
-        </p:txBody>
-      </p:sp>
-      <p:sp>
-        <p:nvSpPr>
-          <p:cNvPr id="9" name="Text 7"/>
-          <p:cNvSpPr/>
-          <p:nvPr/>
-        </p:nvSpPr>
-        <p:spPr>
-          <a:xfrm>
-            <a:off x="822960" y="4343400"/>
-            <a:ext cx="2956560" cy="548640"/>
-          </a:xfrm>
-          <a:prstGeom prst="rect">
-            <a:avLst/>
-          </a:prstGeom>
-          <a:noFill/>
-          <a:ln/>
-        </p:spPr>
-        <p:txBody>
-          <a:bodyPr wrap="square" lIns="0" tIns="0" rIns="0" bIns="0" rtlCol="0" anchor="ctr"/>
-          <a:lstStyle/>
-          <a:p>
-            <a:pPr algn="ctr" indent="0" marL="0">
-              <a:buNone/>
-            </a:pPr>
-            <a:r>
-              <a:rPr lang="en-US" sz="1800" b="1" dirty="0">
+              <a:buNone/>
+            </a:pPr>
+            <a:r>
+              <a:rPr lang="en-US" sz="1500" b="1" dirty="0">
                 <a:solidFill>
                   <a:srgbClr val="FFB347"/>
                 </a:solidFill>
@@ -2739,35 +3281,39 @@
                 <a:ea typeface="Calibri" pitchFamily="34" charset="-122"/>
                 <a:cs typeface="Calibri" pitchFamily="34" charset="-120"/>
               </a:rPr>
-              <a:t>Balatro (2024)</a:t>
-            </a:r>
-            <a:endParaRPr lang="en-US" sz="1800" dirty="0"/>
-          </a:p>
-        </p:txBody>
-      </p:sp>
-      <p:sp>
-        <p:nvSpPr>
-          <p:cNvPr id="10" name="Text 8"/>
-          <p:cNvSpPr/>
-          <p:nvPr/>
-        </p:nvSpPr>
-        <p:spPr>
-          <a:xfrm>
-            <a:off x="822960" y="4892040"/>
-            <a:ext cx="2956560" cy="365760"/>
-          </a:xfrm>
-          <a:prstGeom prst="rect">
-            <a:avLst/>
-          </a:prstGeom>
-          <a:noFill/>
-          <a:ln/>
-        </p:spPr>
-        <p:txBody>
-          <a:bodyPr wrap="square" lIns="0" tIns="0" rIns="0" bIns="0" rtlCol="0" anchor="ctr"/>
-          <a:lstStyle/>
-          <a:p>
-            <a:pPr algn="ctr" indent="0" marL="0">
-              <a:buNone/>
+              <a:t>C techniques here</a:t>
+            </a:r>
+            <a:endParaRPr lang="en-US" sz="1500" dirty="0"/>
+          </a:p>
+        </p:txBody>
+      </p:sp>
+      <p:sp>
+        <p:nvSpPr>
+          <p:cNvPr id="12" name="Text 10"/>
+          <p:cNvSpPr/>
+          <p:nvPr/>
+        </p:nvSpPr>
+        <p:spPr>
+          <a:xfrm>
+            <a:off x="8046720" y="2514600"/>
+            <a:ext cx="3246120" cy="2651760"/>
+          </a:xfrm>
+          <a:prstGeom prst="rect">
+            <a:avLst/>
+          </a:prstGeom>
+          <a:noFill/>
+          <a:ln/>
+        </p:spPr>
+        <p:txBody>
+          <a:bodyPr wrap="square" lIns="0" tIns="0" rIns="0" bIns="0" rtlCol="0" anchor="t"/>
+          <a:lstStyle/>
+          <a:p>
+            <a:pPr marL="177800" indent="-177800">
+              <a:spcAft>
+                <a:spcPts val="700"/>
+              </a:spcAft>
+              <a:buSzPct val="100000"/>
+              <a:buChar char="•"/>
             </a:pPr>
             <a:r>
               <a:rPr lang="en-US" sz="1250" dirty="0">
@@ -2778,30 +3324,93 @@
                 <a:ea typeface="Calibri" pitchFamily="34" charset="-122"/>
                 <a:cs typeface="Calibri" pitchFamily="34" charset="-120"/>
               </a:rPr>
-              <a:t>Cozy · Relaxed · ★ 9.0</a:t>
+              <a:t>argc / argv — command-line arguments</a:t>
             </a:r>
             <a:endParaRPr lang="en-US" sz="1250" dirty="0"/>
           </a:p>
-        </p:txBody>
-      </p:sp>
-      <p:sp>
-        <p:nvSpPr>
-          <p:cNvPr id="11" name="Shape 9"/>
-          <p:cNvSpPr/>
-          <p:nvPr/>
-        </p:nvSpPr>
-        <p:spPr>
-          <a:xfrm>
-            <a:off x="4419600" y="2103120"/>
-            <a:ext cx="3322320" cy="3291840"/>
+          <a:p>
+            <a:pPr marL="177800" indent="-177800">
+              <a:spcAft>
+                <a:spcPts val="700"/>
+              </a:spcAft>
+              <a:buSzPct val="100000"/>
+              <a:buChar char="•"/>
+            </a:pPr>
+            <a:r>
+              <a:rPr lang="en-US" sz="1250" dirty="0">
+                <a:solidFill>
+                  <a:srgbClr val="ECECF3"/>
+                </a:solidFill>
+                <a:latin typeface="Calibri" pitchFamily="34" charset="0"/>
+                <a:ea typeface="Calibri" pitchFamily="34" charset="-122"/>
+                <a:cs typeface="Calibri" pitchFamily="34" charset="-120"/>
+              </a:rPr>
+              <a:t>Separate compilation — recommend.h interface</a:t>
+            </a:r>
+            <a:endParaRPr lang="en-US" sz="1250" dirty="0"/>
+          </a:p>
+          <a:p>
+            <a:pPr marL="177800" indent="-177800">
+              <a:spcAft>
+                <a:spcPts val="700"/>
+              </a:spcAft>
+              <a:buSzPct val="100000"/>
+              <a:buChar char="•"/>
+            </a:pPr>
+            <a:r>
+              <a:rPr lang="en-US" sz="1250" dirty="0">
+                <a:solidFill>
+                  <a:srgbClr val="ECECF3"/>
+                </a:solidFill>
+                <a:latin typeface="Calibri" pitchFamily="34" charset="0"/>
+                <a:ea typeface="Calibri" pitchFamily="34" charset="-122"/>
+                <a:cs typeface="Calibri" pitchFamily="34" charset="-120"/>
+              </a:rPr>
+              <a:t>putchar / fputs — character output</a:t>
+            </a:r>
+            <a:endParaRPr lang="en-US" sz="1250" dirty="0"/>
+          </a:p>
+          <a:p>
+            <a:pPr marL="177800" indent="-177800">
+              <a:spcAft>
+                <a:spcPts val="700"/>
+              </a:spcAft>
+              <a:buSzPct val="100000"/>
+              <a:buChar char="•"/>
+            </a:pPr>
+            <a:r>
+              <a:rPr lang="en-US" sz="1250" dirty="0">
+                <a:solidFill>
+                  <a:srgbClr val="ECECF3"/>
+                </a:solidFill>
+                <a:latin typeface="Calibri" pitchFamily="34" charset="0"/>
+                <a:ea typeface="Calibri" pitchFamily="34" charset="-122"/>
+                <a:cs typeface="Calibri" pitchFamily="34" charset="-120"/>
+              </a:rPr>
+              <a:t>Exit codes — return 0</a:t>
+            </a:r>
+            <a:endParaRPr lang="en-US" sz="1250" dirty="0"/>
+          </a:p>
+        </p:txBody>
+      </p:sp>
+      <p:sp>
+        <p:nvSpPr>
+          <p:cNvPr id="13" name="Shape 11"/>
+          <p:cNvSpPr/>
+          <p:nvPr/>
+        </p:nvSpPr>
+        <p:spPr>
+          <a:xfrm>
+            <a:off x="640080" y="5532120"/>
+            <a:ext cx="10881360" cy="841248"/>
           </a:xfrm>
           <a:prstGeom prst="roundRect">
             <a:avLst>
-              <a:gd name="adj" fmla="val 2222"/>
+              <a:gd name="adj" fmla="val 8696"/>
             </a:avLst>
           </a:prstGeom>
           <a:solidFill>
-            <a:srgbClr val="1A1D27"/>
+            <a:srgbClr val="11141D"/>
           </a:solidFill>
           <a:ln w="12700">
             <a:solidFill>
@@ -2820,14 +3429,14 @@
       </p:sp>
       <p:sp>
         <p:nvSpPr>
-          <p:cNvPr id="12" name="Text 10"/>
-          <p:cNvSpPr/>
-          <p:nvPr/>
-        </p:nvSpPr>
-        <p:spPr>
-          <a:xfrm>
-            <a:off x="4739640" y="2377440"/>
-            <a:ext cx="2682240" cy="822960"/>
+          <p:cNvPr id="14" name="Text 12"/>
+          <p:cNvSpPr/>
+          <p:nvPr/>
+        </p:nvSpPr>
+        <p:spPr>
+          <a:xfrm>
+            <a:off x="914400" y="5532120"/>
+            <a:ext cx="10332720" cy="841248"/>
           </a:xfrm>
           <a:prstGeom prst="rect">
             <a:avLst/>
@@ -2840,418 +3449,82 @@
           <a:lstStyle/>
           <a:p>
             <a:pPr indent="0" marL="0">
-              <a:lnSpc>
-                <a:spcPct val="110000"/>
-              </a:lnSpc>
-              <a:buNone/>
-            </a:pPr>
-            <a:r>
-              <a:rPr lang="en-US" sz="1600" i="1" dirty="0">
+              <a:buNone/>
+            </a:pPr>
+            <a:r>
+              <a:rPr lang="en-US" sz="1300" dirty="0">
                 <a:solidFill>
                   <a:srgbClr val="9AA0B4"/>
                 </a:solidFill>
-                <a:latin typeface="Georgia" pitchFamily="34" charset="0"/>
-                <a:ea typeface="Georgia" pitchFamily="34" charset="-122"/>
-                <a:cs typeface="Georgia" pitchFamily="34" charset="-120"/>
-              </a:rPr>
-              <a:t>“scary horror with a group”</a:t>
-            </a:r>
-            <a:endParaRPr lang="en-US" sz="1600" dirty="0"/>
-          </a:p>
-        </p:txBody>
-      </p:sp>
-      <p:sp>
-        <p:nvSpPr>
-          <p:cNvPr id="13" name="Shape 11"/>
-          <p:cNvSpPr/>
-          <p:nvPr/>
-        </p:nvSpPr>
-        <p:spPr>
-          <a:xfrm>
-            <a:off x="4739640" y="3291840"/>
-            <a:ext cx="2682240" cy="0"/>
-          </a:xfrm>
-          <a:prstGeom prst="line">
-            <a:avLst/>
-          </a:prstGeom>
-          <a:noFill/>
-          <a:ln w="12700">
-            <a:solidFill>
-              <a:srgbClr val="2A2F3E"/>
-            </a:solidFill>
-            <a:prstDash val="solid"/>
-          </a:ln>
-        </p:spPr>
-      </p:sp>
-      <p:sp>
-        <p:nvSpPr>
-          <p:cNvPr id="14" name="Text 12"/>
-          <p:cNvSpPr/>
-          <p:nvPr/>
-        </p:nvSpPr>
-        <p:spPr>
-          <a:xfrm>
-            <a:off x="4419600" y="3474720"/>
-            <a:ext cx="3322320" cy="822960"/>
-          </a:xfrm>
-          <a:prstGeom prst="rect">
-            <a:avLst/>
-          </a:prstGeom>
-          <a:noFill/>
-          <a:ln/>
-        </p:spPr>
-        <p:txBody>
-          <a:bodyPr wrap="square" lIns="0" tIns="0" rIns="0" bIns="0" rtlCol="0" anchor="ctr"/>
-          <a:lstStyle/>
-          <a:p>
-            <a:pPr algn="ctr" indent="0" marL="0">
-              <a:buNone/>
-            </a:pPr>
-            <a:r>
-              <a:rPr lang="en-US" sz="4400" dirty="0">
-                <a:solidFill>
-                  <a:srgbClr val="000000"/>
-                </a:solidFill>
-              </a:rPr>
-              <a:t>🎬</a:t>
-            </a:r>
-            <a:endParaRPr lang="en-US" sz="4400" dirty="0"/>
+                <a:latin typeface="Calibri" pitchFamily="34" charset="0"/>
+                <a:ea typeface="Calibri" pitchFamily="34" charset="-122"/>
+                <a:cs typeface="Calibri" pitchFamily="34" charset="-120"/>
+              </a:rPr>
+              <a:t>C prints to stdout:  </a:t>
+            </a:r>
+            <a:pPr indent="0" marL="0">
+              <a:buNone/>
+            </a:pPr>
+            <a:r>
+              <a:rPr lang="en-US" sz="1300" dirty="0">
+                <a:solidFill>
+                  <a:srgbClr val="5BC8AF"/>
+                </a:solidFill>
+                <a:latin typeface="Consolas" pitchFamily="34" charset="0"/>
+                <a:ea typeface="Consolas" pitchFamily="34" charset="-122"/>
+                <a:cs typeface="Consolas" pitchFamily="34" charset="-120"/>
+              </a:rPr>
+              <a:t>{"found":true,"title":"Get Out", ... }</a:t>
+            </a:r>
+            <a:pPr indent="0" marL="0">
+              <a:buNone/>
+            </a:pPr>
+            <a:r>
+              <a:rPr lang="en-US" sz="1300" b="1" dirty="0">
+                <a:solidFill>
+                  <a:srgbClr val="FFB347"/>
+                </a:solidFill>
+                <a:latin typeface="Calibri" pitchFamily="34" charset="0"/>
+                <a:ea typeface="Calibri" pitchFamily="34" charset="-122"/>
+                <a:cs typeface="Calibri" pitchFamily="34" charset="-120"/>
+              </a:rPr>
+              <a:t>   →   </a:t>
+            </a:r>
+            <a:pPr indent="0" marL="0">
+              <a:buNone/>
+            </a:pPr>
+            <a:r>
+              <a:rPr lang="en-US" sz="1300" dirty="0">
+                <a:solidFill>
+                  <a:srgbClr val="9AA0B4"/>
+                </a:solidFill>
+                <a:latin typeface="Calibri" pitchFamily="34" charset="0"/>
+                <a:ea typeface="Calibri" pitchFamily="34" charset="-122"/>
+                <a:cs typeface="Calibri" pitchFamily="34" charset="-120"/>
+              </a:rPr>
+              <a:t>Node.js:  </a:t>
+            </a:r>
+            <a:pPr indent="0" marL="0">
+              <a:buNone/>
+            </a:pPr>
+            <a:r>
+              <a:rPr lang="en-US" sz="1300" dirty="0">
+                <a:solidFill>
+                  <a:srgbClr val="5BC8AF"/>
+                </a:solidFill>
+                <a:latin typeface="Consolas" pitchFamily="34" charset="0"/>
+                <a:ea typeface="Consolas" pitchFamily="34" charset="-122"/>
+                <a:cs typeface="Consolas" pitchFamily="34" charset="-120"/>
+              </a:rPr>
+              <a:t>JSON.parse(stdout)</a:t>
+            </a:r>
+            <a:endParaRPr lang="en-US" sz="1300" dirty="0"/>
           </a:p>
         </p:txBody>
       </p:sp>
       <p:sp>
         <p:nvSpPr>
           <p:cNvPr id="15" name="Text 13"/>
-          <p:cNvSpPr/>
-          <p:nvPr/>
-        </p:nvSpPr>
-        <p:spPr>
-          <a:xfrm>
-            <a:off x="4602480" y="4343400"/>
-            <a:ext cx="2956560" cy="548640"/>
-          </a:xfrm>
-          <a:prstGeom prst="rect">
-            <a:avLst/>
-          </a:prstGeom>
-          <a:noFill/>
-          <a:ln/>
-        </p:spPr>
-        <p:txBody>
-          <a:bodyPr wrap="square" lIns="0" tIns="0" rIns="0" bIns="0" rtlCol="0" anchor="ctr"/>
-          <a:lstStyle/>
-          <a:p>
-            <a:pPr algn="ctr" indent="0" marL="0">
-              <a:buNone/>
-            </a:pPr>
-            <a:r>
-              <a:rPr lang="en-US" sz="1800" b="1" dirty="0">
-                <a:solidFill>
-                  <a:srgbClr val="FFB347"/>
-                </a:solidFill>
-                <a:latin typeface="Calibri" pitchFamily="34" charset="0"/>
-                <a:ea typeface="Calibri" pitchFamily="34" charset="-122"/>
-                <a:cs typeface="Calibri" pitchFamily="34" charset="-120"/>
-              </a:rPr>
-              <a:t>Alien (1979)</a:t>
-            </a:r>
-            <a:endParaRPr lang="en-US" sz="1800" dirty="0"/>
-          </a:p>
-        </p:txBody>
-      </p:sp>
-      <p:sp>
-        <p:nvSpPr>
-          <p:cNvPr id="16" name="Text 14"/>
-          <p:cNvSpPr/>
-          <p:nvPr/>
-        </p:nvSpPr>
-        <p:spPr>
-          <a:xfrm>
-            <a:off x="4602480" y="4892040"/>
-            <a:ext cx="2956560" cy="365760"/>
-          </a:xfrm>
-          <a:prstGeom prst="rect">
-            <a:avLst/>
-          </a:prstGeom>
-          <a:noFill/>
-          <a:ln/>
-        </p:spPr>
-        <p:txBody>
-          <a:bodyPr wrap="square" lIns="0" tIns="0" rIns="0" bIns="0" rtlCol="0" anchor="ctr"/>
-          <a:lstStyle/>
-          <a:p>
-            <a:pPr algn="ctr" indent="0" marL="0">
-              <a:buNone/>
-            </a:pPr>
-            <a:r>
-              <a:rPr lang="en-US" sz="1250" dirty="0">
-                <a:solidFill>
-                  <a:srgbClr val="ECECF3"/>
-                </a:solidFill>
-                <a:latin typeface="Calibri" pitchFamily="34" charset="0"/>
-                <a:ea typeface="Calibri" pitchFamily="34" charset="-122"/>
-                <a:cs typeface="Calibri" pitchFamily="34" charset="-120"/>
-              </a:rPr>
-              <a:t>Horror · Intense · ★ 8.5</a:t>
-            </a:r>
-            <a:endParaRPr lang="en-US" sz="1250" dirty="0"/>
-          </a:p>
-        </p:txBody>
-      </p:sp>
-      <p:sp>
-        <p:nvSpPr>
-          <p:cNvPr id="17" name="Shape 15"/>
-          <p:cNvSpPr/>
-          <p:nvPr/>
-        </p:nvSpPr>
-        <p:spPr>
-          <a:xfrm>
-            <a:off x="8199120" y="2103120"/>
-            <a:ext cx="3322320" cy="3291840"/>
-          </a:xfrm>
-          <a:prstGeom prst="roundRect">
-            <a:avLst>
-              <a:gd name="adj" fmla="val 2222"/>
-            </a:avLst>
-          </a:prstGeom>
-          <a:solidFill>
-            <a:srgbClr val="1A1D27"/>
-          </a:solidFill>
-          <a:ln w="12700">
-            <a:solidFill>
-              <a:srgbClr val="2A2F3E"/>
-            </a:solidFill>
-            <a:prstDash val="solid"/>
-          </a:ln>
-          <a:effectLst>
-            <a:outerShdw sx="100000" sy="100000" kx="0" ky="0" algn="bl" rotWithShape="0" blurRad="101600" dist="38100" dir="8100000">
-              <a:srgbClr val="000000">
-                <a:alpha val="35000"/>
-              </a:srgbClr>
-            </a:outerShdw>
-          </a:effectLst>
-        </p:spPr>
-      </p:sp>
-      <p:sp>
-        <p:nvSpPr>
-          <p:cNvPr id="18" name="Text 16"/>
-          <p:cNvSpPr/>
-          <p:nvPr/>
-        </p:nvSpPr>
-        <p:spPr>
-          <a:xfrm>
-            <a:off x="8519160" y="2377440"/>
-            <a:ext cx="2682240" cy="822960"/>
-          </a:xfrm>
-          <a:prstGeom prst="rect">
-            <a:avLst/>
-          </a:prstGeom>
-          <a:noFill/>
-          <a:ln/>
-        </p:spPr>
-        <p:txBody>
-          <a:bodyPr wrap="square" lIns="0" tIns="0" rIns="0" bIns="0" rtlCol="0" anchor="ctr"/>
-          <a:lstStyle/>
-          <a:p>
-            <a:pPr indent="0" marL="0">
-              <a:lnSpc>
-                <a:spcPct val="110000"/>
-              </a:lnSpc>
-              <a:buNone/>
-            </a:pPr>
-            <a:r>
-              <a:rPr lang="en-US" sz="1600" i="1" dirty="0">
-                <a:solidFill>
-                  <a:srgbClr val="9AA0B4"/>
-                </a:solidFill>
-                <a:latin typeface="Georgia" pitchFamily="34" charset="0"/>
-                <a:ea typeface="Georgia" pitchFamily="34" charset="-122"/>
-                <a:cs typeface="Georgia" pitchFamily="34" charset="-120"/>
-              </a:rPr>
-              <a:t>“epic action game for hours”</a:t>
-            </a:r>
-            <a:endParaRPr lang="en-US" sz="1600" dirty="0"/>
-          </a:p>
-        </p:txBody>
-      </p:sp>
-      <p:sp>
-        <p:nvSpPr>
-          <p:cNvPr id="19" name="Shape 17"/>
-          <p:cNvSpPr/>
-          <p:nvPr/>
-        </p:nvSpPr>
-        <p:spPr>
-          <a:xfrm>
-            <a:off x="8519160" y="3291840"/>
-            <a:ext cx="2682240" cy="0"/>
-          </a:xfrm>
-          <a:prstGeom prst="line">
-            <a:avLst/>
-          </a:prstGeom>
-          <a:noFill/>
-          <a:ln w="12700">
-            <a:solidFill>
-              <a:srgbClr val="2A2F3E"/>
-            </a:solidFill>
-            <a:prstDash val="solid"/>
-          </a:ln>
-        </p:spPr>
-      </p:sp>
-      <p:sp>
-        <p:nvSpPr>
-          <p:cNvPr id="20" name="Text 18"/>
-          <p:cNvSpPr/>
-          <p:nvPr/>
-        </p:nvSpPr>
-        <p:spPr>
-          <a:xfrm>
-            <a:off x="8199120" y="3474720"/>
-            <a:ext cx="3322320" cy="822960"/>
-          </a:xfrm>
-          <a:prstGeom prst="rect">
-            <a:avLst/>
-          </a:prstGeom>
-          <a:noFill/>
-          <a:ln/>
-        </p:spPr>
-        <p:txBody>
-          <a:bodyPr wrap="square" lIns="0" tIns="0" rIns="0" bIns="0" rtlCol="0" anchor="ctr"/>
-          <a:lstStyle/>
-          <a:p>
-            <a:pPr algn="ctr" indent="0" marL="0">
-              <a:buNone/>
-            </a:pPr>
-            <a:r>
-              <a:rPr lang="en-US" sz="4400" dirty="0">
-                <a:solidFill>
-                  <a:srgbClr val="000000"/>
-                </a:solidFill>
-              </a:rPr>
-              <a:t>🎮</a:t>
-            </a:r>
-            <a:endParaRPr lang="en-US" sz="4400" dirty="0"/>
-          </a:p>
-        </p:txBody>
-      </p:sp>
-      <p:sp>
-        <p:nvSpPr>
-          <p:cNvPr id="21" name="Text 19"/>
-          <p:cNvSpPr/>
-          <p:nvPr/>
-        </p:nvSpPr>
-        <p:spPr>
-          <a:xfrm>
-            <a:off x="8382000" y="4343400"/>
-            <a:ext cx="2956560" cy="548640"/>
-          </a:xfrm>
-          <a:prstGeom prst="rect">
-            <a:avLst/>
-          </a:prstGeom>
-          <a:noFill/>
-          <a:ln/>
-        </p:spPr>
-        <p:txBody>
-          <a:bodyPr wrap="square" lIns="0" tIns="0" rIns="0" bIns="0" rtlCol="0" anchor="ctr"/>
-          <a:lstStyle/>
-          <a:p>
-            <a:pPr algn="ctr" indent="0" marL="0">
-              <a:buNone/>
-            </a:pPr>
-            <a:r>
-              <a:rPr lang="en-US" sz="1800" b="1" dirty="0">
-                <a:solidFill>
-                  <a:srgbClr val="FFB347"/>
-                </a:solidFill>
-                <a:latin typeface="Calibri" pitchFamily="34" charset="0"/>
-                <a:ea typeface="Calibri" pitchFamily="34" charset="-122"/>
-                <a:cs typeface="Calibri" pitchFamily="34" charset="-120"/>
-              </a:rPr>
-              <a:t>Super Mario Odyssey</a:t>
-            </a:r>
-            <a:endParaRPr lang="en-US" sz="1800" dirty="0"/>
-          </a:p>
-        </p:txBody>
-      </p:sp>
-      <p:sp>
-        <p:nvSpPr>
-          <p:cNvPr id="22" name="Text 20"/>
-          <p:cNvSpPr/>
-          <p:nvPr/>
-        </p:nvSpPr>
-        <p:spPr>
-          <a:xfrm>
-            <a:off x="8382000" y="4892040"/>
-            <a:ext cx="2956560" cy="365760"/>
-          </a:xfrm>
-          <a:prstGeom prst="rect">
-            <a:avLst/>
-          </a:prstGeom>
-          <a:noFill/>
-          <a:ln/>
-        </p:spPr>
-        <p:txBody>
-          <a:bodyPr wrap="square" lIns="0" tIns="0" rIns="0" bIns="0" rtlCol="0" anchor="ctr"/>
-          <a:lstStyle/>
-          <a:p>
-            <a:pPr algn="ctr" indent="0" marL="0">
-              <a:buNone/>
-            </a:pPr>
-            <a:r>
-              <a:rPr lang="en-US" sz="1250" dirty="0">
-                <a:solidFill>
-                  <a:srgbClr val="ECECF3"/>
-                </a:solidFill>
-                <a:latin typeface="Calibri" pitchFamily="34" charset="0"/>
-                <a:ea typeface="Calibri" pitchFamily="34" charset="-122"/>
-                <a:cs typeface="Calibri" pitchFamily="34" charset="-120"/>
-              </a:rPr>
-              <a:t>Action · Light · ★ 9.4</a:t>
-            </a:r>
-            <a:endParaRPr lang="en-US" sz="1250" dirty="0"/>
-          </a:p>
-        </p:txBody>
-      </p:sp>
-      <p:sp>
-        <p:nvSpPr>
-          <p:cNvPr id="23" name="Text 21"/>
-          <p:cNvSpPr/>
-          <p:nvPr/>
-        </p:nvSpPr>
-        <p:spPr>
-          <a:xfrm>
-            <a:off x="640080" y="5669280"/>
-            <a:ext cx="10881360" cy="365760"/>
-          </a:xfrm>
-          <a:prstGeom prst="rect">
-            <a:avLst/>
-          </a:prstGeom>
-          <a:noFill/>
-          <a:ln/>
-        </p:spPr>
-        <p:txBody>
-          <a:bodyPr wrap="square" lIns="0" tIns="0" rIns="0" bIns="0" rtlCol="0" anchor="ctr"/>
-          <a:lstStyle/>
-          <a:p>
-            <a:pPr algn="ctr" indent="0" marL="0">
-              <a:buNone/>
-            </a:pPr>
-            <a:r>
-              <a:rPr lang="en-US" sz="1300" i="1" dirty="0">
-                <a:solidFill>
-                  <a:srgbClr val="9AA0B4"/>
-                </a:solidFill>
-                <a:latin typeface="Calibri" pitchFamily="34" charset="0"/>
-                <a:ea typeface="Calibri" pitchFamily="34" charset="-122"/>
-                <a:cs typeface="Calibri" pitchFamily="34" charset="-120"/>
-              </a:rPr>
-              <a:t>Same mood → same pick, every time. The C engine is deterministic.</a:t>
-            </a:r>
-            <a:endParaRPr lang="en-US" sz="1300" dirty="0"/>
-          </a:p>
-        </p:txBody>
-      </p:sp>
-      <p:sp>
-        <p:nvSpPr>
-          <p:cNvPr id="24" name="Text 22"/>
           <p:cNvSpPr/>
           <p:nvPr/>
         </p:nvSpPr>
@@ -3304,7 +3577,7 @@
       </p:sp>
       <p:sp>
         <p:nvSpPr>
-          <p:cNvPr id="25" name="Text 23"/>
+          <p:cNvPr id="16" name="Text 14"/>
           <p:cNvSpPr/>
           <p:nvPr/>
         </p:nvSpPr>
@@ -3426,7 +3699,7 @@
                 <a:ea typeface="Calibri" pitchFamily="34" charset="-122"/>
                 <a:cs typeface="Calibri" pitchFamily="34" charset="-120"/>
               </a:rPr>
-              <a:t>UNDER THE HOOD</a:t>
+              <a:t>THE PRODUCT</a:t>
             </a:r>
             <a:endParaRPr lang="en-US" sz="1200" dirty="0"/>
           </a:p>
@@ -3465,7 +3738,7 @@
                 <a:ea typeface="Georgia" pitchFamily="34" charset="-122"/>
                 <a:cs typeface="Georgia" pitchFamily="34" charset="-120"/>
               </a:rPr>
-              <a:t>Tech stack &amp; open data</a:t>
+              <a:t>Four pages, one app</a:t>
             </a:r>
             <a:endParaRPr lang="en-US" sz="3200" dirty="0"/>
           </a:p>
@@ -3479,16 +3752,16 @@
         </p:nvSpPr>
         <p:spPr>
           <a:xfrm>
-            <a:off x="640080" y="2103120"/>
-            <a:ext cx="2446020" cy="1554480"/>
+            <a:off x="640080" y="1920240"/>
+            <a:ext cx="5212080" cy="1874520"/>
           </a:xfrm>
           <a:prstGeom prst="roundRect">
             <a:avLst>
-              <a:gd name="adj" fmla="val 4706"/>
+              <a:gd name="adj" fmla="val 3902"/>
             </a:avLst>
           </a:prstGeom>
           <a:solidFill>
-            <a:srgbClr val="11141D"/>
+            <a:srgbClr val="1A1D27"/>
           </a:solidFill>
           <a:ln w="12700">
             <a:solidFill>
@@ -3513,16 +3786,21 @@
         </p:nvSpPr>
         <p:spPr>
           <a:xfrm>
-            <a:off x="640080" y="2103120"/>
-            <a:ext cx="2446020" cy="82296"/>
-          </a:xfrm>
-          <a:prstGeom prst="rect">
+            <a:off x="960120" y="2331720"/>
+            <a:ext cx="960120" cy="960120"/>
+          </a:xfrm>
+          <a:prstGeom prst="ellipse">
             <a:avLst/>
           </a:prstGeom>
           <a:solidFill>
-            <a:srgbClr val="FFB347"/>
+            <a:srgbClr val="11141D"/>
           </a:solidFill>
-          <a:ln/>
+          <a:ln w="19050">
+            <a:solidFill>
+              <a:srgbClr val="FFB347"/>
+            </a:solidFill>
+            <a:prstDash val="solid"/>
+          </a:ln>
         </p:spPr>
       </p:sp>
       <p:sp>
@@ -3533,8 +3811,44 @@
         </p:nvSpPr>
         <p:spPr>
           <a:xfrm>
-            <a:off x="822960" y="2423160"/>
-            <a:ext cx="2080260" cy="365760"/>
+            <a:off x="960120" y="2331720"/>
+            <a:ext cx="960120" cy="960120"/>
+          </a:xfrm>
+          <a:prstGeom prst="rect">
+            <a:avLst/>
+          </a:prstGeom>
+          <a:noFill/>
+          <a:ln/>
+        </p:spPr>
+        <p:txBody>
+          <a:bodyPr wrap="square" lIns="0" tIns="0" rIns="0" bIns="0" rtlCol="0" anchor="ctr"/>
+          <a:lstStyle/>
+          <a:p>
+            <a:pPr algn="ctr" indent="0" marL="0">
+              <a:buNone/>
+            </a:pPr>
+            <a:r>
+              <a:rPr lang="en-US" sz="3200" dirty="0">
+                <a:solidFill>
+                  <a:srgbClr val="000000"/>
+                </a:solidFill>
+              </a:rPr>
+              <a:t>✨</a:t>
+            </a:r>
+            <a:endParaRPr lang="en-US" sz="3200" dirty="0"/>
+          </a:p>
+        </p:txBody>
+      </p:sp>
+      <p:sp>
+        <p:nvSpPr>
+          <p:cNvPr id="8" name="Text 6"/>
+          <p:cNvSpPr/>
+          <p:nvPr/>
+        </p:nvSpPr>
+        <p:spPr>
+          <a:xfrm>
+            <a:off x="2194560" y="2286000"/>
+            <a:ext cx="3383280" cy="457200"/>
           </a:xfrm>
           <a:prstGeom prst="rect">
             <a:avLst/>
@@ -3550,30 +3864,30 @@
               <a:buNone/>
             </a:pPr>
             <a:r>
-              <a:rPr lang="en-US" sz="1100" b="1" spc="100" kern="0" dirty="0">
-                <a:solidFill>
-                  <a:srgbClr val="9AA0B4"/>
-                </a:solidFill>
-                <a:latin typeface="Calibri" pitchFamily="34" charset="0"/>
-                <a:ea typeface="Calibri" pitchFamily="34" charset="-122"/>
-                <a:cs typeface="Calibri" pitchFamily="34" charset="-120"/>
-              </a:rPr>
-              <a:t>ENGINE</a:t>
-            </a:r>
-            <a:endParaRPr lang="en-US" sz="1100" dirty="0"/>
-          </a:p>
-        </p:txBody>
-      </p:sp>
-      <p:sp>
-        <p:nvSpPr>
-          <p:cNvPr id="8" name="Text 6"/>
-          <p:cNvSpPr/>
-          <p:nvPr/>
-        </p:nvSpPr>
-        <p:spPr>
-          <a:xfrm>
-            <a:off x="822960" y="2834640"/>
-            <a:ext cx="2080260" cy="640080"/>
+              <a:rPr lang="en-US" sz="2200" b="1" dirty="0">
+                <a:solidFill>
+                  <a:srgbClr val="FFB347"/>
+                </a:solidFill>
+                <a:latin typeface="Georgia" pitchFamily="34" charset="0"/>
+                <a:ea typeface="Georgia" pitchFamily="34" charset="-122"/>
+                <a:cs typeface="Georgia" pitchFamily="34" charset="-120"/>
+              </a:rPr>
+              <a:t>AI Match</a:t>
+            </a:r>
+            <a:endParaRPr lang="en-US" sz="2200" dirty="0"/>
+          </a:p>
+        </p:txBody>
+      </p:sp>
+      <p:sp>
+        <p:nvSpPr>
+          <p:cNvPr id="9" name="Text 7"/>
+          <p:cNvSpPr/>
+          <p:nvPr/>
+        </p:nvSpPr>
+        <p:spPr>
+          <a:xfrm>
+            <a:off x="2194560" y="2788920"/>
+            <a:ext cx="3383280" cy="868680"/>
           </a:xfrm>
           <a:prstGeom prst="rect">
             <a:avLst/>
@@ -3586,10 +3900,13 @@
           <a:lstStyle/>
           <a:p>
             <a:pPr indent="0" marL="0">
-              <a:buNone/>
-            </a:pPr>
-            <a:r>
-              <a:rPr lang="en-US" sz="1500" b="1" dirty="0">
+              <a:lnSpc>
+                <a:spcPct val="112000"/>
+              </a:lnSpc>
+              <a:buNone/>
+            </a:pPr>
+            <a:r>
+              <a:rPr lang="en-US" sz="1350" dirty="0">
                 <a:solidFill>
                   <a:srgbClr val="ECECF3"/>
                 </a:solidFill>
@@ -3597,30 +3914,30 @@
                 <a:ea typeface="Calibri" pitchFamily="34" charset="-122"/>
                 <a:cs typeface="Calibri" pitchFamily="34" charset="-120"/>
               </a:rPr>
-              <a:t>C → cinematch.exe</a:t>
-            </a:r>
-            <a:endParaRPr lang="en-US" sz="1500" dirty="0"/>
-          </a:p>
-        </p:txBody>
-      </p:sp>
-      <p:sp>
-        <p:nvSpPr>
-          <p:cNvPr id="9" name="Shape 7"/>
-          <p:cNvSpPr/>
-          <p:nvPr/>
-        </p:nvSpPr>
-        <p:spPr>
-          <a:xfrm>
-            <a:off x="3451860" y="2103120"/>
-            <a:ext cx="2446020" cy="1554480"/>
+              <a:t>The core feature. Type a mood, get one explained pick from the curated 55-title library.</a:t>
+            </a:r>
+            <a:endParaRPr lang="en-US" sz="1350" dirty="0"/>
+          </a:p>
+        </p:txBody>
+      </p:sp>
+      <p:sp>
+        <p:nvSpPr>
+          <p:cNvPr id="10" name="Shape 8"/>
+          <p:cNvSpPr/>
+          <p:nvPr/>
+        </p:nvSpPr>
+        <p:spPr>
+          <a:xfrm>
+            <a:off x="6309360" y="1920240"/>
+            <a:ext cx="5212080" cy="1874520"/>
           </a:xfrm>
           <a:prstGeom prst="roundRect">
             <a:avLst>
-              <a:gd name="adj" fmla="val 4706"/>
+              <a:gd name="adj" fmla="val 3902"/>
             </a:avLst>
           </a:prstGeom>
           <a:solidFill>
-            <a:srgbClr val="11141D"/>
+            <a:srgbClr val="1A1D27"/>
           </a:solidFill>
           <a:ln w="12700">
             <a:solidFill>
@@ -3639,34 +3956,75 @@
       </p:sp>
       <p:sp>
         <p:nvSpPr>
-          <p:cNvPr id="10" name="Shape 8"/>
-          <p:cNvSpPr/>
-          <p:nvPr/>
-        </p:nvSpPr>
-        <p:spPr>
-          <a:xfrm>
-            <a:off x="3451860" y="2103120"/>
-            <a:ext cx="2446020" cy="82296"/>
-          </a:xfrm>
-          <a:prstGeom prst="rect">
+          <p:cNvPr id="11" name="Shape 9"/>
+          <p:cNvSpPr/>
+          <p:nvPr/>
+        </p:nvSpPr>
+        <p:spPr>
+          <a:xfrm>
+            <a:off x="6629400" y="2331720"/>
+            <a:ext cx="960120" cy="960120"/>
+          </a:xfrm>
+          <a:prstGeom prst="ellipse">
             <a:avLst/>
           </a:prstGeom>
           <a:solidFill>
-            <a:srgbClr val="FFB347"/>
+            <a:srgbClr val="11141D"/>
           </a:solidFill>
-          <a:ln/>
-        </p:spPr>
-      </p:sp>
-      <p:sp>
-        <p:nvSpPr>
-          <p:cNvPr id="11" name="Text 9"/>
-          <p:cNvSpPr/>
-          <p:nvPr/>
-        </p:nvSpPr>
-        <p:spPr>
-          <a:xfrm>
-            <a:off x="3634740" y="2423160"/>
-            <a:ext cx="2080260" cy="365760"/>
+          <a:ln w="19050">
+            <a:solidFill>
+              <a:srgbClr val="FFB347"/>
+            </a:solidFill>
+            <a:prstDash val="solid"/>
+          </a:ln>
+        </p:spPr>
+      </p:sp>
+      <p:sp>
+        <p:nvSpPr>
+          <p:cNvPr id="12" name="Text 10"/>
+          <p:cNvSpPr/>
+          <p:nvPr/>
+        </p:nvSpPr>
+        <p:spPr>
+          <a:xfrm>
+            <a:off x="6629400" y="2331720"/>
+            <a:ext cx="960120" cy="960120"/>
+          </a:xfrm>
+          <a:prstGeom prst="rect">
+            <a:avLst/>
+          </a:prstGeom>
+          <a:noFill/>
+          <a:ln/>
+        </p:spPr>
+        <p:txBody>
+          <a:bodyPr wrap="square" lIns="0" tIns="0" rIns="0" bIns="0" rtlCol="0" anchor="ctr"/>
+          <a:lstStyle/>
+          <a:p>
+            <a:pPr algn="ctr" indent="0" marL="0">
+              <a:buNone/>
+            </a:pPr>
+            <a:r>
+              <a:rPr lang="en-US" sz="3200" dirty="0">
+                <a:solidFill>
+                  <a:srgbClr val="000000"/>
+                </a:solidFill>
+              </a:rPr>
+              <a:t>🎬</a:t>
+            </a:r>
+            <a:endParaRPr lang="en-US" sz="3200" dirty="0"/>
+          </a:p>
+        </p:txBody>
+      </p:sp>
+      <p:sp>
+        <p:nvSpPr>
+          <p:cNvPr id="13" name="Text 11"/>
+          <p:cNvSpPr/>
+          <p:nvPr/>
+        </p:nvSpPr>
+        <p:spPr>
+          <a:xfrm>
+            <a:off x="7863840" y="2286000"/>
+            <a:ext cx="3383280" cy="457200"/>
           </a:xfrm>
           <a:prstGeom prst="rect">
             <a:avLst/>
@@ -3682,30 +4040,30 @@
               <a:buNone/>
             </a:pPr>
             <a:r>
-              <a:rPr lang="en-US" sz="1100" b="1" spc="100" kern="0" dirty="0">
-                <a:solidFill>
-                  <a:srgbClr val="9AA0B4"/>
-                </a:solidFill>
-                <a:latin typeface="Calibri" pitchFamily="34" charset="0"/>
-                <a:ea typeface="Calibri" pitchFamily="34" charset="-122"/>
-                <a:cs typeface="Calibri" pitchFamily="34" charset="-120"/>
-              </a:rPr>
-              <a:t>BACKEND</a:t>
-            </a:r>
-            <a:endParaRPr lang="en-US" sz="1100" dirty="0"/>
-          </a:p>
-        </p:txBody>
-      </p:sp>
-      <p:sp>
-        <p:nvSpPr>
-          <p:cNvPr id="12" name="Text 10"/>
-          <p:cNvSpPr/>
-          <p:nvPr/>
-        </p:nvSpPr>
-        <p:spPr>
-          <a:xfrm>
-            <a:off x="3634740" y="2834640"/>
-            <a:ext cx="2080260" cy="640080"/>
+              <a:rPr lang="en-US" sz="2200" b="1" dirty="0">
+                <a:solidFill>
+                  <a:srgbClr val="FFB347"/>
+                </a:solidFill>
+                <a:latin typeface="Georgia" pitchFamily="34" charset="0"/>
+                <a:ea typeface="Georgia" pitchFamily="34" charset="-122"/>
+                <a:cs typeface="Georgia" pitchFamily="34" charset="-120"/>
+              </a:rPr>
+              <a:t>Movies</a:t>
+            </a:r>
+            <a:endParaRPr lang="en-US" sz="2200" dirty="0"/>
+          </a:p>
+        </p:txBody>
+      </p:sp>
+      <p:sp>
+        <p:nvSpPr>
+          <p:cNvPr id="14" name="Text 12"/>
+          <p:cNvSpPr/>
+          <p:nvPr/>
+        </p:nvSpPr>
+        <p:spPr>
+          <a:xfrm>
+            <a:off x="7863840" y="2788920"/>
+            <a:ext cx="3383280" cy="868680"/>
           </a:xfrm>
           <a:prstGeom prst="rect">
             <a:avLst/>
@@ -3718,10 +4076,13 @@
           <a:lstStyle/>
           <a:p>
             <a:pPr indent="0" marL="0">
-              <a:buNone/>
-            </a:pPr>
-            <a:r>
-              <a:rPr lang="en-US" sz="1500" b="1" dirty="0">
+              <a:lnSpc>
+                <a:spcPct val="112000"/>
+              </a:lnSpc>
+              <a:buNone/>
+            </a:pPr>
+            <a:r>
+              <a:rPr lang="en-US" sz="1350" dirty="0">
                 <a:solidFill>
                   <a:srgbClr val="ECECF3"/>
                 </a:solidFill>
@@ -3729,30 +4090,30 @@
                 <a:ea typeface="Calibri" pitchFamily="34" charset="-122"/>
                 <a:cs typeface="Calibri" pitchFamily="34" charset="-120"/>
               </a:rPr>
-              <a:t>Node.js + Express</a:t>
-            </a:r>
-            <a:endParaRPr lang="en-US" sz="1500" dirty="0"/>
-          </a:p>
-        </p:txBody>
-      </p:sp>
-      <p:sp>
-        <p:nvSpPr>
-          <p:cNvPr id="13" name="Shape 11"/>
-          <p:cNvSpPr/>
-          <p:nvPr/>
-        </p:nvSpPr>
-        <p:spPr>
-          <a:xfrm>
-            <a:off x="6263640" y="2103120"/>
-            <a:ext cx="2446020" cy="1554480"/>
+              <a:t>Browse thousands of real films from the open TMDB dataset — search, filter, posters, details.</a:t>
+            </a:r>
+            <a:endParaRPr lang="en-US" sz="1350" dirty="0"/>
+          </a:p>
+        </p:txBody>
+      </p:sp>
+      <p:sp>
+        <p:nvSpPr>
+          <p:cNvPr id="15" name="Shape 13"/>
+          <p:cNvSpPr/>
+          <p:nvPr/>
+        </p:nvSpPr>
+        <p:spPr>
+          <a:xfrm>
+            <a:off x="640080" y="4160520"/>
+            <a:ext cx="5212080" cy="1874520"/>
           </a:xfrm>
           <a:prstGeom prst="roundRect">
             <a:avLst>
-              <a:gd name="adj" fmla="val 4706"/>
+              <a:gd name="adj" fmla="val 3902"/>
             </a:avLst>
           </a:prstGeom>
           <a:solidFill>
-            <a:srgbClr val="11141D"/>
+            <a:srgbClr val="1A1D27"/>
           </a:solidFill>
           <a:ln w="12700">
             <a:solidFill>
@@ -3771,34 +4132,75 @@
       </p:sp>
       <p:sp>
         <p:nvSpPr>
-          <p:cNvPr id="14" name="Shape 12"/>
-          <p:cNvSpPr/>
-          <p:nvPr/>
-        </p:nvSpPr>
-        <p:spPr>
-          <a:xfrm>
-            <a:off x="6263640" y="2103120"/>
-            <a:ext cx="2446020" cy="82296"/>
-          </a:xfrm>
-          <a:prstGeom prst="rect">
+          <p:cNvPr id="16" name="Shape 14"/>
+          <p:cNvSpPr/>
+          <p:nvPr/>
+        </p:nvSpPr>
+        <p:spPr>
+          <a:xfrm>
+            <a:off x="960120" y="4572000"/>
+            <a:ext cx="960120" cy="960120"/>
+          </a:xfrm>
+          <a:prstGeom prst="ellipse">
             <a:avLst/>
           </a:prstGeom>
           <a:solidFill>
-            <a:srgbClr val="FFB347"/>
+            <a:srgbClr val="11141D"/>
           </a:solidFill>
-          <a:ln/>
-        </p:spPr>
-      </p:sp>
-      <p:sp>
-        <p:nvSpPr>
-          <p:cNvPr id="15" name="Text 13"/>
-          <p:cNvSpPr/>
-          <p:nvPr/>
-        </p:nvSpPr>
-        <p:spPr>
-          <a:xfrm>
-            <a:off x="6446520" y="2423160"/>
-            <a:ext cx="2080260" cy="365760"/>
+          <a:ln w="19050">
+            <a:solidFill>
+              <a:srgbClr val="FFB347"/>
+            </a:solidFill>
+            <a:prstDash val="solid"/>
+          </a:ln>
+        </p:spPr>
+      </p:sp>
+      <p:sp>
+        <p:nvSpPr>
+          <p:cNvPr id="17" name="Text 15"/>
+          <p:cNvSpPr/>
+          <p:nvPr/>
+        </p:nvSpPr>
+        <p:spPr>
+          <a:xfrm>
+            <a:off x="960120" y="4572000"/>
+            <a:ext cx="960120" cy="960120"/>
+          </a:xfrm>
+          <a:prstGeom prst="rect">
+            <a:avLst/>
+          </a:prstGeom>
+          <a:noFill/>
+          <a:ln/>
+        </p:spPr>
+        <p:txBody>
+          <a:bodyPr wrap="square" lIns="0" tIns="0" rIns="0" bIns="0" rtlCol="0" anchor="ctr"/>
+          <a:lstStyle/>
+          <a:p>
+            <a:pPr algn="ctr" indent="0" marL="0">
+              <a:buNone/>
+            </a:pPr>
+            <a:r>
+              <a:rPr lang="en-US" sz="3200" dirty="0">
+                <a:solidFill>
+                  <a:srgbClr val="000000"/>
+                </a:solidFill>
+              </a:rPr>
+              <a:t>🎮</a:t>
+            </a:r>
+            <a:endParaRPr lang="en-US" sz="3200" dirty="0"/>
+          </a:p>
+        </p:txBody>
+      </p:sp>
+      <p:sp>
+        <p:nvSpPr>
+          <p:cNvPr id="18" name="Text 16"/>
+          <p:cNvSpPr/>
+          <p:nvPr/>
+        </p:nvSpPr>
+        <p:spPr>
+          <a:xfrm>
+            <a:off x="2194560" y="4526280"/>
+            <a:ext cx="3383280" cy="457200"/>
           </a:xfrm>
           <a:prstGeom prst="rect">
             <a:avLst/>
@@ -3814,30 +4216,30 @@
               <a:buNone/>
             </a:pPr>
             <a:r>
-              <a:rPr lang="en-US" sz="1100" b="1" spc="100" kern="0" dirty="0">
-                <a:solidFill>
-                  <a:srgbClr val="9AA0B4"/>
-                </a:solidFill>
-                <a:latin typeface="Calibri" pitchFamily="34" charset="0"/>
-                <a:ea typeface="Calibri" pitchFamily="34" charset="-122"/>
-                <a:cs typeface="Calibri" pitchFamily="34" charset="-120"/>
-              </a:rPr>
-              <a:t>FRONTEND</a:t>
-            </a:r>
-            <a:endParaRPr lang="en-US" sz="1100" dirty="0"/>
-          </a:p>
-        </p:txBody>
-      </p:sp>
-      <p:sp>
-        <p:nvSpPr>
-          <p:cNvPr id="16" name="Text 14"/>
-          <p:cNvSpPr/>
-          <p:nvPr/>
-        </p:nvSpPr>
-        <p:spPr>
-          <a:xfrm>
-            <a:off x="6446520" y="2834640"/>
-            <a:ext cx="2080260" cy="640080"/>
+              <a:rPr lang="en-US" sz="2200" b="1" dirty="0">
+                <a:solidFill>
+                  <a:srgbClr val="FFB347"/>
+                </a:solidFill>
+                <a:latin typeface="Georgia" pitchFamily="34" charset="0"/>
+                <a:ea typeface="Georgia" pitchFamily="34" charset="-122"/>
+                <a:cs typeface="Georgia" pitchFamily="34" charset="-120"/>
+              </a:rPr>
+              <a:t>Games</a:t>
+            </a:r>
+            <a:endParaRPr lang="en-US" sz="2200" dirty="0"/>
+          </a:p>
+        </p:txBody>
+      </p:sp>
+      <p:sp>
+        <p:nvSpPr>
+          <p:cNvPr id="19" name="Text 17"/>
+          <p:cNvSpPr/>
+          <p:nvPr/>
+        </p:nvSpPr>
+        <p:spPr>
+          <a:xfrm>
+            <a:off x="2194560" y="5029200"/>
+            <a:ext cx="3383280" cy="868680"/>
           </a:xfrm>
           <a:prstGeom prst="rect">
             <a:avLst/>
@@ -3850,10 +4252,13 @@
           <a:lstStyle/>
           <a:p>
             <a:pPr indent="0" marL="0">
-              <a:buNone/>
-            </a:pPr>
-            <a:r>
-              <a:rPr lang="en-US" sz="1500" b="1" dirty="0">
+              <a:lnSpc>
+                <a:spcPct val="112000"/>
+              </a:lnSpc>
+              <a:buNone/>
+            </a:pPr>
+            <a:r>
+              <a:rPr lang="en-US" sz="1350" dirty="0">
                 <a:solidFill>
                   <a:srgbClr val="ECECF3"/>
                 </a:solidFill>
@@ -3861,30 +4266,30 @@
                 <a:ea typeface="Calibri" pitchFamily="34" charset="-122"/>
                 <a:cs typeface="Calibri" pitchFamily="34" charset="-120"/>
               </a:rPr>
-              <a:t>Vite + React</a:t>
-            </a:r>
-            <a:endParaRPr lang="en-US" sz="1500" dirty="0"/>
-          </a:p>
-        </p:txBody>
-      </p:sp>
-      <p:sp>
-        <p:nvSpPr>
-          <p:cNvPr id="17" name="Shape 15"/>
-          <p:cNvSpPr/>
-          <p:nvPr/>
-        </p:nvSpPr>
-        <p:spPr>
-          <a:xfrm>
-            <a:off x="9075420" y="2103120"/>
-            <a:ext cx="2446020" cy="1554480"/>
+              <a:t>Browse 800,000+ titles from the open RAWG dataset — covers, ratings, and detail views.</a:t>
+            </a:r>
+            <a:endParaRPr lang="en-US" sz="1350" dirty="0"/>
+          </a:p>
+        </p:txBody>
+      </p:sp>
+      <p:sp>
+        <p:nvSpPr>
+          <p:cNvPr id="20" name="Shape 18"/>
+          <p:cNvSpPr/>
+          <p:nvPr/>
+        </p:nvSpPr>
+        <p:spPr>
+          <a:xfrm>
+            <a:off x="6309360" y="4160520"/>
+            <a:ext cx="5212080" cy="1874520"/>
           </a:xfrm>
           <a:prstGeom prst="roundRect">
             <a:avLst>
-              <a:gd name="adj" fmla="val 4706"/>
+              <a:gd name="adj" fmla="val 3902"/>
             </a:avLst>
           </a:prstGeom>
           <a:solidFill>
-            <a:srgbClr val="11141D"/>
+            <a:srgbClr val="1A1D27"/>
           </a:solidFill>
           <a:ln w="12700">
             <a:solidFill>
@@ -3903,155 +4308,64 @@
       </p:sp>
       <p:sp>
         <p:nvSpPr>
-          <p:cNvPr id="18" name="Shape 16"/>
-          <p:cNvSpPr/>
-          <p:nvPr/>
-        </p:nvSpPr>
-        <p:spPr>
-          <a:xfrm>
-            <a:off x="9075420" y="2103120"/>
-            <a:ext cx="2446020" cy="82296"/>
-          </a:xfrm>
-          <a:prstGeom prst="rect">
-            <a:avLst/>
-          </a:prstGeom>
-          <a:solidFill>
-            <a:srgbClr val="FFB347"/>
-          </a:solidFill>
-          <a:ln/>
-        </p:spPr>
-      </p:sp>
-      <p:sp>
-        <p:nvSpPr>
-          <p:cNvPr id="19" name="Text 17"/>
-          <p:cNvSpPr/>
-          <p:nvPr/>
-        </p:nvSpPr>
-        <p:spPr>
-          <a:xfrm>
-            <a:off x="9258300" y="2423160"/>
-            <a:ext cx="2080260" cy="365760"/>
-          </a:xfrm>
-          <a:prstGeom prst="rect">
-            <a:avLst/>
-          </a:prstGeom>
-          <a:noFill/>
-          <a:ln/>
-        </p:spPr>
-        <p:txBody>
-          <a:bodyPr wrap="square" lIns="0" tIns="0" rIns="0" bIns="0" rtlCol="0" anchor="ctr"/>
-          <a:lstStyle/>
-          <a:p>
-            <a:pPr indent="0" marL="0">
-              <a:buNone/>
-            </a:pPr>
-            <a:r>
-              <a:rPr lang="en-US" sz="1100" b="1" spc="100" kern="0" dirty="0">
-                <a:solidFill>
-                  <a:srgbClr val="9AA0B4"/>
-                </a:solidFill>
-                <a:latin typeface="Calibri" pitchFamily="34" charset="0"/>
-                <a:ea typeface="Calibri" pitchFamily="34" charset="-122"/>
-                <a:cs typeface="Calibri" pitchFamily="34" charset="-120"/>
-              </a:rPr>
-              <a:t>PACKAGES</a:t>
-            </a:r>
-            <a:endParaRPr lang="en-US" sz="1100" dirty="0"/>
-          </a:p>
-        </p:txBody>
-      </p:sp>
-      <p:sp>
-        <p:nvSpPr>
-          <p:cNvPr id="20" name="Text 18"/>
-          <p:cNvSpPr/>
-          <p:nvPr/>
-        </p:nvSpPr>
-        <p:spPr>
-          <a:xfrm>
-            <a:off x="9258300" y="2834640"/>
-            <a:ext cx="2080260" cy="640080"/>
-          </a:xfrm>
-          <a:prstGeom prst="rect">
-            <a:avLst/>
-          </a:prstGeom>
-          <a:noFill/>
-          <a:ln/>
-        </p:spPr>
-        <p:txBody>
-          <a:bodyPr wrap="square" lIns="0" tIns="0" rIns="0" bIns="0" rtlCol="0" anchor="ctr"/>
-          <a:lstStyle/>
-          <a:p>
-            <a:pPr indent="0" marL="0">
-              <a:buNone/>
-            </a:pPr>
-            <a:r>
-              <a:rPr lang="en-US" sz="1500" b="1" dirty="0">
-                <a:solidFill>
-                  <a:srgbClr val="ECECF3"/>
-                </a:solidFill>
-                <a:latin typeface="Calibri" pitchFamily="34" charset="0"/>
-                <a:ea typeface="Calibri" pitchFamily="34" charset="-122"/>
-                <a:cs typeface="Calibri" pitchFamily="34" charset="-120"/>
-              </a:rPr>
-              <a:t>pnpm</a:t>
-            </a:r>
-            <a:endParaRPr lang="en-US" sz="1500" dirty="0"/>
-          </a:p>
-        </p:txBody>
-      </p:sp>
-      <p:sp>
-        <p:nvSpPr>
           <p:cNvPr id="21" name="Shape 19"/>
           <p:cNvSpPr/>
           <p:nvPr/>
         </p:nvSpPr>
         <p:spPr>
           <a:xfrm>
-            <a:off x="640080" y="4023360"/>
-            <a:ext cx="2446020" cy="1554480"/>
-          </a:xfrm>
-          <a:prstGeom prst="roundRect">
-            <a:avLst>
-              <a:gd name="adj" fmla="val 4706"/>
-            </a:avLst>
+            <a:off x="6629400" y="4572000"/>
+            <a:ext cx="960120" cy="960120"/>
+          </a:xfrm>
+          <a:prstGeom prst="ellipse">
+            <a:avLst/>
           </a:prstGeom>
           <a:solidFill>
             <a:srgbClr val="11141D"/>
           </a:solidFill>
-          <a:ln w="12700">
+          <a:ln w="19050">
             <a:solidFill>
-              <a:srgbClr val="2A2F3E"/>
+              <a:srgbClr val="FFB347"/>
             </a:solidFill>
             <a:prstDash val="solid"/>
           </a:ln>
-          <a:effectLst>
-            <a:outerShdw sx="100000" sy="100000" kx="0" ky="0" algn="bl" rotWithShape="0" blurRad="101600" dist="38100" dir="8100000">
-              <a:srgbClr val="000000">
-                <a:alpha val="35000"/>
-              </a:srgbClr>
-            </a:outerShdw>
-          </a:effectLst>
-        </p:spPr>
-      </p:sp>
-      <p:sp>
-        <p:nvSpPr>
-          <p:cNvPr id="22" name="Shape 20"/>
-          <p:cNvSpPr/>
-          <p:nvPr/>
-        </p:nvSpPr>
-        <p:spPr>
-          <a:xfrm>
-            <a:off x="640080" y="4023360"/>
-            <a:ext cx="2446020" cy="82296"/>
-          </a:xfrm>
-          <a:prstGeom prst="rect">
-            <a:avLst/>
-          </a:prstGeom>
-          <a:solidFill>
-            <a:srgbClr val="FFB347"/>
-          </a:solidFill>
-          <a:ln/>
-        </p:spPr>
+        </p:spPr>
+      </p:sp>
+      <p:sp>
+        <p:nvSpPr>
+          <p:cNvPr id="22" name="Text 20"/>
+          <p:cNvSpPr/>
+          <p:nvPr/>
+        </p:nvSpPr>
+        <p:spPr>
+          <a:xfrm>
+            <a:off x="6629400" y="4572000"/>
+            <a:ext cx="960120" cy="960120"/>
+          </a:xfrm>
+          <a:prstGeom prst="rect">
+            <a:avLst/>
+          </a:prstGeom>
+          <a:noFill/>
+          <a:ln/>
+        </p:spPr>
+        <p:txBody>
+          <a:bodyPr wrap="square" lIns="0" tIns="0" rIns="0" bIns="0" rtlCol="0" anchor="ctr"/>
+          <a:lstStyle/>
+          <a:p>
+            <a:pPr algn="ctr" indent="0" marL="0">
+              <a:buNone/>
+            </a:pPr>
+            <a:r>
+              <a:rPr lang="en-US" sz="3200" dirty="0">
+                <a:solidFill>
+                  <a:srgbClr val="000000"/>
+                </a:solidFill>
+              </a:rPr>
+              <a:t>💬</a:t>
+            </a:r>
+            <a:endParaRPr lang="en-US" sz="3200" dirty="0"/>
+          </a:p>
+        </p:txBody>
       </p:sp>
       <p:sp>
         <p:nvSpPr>
@@ -4061,8 +4375,8 @@
         </p:nvSpPr>
         <p:spPr>
           <a:xfrm>
-            <a:off x="822960" y="4343400"/>
-            <a:ext cx="2080260" cy="365760"/>
+            <a:off x="7863840" y="4526280"/>
+            <a:ext cx="3383280" cy="457200"/>
           </a:xfrm>
           <a:prstGeom prst="rect">
             <a:avLst/>
@@ -4078,17 +4392,17 @@
               <a:buNone/>
             </a:pPr>
             <a:r>
-              <a:rPr lang="en-US" sz="1100" b="1" spc="100" kern="0" dirty="0">
-                <a:solidFill>
-                  <a:srgbClr val="9AA0B4"/>
-                </a:solidFill>
-                <a:latin typeface="Calibri" pitchFamily="34" charset="0"/>
-                <a:ea typeface="Calibri" pitchFamily="34" charset="-122"/>
-                <a:cs typeface="Calibri" pitchFamily="34" charset="-120"/>
-              </a:rPr>
-              <a:t>AI</a:t>
-            </a:r>
-            <a:endParaRPr lang="en-US" sz="1100" dirty="0"/>
+              <a:rPr lang="en-US" sz="2200" b="1" dirty="0">
+                <a:solidFill>
+                  <a:srgbClr val="FFB347"/>
+                </a:solidFill>
+                <a:latin typeface="Georgia" pitchFamily="34" charset="0"/>
+                <a:ea typeface="Georgia" pitchFamily="34" charset="-122"/>
+                <a:cs typeface="Georgia" pitchFamily="34" charset="-120"/>
+              </a:rPr>
+              <a:t>Discussion</a:t>
+            </a:r>
+            <a:endParaRPr lang="en-US" sz="2200" dirty="0"/>
           </a:p>
         </p:txBody>
       </p:sp>
@@ -4100,8 +4414,8 @@
         </p:nvSpPr>
         <p:spPr>
           <a:xfrm>
-            <a:off x="822960" y="4754880"/>
-            <a:ext cx="2080260" cy="640080"/>
+            <a:off x="7863840" y="5029200"/>
+            <a:ext cx="3383280" cy="868680"/>
           </a:xfrm>
           <a:prstGeom prst="rect">
             <a:avLst/>
@@ -4114,10 +4428,13 @@
           <a:lstStyle/>
           <a:p>
             <a:pPr indent="0" marL="0">
-              <a:buNone/>
-            </a:pPr>
-            <a:r>
-              <a:rPr lang="en-US" sz="1500" b="1" dirty="0">
+              <a:lnSpc>
+                <a:spcPct val="112000"/>
+              </a:lnSpc>
+              <a:buNone/>
+            </a:pPr>
+            <a:r>
+              <a:rPr lang="en-US" sz="1350" dirty="0">
                 <a:solidFill>
                   <a:srgbClr val="ECECF3"/>
                 </a:solidFill>
@@ -4125,411 +4442,15 @@
                 <a:ea typeface="Calibri" pitchFamily="34" charset="-122"/>
                 <a:cs typeface="Calibri" pitchFamily="34" charset="-120"/>
               </a:rPr>
-              <a:t>OpenRouter (Qwen3)</a:t>
-            </a:r>
-            <a:endParaRPr lang="en-US" sz="1500" dirty="0"/>
-          </a:p>
-        </p:txBody>
-      </p:sp>
-      <p:sp>
-        <p:nvSpPr>
-          <p:cNvPr id="25" name="Shape 23"/>
-          <p:cNvSpPr/>
-          <p:nvPr/>
-        </p:nvSpPr>
-        <p:spPr>
-          <a:xfrm>
-            <a:off x="3451860" y="4023360"/>
-            <a:ext cx="2446020" cy="1554480"/>
-          </a:xfrm>
-          <a:prstGeom prst="roundRect">
-            <a:avLst>
-              <a:gd name="adj" fmla="val 4706"/>
-            </a:avLst>
-          </a:prstGeom>
-          <a:solidFill>
-            <a:srgbClr val="11141D"/>
-          </a:solidFill>
-          <a:ln w="12700">
-            <a:solidFill>
-              <a:srgbClr val="2A2F3E"/>
-            </a:solidFill>
-            <a:prstDash val="solid"/>
-          </a:ln>
-          <a:effectLst>
-            <a:outerShdw sx="100000" sy="100000" kx="0" ky="0" algn="bl" rotWithShape="0" blurRad="101600" dist="38100" dir="8100000">
-              <a:srgbClr val="000000">
-                <a:alpha val="35000"/>
-              </a:srgbClr>
-            </a:outerShdw>
-          </a:effectLst>
-        </p:spPr>
-      </p:sp>
-      <p:sp>
-        <p:nvSpPr>
-          <p:cNvPr id="26" name="Shape 24"/>
-          <p:cNvSpPr/>
-          <p:nvPr/>
-        </p:nvSpPr>
-        <p:spPr>
-          <a:xfrm>
-            <a:off x="3451860" y="4023360"/>
-            <a:ext cx="2446020" cy="82296"/>
-          </a:xfrm>
-          <a:prstGeom prst="rect">
-            <a:avLst/>
-          </a:prstGeom>
-          <a:solidFill>
-            <a:srgbClr val="FFB347"/>
-          </a:solidFill>
-          <a:ln/>
-        </p:spPr>
-      </p:sp>
-      <p:sp>
-        <p:nvSpPr>
-          <p:cNvPr id="27" name="Text 25"/>
-          <p:cNvSpPr/>
-          <p:nvPr/>
-        </p:nvSpPr>
-        <p:spPr>
-          <a:xfrm>
-            <a:off x="3634740" y="4343400"/>
-            <a:ext cx="2080260" cy="365760"/>
-          </a:xfrm>
-          <a:prstGeom prst="rect">
-            <a:avLst/>
-          </a:prstGeom>
-          <a:noFill/>
-          <a:ln/>
-        </p:spPr>
-        <p:txBody>
-          <a:bodyPr wrap="square" lIns="0" tIns="0" rIns="0" bIns="0" rtlCol="0" anchor="ctr"/>
-          <a:lstStyle/>
-          <a:p>
-            <a:pPr indent="0" marL="0">
-              <a:buNone/>
-            </a:pPr>
-            <a:r>
-              <a:rPr lang="en-US" sz="1100" b="1" spc="100" kern="0" dirty="0">
-                <a:solidFill>
-                  <a:srgbClr val="9AA0B4"/>
-                </a:solidFill>
-                <a:latin typeface="Calibri" pitchFamily="34" charset="0"/>
-                <a:ea typeface="Calibri" pitchFamily="34" charset="-122"/>
-                <a:cs typeface="Calibri" pitchFamily="34" charset="-120"/>
-              </a:rPr>
-              <a:t>MOVIES</a:t>
-            </a:r>
-            <a:endParaRPr lang="en-US" sz="1100" dirty="0"/>
-          </a:p>
-        </p:txBody>
-      </p:sp>
-      <p:sp>
-        <p:nvSpPr>
-          <p:cNvPr id="28" name="Text 26"/>
-          <p:cNvSpPr/>
-          <p:nvPr/>
-        </p:nvSpPr>
-        <p:spPr>
-          <a:xfrm>
-            <a:off x="3634740" y="4754880"/>
-            <a:ext cx="2080260" cy="640080"/>
-          </a:xfrm>
-          <a:prstGeom prst="rect">
-            <a:avLst/>
-          </a:prstGeom>
-          <a:noFill/>
-          <a:ln/>
-        </p:spPr>
-        <p:txBody>
-          <a:bodyPr wrap="square" lIns="0" tIns="0" rIns="0" bIns="0" rtlCol="0" anchor="ctr"/>
-          <a:lstStyle/>
-          <a:p>
-            <a:pPr indent="0" marL="0">
-              <a:buNone/>
-            </a:pPr>
-            <a:r>
-              <a:rPr lang="en-US" sz="1500" b="1" dirty="0">
-                <a:solidFill>
-                  <a:srgbClr val="ECECF3"/>
-                </a:solidFill>
-                <a:latin typeface="Calibri" pitchFamily="34" charset="0"/>
-                <a:ea typeface="Calibri" pitchFamily="34" charset="-122"/>
-                <a:cs typeface="Calibri" pitchFamily="34" charset="-120"/>
-              </a:rPr>
-              <a:t>TMDB open dataset</a:t>
-            </a:r>
-            <a:endParaRPr lang="en-US" sz="1500" dirty="0"/>
-          </a:p>
-        </p:txBody>
-      </p:sp>
-      <p:sp>
-        <p:nvSpPr>
-          <p:cNvPr id="29" name="Shape 27"/>
-          <p:cNvSpPr/>
-          <p:nvPr/>
-        </p:nvSpPr>
-        <p:spPr>
-          <a:xfrm>
-            <a:off x="6263640" y="4023360"/>
-            <a:ext cx="2446020" cy="1554480"/>
-          </a:xfrm>
-          <a:prstGeom prst="roundRect">
-            <a:avLst>
-              <a:gd name="adj" fmla="val 4706"/>
-            </a:avLst>
-          </a:prstGeom>
-          <a:solidFill>
-            <a:srgbClr val="11141D"/>
-          </a:solidFill>
-          <a:ln w="12700">
-            <a:solidFill>
-              <a:srgbClr val="2A2F3E"/>
-            </a:solidFill>
-            <a:prstDash val="solid"/>
-          </a:ln>
-          <a:effectLst>
-            <a:outerShdw sx="100000" sy="100000" kx="0" ky="0" algn="bl" rotWithShape="0" blurRad="101600" dist="38100" dir="8100000">
-              <a:srgbClr val="000000">
-                <a:alpha val="35000"/>
-              </a:srgbClr>
-            </a:outerShdw>
-          </a:effectLst>
-        </p:spPr>
-      </p:sp>
-      <p:sp>
-        <p:nvSpPr>
-          <p:cNvPr id="30" name="Shape 28"/>
-          <p:cNvSpPr/>
-          <p:nvPr/>
-        </p:nvSpPr>
-        <p:spPr>
-          <a:xfrm>
-            <a:off x="6263640" y="4023360"/>
-            <a:ext cx="2446020" cy="82296"/>
-          </a:xfrm>
-          <a:prstGeom prst="rect">
-            <a:avLst/>
-          </a:prstGeom>
-          <a:solidFill>
-            <a:srgbClr val="FFB347"/>
-          </a:solidFill>
-          <a:ln/>
-        </p:spPr>
-      </p:sp>
-      <p:sp>
-        <p:nvSpPr>
-          <p:cNvPr id="31" name="Text 29"/>
-          <p:cNvSpPr/>
-          <p:nvPr/>
-        </p:nvSpPr>
-        <p:spPr>
-          <a:xfrm>
-            <a:off x="6446520" y="4343400"/>
-            <a:ext cx="2080260" cy="365760"/>
-          </a:xfrm>
-          <a:prstGeom prst="rect">
-            <a:avLst/>
-          </a:prstGeom>
-          <a:noFill/>
-          <a:ln/>
-        </p:spPr>
-        <p:txBody>
-          <a:bodyPr wrap="square" lIns="0" tIns="0" rIns="0" bIns="0" rtlCol="0" anchor="ctr"/>
-          <a:lstStyle/>
-          <a:p>
-            <a:pPr indent="0" marL="0">
-              <a:buNone/>
-            </a:pPr>
-            <a:r>
-              <a:rPr lang="en-US" sz="1100" b="1" spc="100" kern="0" dirty="0">
-                <a:solidFill>
-                  <a:srgbClr val="9AA0B4"/>
-                </a:solidFill>
-                <a:latin typeface="Calibri" pitchFamily="34" charset="0"/>
-                <a:ea typeface="Calibri" pitchFamily="34" charset="-122"/>
-                <a:cs typeface="Calibri" pitchFamily="34" charset="-120"/>
-              </a:rPr>
-              <a:t>GAMES</a:t>
-            </a:r>
-            <a:endParaRPr lang="en-US" sz="1100" dirty="0"/>
-          </a:p>
-        </p:txBody>
-      </p:sp>
-      <p:sp>
-        <p:nvSpPr>
-          <p:cNvPr id="32" name="Text 30"/>
-          <p:cNvSpPr/>
-          <p:nvPr/>
-        </p:nvSpPr>
-        <p:spPr>
-          <a:xfrm>
-            <a:off x="6446520" y="4754880"/>
-            <a:ext cx="2080260" cy="640080"/>
-          </a:xfrm>
-          <a:prstGeom prst="rect">
-            <a:avLst/>
-          </a:prstGeom>
-          <a:noFill/>
-          <a:ln/>
-        </p:spPr>
-        <p:txBody>
-          <a:bodyPr wrap="square" lIns="0" tIns="0" rIns="0" bIns="0" rtlCol="0" anchor="ctr"/>
-          <a:lstStyle/>
-          <a:p>
-            <a:pPr indent="0" marL="0">
-              <a:buNone/>
-            </a:pPr>
-            <a:r>
-              <a:rPr lang="en-US" sz="1500" b="1" dirty="0">
-                <a:solidFill>
-                  <a:srgbClr val="ECECF3"/>
-                </a:solidFill>
-                <a:latin typeface="Calibri" pitchFamily="34" charset="0"/>
-                <a:ea typeface="Calibri" pitchFamily="34" charset="-122"/>
-                <a:cs typeface="Calibri" pitchFamily="34" charset="-120"/>
-              </a:rPr>
-              <a:t>RAWG open dataset</a:t>
-            </a:r>
-            <a:endParaRPr lang="en-US" sz="1500" dirty="0"/>
-          </a:p>
-        </p:txBody>
-      </p:sp>
-      <p:sp>
-        <p:nvSpPr>
-          <p:cNvPr id="33" name="Shape 31"/>
-          <p:cNvSpPr/>
-          <p:nvPr/>
-        </p:nvSpPr>
-        <p:spPr>
-          <a:xfrm>
-            <a:off x="9075420" y="4023360"/>
-            <a:ext cx="2446020" cy="1554480"/>
-          </a:xfrm>
-          <a:prstGeom prst="roundRect">
-            <a:avLst>
-              <a:gd name="adj" fmla="val 4706"/>
-            </a:avLst>
-          </a:prstGeom>
-          <a:solidFill>
-            <a:srgbClr val="11141D"/>
-          </a:solidFill>
-          <a:ln w="12700">
-            <a:solidFill>
-              <a:srgbClr val="2A2F3E"/>
-            </a:solidFill>
-            <a:prstDash val="solid"/>
-          </a:ln>
-          <a:effectLst>
-            <a:outerShdw sx="100000" sy="100000" kx="0" ky="0" algn="bl" rotWithShape="0" blurRad="101600" dist="38100" dir="8100000">
-              <a:srgbClr val="000000">
-                <a:alpha val="35000"/>
-              </a:srgbClr>
-            </a:outerShdw>
-          </a:effectLst>
-        </p:spPr>
-      </p:sp>
-      <p:sp>
-        <p:nvSpPr>
-          <p:cNvPr id="34" name="Shape 32"/>
-          <p:cNvSpPr/>
-          <p:nvPr/>
-        </p:nvSpPr>
-        <p:spPr>
-          <a:xfrm>
-            <a:off x="9075420" y="4023360"/>
-            <a:ext cx="2446020" cy="82296"/>
-          </a:xfrm>
-          <a:prstGeom prst="rect">
-            <a:avLst/>
-          </a:prstGeom>
-          <a:solidFill>
-            <a:srgbClr val="FFB347"/>
-          </a:solidFill>
-          <a:ln/>
-        </p:spPr>
-      </p:sp>
-      <p:sp>
-        <p:nvSpPr>
-          <p:cNvPr id="35" name="Text 33"/>
-          <p:cNvSpPr/>
-          <p:nvPr/>
-        </p:nvSpPr>
-        <p:spPr>
-          <a:xfrm>
-            <a:off x="9258300" y="4343400"/>
-            <a:ext cx="2080260" cy="365760"/>
-          </a:xfrm>
-          <a:prstGeom prst="rect">
-            <a:avLst/>
-          </a:prstGeom>
-          <a:noFill/>
-          <a:ln/>
-        </p:spPr>
-        <p:txBody>
-          <a:bodyPr wrap="square" lIns="0" tIns="0" rIns="0" bIns="0" rtlCol="0" anchor="ctr"/>
-          <a:lstStyle/>
-          <a:p>
-            <a:pPr indent="0" marL="0">
-              <a:buNone/>
-            </a:pPr>
-            <a:r>
-              <a:rPr lang="en-US" sz="1100" b="1" spc="100" kern="0" dirty="0">
-                <a:solidFill>
-                  <a:srgbClr val="9AA0B4"/>
-                </a:solidFill>
-                <a:latin typeface="Calibri" pitchFamily="34" charset="0"/>
-                <a:ea typeface="Calibri" pitchFamily="34" charset="-122"/>
-                <a:cs typeface="Calibri" pitchFamily="34" charset="-120"/>
-              </a:rPr>
-              <a:t>VERSION CONTROL</a:t>
-            </a:r>
-            <a:endParaRPr lang="en-US" sz="1100" dirty="0"/>
-          </a:p>
-        </p:txBody>
-      </p:sp>
-      <p:sp>
-        <p:nvSpPr>
-          <p:cNvPr id="36" name="Text 34"/>
-          <p:cNvSpPr/>
-          <p:nvPr/>
-        </p:nvSpPr>
-        <p:spPr>
-          <a:xfrm>
-            <a:off x="9258300" y="4754880"/>
-            <a:ext cx="2080260" cy="640080"/>
-          </a:xfrm>
-          <a:prstGeom prst="rect">
-            <a:avLst/>
-          </a:prstGeom>
-          <a:noFill/>
-          <a:ln/>
-        </p:spPr>
-        <p:txBody>
-          <a:bodyPr wrap="square" lIns="0" tIns="0" rIns="0" bIns="0" rtlCol="0" anchor="ctr"/>
-          <a:lstStyle/>
-          <a:p>
-            <a:pPr indent="0" marL="0">
-              <a:buNone/>
-            </a:pPr>
-            <a:r>
-              <a:rPr lang="en-US" sz="1500" b="1" dirty="0">
-                <a:solidFill>
-                  <a:srgbClr val="ECECF3"/>
-                </a:solidFill>
-                <a:latin typeface="Calibri" pitchFamily="34" charset="0"/>
-                <a:ea typeface="Calibri" pitchFamily="34" charset="-122"/>
-                <a:cs typeface="Calibri" pitchFamily="34" charset="-120"/>
-              </a:rPr>
-              <a:t>Git + GitHub</a:t>
-            </a:r>
-            <a:endParaRPr lang="en-US" sz="1500" dirty="0"/>
-          </a:p>
-        </p:txBody>
-      </p:sp>
-      <p:sp>
-        <p:nvSpPr>
-          <p:cNvPr id="37" name="Text 35"/>
+              <a:t>Search any film for AI analysis: cast, theme, epic moments, and discussion questions.</a:t>
+            </a:r>
+            <a:endParaRPr lang="en-US" sz="1350" dirty="0"/>
+          </a:p>
+        </p:txBody>
+      </p:sp>
+      <p:sp>
+        <p:nvSpPr>
+          <p:cNvPr id="25" name="Text 23"/>
           <p:cNvSpPr/>
           <p:nvPr/>
         </p:nvSpPr>
@@ -4582,7 +4503,7 @@
       </p:sp>
       <p:sp>
         <p:nvSpPr>
-          <p:cNvPr id="38" name="Text 36"/>
+          <p:cNvPr id="26" name="Text 24"/>
           <p:cNvSpPr/>
           <p:nvPr/>
         </p:nvSpPr>
@@ -4659,6 +4580,3307 @@
         </p:nvSpPr>
         <p:spPr>
           <a:xfrm>
+            <a:off x="640080" y="566928"/>
+            <a:ext cx="146304" cy="146304"/>
+          </a:xfrm>
+          <a:prstGeom prst="ellipse">
+            <a:avLst/>
+          </a:prstGeom>
+          <a:solidFill>
+            <a:srgbClr val="FFB347"/>
+          </a:solidFill>
+          <a:ln/>
+        </p:spPr>
+      </p:sp>
+      <p:sp>
+        <p:nvSpPr>
+          <p:cNvPr id="3" name="Text 1"/>
+          <p:cNvSpPr/>
+          <p:nvPr/>
+        </p:nvSpPr>
+        <p:spPr>
+          <a:xfrm>
+            <a:off x="896112" y="457200"/>
+            <a:ext cx="9144000" cy="365760"/>
+          </a:xfrm>
+          <a:prstGeom prst="rect">
+            <a:avLst/>
+          </a:prstGeom>
+          <a:noFill/>
+          <a:ln/>
+        </p:spPr>
+        <p:txBody>
+          <a:bodyPr wrap="square" lIns="0" tIns="0" rIns="0" bIns="0" rtlCol="0" anchor="ctr"/>
+          <a:lstStyle/>
+          <a:p>
+            <a:pPr indent="0" marL="0">
+              <a:buNone/>
+            </a:pPr>
+            <a:r>
+              <a:rPr lang="en-US" sz="1200" b="1" spc="300" kern="0" dirty="0">
+                <a:solidFill>
+                  <a:srgbClr val="FFB347"/>
+                </a:solidFill>
+                <a:latin typeface="Calibri" pitchFamily="34" charset="0"/>
+                <a:ea typeface="Calibri" pitchFamily="34" charset="-122"/>
+                <a:cs typeface="Calibri" pitchFamily="34" charset="-120"/>
+              </a:rPr>
+              <a:t>RELIABILITY</a:t>
+            </a:r>
+            <a:endParaRPr lang="en-US" sz="1200" dirty="0"/>
+          </a:p>
+        </p:txBody>
+      </p:sp>
+      <p:sp>
+        <p:nvSpPr>
+          <p:cNvPr id="4" name="Text 2"/>
+          <p:cNvSpPr/>
+          <p:nvPr/>
+        </p:nvSpPr>
+        <p:spPr>
+          <a:xfrm>
+            <a:off x="640080" y="777240"/>
+            <a:ext cx="10881360" cy="731520"/>
+          </a:xfrm>
+          <a:prstGeom prst="rect">
+            <a:avLst/>
+          </a:prstGeom>
+          <a:noFill/>
+          <a:ln/>
+        </p:spPr>
+        <p:txBody>
+          <a:bodyPr wrap="square" lIns="0" tIns="0" rIns="0" bIns="0" rtlCol="0" anchor="ctr"/>
+          <a:lstStyle/>
+          <a:p>
+            <a:pPr indent="0" marL="0">
+              <a:buNone/>
+            </a:pPr>
+            <a:r>
+              <a:rPr lang="en-US" sz="3200" b="1" dirty="0">
+                <a:solidFill>
+                  <a:srgbClr val="ECECF3"/>
+                </a:solidFill>
+                <a:latin typeface="Georgia" pitchFamily="34" charset="0"/>
+                <a:ea typeface="Georgia" pitchFamily="34" charset="-122"/>
+                <a:cs typeface="Georgia" pitchFamily="34" charset="-120"/>
+              </a:rPr>
+              <a:t>Never crash in a live demo</a:t>
+            </a:r>
+            <a:endParaRPr lang="en-US" sz="3200" dirty="0"/>
+          </a:p>
+        </p:txBody>
+      </p:sp>
+      <p:sp>
+        <p:nvSpPr>
+          <p:cNvPr id="5" name="Text 3"/>
+          <p:cNvSpPr/>
+          <p:nvPr/>
+        </p:nvSpPr>
+        <p:spPr>
+          <a:xfrm>
+            <a:off x="640080" y="1554480"/>
+            <a:ext cx="10881360" cy="365760"/>
+          </a:xfrm>
+          <a:prstGeom prst="rect">
+            <a:avLst/>
+          </a:prstGeom>
+          <a:noFill/>
+          <a:ln/>
+        </p:spPr>
+        <p:txBody>
+          <a:bodyPr wrap="square" lIns="0" tIns="0" rIns="0" bIns="0" rtlCol="0" anchor="ctr"/>
+          <a:lstStyle/>
+          <a:p>
+            <a:pPr indent="0" marL="0">
+              <a:buNone/>
+            </a:pPr>
+            <a:r>
+              <a:rPr lang="en-US" sz="1400" dirty="0">
+                <a:solidFill>
+                  <a:srgbClr val="9AA0B4"/>
+                </a:solidFill>
+                <a:latin typeface="Calibri" pitchFamily="34" charset="0"/>
+                <a:ea typeface="Calibri" pitchFamily="34" charset="-122"/>
+                <a:cs typeface="Calibri" pitchFamily="34" charset="-120"/>
+              </a:rPr>
+              <a:t>Free AI models rate-limit and fail. CINEMATCH degrades gracefully at every layer.</a:t>
+            </a:r>
+            <a:endParaRPr lang="en-US" sz="1400" dirty="0"/>
+          </a:p>
+        </p:txBody>
+      </p:sp>
+      <p:sp>
+        <p:nvSpPr>
+          <p:cNvPr id="6" name="Shape 4"/>
+          <p:cNvSpPr/>
+          <p:nvPr/>
+        </p:nvSpPr>
+        <p:spPr>
+          <a:xfrm>
+            <a:off x="640080" y="2103120"/>
+            <a:ext cx="2468880" cy="868680"/>
+          </a:xfrm>
+          <a:prstGeom prst="roundRect">
+            <a:avLst>
+              <a:gd name="adj" fmla="val 8421"/>
+            </a:avLst>
+          </a:prstGeom>
+          <a:solidFill>
+            <a:srgbClr val="11141D"/>
+          </a:solidFill>
+          <a:ln w="12700">
+            <a:solidFill>
+              <a:srgbClr val="2A2F3E"/>
+            </a:solidFill>
+            <a:prstDash val="solid"/>
+          </a:ln>
+          <a:effectLst>
+            <a:outerShdw sx="100000" sy="100000" kx="0" ky="0" algn="bl" rotWithShape="0" blurRad="101600" dist="38100" dir="8100000">
+              <a:srgbClr val="000000">
+                <a:alpha val="35000"/>
+              </a:srgbClr>
+            </a:outerShdw>
+          </a:effectLst>
+        </p:spPr>
+      </p:sp>
+      <p:sp>
+        <p:nvSpPr>
+          <p:cNvPr id="7" name="Text 5"/>
+          <p:cNvSpPr/>
+          <p:nvPr/>
+        </p:nvSpPr>
+        <p:spPr>
+          <a:xfrm>
+            <a:off x="640080" y="2103120"/>
+            <a:ext cx="2468880" cy="868680"/>
+          </a:xfrm>
+          <a:prstGeom prst="rect">
+            <a:avLst/>
+          </a:prstGeom>
+          <a:noFill/>
+          <a:ln/>
+        </p:spPr>
+        <p:txBody>
+          <a:bodyPr wrap="square" lIns="0" tIns="0" rIns="0" bIns="0" rtlCol="0" anchor="ctr"/>
+          <a:lstStyle/>
+          <a:p>
+            <a:pPr algn="ctr" indent="0" marL="0">
+              <a:buNone/>
+            </a:pPr>
+            <a:r>
+              <a:rPr lang="en-US" sz="1400" b="1" dirty="0">
+                <a:solidFill>
+                  <a:srgbClr val="ECECF3"/>
+                </a:solidFill>
+                <a:latin typeface="Calibri" pitchFamily="34" charset="0"/>
+                <a:ea typeface="Calibri" pitchFamily="34" charset="-122"/>
+                <a:cs typeface="Calibri" pitchFamily="34" charset="-120"/>
+              </a:rPr>
+              <a:t>Qwen3</a:t>
+            </a:r>
+            <a:endParaRPr lang="en-US" sz="1400" dirty="0"/>
+          </a:p>
+        </p:txBody>
+      </p:sp>
+      <p:sp>
+        <p:nvSpPr>
+          <p:cNvPr id="8" name="Text 6"/>
+          <p:cNvSpPr/>
+          <p:nvPr/>
+        </p:nvSpPr>
+        <p:spPr>
+          <a:xfrm>
+            <a:off x="3063240" y="2103120"/>
+            <a:ext cx="457200" cy="868680"/>
+          </a:xfrm>
+          <a:prstGeom prst="rect">
+            <a:avLst/>
+          </a:prstGeom>
+          <a:noFill/>
+          <a:ln/>
+        </p:spPr>
+        <p:txBody>
+          <a:bodyPr wrap="square" lIns="0" tIns="0" rIns="0" bIns="0" rtlCol="0" anchor="ctr"/>
+          <a:lstStyle/>
+          <a:p>
+            <a:pPr algn="ctr" indent="0" marL="0">
+              <a:buNone/>
+            </a:pPr>
+            <a:r>
+              <a:rPr lang="en-US" sz="2200" b="1" dirty="0">
+                <a:solidFill>
+                  <a:srgbClr val="FFB347"/>
+                </a:solidFill>
+                <a:latin typeface="Calibri" pitchFamily="34" charset="0"/>
+                <a:ea typeface="Calibri" pitchFamily="34" charset="-122"/>
+                <a:cs typeface="Calibri" pitchFamily="34" charset="-120"/>
+              </a:rPr>
+              <a:t>→</a:t>
+            </a:r>
+            <a:endParaRPr lang="en-US" sz="2200" dirty="0"/>
+          </a:p>
+        </p:txBody>
+      </p:sp>
+      <p:sp>
+        <p:nvSpPr>
+          <p:cNvPr id="9" name="Shape 7"/>
+          <p:cNvSpPr/>
+          <p:nvPr/>
+        </p:nvSpPr>
+        <p:spPr>
+          <a:xfrm>
+            <a:off x="3520440" y="2103120"/>
+            <a:ext cx="2468880" cy="868680"/>
+          </a:xfrm>
+          <a:prstGeom prst="roundRect">
+            <a:avLst>
+              <a:gd name="adj" fmla="val 8421"/>
+            </a:avLst>
+          </a:prstGeom>
+          <a:solidFill>
+            <a:srgbClr val="11141D"/>
+          </a:solidFill>
+          <a:ln w="12700">
+            <a:solidFill>
+              <a:srgbClr val="2A2F3E"/>
+            </a:solidFill>
+            <a:prstDash val="solid"/>
+          </a:ln>
+          <a:effectLst>
+            <a:outerShdw sx="100000" sy="100000" kx="0" ky="0" algn="bl" rotWithShape="0" blurRad="101600" dist="38100" dir="8100000">
+              <a:srgbClr val="000000">
+                <a:alpha val="35000"/>
+              </a:srgbClr>
+            </a:outerShdw>
+          </a:effectLst>
+        </p:spPr>
+      </p:sp>
+      <p:sp>
+        <p:nvSpPr>
+          <p:cNvPr id="10" name="Text 8"/>
+          <p:cNvSpPr/>
+          <p:nvPr/>
+        </p:nvSpPr>
+        <p:spPr>
+          <a:xfrm>
+            <a:off x="3520440" y="2103120"/>
+            <a:ext cx="2468880" cy="868680"/>
+          </a:xfrm>
+          <a:prstGeom prst="rect">
+            <a:avLst/>
+          </a:prstGeom>
+          <a:noFill/>
+          <a:ln/>
+        </p:spPr>
+        <p:txBody>
+          <a:bodyPr wrap="square" lIns="0" tIns="0" rIns="0" bIns="0" rtlCol="0" anchor="ctr"/>
+          <a:lstStyle/>
+          <a:p>
+            <a:pPr algn="ctr" indent="0" marL="0">
+              <a:buNone/>
+            </a:pPr>
+            <a:r>
+              <a:rPr lang="en-US" sz="1400" b="1" dirty="0">
+                <a:solidFill>
+                  <a:srgbClr val="ECECF3"/>
+                </a:solidFill>
+                <a:latin typeface="Calibri" pitchFamily="34" charset="0"/>
+                <a:ea typeface="Calibri" pitchFamily="34" charset="-122"/>
+                <a:cs typeface="Calibri" pitchFamily="34" charset="-120"/>
+              </a:rPr>
+              <a:t>Llama-3.3-70B</a:t>
+            </a:r>
+            <a:endParaRPr lang="en-US" sz="1400" dirty="0"/>
+          </a:p>
+        </p:txBody>
+      </p:sp>
+      <p:sp>
+        <p:nvSpPr>
+          <p:cNvPr id="11" name="Text 9"/>
+          <p:cNvSpPr/>
+          <p:nvPr/>
+        </p:nvSpPr>
+        <p:spPr>
+          <a:xfrm>
+            <a:off x="5943600" y="2103120"/>
+            <a:ext cx="457200" cy="868680"/>
+          </a:xfrm>
+          <a:prstGeom prst="rect">
+            <a:avLst/>
+          </a:prstGeom>
+          <a:noFill/>
+          <a:ln/>
+        </p:spPr>
+        <p:txBody>
+          <a:bodyPr wrap="square" lIns="0" tIns="0" rIns="0" bIns="0" rtlCol="0" anchor="ctr"/>
+          <a:lstStyle/>
+          <a:p>
+            <a:pPr algn="ctr" indent="0" marL="0">
+              <a:buNone/>
+            </a:pPr>
+            <a:r>
+              <a:rPr lang="en-US" sz="2200" b="1" dirty="0">
+                <a:solidFill>
+                  <a:srgbClr val="FFB347"/>
+                </a:solidFill>
+                <a:latin typeface="Calibri" pitchFamily="34" charset="0"/>
+                <a:ea typeface="Calibri" pitchFamily="34" charset="-122"/>
+                <a:cs typeface="Calibri" pitchFamily="34" charset="-120"/>
+              </a:rPr>
+              <a:t>→</a:t>
+            </a:r>
+            <a:endParaRPr lang="en-US" sz="2200" dirty="0"/>
+          </a:p>
+        </p:txBody>
+      </p:sp>
+      <p:sp>
+        <p:nvSpPr>
+          <p:cNvPr id="12" name="Shape 10"/>
+          <p:cNvSpPr/>
+          <p:nvPr/>
+        </p:nvSpPr>
+        <p:spPr>
+          <a:xfrm>
+            <a:off x="6400800" y="2103120"/>
+            <a:ext cx="2468880" cy="868680"/>
+          </a:xfrm>
+          <a:prstGeom prst="roundRect">
+            <a:avLst>
+              <a:gd name="adj" fmla="val 8421"/>
+            </a:avLst>
+          </a:prstGeom>
+          <a:solidFill>
+            <a:srgbClr val="11141D"/>
+          </a:solidFill>
+          <a:ln w="12700">
+            <a:solidFill>
+              <a:srgbClr val="2A2F3E"/>
+            </a:solidFill>
+            <a:prstDash val="solid"/>
+          </a:ln>
+          <a:effectLst>
+            <a:outerShdw sx="100000" sy="100000" kx="0" ky="0" algn="bl" rotWithShape="0" blurRad="101600" dist="38100" dir="8100000">
+              <a:srgbClr val="000000">
+                <a:alpha val="35000"/>
+              </a:srgbClr>
+            </a:outerShdw>
+          </a:effectLst>
+        </p:spPr>
+      </p:sp>
+      <p:sp>
+        <p:nvSpPr>
+          <p:cNvPr id="13" name="Text 11"/>
+          <p:cNvSpPr/>
+          <p:nvPr/>
+        </p:nvSpPr>
+        <p:spPr>
+          <a:xfrm>
+            <a:off x="6400800" y="2103120"/>
+            <a:ext cx="2468880" cy="868680"/>
+          </a:xfrm>
+          <a:prstGeom prst="rect">
+            <a:avLst/>
+          </a:prstGeom>
+          <a:noFill/>
+          <a:ln/>
+        </p:spPr>
+        <p:txBody>
+          <a:bodyPr wrap="square" lIns="0" tIns="0" rIns="0" bIns="0" rtlCol="0" anchor="ctr"/>
+          <a:lstStyle/>
+          <a:p>
+            <a:pPr algn="ctr" indent="0" marL="0">
+              <a:buNone/>
+            </a:pPr>
+            <a:r>
+              <a:rPr lang="en-US" sz="1400" b="1" dirty="0">
+                <a:solidFill>
+                  <a:srgbClr val="ECECF3"/>
+                </a:solidFill>
+                <a:latin typeface="Calibri" pitchFamily="34" charset="0"/>
+                <a:ea typeface="Calibri" pitchFamily="34" charset="-122"/>
+                <a:cs typeface="Calibri" pitchFamily="34" charset="-120"/>
+              </a:rPr>
+              <a:t>GPT-OSS-120B</a:t>
+            </a:r>
+            <a:endParaRPr lang="en-US" sz="1400" dirty="0"/>
+          </a:p>
+        </p:txBody>
+      </p:sp>
+      <p:sp>
+        <p:nvSpPr>
+          <p:cNvPr id="14" name="Text 12"/>
+          <p:cNvSpPr/>
+          <p:nvPr/>
+        </p:nvSpPr>
+        <p:spPr>
+          <a:xfrm>
+            <a:off x="8823960" y="2103120"/>
+            <a:ext cx="457200" cy="868680"/>
+          </a:xfrm>
+          <a:prstGeom prst="rect">
+            <a:avLst/>
+          </a:prstGeom>
+          <a:noFill/>
+          <a:ln/>
+        </p:spPr>
+        <p:txBody>
+          <a:bodyPr wrap="square" lIns="0" tIns="0" rIns="0" bIns="0" rtlCol="0" anchor="ctr"/>
+          <a:lstStyle/>
+          <a:p>
+            <a:pPr algn="ctr" indent="0" marL="0">
+              <a:buNone/>
+            </a:pPr>
+            <a:r>
+              <a:rPr lang="en-US" sz="2200" b="1" dirty="0">
+                <a:solidFill>
+                  <a:srgbClr val="FFB347"/>
+                </a:solidFill>
+                <a:latin typeface="Calibri" pitchFamily="34" charset="0"/>
+                <a:ea typeface="Calibri" pitchFamily="34" charset="-122"/>
+                <a:cs typeface="Calibri" pitchFamily="34" charset="-120"/>
+              </a:rPr>
+              <a:t>→</a:t>
+            </a:r>
+            <a:endParaRPr lang="en-US" sz="2200" dirty="0"/>
+          </a:p>
+        </p:txBody>
+      </p:sp>
+      <p:sp>
+        <p:nvSpPr>
+          <p:cNvPr id="15" name="Shape 13"/>
+          <p:cNvSpPr/>
+          <p:nvPr/>
+        </p:nvSpPr>
+        <p:spPr>
+          <a:xfrm>
+            <a:off x="9281160" y="2103120"/>
+            <a:ext cx="2468880" cy="868680"/>
+          </a:xfrm>
+          <a:prstGeom prst="roundRect">
+            <a:avLst>
+              <a:gd name="adj" fmla="val 8421"/>
+            </a:avLst>
+          </a:prstGeom>
+          <a:solidFill>
+            <a:srgbClr val="1A1D27"/>
+          </a:solidFill>
+          <a:ln w="12700">
+            <a:solidFill>
+              <a:srgbClr val="2A2F3E"/>
+            </a:solidFill>
+            <a:prstDash val="solid"/>
+          </a:ln>
+          <a:effectLst>
+            <a:outerShdw sx="100000" sy="100000" kx="0" ky="0" algn="bl" rotWithShape="0" blurRad="101600" dist="38100" dir="8100000">
+              <a:srgbClr val="000000">
+                <a:alpha val="35000"/>
+              </a:srgbClr>
+            </a:outerShdw>
+          </a:effectLst>
+        </p:spPr>
+      </p:sp>
+      <p:sp>
+        <p:nvSpPr>
+          <p:cNvPr id="16" name="Text 14"/>
+          <p:cNvSpPr/>
+          <p:nvPr/>
+        </p:nvSpPr>
+        <p:spPr>
+          <a:xfrm>
+            <a:off x="9281160" y="2103120"/>
+            <a:ext cx="2468880" cy="868680"/>
+          </a:xfrm>
+          <a:prstGeom prst="rect">
+            <a:avLst/>
+          </a:prstGeom>
+          <a:noFill/>
+          <a:ln/>
+        </p:spPr>
+        <p:txBody>
+          <a:bodyPr wrap="square" lIns="0" tIns="0" rIns="0" bIns="0" rtlCol="0" anchor="ctr"/>
+          <a:lstStyle/>
+          <a:p>
+            <a:pPr algn="ctr" indent="0" marL="0">
+              <a:buNone/>
+            </a:pPr>
+            <a:r>
+              <a:rPr lang="en-US" sz="1400" b="1" dirty="0">
+                <a:solidFill>
+                  <a:srgbClr val="FFB347"/>
+                </a:solidFill>
+                <a:latin typeface="Calibri" pitchFamily="34" charset="0"/>
+                <a:ea typeface="Calibri" pitchFamily="34" charset="-122"/>
+                <a:cs typeface="Calibri" pitchFamily="34" charset="-120"/>
+              </a:rPr>
+              <a:t>Keyword fallback</a:t>
+            </a:r>
+            <a:endParaRPr lang="en-US" sz="1400" dirty="0"/>
+          </a:p>
+        </p:txBody>
+      </p:sp>
+      <p:sp>
+        <p:nvSpPr>
+          <p:cNvPr id="17" name="Shape 15"/>
+          <p:cNvSpPr/>
+          <p:nvPr/>
+        </p:nvSpPr>
+        <p:spPr>
+          <a:xfrm>
+            <a:off x="640080" y="3383280"/>
+            <a:ext cx="3322320" cy="2286000"/>
+          </a:xfrm>
+          <a:prstGeom prst="roundRect">
+            <a:avLst>
+              <a:gd name="adj" fmla="val 3200"/>
+            </a:avLst>
+          </a:prstGeom>
+          <a:solidFill>
+            <a:srgbClr val="1A1D27"/>
+          </a:solidFill>
+          <a:ln w="12700">
+            <a:solidFill>
+              <a:srgbClr val="2A2F3E"/>
+            </a:solidFill>
+            <a:prstDash val="solid"/>
+          </a:ln>
+          <a:effectLst>
+            <a:outerShdw sx="100000" sy="100000" kx="0" ky="0" algn="bl" rotWithShape="0" blurRad="101600" dist="38100" dir="8100000">
+              <a:srgbClr val="000000">
+                <a:alpha val="35000"/>
+              </a:srgbClr>
+            </a:outerShdw>
+          </a:effectLst>
+        </p:spPr>
+      </p:sp>
+      <p:sp>
+        <p:nvSpPr>
+          <p:cNvPr id="18" name="Text 16"/>
+          <p:cNvSpPr/>
+          <p:nvPr/>
+        </p:nvSpPr>
+        <p:spPr>
+          <a:xfrm>
+            <a:off x="914400" y="3611880"/>
+            <a:ext cx="822960" cy="731520"/>
+          </a:xfrm>
+          <a:prstGeom prst="rect">
+            <a:avLst/>
+          </a:prstGeom>
+          <a:noFill/>
+          <a:ln/>
+        </p:spPr>
+        <p:txBody>
+          <a:bodyPr wrap="square" lIns="0" tIns="0" rIns="0" bIns="0" rtlCol="0" anchor="ctr"/>
+          <a:lstStyle/>
+          <a:p>
+            <a:pPr algn="ctr" indent="0" marL="0">
+              <a:buNone/>
+            </a:pPr>
+            <a:r>
+              <a:rPr lang="en-US" sz="2600" dirty="0">
+                <a:solidFill>
+                  <a:srgbClr val="000000"/>
+                </a:solidFill>
+              </a:rPr>
+              <a:t>🔁</a:t>
+            </a:r>
+            <a:endParaRPr lang="en-US" sz="2600" dirty="0"/>
+          </a:p>
+        </p:txBody>
+      </p:sp>
+      <p:sp>
+        <p:nvSpPr>
+          <p:cNvPr id="19" name="Text 17"/>
+          <p:cNvSpPr/>
+          <p:nvPr/>
+        </p:nvSpPr>
+        <p:spPr>
+          <a:xfrm>
+            <a:off x="914400" y="4343400"/>
+            <a:ext cx="2773680" cy="457200"/>
+          </a:xfrm>
+          <a:prstGeom prst="rect">
+            <a:avLst/>
+          </a:prstGeom>
+          <a:noFill/>
+          <a:ln/>
+        </p:spPr>
+        <p:txBody>
+          <a:bodyPr wrap="square" lIns="0" tIns="0" rIns="0" bIns="0" rtlCol="0" anchor="ctr"/>
+          <a:lstStyle/>
+          <a:p>
+            <a:pPr indent="0" marL="0">
+              <a:buNone/>
+            </a:pPr>
+            <a:r>
+              <a:rPr lang="en-US" sz="1600" b="1" dirty="0">
+                <a:solidFill>
+                  <a:srgbClr val="FFB347"/>
+                </a:solidFill>
+                <a:latin typeface="Calibri" pitchFamily="34" charset="0"/>
+                <a:ea typeface="Calibri" pitchFamily="34" charset="-122"/>
+                <a:cs typeface="Calibri" pitchFamily="34" charset="-120"/>
+              </a:rPr>
+              <a:t>Automatic retry</a:t>
+            </a:r>
+            <a:endParaRPr lang="en-US" sz="1600" dirty="0"/>
+          </a:p>
+        </p:txBody>
+      </p:sp>
+      <p:sp>
+        <p:nvSpPr>
+          <p:cNvPr id="20" name="Text 18"/>
+          <p:cNvSpPr/>
+          <p:nvPr/>
+        </p:nvSpPr>
+        <p:spPr>
+          <a:xfrm>
+            <a:off x="914400" y="4800600"/>
+            <a:ext cx="2773680" cy="822960"/>
+          </a:xfrm>
+          <a:prstGeom prst="rect">
+            <a:avLst/>
+          </a:prstGeom>
+          <a:noFill/>
+          <a:ln/>
+        </p:spPr>
+        <p:txBody>
+          <a:bodyPr wrap="square" lIns="0" tIns="0" rIns="0" bIns="0" rtlCol="0" anchor="ctr"/>
+          <a:lstStyle/>
+          <a:p>
+            <a:pPr indent="0" marL="0">
+              <a:lnSpc>
+                <a:spcPct val="110000"/>
+              </a:lnSpc>
+              <a:buNone/>
+            </a:pPr>
+            <a:r>
+              <a:rPr lang="en-US" sz="1300" dirty="0">
+                <a:solidFill>
+                  <a:srgbClr val="ECECF3"/>
+                </a:solidFill>
+                <a:latin typeface="Calibri" pitchFamily="34" charset="0"/>
+                <a:ea typeface="Calibri" pitchFamily="34" charset="-122"/>
+                <a:cs typeface="Calibri" pitchFamily="34" charset="-120"/>
+              </a:rPr>
+              <a:t>On a 429 or 5xx error, the request retries after a short delay.</a:t>
+            </a:r>
+            <a:endParaRPr lang="en-US" sz="1300" dirty="0"/>
+          </a:p>
+        </p:txBody>
+      </p:sp>
+      <p:sp>
+        <p:nvSpPr>
+          <p:cNvPr id="21" name="Shape 19"/>
+          <p:cNvSpPr/>
+          <p:nvPr/>
+        </p:nvSpPr>
+        <p:spPr>
+          <a:xfrm>
+            <a:off x="4419600" y="3383280"/>
+            <a:ext cx="3322320" cy="2286000"/>
+          </a:xfrm>
+          <a:prstGeom prst="roundRect">
+            <a:avLst>
+              <a:gd name="adj" fmla="val 3200"/>
+            </a:avLst>
+          </a:prstGeom>
+          <a:solidFill>
+            <a:srgbClr val="1A1D27"/>
+          </a:solidFill>
+          <a:ln w="12700">
+            <a:solidFill>
+              <a:srgbClr val="2A2F3E"/>
+            </a:solidFill>
+            <a:prstDash val="solid"/>
+          </a:ln>
+          <a:effectLst>
+            <a:outerShdw sx="100000" sy="100000" kx="0" ky="0" algn="bl" rotWithShape="0" blurRad="101600" dist="38100" dir="8100000">
+              <a:srgbClr val="000000">
+                <a:alpha val="35000"/>
+              </a:srgbClr>
+            </a:outerShdw>
+          </a:effectLst>
+        </p:spPr>
+      </p:sp>
+      <p:sp>
+        <p:nvSpPr>
+          <p:cNvPr id="22" name="Text 20"/>
+          <p:cNvSpPr/>
+          <p:nvPr/>
+        </p:nvSpPr>
+        <p:spPr>
+          <a:xfrm>
+            <a:off x="4693920" y="3611880"/>
+            <a:ext cx="822960" cy="731520"/>
+          </a:xfrm>
+          <a:prstGeom prst="rect">
+            <a:avLst/>
+          </a:prstGeom>
+          <a:noFill/>
+          <a:ln/>
+        </p:spPr>
+        <p:txBody>
+          <a:bodyPr wrap="square" lIns="0" tIns="0" rIns="0" bIns="0" rtlCol="0" anchor="ctr"/>
+          <a:lstStyle/>
+          <a:p>
+            <a:pPr algn="ctr" indent="0" marL="0">
+              <a:buNone/>
+            </a:pPr>
+            <a:r>
+              <a:rPr lang="en-US" sz="2600" dirty="0">
+                <a:solidFill>
+                  <a:srgbClr val="000000"/>
+                </a:solidFill>
+              </a:rPr>
+              <a:t>🔑</a:t>
+            </a:r>
+            <a:endParaRPr lang="en-US" sz="2600" dirty="0"/>
+          </a:p>
+        </p:txBody>
+      </p:sp>
+      <p:sp>
+        <p:nvSpPr>
+          <p:cNvPr id="23" name="Text 21"/>
+          <p:cNvSpPr/>
+          <p:nvPr/>
+        </p:nvSpPr>
+        <p:spPr>
+          <a:xfrm>
+            <a:off x="4693920" y="4343400"/>
+            <a:ext cx="2773680" cy="457200"/>
+          </a:xfrm>
+          <a:prstGeom prst="rect">
+            <a:avLst/>
+          </a:prstGeom>
+          <a:noFill/>
+          <a:ln/>
+        </p:spPr>
+        <p:txBody>
+          <a:bodyPr wrap="square" lIns="0" tIns="0" rIns="0" bIns="0" rtlCol="0" anchor="ctr"/>
+          <a:lstStyle/>
+          <a:p>
+            <a:pPr indent="0" marL="0">
+              <a:buNone/>
+            </a:pPr>
+            <a:r>
+              <a:rPr lang="en-US" sz="1600" b="1" dirty="0">
+                <a:solidFill>
+                  <a:srgbClr val="FFB347"/>
+                </a:solidFill>
+                <a:latin typeface="Calibri" pitchFamily="34" charset="0"/>
+                <a:ea typeface="Calibri" pitchFamily="34" charset="-122"/>
+                <a:cs typeface="Calibri" pitchFamily="34" charset="-120"/>
+              </a:rPr>
+              <a:t>Keyword fallback</a:t>
+            </a:r>
+            <a:endParaRPr lang="en-US" sz="1600" dirty="0"/>
+          </a:p>
+        </p:txBody>
+      </p:sp>
+      <p:sp>
+        <p:nvSpPr>
+          <p:cNvPr id="24" name="Text 22"/>
+          <p:cNvSpPr/>
+          <p:nvPr/>
+        </p:nvSpPr>
+        <p:spPr>
+          <a:xfrm>
+            <a:off x="4693920" y="4800600"/>
+            <a:ext cx="2773680" cy="822960"/>
+          </a:xfrm>
+          <a:prstGeom prst="rect">
+            <a:avLst/>
+          </a:prstGeom>
+          <a:noFill/>
+          <a:ln/>
+        </p:spPr>
+        <p:txBody>
+          <a:bodyPr wrap="square" lIns="0" tIns="0" rIns="0" bIns="0" rtlCol="0" anchor="ctr"/>
+          <a:lstStyle/>
+          <a:p>
+            <a:pPr indent="0" marL="0">
+              <a:lnSpc>
+                <a:spcPct val="110000"/>
+              </a:lnSpc>
+              <a:buNone/>
+            </a:pPr>
+            <a:r>
+              <a:rPr lang="en-US" sz="1300" dirty="0">
+                <a:solidFill>
+                  <a:srgbClr val="ECECF3"/>
+                </a:solidFill>
+                <a:latin typeface="Calibri" pitchFamily="34" charset="0"/>
+                <a:ea typeface="Calibri" pitchFamily="34" charset="-122"/>
+                <a:cs typeface="Calibri" pitchFamily="34" charset="-120"/>
+              </a:rPr>
+              <a:t>If all AI fails, a local matcher still derives sensible preferences.</a:t>
+            </a:r>
+            <a:endParaRPr lang="en-US" sz="1300" dirty="0"/>
+          </a:p>
+        </p:txBody>
+      </p:sp>
+      <p:sp>
+        <p:nvSpPr>
+          <p:cNvPr id="25" name="Shape 23"/>
+          <p:cNvSpPr/>
+          <p:nvPr/>
+        </p:nvSpPr>
+        <p:spPr>
+          <a:xfrm>
+            <a:off x="8199120" y="3383280"/>
+            <a:ext cx="3322320" cy="2286000"/>
+          </a:xfrm>
+          <a:prstGeom prst="roundRect">
+            <a:avLst>
+              <a:gd name="adj" fmla="val 3200"/>
+            </a:avLst>
+          </a:prstGeom>
+          <a:solidFill>
+            <a:srgbClr val="1A1D27"/>
+          </a:solidFill>
+          <a:ln w="12700">
+            <a:solidFill>
+              <a:srgbClr val="2A2F3E"/>
+            </a:solidFill>
+            <a:prstDash val="solid"/>
+          </a:ln>
+          <a:effectLst>
+            <a:outerShdw sx="100000" sy="100000" kx="0" ky="0" algn="bl" rotWithShape="0" blurRad="101600" dist="38100" dir="8100000">
+              <a:srgbClr val="000000">
+                <a:alpha val="35000"/>
+              </a:srgbClr>
+            </a:outerShdw>
+          </a:effectLst>
+        </p:spPr>
+      </p:sp>
+      <p:sp>
+        <p:nvSpPr>
+          <p:cNvPr id="26" name="Text 24"/>
+          <p:cNvSpPr/>
+          <p:nvPr/>
+        </p:nvSpPr>
+        <p:spPr>
+          <a:xfrm>
+            <a:off x="8473440" y="3611880"/>
+            <a:ext cx="822960" cy="731520"/>
+          </a:xfrm>
+          <a:prstGeom prst="rect">
+            <a:avLst/>
+          </a:prstGeom>
+          <a:noFill/>
+          <a:ln/>
+        </p:spPr>
+        <p:txBody>
+          <a:bodyPr wrap="square" lIns="0" tIns="0" rIns="0" bIns="0" rtlCol="0" anchor="ctr"/>
+          <a:lstStyle/>
+          <a:p>
+            <a:pPr algn="ctr" indent="0" marL="0">
+              <a:buNone/>
+            </a:pPr>
+            <a:r>
+              <a:rPr lang="en-US" sz="2600" dirty="0">
+                <a:solidFill>
+                  <a:srgbClr val="000000"/>
+                </a:solidFill>
+              </a:rPr>
+              <a:t>📝</a:t>
+            </a:r>
+            <a:endParaRPr lang="en-US" sz="2600" dirty="0"/>
+          </a:p>
+        </p:txBody>
+      </p:sp>
+      <p:sp>
+        <p:nvSpPr>
+          <p:cNvPr id="27" name="Text 25"/>
+          <p:cNvSpPr/>
+          <p:nvPr/>
+        </p:nvSpPr>
+        <p:spPr>
+          <a:xfrm>
+            <a:off x="8473440" y="4343400"/>
+            <a:ext cx="2773680" cy="457200"/>
+          </a:xfrm>
+          <a:prstGeom prst="rect">
+            <a:avLst/>
+          </a:prstGeom>
+          <a:noFill/>
+          <a:ln/>
+        </p:spPr>
+        <p:txBody>
+          <a:bodyPr wrap="square" lIns="0" tIns="0" rIns="0" bIns="0" rtlCol="0" anchor="ctr"/>
+          <a:lstStyle/>
+          <a:p>
+            <a:pPr indent="0" marL="0">
+              <a:buNone/>
+            </a:pPr>
+            <a:r>
+              <a:rPr lang="en-US" sz="1600" b="1" dirty="0">
+                <a:solidFill>
+                  <a:srgbClr val="FFB347"/>
+                </a:solidFill>
+                <a:latin typeface="Calibri" pitchFamily="34" charset="0"/>
+                <a:ea typeface="Calibri" pitchFamily="34" charset="-122"/>
+                <a:cs typeface="Calibri" pitchFamily="34" charset="-120"/>
+              </a:rPr>
+              <a:t>Content fallback</a:t>
+            </a:r>
+            <a:endParaRPr lang="en-US" sz="1600" dirty="0"/>
+          </a:p>
+        </p:txBody>
+      </p:sp>
+      <p:sp>
+        <p:nvSpPr>
+          <p:cNvPr id="28" name="Text 26"/>
+          <p:cNvSpPr/>
+          <p:nvPr/>
+        </p:nvSpPr>
+        <p:spPr>
+          <a:xfrm>
+            <a:off x="8473440" y="4800600"/>
+            <a:ext cx="2773680" cy="822960"/>
+          </a:xfrm>
+          <a:prstGeom prst="rect">
+            <a:avLst/>
+          </a:prstGeom>
+          <a:noFill/>
+          <a:ln/>
+        </p:spPr>
+        <p:txBody>
+          <a:bodyPr wrap="square" lIns="0" tIns="0" rIns="0" bIns="0" rtlCol="0" anchor="ctr"/>
+          <a:lstStyle/>
+          <a:p>
+            <a:pPr indent="0" marL="0">
+              <a:lnSpc>
+                <a:spcPct val="110000"/>
+              </a:lnSpc>
+              <a:buNone/>
+            </a:pPr>
+            <a:r>
+              <a:rPr lang="en-US" sz="1300" dirty="0">
+                <a:solidFill>
+                  <a:srgbClr val="ECECF3"/>
+                </a:solidFill>
+                <a:latin typeface="Calibri" pitchFamily="34" charset="0"/>
+                <a:ea typeface="Calibri" pitchFamily="34" charset="-122"/>
+                <a:cs typeface="Calibri" pitchFamily="34" charset="-120"/>
+              </a:rPr>
+              <a:t>Empty AI fields are replaced with rich, well-written defaults.</a:t>
+            </a:r>
+            <a:endParaRPr lang="en-US" sz="1300" dirty="0"/>
+          </a:p>
+        </p:txBody>
+      </p:sp>
+      <p:sp>
+        <p:nvSpPr>
+          <p:cNvPr id="29" name="Text 27"/>
+          <p:cNvSpPr/>
+          <p:nvPr/>
+        </p:nvSpPr>
+        <p:spPr>
+          <a:xfrm>
+            <a:off x="640080" y="6400800"/>
+            <a:ext cx="8229600" cy="274320"/>
+          </a:xfrm>
+          <a:prstGeom prst="rect">
+            <a:avLst/>
+          </a:prstGeom>
+          <a:noFill/>
+          <a:ln/>
+        </p:spPr>
+        <p:txBody>
+          <a:bodyPr wrap="square" lIns="0" tIns="0" rIns="0" bIns="0" rtlCol="0" anchor="ctr"/>
+          <a:lstStyle/>
+          <a:p>
+            <a:pPr indent="0" marL="0">
+              <a:buNone/>
+            </a:pPr>
+            <a:r>
+              <a:rPr lang="en-US" sz="900" b="1" dirty="0">
+                <a:solidFill>
+                  <a:srgbClr val="FFB347"/>
+                </a:solidFill>
+                <a:latin typeface="Calibri" pitchFamily="34" charset="0"/>
+                <a:ea typeface="Calibri" pitchFamily="34" charset="-122"/>
+                <a:cs typeface="Calibri" pitchFamily="34" charset="-120"/>
+              </a:rPr>
+              <a:t>CINEMATCH</a:t>
+            </a:r>
+            <a:pPr indent="0" marL="0">
+              <a:buNone/>
+            </a:pPr>
+            <a:r>
+              <a:rPr lang="en-US" sz="900" dirty="0">
+                <a:solidFill>
+                  <a:srgbClr val="9AA0B4"/>
+                </a:solidFill>
+                <a:latin typeface="Calibri" pitchFamily="34" charset="0"/>
+                <a:ea typeface="Calibri" pitchFamily="34" charset="-122"/>
+                <a:cs typeface="Calibri" pitchFamily="34" charset="-120"/>
+              </a:rPr>
+              <a:t>   ·   AI-Powered Movie &amp; Game Recommender</a:t>
+            </a:r>
+            <a:endParaRPr lang="en-US" sz="900" dirty="0"/>
+          </a:p>
+        </p:txBody>
+      </p:sp>
+      <p:sp>
+        <p:nvSpPr>
+          <p:cNvPr id="30" name="Text 28"/>
+          <p:cNvSpPr/>
+          <p:nvPr/>
+        </p:nvSpPr>
+        <p:spPr>
+          <a:xfrm>
+            <a:off x="11064240" y="6400800"/>
+            <a:ext cx="457200" cy="274320"/>
+          </a:xfrm>
+          <a:prstGeom prst="rect">
+            <a:avLst/>
+          </a:prstGeom>
+          <a:noFill/>
+          <a:ln/>
+        </p:spPr>
+        <p:txBody>
+          <a:bodyPr wrap="square" lIns="0" tIns="0" rIns="0" bIns="0" rtlCol="0" anchor="ctr"/>
+          <a:lstStyle/>
+          <a:p>
+            <a:pPr algn="r" indent="0" marL="0">
+              <a:buNone/>
+            </a:pPr>
+            <a:r>
+              <a:rPr lang="en-US" sz="900" dirty="0">
+                <a:solidFill>
+                  <a:srgbClr val="9AA0B4"/>
+                </a:solidFill>
+                <a:latin typeface="Calibri" pitchFamily="34" charset="0"/>
+                <a:ea typeface="Calibri" pitchFamily="34" charset="-122"/>
+                <a:cs typeface="Calibri" pitchFamily="34" charset="-120"/>
+              </a:rPr>
+              <a:t>12</a:t>
+            </a:r>
+            <a:endParaRPr lang="en-US" sz="900" dirty="0"/>
+          </a:p>
+        </p:txBody>
+      </p:sp>
+    </p:spTree>
+  </p:cSld>
+  <p:clrMapOvr>
+    <a:masterClrMapping/>
+  </p:clrMapOvr>
+</p:sld>
+</file>
+
+<file path=ppt/slides/slide13.xml><?xml version="1.0" encoding="utf-8"?>
+<p:sld xmlns:a="http://schemas.openxmlformats.org/drawingml/2006/main" xmlns:r="http://schemas.openxmlformats.org/officeDocument/2006/relationships" xmlns:p="http://schemas.openxmlformats.org/presentationml/2006/main">
+  <p:cSld name="Slide 13">
+    <p:bg>
+      <p:bgPr>
+        <a:solidFill>
+          <a:srgbClr val="0F1117"/>
+        </a:solidFill>
+      </p:bgPr>
+    </p:bg>
+    <p:spTree>
+      <p:nvGrpSpPr>
+        <p:cNvPr id="1" name=""/>
+        <p:cNvGrpSpPr/>
+        <p:nvPr/>
+      </p:nvGrpSpPr>
+      <p:grpSpPr>
+        <a:xfrm>
+          <a:off x="0" y="0"/>
+          <a:ext cx="0" cy="0"/>
+          <a:chOff x="0" y="0"/>
+          <a:chExt cx="0" cy="0"/>
+        </a:xfrm>
+      </p:grpSpPr>
+      <p:sp>
+        <p:nvSpPr>
+          <p:cNvPr id="2" name="Shape 0"/>
+          <p:cNvSpPr/>
+          <p:nvPr/>
+        </p:nvSpPr>
+        <p:spPr>
+          <a:xfrm>
+            <a:off x="640080" y="566928"/>
+            <a:ext cx="146304" cy="146304"/>
+          </a:xfrm>
+          <a:prstGeom prst="ellipse">
+            <a:avLst/>
+          </a:prstGeom>
+          <a:solidFill>
+            <a:srgbClr val="FFB347"/>
+          </a:solidFill>
+          <a:ln/>
+        </p:spPr>
+      </p:sp>
+      <p:sp>
+        <p:nvSpPr>
+          <p:cNvPr id="3" name="Text 1"/>
+          <p:cNvSpPr/>
+          <p:nvPr/>
+        </p:nvSpPr>
+        <p:spPr>
+          <a:xfrm>
+            <a:off x="896112" y="457200"/>
+            <a:ext cx="9144000" cy="365760"/>
+          </a:xfrm>
+          <a:prstGeom prst="rect">
+            <a:avLst/>
+          </a:prstGeom>
+          <a:noFill/>
+          <a:ln/>
+        </p:spPr>
+        <p:txBody>
+          <a:bodyPr wrap="square" lIns="0" tIns="0" rIns="0" bIns="0" rtlCol="0" anchor="ctr"/>
+          <a:lstStyle/>
+          <a:p>
+            <a:pPr indent="0" marL="0">
+              <a:buNone/>
+            </a:pPr>
+            <a:r>
+              <a:rPr lang="en-US" sz="1200" b="1" spc="300" kern="0" dirty="0">
+                <a:solidFill>
+                  <a:srgbClr val="FFB347"/>
+                </a:solidFill>
+                <a:latin typeface="Calibri" pitchFamily="34" charset="0"/>
+                <a:ea typeface="Calibri" pitchFamily="34" charset="-122"/>
+                <a:cs typeface="Calibri" pitchFamily="34" charset="-120"/>
+              </a:rPr>
+              <a:t>LIVE DEMO</a:t>
+            </a:r>
+            <a:endParaRPr lang="en-US" sz="1200" dirty="0"/>
+          </a:p>
+        </p:txBody>
+      </p:sp>
+      <p:sp>
+        <p:nvSpPr>
+          <p:cNvPr id="4" name="Text 2"/>
+          <p:cNvSpPr/>
+          <p:nvPr/>
+        </p:nvSpPr>
+        <p:spPr>
+          <a:xfrm>
+            <a:off x="640080" y="777240"/>
+            <a:ext cx="10881360" cy="731520"/>
+          </a:xfrm>
+          <a:prstGeom prst="rect">
+            <a:avLst/>
+          </a:prstGeom>
+          <a:noFill/>
+          <a:ln/>
+        </p:spPr>
+        <p:txBody>
+          <a:bodyPr wrap="square" lIns="0" tIns="0" rIns="0" bIns="0" rtlCol="0" anchor="ctr"/>
+          <a:lstStyle/>
+          <a:p>
+            <a:pPr indent="0" marL="0">
+              <a:buNone/>
+            </a:pPr>
+            <a:r>
+              <a:rPr lang="en-US" sz="3200" b="1" dirty="0">
+                <a:solidFill>
+                  <a:srgbClr val="ECECF3"/>
+                </a:solidFill>
+                <a:latin typeface="Georgia" pitchFamily="34" charset="0"/>
+                <a:ea typeface="Georgia" pitchFamily="34" charset="-122"/>
+                <a:cs typeface="Georgia" pitchFamily="34" charset="-120"/>
+              </a:rPr>
+              <a:t>Rehearsed and reliable</a:t>
+            </a:r>
+            <a:endParaRPr lang="en-US" sz="3200" dirty="0"/>
+          </a:p>
+        </p:txBody>
+      </p:sp>
+      <p:sp>
+        <p:nvSpPr>
+          <p:cNvPr id="5" name="Shape 3"/>
+          <p:cNvSpPr/>
+          <p:nvPr/>
+        </p:nvSpPr>
+        <p:spPr>
+          <a:xfrm>
+            <a:off x="640080" y="2103120"/>
+            <a:ext cx="3322320" cy="3291840"/>
+          </a:xfrm>
+          <a:prstGeom prst="roundRect">
+            <a:avLst>
+              <a:gd name="adj" fmla="val 2222"/>
+            </a:avLst>
+          </a:prstGeom>
+          <a:solidFill>
+            <a:srgbClr val="1A1D27"/>
+          </a:solidFill>
+          <a:ln w="12700">
+            <a:solidFill>
+              <a:srgbClr val="2A2F3E"/>
+            </a:solidFill>
+            <a:prstDash val="solid"/>
+          </a:ln>
+          <a:effectLst>
+            <a:outerShdw sx="100000" sy="100000" kx="0" ky="0" algn="bl" rotWithShape="0" blurRad="101600" dist="38100" dir="8100000">
+              <a:srgbClr val="000000">
+                <a:alpha val="35000"/>
+              </a:srgbClr>
+            </a:outerShdw>
+          </a:effectLst>
+        </p:spPr>
+      </p:sp>
+      <p:sp>
+        <p:nvSpPr>
+          <p:cNvPr id="6" name="Text 4"/>
+          <p:cNvSpPr/>
+          <p:nvPr/>
+        </p:nvSpPr>
+        <p:spPr>
+          <a:xfrm>
+            <a:off x="960120" y="2377440"/>
+            <a:ext cx="2682240" cy="822960"/>
+          </a:xfrm>
+          <a:prstGeom prst="rect">
+            <a:avLst/>
+          </a:prstGeom>
+          <a:noFill/>
+          <a:ln/>
+        </p:spPr>
+        <p:txBody>
+          <a:bodyPr wrap="square" lIns="0" tIns="0" rIns="0" bIns="0" rtlCol="0" anchor="ctr"/>
+          <a:lstStyle/>
+          <a:p>
+            <a:pPr indent="0" marL="0">
+              <a:lnSpc>
+                <a:spcPct val="110000"/>
+              </a:lnSpc>
+              <a:buNone/>
+            </a:pPr>
+            <a:r>
+              <a:rPr lang="en-US" sz="1600" i="1" dirty="0">
+                <a:solidFill>
+                  <a:srgbClr val="9AA0B4"/>
+                </a:solidFill>
+                <a:latin typeface="Georgia" pitchFamily="34" charset="0"/>
+                <a:ea typeface="Georgia" pitchFamily="34" charset="-122"/>
+                <a:cs typeface="Georgia" pitchFamily="34" charset="-120"/>
+              </a:rPr>
+              <a:t>“relaxing cozy solo night”</a:t>
+            </a:r>
+            <a:endParaRPr lang="en-US" sz="1600" dirty="0"/>
+          </a:p>
+        </p:txBody>
+      </p:sp>
+      <p:sp>
+        <p:nvSpPr>
+          <p:cNvPr id="7" name="Shape 5"/>
+          <p:cNvSpPr/>
+          <p:nvPr/>
+        </p:nvSpPr>
+        <p:spPr>
+          <a:xfrm>
+            <a:off x="960120" y="3291840"/>
+            <a:ext cx="2682240" cy="0"/>
+          </a:xfrm>
+          <a:prstGeom prst="line">
+            <a:avLst/>
+          </a:prstGeom>
+          <a:noFill/>
+          <a:ln w="12700">
+            <a:solidFill>
+              <a:srgbClr val="2A2F3E"/>
+            </a:solidFill>
+            <a:prstDash val="solid"/>
+          </a:ln>
+        </p:spPr>
+      </p:sp>
+      <p:sp>
+        <p:nvSpPr>
+          <p:cNvPr id="8" name="Text 6"/>
+          <p:cNvSpPr/>
+          <p:nvPr/>
+        </p:nvSpPr>
+        <p:spPr>
+          <a:xfrm>
+            <a:off x="640080" y="3474720"/>
+            <a:ext cx="3322320" cy="822960"/>
+          </a:xfrm>
+          <a:prstGeom prst="rect">
+            <a:avLst/>
+          </a:prstGeom>
+          <a:noFill/>
+          <a:ln/>
+        </p:spPr>
+        <p:txBody>
+          <a:bodyPr wrap="square" lIns="0" tIns="0" rIns="0" bIns="0" rtlCol="0" anchor="ctr"/>
+          <a:lstStyle/>
+          <a:p>
+            <a:pPr algn="ctr" indent="0" marL="0">
+              <a:buNone/>
+            </a:pPr>
+            <a:r>
+              <a:rPr lang="en-US" sz="4400" dirty="0">
+                <a:solidFill>
+                  <a:srgbClr val="000000"/>
+                </a:solidFill>
+              </a:rPr>
+              <a:t>🎮</a:t>
+            </a:r>
+            <a:endParaRPr lang="en-US" sz="4400" dirty="0"/>
+          </a:p>
+        </p:txBody>
+      </p:sp>
+      <p:sp>
+        <p:nvSpPr>
+          <p:cNvPr id="9" name="Text 7"/>
+          <p:cNvSpPr/>
+          <p:nvPr/>
+        </p:nvSpPr>
+        <p:spPr>
+          <a:xfrm>
+            <a:off x="822960" y="4343400"/>
+            <a:ext cx="2956560" cy="548640"/>
+          </a:xfrm>
+          <a:prstGeom prst="rect">
+            <a:avLst/>
+          </a:prstGeom>
+          <a:noFill/>
+          <a:ln/>
+        </p:spPr>
+        <p:txBody>
+          <a:bodyPr wrap="square" lIns="0" tIns="0" rIns="0" bIns="0" rtlCol="0" anchor="ctr"/>
+          <a:lstStyle/>
+          <a:p>
+            <a:pPr algn="ctr" indent="0" marL="0">
+              <a:buNone/>
+            </a:pPr>
+            <a:r>
+              <a:rPr lang="en-US" sz="1800" b="1" dirty="0">
+                <a:solidFill>
+                  <a:srgbClr val="FFB347"/>
+                </a:solidFill>
+                <a:latin typeface="Calibri" pitchFamily="34" charset="0"/>
+                <a:ea typeface="Calibri" pitchFamily="34" charset="-122"/>
+                <a:cs typeface="Calibri" pitchFamily="34" charset="-120"/>
+              </a:rPr>
+              <a:t>Balatro (2024)</a:t>
+            </a:r>
+            <a:endParaRPr lang="en-US" sz="1800" dirty="0"/>
+          </a:p>
+        </p:txBody>
+      </p:sp>
+      <p:sp>
+        <p:nvSpPr>
+          <p:cNvPr id="10" name="Text 8"/>
+          <p:cNvSpPr/>
+          <p:nvPr/>
+        </p:nvSpPr>
+        <p:spPr>
+          <a:xfrm>
+            <a:off x="822960" y="4892040"/>
+            <a:ext cx="2956560" cy="365760"/>
+          </a:xfrm>
+          <a:prstGeom prst="rect">
+            <a:avLst/>
+          </a:prstGeom>
+          <a:noFill/>
+          <a:ln/>
+        </p:spPr>
+        <p:txBody>
+          <a:bodyPr wrap="square" lIns="0" tIns="0" rIns="0" bIns="0" rtlCol="0" anchor="ctr"/>
+          <a:lstStyle/>
+          <a:p>
+            <a:pPr algn="ctr" indent="0" marL="0">
+              <a:buNone/>
+            </a:pPr>
+            <a:r>
+              <a:rPr lang="en-US" sz="1250" dirty="0">
+                <a:solidFill>
+                  <a:srgbClr val="ECECF3"/>
+                </a:solidFill>
+                <a:latin typeface="Calibri" pitchFamily="34" charset="0"/>
+                <a:ea typeface="Calibri" pitchFamily="34" charset="-122"/>
+                <a:cs typeface="Calibri" pitchFamily="34" charset="-120"/>
+              </a:rPr>
+              <a:t>Cozy · Relaxed · ★ 9.0</a:t>
+            </a:r>
+            <a:endParaRPr lang="en-US" sz="1250" dirty="0"/>
+          </a:p>
+        </p:txBody>
+      </p:sp>
+      <p:sp>
+        <p:nvSpPr>
+          <p:cNvPr id="11" name="Shape 9"/>
+          <p:cNvSpPr/>
+          <p:nvPr/>
+        </p:nvSpPr>
+        <p:spPr>
+          <a:xfrm>
+            <a:off x="4419600" y="2103120"/>
+            <a:ext cx="3322320" cy="3291840"/>
+          </a:xfrm>
+          <a:prstGeom prst="roundRect">
+            <a:avLst>
+              <a:gd name="adj" fmla="val 2222"/>
+            </a:avLst>
+          </a:prstGeom>
+          <a:solidFill>
+            <a:srgbClr val="1A1D27"/>
+          </a:solidFill>
+          <a:ln w="12700">
+            <a:solidFill>
+              <a:srgbClr val="2A2F3E"/>
+            </a:solidFill>
+            <a:prstDash val="solid"/>
+          </a:ln>
+          <a:effectLst>
+            <a:outerShdw sx="100000" sy="100000" kx="0" ky="0" algn="bl" rotWithShape="0" blurRad="101600" dist="38100" dir="8100000">
+              <a:srgbClr val="000000">
+                <a:alpha val="35000"/>
+              </a:srgbClr>
+            </a:outerShdw>
+          </a:effectLst>
+        </p:spPr>
+      </p:sp>
+      <p:sp>
+        <p:nvSpPr>
+          <p:cNvPr id="12" name="Text 10"/>
+          <p:cNvSpPr/>
+          <p:nvPr/>
+        </p:nvSpPr>
+        <p:spPr>
+          <a:xfrm>
+            <a:off x="4739640" y="2377440"/>
+            <a:ext cx="2682240" cy="822960"/>
+          </a:xfrm>
+          <a:prstGeom prst="rect">
+            <a:avLst/>
+          </a:prstGeom>
+          <a:noFill/>
+          <a:ln/>
+        </p:spPr>
+        <p:txBody>
+          <a:bodyPr wrap="square" lIns="0" tIns="0" rIns="0" bIns="0" rtlCol="0" anchor="ctr"/>
+          <a:lstStyle/>
+          <a:p>
+            <a:pPr indent="0" marL="0">
+              <a:lnSpc>
+                <a:spcPct val="110000"/>
+              </a:lnSpc>
+              <a:buNone/>
+            </a:pPr>
+            <a:r>
+              <a:rPr lang="en-US" sz="1600" i="1" dirty="0">
+                <a:solidFill>
+                  <a:srgbClr val="9AA0B4"/>
+                </a:solidFill>
+                <a:latin typeface="Georgia" pitchFamily="34" charset="0"/>
+                <a:ea typeface="Georgia" pitchFamily="34" charset="-122"/>
+                <a:cs typeface="Georgia" pitchFamily="34" charset="-120"/>
+              </a:rPr>
+              <a:t>“scary horror with a group”</a:t>
+            </a:r>
+            <a:endParaRPr lang="en-US" sz="1600" dirty="0"/>
+          </a:p>
+        </p:txBody>
+      </p:sp>
+      <p:sp>
+        <p:nvSpPr>
+          <p:cNvPr id="13" name="Shape 11"/>
+          <p:cNvSpPr/>
+          <p:nvPr/>
+        </p:nvSpPr>
+        <p:spPr>
+          <a:xfrm>
+            <a:off x="4739640" y="3291840"/>
+            <a:ext cx="2682240" cy="0"/>
+          </a:xfrm>
+          <a:prstGeom prst="line">
+            <a:avLst/>
+          </a:prstGeom>
+          <a:noFill/>
+          <a:ln w="12700">
+            <a:solidFill>
+              <a:srgbClr val="2A2F3E"/>
+            </a:solidFill>
+            <a:prstDash val="solid"/>
+          </a:ln>
+        </p:spPr>
+      </p:sp>
+      <p:sp>
+        <p:nvSpPr>
+          <p:cNvPr id="14" name="Text 12"/>
+          <p:cNvSpPr/>
+          <p:nvPr/>
+        </p:nvSpPr>
+        <p:spPr>
+          <a:xfrm>
+            <a:off x="4419600" y="3474720"/>
+            <a:ext cx="3322320" cy="822960"/>
+          </a:xfrm>
+          <a:prstGeom prst="rect">
+            <a:avLst/>
+          </a:prstGeom>
+          <a:noFill/>
+          <a:ln/>
+        </p:spPr>
+        <p:txBody>
+          <a:bodyPr wrap="square" lIns="0" tIns="0" rIns="0" bIns="0" rtlCol="0" anchor="ctr"/>
+          <a:lstStyle/>
+          <a:p>
+            <a:pPr algn="ctr" indent="0" marL="0">
+              <a:buNone/>
+            </a:pPr>
+            <a:r>
+              <a:rPr lang="en-US" sz="4400" dirty="0">
+                <a:solidFill>
+                  <a:srgbClr val="000000"/>
+                </a:solidFill>
+              </a:rPr>
+              <a:t>🎬</a:t>
+            </a:r>
+            <a:endParaRPr lang="en-US" sz="4400" dirty="0"/>
+          </a:p>
+        </p:txBody>
+      </p:sp>
+      <p:sp>
+        <p:nvSpPr>
+          <p:cNvPr id="15" name="Text 13"/>
+          <p:cNvSpPr/>
+          <p:nvPr/>
+        </p:nvSpPr>
+        <p:spPr>
+          <a:xfrm>
+            <a:off x="4602480" y="4343400"/>
+            <a:ext cx="2956560" cy="548640"/>
+          </a:xfrm>
+          <a:prstGeom prst="rect">
+            <a:avLst/>
+          </a:prstGeom>
+          <a:noFill/>
+          <a:ln/>
+        </p:spPr>
+        <p:txBody>
+          <a:bodyPr wrap="square" lIns="0" tIns="0" rIns="0" bIns="0" rtlCol="0" anchor="ctr"/>
+          <a:lstStyle/>
+          <a:p>
+            <a:pPr algn="ctr" indent="0" marL="0">
+              <a:buNone/>
+            </a:pPr>
+            <a:r>
+              <a:rPr lang="en-US" sz="1800" b="1" dirty="0">
+                <a:solidFill>
+                  <a:srgbClr val="FFB347"/>
+                </a:solidFill>
+                <a:latin typeface="Calibri" pitchFamily="34" charset="0"/>
+                <a:ea typeface="Calibri" pitchFamily="34" charset="-122"/>
+                <a:cs typeface="Calibri" pitchFamily="34" charset="-120"/>
+              </a:rPr>
+              <a:t>Alien (1979)</a:t>
+            </a:r>
+            <a:endParaRPr lang="en-US" sz="1800" dirty="0"/>
+          </a:p>
+        </p:txBody>
+      </p:sp>
+      <p:sp>
+        <p:nvSpPr>
+          <p:cNvPr id="16" name="Text 14"/>
+          <p:cNvSpPr/>
+          <p:nvPr/>
+        </p:nvSpPr>
+        <p:spPr>
+          <a:xfrm>
+            <a:off x="4602480" y="4892040"/>
+            <a:ext cx="2956560" cy="365760"/>
+          </a:xfrm>
+          <a:prstGeom prst="rect">
+            <a:avLst/>
+          </a:prstGeom>
+          <a:noFill/>
+          <a:ln/>
+        </p:spPr>
+        <p:txBody>
+          <a:bodyPr wrap="square" lIns="0" tIns="0" rIns="0" bIns="0" rtlCol="0" anchor="ctr"/>
+          <a:lstStyle/>
+          <a:p>
+            <a:pPr algn="ctr" indent="0" marL="0">
+              <a:buNone/>
+            </a:pPr>
+            <a:r>
+              <a:rPr lang="en-US" sz="1250" dirty="0">
+                <a:solidFill>
+                  <a:srgbClr val="ECECF3"/>
+                </a:solidFill>
+                <a:latin typeface="Calibri" pitchFamily="34" charset="0"/>
+                <a:ea typeface="Calibri" pitchFamily="34" charset="-122"/>
+                <a:cs typeface="Calibri" pitchFamily="34" charset="-120"/>
+              </a:rPr>
+              <a:t>Horror · Intense · ★ 8.5</a:t>
+            </a:r>
+            <a:endParaRPr lang="en-US" sz="1250" dirty="0"/>
+          </a:p>
+        </p:txBody>
+      </p:sp>
+      <p:sp>
+        <p:nvSpPr>
+          <p:cNvPr id="17" name="Shape 15"/>
+          <p:cNvSpPr/>
+          <p:nvPr/>
+        </p:nvSpPr>
+        <p:spPr>
+          <a:xfrm>
+            <a:off x="8199120" y="2103120"/>
+            <a:ext cx="3322320" cy="3291840"/>
+          </a:xfrm>
+          <a:prstGeom prst="roundRect">
+            <a:avLst>
+              <a:gd name="adj" fmla="val 2222"/>
+            </a:avLst>
+          </a:prstGeom>
+          <a:solidFill>
+            <a:srgbClr val="1A1D27"/>
+          </a:solidFill>
+          <a:ln w="12700">
+            <a:solidFill>
+              <a:srgbClr val="2A2F3E"/>
+            </a:solidFill>
+            <a:prstDash val="solid"/>
+          </a:ln>
+          <a:effectLst>
+            <a:outerShdw sx="100000" sy="100000" kx="0" ky="0" algn="bl" rotWithShape="0" blurRad="101600" dist="38100" dir="8100000">
+              <a:srgbClr val="000000">
+                <a:alpha val="35000"/>
+              </a:srgbClr>
+            </a:outerShdw>
+          </a:effectLst>
+        </p:spPr>
+      </p:sp>
+      <p:sp>
+        <p:nvSpPr>
+          <p:cNvPr id="18" name="Text 16"/>
+          <p:cNvSpPr/>
+          <p:nvPr/>
+        </p:nvSpPr>
+        <p:spPr>
+          <a:xfrm>
+            <a:off x="8519160" y="2377440"/>
+            <a:ext cx="2682240" cy="822960"/>
+          </a:xfrm>
+          <a:prstGeom prst="rect">
+            <a:avLst/>
+          </a:prstGeom>
+          <a:noFill/>
+          <a:ln/>
+        </p:spPr>
+        <p:txBody>
+          <a:bodyPr wrap="square" lIns="0" tIns="0" rIns="0" bIns="0" rtlCol="0" anchor="ctr"/>
+          <a:lstStyle/>
+          <a:p>
+            <a:pPr indent="0" marL="0">
+              <a:lnSpc>
+                <a:spcPct val="110000"/>
+              </a:lnSpc>
+              <a:buNone/>
+            </a:pPr>
+            <a:r>
+              <a:rPr lang="en-US" sz="1600" i="1" dirty="0">
+                <a:solidFill>
+                  <a:srgbClr val="9AA0B4"/>
+                </a:solidFill>
+                <a:latin typeface="Georgia" pitchFamily="34" charset="0"/>
+                <a:ea typeface="Georgia" pitchFamily="34" charset="-122"/>
+                <a:cs typeface="Georgia" pitchFamily="34" charset="-120"/>
+              </a:rPr>
+              <a:t>“epic action game for hours”</a:t>
+            </a:r>
+            <a:endParaRPr lang="en-US" sz="1600" dirty="0"/>
+          </a:p>
+        </p:txBody>
+      </p:sp>
+      <p:sp>
+        <p:nvSpPr>
+          <p:cNvPr id="19" name="Shape 17"/>
+          <p:cNvSpPr/>
+          <p:nvPr/>
+        </p:nvSpPr>
+        <p:spPr>
+          <a:xfrm>
+            <a:off x="8519160" y="3291840"/>
+            <a:ext cx="2682240" cy="0"/>
+          </a:xfrm>
+          <a:prstGeom prst="line">
+            <a:avLst/>
+          </a:prstGeom>
+          <a:noFill/>
+          <a:ln w="12700">
+            <a:solidFill>
+              <a:srgbClr val="2A2F3E"/>
+            </a:solidFill>
+            <a:prstDash val="solid"/>
+          </a:ln>
+        </p:spPr>
+      </p:sp>
+      <p:sp>
+        <p:nvSpPr>
+          <p:cNvPr id="20" name="Text 18"/>
+          <p:cNvSpPr/>
+          <p:nvPr/>
+        </p:nvSpPr>
+        <p:spPr>
+          <a:xfrm>
+            <a:off x="8199120" y="3474720"/>
+            <a:ext cx="3322320" cy="822960"/>
+          </a:xfrm>
+          <a:prstGeom prst="rect">
+            <a:avLst/>
+          </a:prstGeom>
+          <a:noFill/>
+          <a:ln/>
+        </p:spPr>
+        <p:txBody>
+          <a:bodyPr wrap="square" lIns="0" tIns="0" rIns="0" bIns="0" rtlCol="0" anchor="ctr"/>
+          <a:lstStyle/>
+          <a:p>
+            <a:pPr algn="ctr" indent="0" marL="0">
+              <a:buNone/>
+            </a:pPr>
+            <a:r>
+              <a:rPr lang="en-US" sz="4400" dirty="0">
+                <a:solidFill>
+                  <a:srgbClr val="000000"/>
+                </a:solidFill>
+              </a:rPr>
+              <a:t>🎮</a:t>
+            </a:r>
+            <a:endParaRPr lang="en-US" sz="4400" dirty="0"/>
+          </a:p>
+        </p:txBody>
+      </p:sp>
+      <p:sp>
+        <p:nvSpPr>
+          <p:cNvPr id="21" name="Text 19"/>
+          <p:cNvSpPr/>
+          <p:nvPr/>
+        </p:nvSpPr>
+        <p:spPr>
+          <a:xfrm>
+            <a:off x="8382000" y="4343400"/>
+            <a:ext cx="2956560" cy="548640"/>
+          </a:xfrm>
+          <a:prstGeom prst="rect">
+            <a:avLst/>
+          </a:prstGeom>
+          <a:noFill/>
+          <a:ln/>
+        </p:spPr>
+        <p:txBody>
+          <a:bodyPr wrap="square" lIns="0" tIns="0" rIns="0" bIns="0" rtlCol="0" anchor="ctr"/>
+          <a:lstStyle/>
+          <a:p>
+            <a:pPr algn="ctr" indent="0" marL="0">
+              <a:buNone/>
+            </a:pPr>
+            <a:r>
+              <a:rPr lang="en-US" sz="1800" b="1" dirty="0">
+                <a:solidFill>
+                  <a:srgbClr val="FFB347"/>
+                </a:solidFill>
+                <a:latin typeface="Calibri" pitchFamily="34" charset="0"/>
+                <a:ea typeface="Calibri" pitchFamily="34" charset="-122"/>
+                <a:cs typeface="Calibri" pitchFamily="34" charset="-120"/>
+              </a:rPr>
+              <a:t>Super Mario Odyssey</a:t>
+            </a:r>
+            <a:endParaRPr lang="en-US" sz="1800" dirty="0"/>
+          </a:p>
+        </p:txBody>
+      </p:sp>
+      <p:sp>
+        <p:nvSpPr>
+          <p:cNvPr id="22" name="Text 20"/>
+          <p:cNvSpPr/>
+          <p:nvPr/>
+        </p:nvSpPr>
+        <p:spPr>
+          <a:xfrm>
+            <a:off x="8382000" y="4892040"/>
+            <a:ext cx="2956560" cy="365760"/>
+          </a:xfrm>
+          <a:prstGeom prst="rect">
+            <a:avLst/>
+          </a:prstGeom>
+          <a:noFill/>
+          <a:ln/>
+        </p:spPr>
+        <p:txBody>
+          <a:bodyPr wrap="square" lIns="0" tIns="0" rIns="0" bIns="0" rtlCol="0" anchor="ctr"/>
+          <a:lstStyle/>
+          <a:p>
+            <a:pPr algn="ctr" indent="0" marL="0">
+              <a:buNone/>
+            </a:pPr>
+            <a:r>
+              <a:rPr lang="en-US" sz="1250" dirty="0">
+                <a:solidFill>
+                  <a:srgbClr val="ECECF3"/>
+                </a:solidFill>
+                <a:latin typeface="Calibri" pitchFamily="34" charset="0"/>
+                <a:ea typeface="Calibri" pitchFamily="34" charset="-122"/>
+                <a:cs typeface="Calibri" pitchFamily="34" charset="-120"/>
+              </a:rPr>
+              <a:t>Action · Light · ★ 9.4</a:t>
+            </a:r>
+            <a:endParaRPr lang="en-US" sz="1250" dirty="0"/>
+          </a:p>
+        </p:txBody>
+      </p:sp>
+      <p:sp>
+        <p:nvSpPr>
+          <p:cNvPr id="23" name="Text 21"/>
+          <p:cNvSpPr/>
+          <p:nvPr/>
+        </p:nvSpPr>
+        <p:spPr>
+          <a:xfrm>
+            <a:off x="640080" y="5669280"/>
+            <a:ext cx="10881360" cy="365760"/>
+          </a:xfrm>
+          <a:prstGeom prst="rect">
+            <a:avLst/>
+          </a:prstGeom>
+          <a:noFill/>
+          <a:ln/>
+        </p:spPr>
+        <p:txBody>
+          <a:bodyPr wrap="square" lIns="0" tIns="0" rIns="0" bIns="0" rtlCol="0" anchor="ctr"/>
+          <a:lstStyle/>
+          <a:p>
+            <a:pPr algn="ctr" indent="0" marL="0">
+              <a:buNone/>
+            </a:pPr>
+            <a:r>
+              <a:rPr lang="en-US" sz="1300" i="1" dirty="0">
+                <a:solidFill>
+                  <a:srgbClr val="9AA0B4"/>
+                </a:solidFill>
+                <a:latin typeface="Calibri" pitchFamily="34" charset="0"/>
+                <a:ea typeface="Calibri" pitchFamily="34" charset="-122"/>
+                <a:cs typeface="Calibri" pitchFamily="34" charset="-120"/>
+              </a:rPr>
+              <a:t>Same mood → same pick, every time. The C engine is deterministic.</a:t>
+            </a:r>
+            <a:endParaRPr lang="en-US" sz="1300" dirty="0"/>
+          </a:p>
+        </p:txBody>
+      </p:sp>
+      <p:sp>
+        <p:nvSpPr>
+          <p:cNvPr id="24" name="Text 22"/>
+          <p:cNvSpPr/>
+          <p:nvPr/>
+        </p:nvSpPr>
+        <p:spPr>
+          <a:xfrm>
+            <a:off x="640080" y="6400800"/>
+            <a:ext cx="8229600" cy="274320"/>
+          </a:xfrm>
+          <a:prstGeom prst="rect">
+            <a:avLst/>
+          </a:prstGeom>
+          <a:noFill/>
+          <a:ln/>
+        </p:spPr>
+        <p:txBody>
+          <a:bodyPr wrap="square" lIns="0" tIns="0" rIns="0" bIns="0" rtlCol="0" anchor="ctr"/>
+          <a:lstStyle/>
+          <a:p>
+            <a:pPr indent="0" marL="0">
+              <a:buNone/>
+            </a:pPr>
+            <a:r>
+              <a:rPr lang="en-US" sz="900" b="1" dirty="0">
+                <a:solidFill>
+                  <a:srgbClr val="FFB347"/>
+                </a:solidFill>
+                <a:latin typeface="Calibri" pitchFamily="34" charset="0"/>
+                <a:ea typeface="Calibri" pitchFamily="34" charset="-122"/>
+                <a:cs typeface="Calibri" pitchFamily="34" charset="-120"/>
+              </a:rPr>
+              <a:t>CINEMATCH</a:t>
+            </a:r>
+            <a:pPr indent="0" marL="0">
+              <a:buNone/>
+            </a:pPr>
+            <a:r>
+              <a:rPr lang="en-US" sz="900" dirty="0">
+                <a:solidFill>
+                  <a:srgbClr val="9AA0B4"/>
+                </a:solidFill>
+                <a:latin typeface="Calibri" pitchFamily="34" charset="0"/>
+                <a:ea typeface="Calibri" pitchFamily="34" charset="-122"/>
+                <a:cs typeface="Calibri" pitchFamily="34" charset="-120"/>
+              </a:rPr>
+              <a:t>   ·   AI-Powered Movie &amp; Game Recommender</a:t>
+            </a:r>
+            <a:endParaRPr lang="en-US" sz="900" dirty="0"/>
+          </a:p>
+        </p:txBody>
+      </p:sp>
+      <p:sp>
+        <p:nvSpPr>
+          <p:cNvPr id="25" name="Text 23"/>
+          <p:cNvSpPr/>
+          <p:nvPr/>
+        </p:nvSpPr>
+        <p:spPr>
+          <a:xfrm>
+            <a:off x="11064240" y="6400800"/>
+            <a:ext cx="457200" cy="274320"/>
+          </a:xfrm>
+          <a:prstGeom prst="rect">
+            <a:avLst/>
+          </a:prstGeom>
+          <a:noFill/>
+          <a:ln/>
+        </p:spPr>
+        <p:txBody>
+          <a:bodyPr wrap="square" lIns="0" tIns="0" rIns="0" bIns="0" rtlCol="0" anchor="ctr"/>
+          <a:lstStyle/>
+          <a:p>
+            <a:pPr algn="r" indent="0" marL="0">
+              <a:buNone/>
+            </a:pPr>
+            <a:r>
+              <a:rPr lang="en-US" sz="900" dirty="0">
+                <a:solidFill>
+                  <a:srgbClr val="9AA0B4"/>
+                </a:solidFill>
+                <a:latin typeface="Calibri" pitchFamily="34" charset="0"/>
+                <a:ea typeface="Calibri" pitchFamily="34" charset="-122"/>
+                <a:cs typeface="Calibri" pitchFamily="34" charset="-120"/>
+              </a:rPr>
+              <a:t>13</a:t>
+            </a:r>
+            <a:endParaRPr lang="en-US" sz="900" dirty="0"/>
+          </a:p>
+        </p:txBody>
+      </p:sp>
+    </p:spTree>
+  </p:cSld>
+  <p:clrMapOvr>
+    <a:masterClrMapping/>
+  </p:clrMapOvr>
+</p:sld>
+</file>
+
+<file path=ppt/slides/slide14.xml><?xml version="1.0" encoding="utf-8"?>
+<p:sld xmlns:a="http://schemas.openxmlformats.org/drawingml/2006/main" xmlns:r="http://schemas.openxmlformats.org/officeDocument/2006/relationships" xmlns:p="http://schemas.openxmlformats.org/presentationml/2006/main">
+  <p:cSld name="Slide 14">
+    <p:bg>
+      <p:bgPr>
+        <a:solidFill>
+          <a:srgbClr val="0F1117"/>
+        </a:solidFill>
+      </p:bgPr>
+    </p:bg>
+    <p:spTree>
+      <p:nvGrpSpPr>
+        <p:cNvPr id="1" name=""/>
+        <p:cNvGrpSpPr/>
+        <p:nvPr/>
+      </p:nvGrpSpPr>
+      <p:grpSpPr>
+        <a:xfrm>
+          <a:off x="0" y="0"/>
+          <a:ext cx="0" cy="0"/>
+          <a:chOff x="0" y="0"/>
+          <a:chExt cx="0" cy="0"/>
+        </a:xfrm>
+      </p:grpSpPr>
+      <p:sp>
+        <p:nvSpPr>
+          <p:cNvPr id="2" name="Shape 0"/>
+          <p:cNvSpPr/>
+          <p:nvPr/>
+        </p:nvSpPr>
+        <p:spPr>
+          <a:xfrm>
+            <a:off x="640080" y="566928"/>
+            <a:ext cx="146304" cy="146304"/>
+          </a:xfrm>
+          <a:prstGeom prst="ellipse">
+            <a:avLst/>
+          </a:prstGeom>
+          <a:solidFill>
+            <a:srgbClr val="FFB347"/>
+          </a:solidFill>
+          <a:ln/>
+        </p:spPr>
+      </p:sp>
+      <p:sp>
+        <p:nvSpPr>
+          <p:cNvPr id="3" name="Text 1"/>
+          <p:cNvSpPr/>
+          <p:nvPr/>
+        </p:nvSpPr>
+        <p:spPr>
+          <a:xfrm>
+            <a:off x="896112" y="457200"/>
+            <a:ext cx="9144000" cy="365760"/>
+          </a:xfrm>
+          <a:prstGeom prst="rect">
+            <a:avLst/>
+          </a:prstGeom>
+          <a:noFill/>
+          <a:ln/>
+        </p:spPr>
+        <p:txBody>
+          <a:bodyPr wrap="square" lIns="0" tIns="0" rIns="0" bIns="0" rtlCol="0" anchor="ctr"/>
+          <a:lstStyle/>
+          <a:p>
+            <a:pPr indent="0" marL="0">
+              <a:buNone/>
+            </a:pPr>
+            <a:r>
+              <a:rPr lang="en-US" sz="1200" b="1" spc="300" kern="0" dirty="0">
+                <a:solidFill>
+                  <a:srgbClr val="FFB347"/>
+                </a:solidFill>
+                <a:latin typeface="Calibri" pitchFamily="34" charset="0"/>
+                <a:ea typeface="Calibri" pitchFamily="34" charset="-122"/>
+                <a:cs typeface="Calibri" pitchFamily="34" charset="-120"/>
+              </a:rPr>
+              <a:t>UNDER THE HOOD</a:t>
+            </a:r>
+            <a:endParaRPr lang="en-US" sz="1200" dirty="0"/>
+          </a:p>
+        </p:txBody>
+      </p:sp>
+      <p:sp>
+        <p:nvSpPr>
+          <p:cNvPr id="4" name="Text 2"/>
+          <p:cNvSpPr/>
+          <p:nvPr/>
+        </p:nvSpPr>
+        <p:spPr>
+          <a:xfrm>
+            <a:off x="640080" y="777240"/>
+            <a:ext cx="10881360" cy="731520"/>
+          </a:xfrm>
+          <a:prstGeom prst="rect">
+            <a:avLst/>
+          </a:prstGeom>
+          <a:noFill/>
+          <a:ln/>
+        </p:spPr>
+        <p:txBody>
+          <a:bodyPr wrap="square" lIns="0" tIns="0" rIns="0" bIns="0" rtlCol="0" anchor="ctr"/>
+          <a:lstStyle/>
+          <a:p>
+            <a:pPr indent="0" marL="0">
+              <a:buNone/>
+            </a:pPr>
+            <a:r>
+              <a:rPr lang="en-US" sz="3200" b="1" dirty="0">
+                <a:solidFill>
+                  <a:srgbClr val="ECECF3"/>
+                </a:solidFill>
+                <a:latin typeface="Georgia" pitchFamily="34" charset="0"/>
+                <a:ea typeface="Georgia" pitchFamily="34" charset="-122"/>
+                <a:cs typeface="Georgia" pitchFamily="34" charset="-120"/>
+              </a:rPr>
+              <a:t>Tech stack &amp; open data</a:t>
+            </a:r>
+            <a:endParaRPr lang="en-US" sz="3200" dirty="0"/>
+          </a:p>
+        </p:txBody>
+      </p:sp>
+      <p:sp>
+        <p:nvSpPr>
+          <p:cNvPr id="5" name="Shape 3"/>
+          <p:cNvSpPr/>
+          <p:nvPr/>
+        </p:nvSpPr>
+        <p:spPr>
+          <a:xfrm>
+            <a:off x="640080" y="2103120"/>
+            <a:ext cx="2446020" cy="1554480"/>
+          </a:xfrm>
+          <a:prstGeom prst="roundRect">
+            <a:avLst>
+              <a:gd name="adj" fmla="val 4706"/>
+            </a:avLst>
+          </a:prstGeom>
+          <a:solidFill>
+            <a:srgbClr val="11141D"/>
+          </a:solidFill>
+          <a:ln w="12700">
+            <a:solidFill>
+              <a:srgbClr val="2A2F3E"/>
+            </a:solidFill>
+            <a:prstDash val="solid"/>
+          </a:ln>
+          <a:effectLst>
+            <a:outerShdw sx="100000" sy="100000" kx="0" ky="0" algn="bl" rotWithShape="0" blurRad="101600" dist="38100" dir="8100000">
+              <a:srgbClr val="000000">
+                <a:alpha val="35000"/>
+              </a:srgbClr>
+            </a:outerShdw>
+          </a:effectLst>
+        </p:spPr>
+      </p:sp>
+      <p:sp>
+        <p:nvSpPr>
+          <p:cNvPr id="6" name="Shape 4"/>
+          <p:cNvSpPr/>
+          <p:nvPr/>
+        </p:nvSpPr>
+        <p:spPr>
+          <a:xfrm>
+            <a:off x="640080" y="2103120"/>
+            <a:ext cx="2446020" cy="82296"/>
+          </a:xfrm>
+          <a:prstGeom prst="rect">
+            <a:avLst/>
+          </a:prstGeom>
+          <a:solidFill>
+            <a:srgbClr val="FFB347"/>
+          </a:solidFill>
+          <a:ln/>
+        </p:spPr>
+      </p:sp>
+      <p:sp>
+        <p:nvSpPr>
+          <p:cNvPr id="7" name="Text 5"/>
+          <p:cNvSpPr/>
+          <p:nvPr/>
+        </p:nvSpPr>
+        <p:spPr>
+          <a:xfrm>
+            <a:off x="822960" y="2423160"/>
+            <a:ext cx="2080260" cy="365760"/>
+          </a:xfrm>
+          <a:prstGeom prst="rect">
+            <a:avLst/>
+          </a:prstGeom>
+          <a:noFill/>
+          <a:ln/>
+        </p:spPr>
+        <p:txBody>
+          <a:bodyPr wrap="square" lIns="0" tIns="0" rIns="0" bIns="0" rtlCol="0" anchor="ctr"/>
+          <a:lstStyle/>
+          <a:p>
+            <a:pPr indent="0" marL="0">
+              <a:buNone/>
+            </a:pPr>
+            <a:r>
+              <a:rPr lang="en-US" sz="1100" b="1" spc="100" kern="0" dirty="0">
+                <a:solidFill>
+                  <a:srgbClr val="9AA0B4"/>
+                </a:solidFill>
+                <a:latin typeface="Calibri" pitchFamily="34" charset="0"/>
+                <a:ea typeface="Calibri" pitchFamily="34" charset="-122"/>
+                <a:cs typeface="Calibri" pitchFamily="34" charset="-120"/>
+              </a:rPr>
+              <a:t>ENGINE</a:t>
+            </a:r>
+            <a:endParaRPr lang="en-US" sz="1100" dirty="0"/>
+          </a:p>
+        </p:txBody>
+      </p:sp>
+      <p:sp>
+        <p:nvSpPr>
+          <p:cNvPr id="8" name="Text 6"/>
+          <p:cNvSpPr/>
+          <p:nvPr/>
+        </p:nvSpPr>
+        <p:spPr>
+          <a:xfrm>
+            <a:off x="822960" y="2834640"/>
+            <a:ext cx="2080260" cy="640080"/>
+          </a:xfrm>
+          <a:prstGeom prst="rect">
+            <a:avLst/>
+          </a:prstGeom>
+          <a:noFill/>
+          <a:ln/>
+        </p:spPr>
+        <p:txBody>
+          <a:bodyPr wrap="square" lIns="0" tIns="0" rIns="0" bIns="0" rtlCol="0" anchor="ctr"/>
+          <a:lstStyle/>
+          <a:p>
+            <a:pPr indent="0" marL="0">
+              <a:buNone/>
+            </a:pPr>
+            <a:r>
+              <a:rPr lang="en-US" sz="1500" b="1" dirty="0">
+                <a:solidFill>
+                  <a:srgbClr val="ECECF3"/>
+                </a:solidFill>
+                <a:latin typeface="Calibri" pitchFamily="34" charset="0"/>
+                <a:ea typeface="Calibri" pitchFamily="34" charset="-122"/>
+                <a:cs typeface="Calibri" pitchFamily="34" charset="-120"/>
+              </a:rPr>
+              <a:t>C → cinematch.exe</a:t>
+            </a:r>
+            <a:endParaRPr lang="en-US" sz="1500" dirty="0"/>
+          </a:p>
+        </p:txBody>
+      </p:sp>
+      <p:sp>
+        <p:nvSpPr>
+          <p:cNvPr id="9" name="Shape 7"/>
+          <p:cNvSpPr/>
+          <p:nvPr/>
+        </p:nvSpPr>
+        <p:spPr>
+          <a:xfrm>
+            <a:off x="3451860" y="2103120"/>
+            <a:ext cx="2446020" cy="1554480"/>
+          </a:xfrm>
+          <a:prstGeom prst="roundRect">
+            <a:avLst>
+              <a:gd name="adj" fmla="val 4706"/>
+            </a:avLst>
+          </a:prstGeom>
+          <a:solidFill>
+            <a:srgbClr val="11141D"/>
+          </a:solidFill>
+          <a:ln w="12700">
+            <a:solidFill>
+              <a:srgbClr val="2A2F3E"/>
+            </a:solidFill>
+            <a:prstDash val="solid"/>
+          </a:ln>
+          <a:effectLst>
+            <a:outerShdw sx="100000" sy="100000" kx="0" ky="0" algn="bl" rotWithShape="0" blurRad="101600" dist="38100" dir="8100000">
+              <a:srgbClr val="000000">
+                <a:alpha val="35000"/>
+              </a:srgbClr>
+            </a:outerShdw>
+          </a:effectLst>
+        </p:spPr>
+      </p:sp>
+      <p:sp>
+        <p:nvSpPr>
+          <p:cNvPr id="10" name="Shape 8"/>
+          <p:cNvSpPr/>
+          <p:nvPr/>
+        </p:nvSpPr>
+        <p:spPr>
+          <a:xfrm>
+            <a:off x="3451860" y="2103120"/>
+            <a:ext cx="2446020" cy="82296"/>
+          </a:xfrm>
+          <a:prstGeom prst="rect">
+            <a:avLst/>
+          </a:prstGeom>
+          <a:solidFill>
+            <a:srgbClr val="FFB347"/>
+          </a:solidFill>
+          <a:ln/>
+        </p:spPr>
+      </p:sp>
+      <p:sp>
+        <p:nvSpPr>
+          <p:cNvPr id="11" name="Text 9"/>
+          <p:cNvSpPr/>
+          <p:nvPr/>
+        </p:nvSpPr>
+        <p:spPr>
+          <a:xfrm>
+            <a:off x="3634740" y="2423160"/>
+            <a:ext cx="2080260" cy="365760"/>
+          </a:xfrm>
+          <a:prstGeom prst="rect">
+            <a:avLst/>
+          </a:prstGeom>
+          <a:noFill/>
+          <a:ln/>
+        </p:spPr>
+        <p:txBody>
+          <a:bodyPr wrap="square" lIns="0" tIns="0" rIns="0" bIns="0" rtlCol="0" anchor="ctr"/>
+          <a:lstStyle/>
+          <a:p>
+            <a:pPr indent="0" marL="0">
+              <a:buNone/>
+            </a:pPr>
+            <a:r>
+              <a:rPr lang="en-US" sz="1100" b="1" spc="100" kern="0" dirty="0">
+                <a:solidFill>
+                  <a:srgbClr val="9AA0B4"/>
+                </a:solidFill>
+                <a:latin typeface="Calibri" pitchFamily="34" charset="0"/>
+                <a:ea typeface="Calibri" pitchFamily="34" charset="-122"/>
+                <a:cs typeface="Calibri" pitchFamily="34" charset="-120"/>
+              </a:rPr>
+              <a:t>BACKEND</a:t>
+            </a:r>
+            <a:endParaRPr lang="en-US" sz="1100" dirty="0"/>
+          </a:p>
+        </p:txBody>
+      </p:sp>
+      <p:sp>
+        <p:nvSpPr>
+          <p:cNvPr id="12" name="Text 10"/>
+          <p:cNvSpPr/>
+          <p:nvPr/>
+        </p:nvSpPr>
+        <p:spPr>
+          <a:xfrm>
+            <a:off x="3634740" y="2834640"/>
+            <a:ext cx="2080260" cy="640080"/>
+          </a:xfrm>
+          <a:prstGeom prst="rect">
+            <a:avLst/>
+          </a:prstGeom>
+          <a:noFill/>
+          <a:ln/>
+        </p:spPr>
+        <p:txBody>
+          <a:bodyPr wrap="square" lIns="0" tIns="0" rIns="0" bIns="0" rtlCol="0" anchor="ctr"/>
+          <a:lstStyle/>
+          <a:p>
+            <a:pPr indent="0" marL="0">
+              <a:buNone/>
+            </a:pPr>
+            <a:r>
+              <a:rPr lang="en-US" sz="1500" b="1" dirty="0">
+                <a:solidFill>
+                  <a:srgbClr val="ECECF3"/>
+                </a:solidFill>
+                <a:latin typeface="Calibri" pitchFamily="34" charset="0"/>
+                <a:ea typeface="Calibri" pitchFamily="34" charset="-122"/>
+                <a:cs typeface="Calibri" pitchFamily="34" charset="-120"/>
+              </a:rPr>
+              <a:t>Node.js + Express</a:t>
+            </a:r>
+            <a:endParaRPr lang="en-US" sz="1500" dirty="0"/>
+          </a:p>
+        </p:txBody>
+      </p:sp>
+      <p:sp>
+        <p:nvSpPr>
+          <p:cNvPr id="13" name="Shape 11"/>
+          <p:cNvSpPr/>
+          <p:nvPr/>
+        </p:nvSpPr>
+        <p:spPr>
+          <a:xfrm>
+            <a:off x="6263640" y="2103120"/>
+            <a:ext cx="2446020" cy="1554480"/>
+          </a:xfrm>
+          <a:prstGeom prst="roundRect">
+            <a:avLst>
+              <a:gd name="adj" fmla="val 4706"/>
+            </a:avLst>
+          </a:prstGeom>
+          <a:solidFill>
+            <a:srgbClr val="11141D"/>
+          </a:solidFill>
+          <a:ln w="12700">
+            <a:solidFill>
+              <a:srgbClr val="2A2F3E"/>
+            </a:solidFill>
+            <a:prstDash val="solid"/>
+          </a:ln>
+          <a:effectLst>
+            <a:outerShdw sx="100000" sy="100000" kx="0" ky="0" algn="bl" rotWithShape="0" blurRad="101600" dist="38100" dir="8100000">
+              <a:srgbClr val="000000">
+                <a:alpha val="35000"/>
+              </a:srgbClr>
+            </a:outerShdw>
+          </a:effectLst>
+        </p:spPr>
+      </p:sp>
+      <p:sp>
+        <p:nvSpPr>
+          <p:cNvPr id="14" name="Shape 12"/>
+          <p:cNvSpPr/>
+          <p:nvPr/>
+        </p:nvSpPr>
+        <p:spPr>
+          <a:xfrm>
+            <a:off x="6263640" y="2103120"/>
+            <a:ext cx="2446020" cy="82296"/>
+          </a:xfrm>
+          <a:prstGeom prst="rect">
+            <a:avLst/>
+          </a:prstGeom>
+          <a:solidFill>
+            <a:srgbClr val="FFB347"/>
+          </a:solidFill>
+          <a:ln/>
+        </p:spPr>
+      </p:sp>
+      <p:sp>
+        <p:nvSpPr>
+          <p:cNvPr id="15" name="Text 13"/>
+          <p:cNvSpPr/>
+          <p:nvPr/>
+        </p:nvSpPr>
+        <p:spPr>
+          <a:xfrm>
+            <a:off x="6446520" y="2423160"/>
+            <a:ext cx="2080260" cy="365760"/>
+          </a:xfrm>
+          <a:prstGeom prst="rect">
+            <a:avLst/>
+          </a:prstGeom>
+          <a:noFill/>
+          <a:ln/>
+        </p:spPr>
+        <p:txBody>
+          <a:bodyPr wrap="square" lIns="0" tIns="0" rIns="0" bIns="0" rtlCol="0" anchor="ctr"/>
+          <a:lstStyle/>
+          <a:p>
+            <a:pPr indent="0" marL="0">
+              <a:buNone/>
+            </a:pPr>
+            <a:r>
+              <a:rPr lang="en-US" sz="1100" b="1" spc="100" kern="0" dirty="0">
+                <a:solidFill>
+                  <a:srgbClr val="9AA0B4"/>
+                </a:solidFill>
+                <a:latin typeface="Calibri" pitchFamily="34" charset="0"/>
+                <a:ea typeface="Calibri" pitchFamily="34" charset="-122"/>
+                <a:cs typeface="Calibri" pitchFamily="34" charset="-120"/>
+              </a:rPr>
+              <a:t>FRONTEND</a:t>
+            </a:r>
+            <a:endParaRPr lang="en-US" sz="1100" dirty="0"/>
+          </a:p>
+        </p:txBody>
+      </p:sp>
+      <p:sp>
+        <p:nvSpPr>
+          <p:cNvPr id="16" name="Text 14"/>
+          <p:cNvSpPr/>
+          <p:nvPr/>
+        </p:nvSpPr>
+        <p:spPr>
+          <a:xfrm>
+            <a:off x="6446520" y="2834640"/>
+            <a:ext cx="2080260" cy="640080"/>
+          </a:xfrm>
+          <a:prstGeom prst="rect">
+            <a:avLst/>
+          </a:prstGeom>
+          <a:noFill/>
+          <a:ln/>
+        </p:spPr>
+        <p:txBody>
+          <a:bodyPr wrap="square" lIns="0" tIns="0" rIns="0" bIns="0" rtlCol="0" anchor="ctr"/>
+          <a:lstStyle/>
+          <a:p>
+            <a:pPr indent="0" marL="0">
+              <a:buNone/>
+            </a:pPr>
+            <a:r>
+              <a:rPr lang="en-US" sz="1500" b="1" dirty="0">
+                <a:solidFill>
+                  <a:srgbClr val="ECECF3"/>
+                </a:solidFill>
+                <a:latin typeface="Calibri" pitchFamily="34" charset="0"/>
+                <a:ea typeface="Calibri" pitchFamily="34" charset="-122"/>
+                <a:cs typeface="Calibri" pitchFamily="34" charset="-120"/>
+              </a:rPr>
+              <a:t>Vite + React</a:t>
+            </a:r>
+            <a:endParaRPr lang="en-US" sz="1500" dirty="0"/>
+          </a:p>
+        </p:txBody>
+      </p:sp>
+      <p:sp>
+        <p:nvSpPr>
+          <p:cNvPr id="17" name="Shape 15"/>
+          <p:cNvSpPr/>
+          <p:nvPr/>
+        </p:nvSpPr>
+        <p:spPr>
+          <a:xfrm>
+            <a:off x="9075420" y="2103120"/>
+            <a:ext cx="2446020" cy="1554480"/>
+          </a:xfrm>
+          <a:prstGeom prst="roundRect">
+            <a:avLst>
+              <a:gd name="adj" fmla="val 4706"/>
+            </a:avLst>
+          </a:prstGeom>
+          <a:solidFill>
+            <a:srgbClr val="11141D"/>
+          </a:solidFill>
+          <a:ln w="12700">
+            <a:solidFill>
+              <a:srgbClr val="2A2F3E"/>
+            </a:solidFill>
+            <a:prstDash val="solid"/>
+          </a:ln>
+          <a:effectLst>
+            <a:outerShdw sx="100000" sy="100000" kx="0" ky="0" algn="bl" rotWithShape="0" blurRad="101600" dist="38100" dir="8100000">
+              <a:srgbClr val="000000">
+                <a:alpha val="35000"/>
+              </a:srgbClr>
+            </a:outerShdw>
+          </a:effectLst>
+        </p:spPr>
+      </p:sp>
+      <p:sp>
+        <p:nvSpPr>
+          <p:cNvPr id="18" name="Shape 16"/>
+          <p:cNvSpPr/>
+          <p:nvPr/>
+        </p:nvSpPr>
+        <p:spPr>
+          <a:xfrm>
+            <a:off x="9075420" y="2103120"/>
+            <a:ext cx="2446020" cy="82296"/>
+          </a:xfrm>
+          <a:prstGeom prst="rect">
+            <a:avLst/>
+          </a:prstGeom>
+          <a:solidFill>
+            <a:srgbClr val="FFB347"/>
+          </a:solidFill>
+          <a:ln/>
+        </p:spPr>
+      </p:sp>
+      <p:sp>
+        <p:nvSpPr>
+          <p:cNvPr id="19" name="Text 17"/>
+          <p:cNvSpPr/>
+          <p:nvPr/>
+        </p:nvSpPr>
+        <p:spPr>
+          <a:xfrm>
+            <a:off x="9258300" y="2423160"/>
+            <a:ext cx="2080260" cy="365760"/>
+          </a:xfrm>
+          <a:prstGeom prst="rect">
+            <a:avLst/>
+          </a:prstGeom>
+          <a:noFill/>
+          <a:ln/>
+        </p:spPr>
+        <p:txBody>
+          <a:bodyPr wrap="square" lIns="0" tIns="0" rIns="0" bIns="0" rtlCol="0" anchor="ctr"/>
+          <a:lstStyle/>
+          <a:p>
+            <a:pPr indent="0" marL="0">
+              <a:buNone/>
+            </a:pPr>
+            <a:r>
+              <a:rPr lang="en-US" sz="1100" b="1" spc="100" kern="0" dirty="0">
+                <a:solidFill>
+                  <a:srgbClr val="9AA0B4"/>
+                </a:solidFill>
+                <a:latin typeface="Calibri" pitchFamily="34" charset="0"/>
+                <a:ea typeface="Calibri" pitchFamily="34" charset="-122"/>
+                <a:cs typeface="Calibri" pitchFamily="34" charset="-120"/>
+              </a:rPr>
+              <a:t>PACKAGES</a:t>
+            </a:r>
+            <a:endParaRPr lang="en-US" sz="1100" dirty="0"/>
+          </a:p>
+        </p:txBody>
+      </p:sp>
+      <p:sp>
+        <p:nvSpPr>
+          <p:cNvPr id="20" name="Text 18"/>
+          <p:cNvSpPr/>
+          <p:nvPr/>
+        </p:nvSpPr>
+        <p:spPr>
+          <a:xfrm>
+            <a:off x="9258300" y="2834640"/>
+            <a:ext cx="2080260" cy="640080"/>
+          </a:xfrm>
+          <a:prstGeom prst="rect">
+            <a:avLst/>
+          </a:prstGeom>
+          <a:noFill/>
+          <a:ln/>
+        </p:spPr>
+        <p:txBody>
+          <a:bodyPr wrap="square" lIns="0" tIns="0" rIns="0" bIns="0" rtlCol="0" anchor="ctr"/>
+          <a:lstStyle/>
+          <a:p>
+            <a:pPr indent="0" marL="0">
+              <a:buNone/>
+            </a:pPr>
+            <a:r>
+              <a:rPr lang="en-US" sz="1500" b="1" dirty="0">
+                <a:solidFill>
+                  <a:srgbClr val="ECECF3"/>
+                </a:solidFill>
+                <a:latin typeface="Calibri" pitchFamily="34" charset="0"/>
+                <a:ea typeface="Calibri" pitchFamily="34" charset="-122"/>
+                <a:cs typeface="Calibri" pitchFamily="34" charset="-120"/>
+              </a:rPr>
+              <a:t>pnpm</a:t>
+            </a:r>
+            <a:endParaRPr lang="en-US" sz="1500" dirty="0"/>
+          </a:p>
+        </p:txBody>
+      </p:sp>
+      <p:sp>
+        <p:nvSpPr>
+          <p:cNvPr id="21" name="Shape 19"/>
+          <p:cNvSpPr/>
+          <p:nvPr/>
+        </p:nvSpPr>
+        <p:spPr>
+          <a:xfrm>
+            <a:off x="640080" y="4023360"/>
+            <a:ext cx="2446020" cy="1554480"/>
+          </a:xfrm>
+          <a:prstGeom prst="roundRect">
+            <a:avLst>
+              <a:gd name="adj" fmla="val 4706"/>
+            </a:avLst>
+          </a:prstGeom>
+          <a:solidFill>
+            <a:srgbClr val="11141D"/>
+          </a:solidFill>
+          <a:ln w="12700">
+            <a:solidFill>
+              <a:srgbClr val="2A2F3E"/>
+            </a:solidFill>
+            <a:prstDash val="solid"/>
+          </a:ln>
+          <a:effectLst>
+            <a:outerShdw sx="100000" sy="100000" kx="0" ky="0" algn="bl" rotWithShape="0" blurRad="101600" dist="38100" dir="8100000">
+              <a:srgbClr val="000000">
+                <a:alpha val="35000"/>
+              </a:srgbClr>
+            </a:outerShdw>
+          </a:effectLst>
+        </p:spPr>
+      </p:sp>
+      <p:sp>
+        <p:nvSpPr>
+          <p:cNvPr id="22" name="Shape 20"/>
+          <p:cNvSpPr/>
+          <p:nvPr/>
+        </p:nvSpPr>
+        <p:spPr>
+          <a:xfrm>
+            <a:off x="640080" y="4023360"/>
+            <a:ext cx="2446020" cy="82296"/>
+          </a:xfrm>
+          <a:prstGeom prst="rect">
+            <a:avLst/>
+          </a:prstGeom>
+          <a:solidFill>
+            <a:srgbClr val="FFB347"/>
+          </a:solidFill>
+          <a:ln/>
+        </p:spPr>
+      </p:sp>
+      <p:sp>
+        <p:nvSpPr>
+          <p:cNvPr id="23" name="Text 21"/>
+          <p:cNvSpPr/>
+          <p:nvPr/>
+        </p:nvSpPr>
+        <p:spPr>
+          <a:xfrm>
+            <a:off x="822960" y="4343400"/>
+            <a:ext cx="2080260" cy="365760"/>
+          </a:xfrm>
+          <a:prstGeom prst="rect">
+            <a:avLst/>
+          </a:prstGeom>
+          <a:noFill/>
+          <a:ln/>
+        </p:spPr>
+        <p:txBody>
+          <a:bodyPr wrap="square" lIns="0" tIns="0" rIns="0" bIns="0" rtlCol="0" anchor="ctr"/>
+          <a:lstStyle/>
+          <a:p>
+            <a:pPr indent="0" marL="0">
+              <a:buNone/>
+            </a:pPr>
+            <a:r>
+              <a:rPr lang="en-US" sz="1100" b="1" spc="100" kern="0" dirty="0">
+                <a:solidFill>
+                  <a:srgbClr val="9AA0B4"/>
+                </a:solidFill>
+                <a:latin typeface="Calibri" pitchFamily="34" charset="0"/>
+                <a:ea typeface="Calibri" pitchFamily="34" charset="-122"/>
+                <a:cs typeface="Calibri" pitchFamily="34" charset="-120"/>
+              </a:rPr>
+              <a:t>AI</a:t>
+            </a:r>
+            <a:endParaRPr lang="en-US" sz="1100" dirty="0"/>
+          </a:p>
+        </p:txBody>
+      </p:sp>
+      <p:sp>
+        <p:nvSpPr>
+          <p:cNvPr id="24" name="Text 22"/>
+          <p:cNvSpPr/>
+          <p:nvPr/>
+        </p:nvSpPr>
+        <p:spPr>
+          <a:xfrm>
+            <a:off x="822960" y="4754880"/>
+            <a:ext cx="2080260" cy="640080"/>
+          </a:xfrm>
+          <a:prstGeom prst="rect">
+            <a:avLst/>
+          </a:prstGeom>
+          <a:noFill/>
+          <a:ln/>
+        </p:spPr>
+        <p:txBody>
+          <a:bodyPr wrap="square" lIns="0" tIns="0" rIns="0" bIns="0" rtlCol="0" anchor="ctr"/>
+          <a:lstStyle/>
+          <a:p>
+            <a:pPr indent="0" marL="0">
+              <a:buNone/>
+            </a:pPr>
+            <a:r>
+              <a:rPr lang="en-US" sz="1500" b="1" dirty="0">
+                <a:solidFill>
+                  <a:srgbClr val="ECECF3"/>
+                </a:solidFill>
+                <a:latin typeface="Calibri" pitchFamily="34" charset="0"/>
+                <a:ea typeface="Calibri" pitchFamily="34" charset="-122"/>
+                <a:cs typeface="Calibri" pitchFamily="34" charset="-120"/>
+              </a:rPr>
+              <a:t>OpenRouter (Qwen3)</a:t>
+            </a:r>
+            <a:endParaRPr lang="en-US" sz="1500" dirty="0"/>
+          </a:p>
+        </p:txBody>
+      </p:sp>
+      <p:sp>
+        <p:nvSpPr>
+          <p:cNvPr id="25" name="Shape 23"/>
+          <p:cNvSpPr/>
+          <p:nvPr/>
+        </p:nvSpPr>
+        <p:spPr>
+          <a:xfrm>
+            <a:off x="3451860" y="4023360"/>
+            <a:ext cx="2446020" cy="1554480"/>
+          </a:xfrm>
+          <a:prstGeom prst="roundRect">
+            <a:avLst>
+              <a:gd name="adj" fmla="val 4706"/>
+            </a:avLst>
+          </a:prstGeom>
+          <a:solidFill>
+            <a:srgbClr val="11141D"/>
+          </a:solidFill>
+          <a:ln w="12700">
+            <a:solidFill>
+              <a:srgbClr val="2A2F3E"/>
+            </a:solidFill>
+            <a:prstDash val="solid"/>
+          </a:ln>
+          <a:effectLst>
+            <a:outerShdw sx="100000" sy="100000" kx="0" ky="0" algn="bl" rotWithShape="0" blurRad="101600" dist="38100" dir="8100000">
+              <a:srgbClr val="000000">
+                <a:alpha val="35000"/>
+              </a:srgbClr>
+            </a:outerShdw>
+          </a:effectLst>
+        </p:spPr>
+      </p:sp>
+      <p:sp>
+        <p:nvSpPr>
+          <p:cNvPr id="26" name="Shape 24"/>
+          <p:cNvSpPr/>
+          <p:nvPr/>
+        </p:nvSpPr>
+        <p:spPr>
+          <a:xfrm>
+            <a:off x="3451860" y="4023360"/>
+            <a:ext cx="2446020" cy="82296"/>
+          </a:xfrm>
+          <a:prstGeom prst="rect">
+            <a:avLst/>
+          </a:prstGeom>
+          <a:solidFill>
+            <a:srgbClr val="FFB347"/>
+          </a:solidFill>
+          <a:ln/>
+        </p:spPr>
+      </p:sp>
+      <p:sp>
+        <p:nvSpPr>
+          <p:cNvPr id="27" name="Text 25"/>
+          <p:cNvSpPr/>
+          <p:nvPr/>
+        </p:nvSpPr>
+        <p:spPr>
+          <a:xfrm>
+            <a:off x="3634740" y="4343400"/>
+            <a:ext cx="2080260" cy="365760"/>
+          </a:xfrm>
+          <a:prstGeom prst="rect">
+            <a:avLst/>
+          </a:prstGeom>
+          <a:noFill/>
+          <a:ln/>
+        </p:spPr>
+        <p:txBody>
+          <a:bodyPr wrap="square" lIns="0" tIns="0" rIns="0" bIns="0" rtlCol="0" anchor="ctr"/>
+          <a:lstStyle/>
+          <a:p>
+            <a:pPr indent="0" marL="0">
+              <a:buNone/>
+            </a:pPr>
+            <a:r>
+              <a:rPr lang="en-US" sz="1100" b="1" spc="100" kern="0" dirty="0">
+                <a:solidFill>
+                  <a:srgbClr val="9AA0B4"/>
+                </a:solidFill>
+                <a:latin typeface="Calibri" pitchFamily="34" charset="0"/>
+                <a:ea typeface="Calibri" pitchFamily="34" charset="-122"/>
+                <a:cs typeface="Calibri" pitchFamily="34" charset="-120"/>
+              </a:rPr>
+              <a:t>MOVIES</a:t>
+            </a:r>
+            <a:endParaRPr lang="en-US" sz="1100" dirty="0"/>
+          </a:p>
+        </p:txBody>
+      </p:sp>
+      <p:sp>
+        <p:nvSpPr>
+          <p:cNvPr id="28" name="Text 26"/>
+          <p:cNvSpPr/>
+          <p:nvPr/>
+        </p:nvSpPr>
+        <p:spPr>
+          <a:xfrm>
+            <a:off x="3634740" y="4754880"/>
+            <a:ext cx="2080260" cy="640080"/>
+          </a:xfrm>
+          <a:prstGeom prst="rect">
+            <a:avLst/>
+          </a:prstGeom>
+          <a:noFill/>
+          <a:ln/>
+        </p:spPr>
+        <p:txBody>
+          <a:bodyPr wrap="square" lIns="0" tIns="0" rIns="0" bIns="0" rtlCol="0" anchor="ctr"/>
+          <a:lstStyle/>
+          <a:p>
+            <a:pPr indent="0" marL="0">
+              <a:buNone/>
+            </a:pPr>
+            <a:r>
+              <a:rPr lang="en-US" sz="1500" b="1" dirty="0">
+                <a:solidFill>
+                  <a:srgbClr val="ECECF3"/>
+                </a:solidFill>
+                <a:latin typeface="Calibri" pitchFamily="34" charset="0"/>
+                <a:ea typeface="Calibri" pitchFamily="34" charset="-122"/>
+                <a:cs typeface="Calibri" pitchFamily="34" charset="-120"/>
+              </a:rPr>
+              <a:t>TMDB open dataset</a:t>
+            </a:r>
+            <a:endParaRPr lang="en-US" sz="1500" dirty="0"/>
+          </a:p>
+        </p:txBody>
+      </p:sp>
+      <p:sp>
+        <p:nvSpPr>
+          <p:cNvPr id="29" name="Shape 27"/>
+          <p:cNvSpPr/>
+          <p:nvPr/>
+        </p:nvSpPr>
+        <p:spPr>
+          <a:xfrm>
+            <a:off x="6263640" y="4023360"/>
+            <a:ext cx="2446020" cy="1554480"/>
+          </a:xfrm>
+          <a:prstGeom prst="roundRect">
+            <a:avLst>
+              <a:gd name="adj" fmla="val 4706"/>
+            </a:avLst>
+          </a:prstGeom>
+          <a:solidFill>
+            <a:srgbClr val="11141D"/>
+          </a:solidFill>
+          <a:ln w="12700">
+            <a:solidFill>
+              <a:srgbClr val="2A2F3E"/>
+            </a:solidFill>
+            <a:prstDash val="solid"/>
+          </a:ln>
+          <a:effectLst>
+            <a:outerShdw sx="100000" sy="100000" kx="0" ky="0" algn="bl" rotWithShape="0" blurRad="101600" dist="38100" dir="8100000">
+              <a:srgbClr val="000000">
+                <a:alpha val="35000"/>
+              </a:srgbClr>
+            </a:outerShdw>
+          </a:effectLst>
+        </p:spPr>
+      </p:sp>
+      <p:sp>
+        <p:nvSpPr>
+          <p:cNvPr id="30" name="Shape 28"/>
+          <p:cNvSpPr/>
+          <p:nvPr/>
+        </p:nvSpPr>
+        <p:spPr>
+          <a:xfrm>
+            <a:off x="6263640" y="4023360"/>
+            <a:ext cx="2446020" cy="82296"/>
+          </a:xfrm>
+          <a:prstGeom prst="rect">
+            <a:avLst/>
+          </a:prstGeom>
+          <a:solidFill>
+            <a:srgbClr val="FFB347"/>
+          </a:solidFill>
+          <a:ln/>
+        </p:spPr>
+      </p:sp>
+      <p:sp>
+        <p:nvSpPr>
+          <p:cNvPr id="31" name="Text 29"/>
+          <p:cNvSpPr/>
+          <p:nvPr/>
+        </p:nvSpPr>
+        <p:spPr>
+          <a:xfrm>
+            <a:off x="6446520" y="4343400"/>
+            <a:ext cx="2080260" cy="365760"/>
+          </a:xfrm>
+          <a:prstGeom prst="rect">
+            <a:avLst/>
+          </a:prstGeom>
+          <a:noFill/>
+          <a:ln/>
+        </p:spPr>
+        <p:txBody>
+          <a:bodyPr wrap="square" lIns="0" tIns="0" rIns="0" bIns="0" rtlCol="0" anchor="ctr"/>
+          <a:lstStyle/>
+          <a:p>
+            <a:pPr indent="0" marL="0">
+              <a:buNone/>
+            </a:pPr>
+            <a:r>
+              <a:rPr lang="en-US" sz="1100" b="1" spc="100" kern="0" dirty="0">
+                <a:solidFill>
+                  <a:srgbClr val="9AA0B4"/>
+                </a:solidFill>
+                <a:latin typeface="Calibri" pitchFamily="34" charset="0"/>
+                <a:ea typeface="Calibri" pitchFamily="34" charset="-122"/>
+                <a:cs typeface="Calibri" pitchFamily="34" charset="-120"/>
+              </a:rPr>
+              <a:t>GAMES</a:t>
+            </a:r>
+            <a:endParaRPr lang="en-US" sz="1100" dirty="0"/>
+          </a:p>
+        </p:txBody>
+      </p:sp>
+      <p:sp>
+        <p:nvSpPr>
+          <p:cNvPr id="32" name="Text 30"/>
+          <p:cNvSpPr/>
+          <p:nvPr/>
+        </p:nvSpPr>
+        <p:spPr>
+          <a:xfrm>
+            <a:off x="6446520" y="4754880"/>
+            <a:ext cx="2080260" cy="640080"/>
+          </a:xfrm>
+          <a:prstGeom prst="rect">
+            <a:avLst/>
+          </a:prstGeom>
+          <a:noFill/>
+          <a:ln/>
+        </p:spPr>
+        <p:txBody>
+          <a:bodyPr wrap="square" lIns="0" tIns="0" rIns="0" bIns="0" rtlCol="0" anchor="ctr"/>
+          <a:lstStyle/>
+          <a:p>
+            <a:pPr indent="0" marL="0">
+              <a:buNone/>
+            </a:pPr>
+            <a:r>
+              <a:rPr lang="en-US" sz="1500" b="1" dirty="0">
+                <a:solidFill>
+                  <a:srgbClr val="ECECF3"/>
+                </a:solidFill>
+                <a:latin typeface="Calibri" pitchFamily="34" charset="0"/>
+                <a:ea typeface="Calibri" pitchFamily="34" charset="-122"/>
+                <a:cs typeface="Calibri" pitchFamily="34" charset="-120"/>
+              </a:rPr>
+              <a:t>RAWG open dataset</a:t>
+            </a:r>
+            <a:endParaRPr lang="en-US" sz="1500" dirty="0"/>
+          </a:p>
+        </p:txBody>
+      </p:sp>
+      <p:sp>
+        <p:nvSpPr>
+          <p:cNvPr id="33" name="Shape 31"/>
+          <p:cNvSpPr/>
+          <p:nvPr/>
+        </p:nvSpPr>
+        <p:spPr>
+          <a:xfrm>
+            <a:off x="9075420" y="4023360"/>
+            <a:ext cx="2446020" cy="1554480"/>
+          </a:xfrm>
+          <a:prstGeom prst="roundRect">
+            <a:avLst>
+              <a:gd name="adj" fmla="val 4706"/>
+            </a:avLst>
+          </a:prstGeom>
+          <a:solidFill>
+            <a:srgbClr val="11141D"/>
+          </a:solidFill>
+          <a:ln w="12700">
+            <a:solidFill>
+              <a:srgbClr val="2A2F3E"/>
+            </a:solidFill>
+            <a:prstDash val="solid"/>
+          </a:ln>
+          <a:effectLst>
+            <a:outerShdw sx="100000" sy="100000" kx="0" ky="0" algn="bl" rotWithShape="0" blurRad="101600" dist="38100" dir="8100000">
+              <a:srgbClr val="000000">
+                <a:alpha val="35000"/>
+              </a:srgbClr>
+            </a:outerShdw>
+          </a:effectLst>
+        </p:spPr>
+      </p:sp>
+      <p:sp>
+        <p:nvSpPr>
+          <p:cNvPr id="34" name="Shape 32"/>
+          <p:cNvSpPr/>
+          <p:nvPr/>
+        </p:nvSpPr>
+        <p:spPr>
+          <a:xfrm>
+            <a:off x="9075420" y="4023360"/>
+            <a:ext cx="2446020" cy="82296"/>
+          </a:xfrm>
+          <a:prstGeom prst="rect">
+            <a:avLst/>
+          </a:prstGeom>
+          <a:solidFill>
+            <a:srgbClr val="FFB347"/>
+          </a:solidFill>
+          <a:ln/>
+        </p:spPr>
+      </p:sp>
+      <p:sp>
+        <p:nvSpPr>
+          <p:cNvPr id="35" name="Text 33"/>
+          <p:cNvSpPr/>
+          <p:nvPr/>
+        </p:nvSpPr>
+        <p:spPr>
+          <a:xfrm>
+            <a:off x="9258300" y="4343400"/>
+            <a:ext cx="2080260" cy="365760"/>
+          </a:xfrm>
+          <a:prstGeom prst="rect">
+            <a:avLst/>
+          </a:prstGeom>
+          <a:noFill/>
+          <a:ln/>
+        </p:spPr>
+        <p:txBody>
+          <a:bodyPr wrap="square" lIns="0" tIns="0" rIns="0" bIns="0" rtlCol="0" anchor="ctr"/>
+          <a:lstStyle/>
+          <a:p>
+            <a:pPr indent="0" marL="0">
+              <a:buNone/>
+            </a:pPr>
+            <a:r>
+              <a:rPr lang="en-US" sz="1100" b="1" spc="100" kern="0" dirty="0">
+                <a:solidFill>
+                  <a:srgbClr val="9AA0B4"/>
+                </a:solidFill>
+                <a:latin typeface="Calibri" pitchFamily="34" charset="0"/>
+                <a:ea typeface="Calibri" pitchFamily="34" charset="-122"/>
+                <a:cs typeface="Calibri" pitchFamily="34" charset="-120"/>
+              </a:rPr>
+              <a:t>VERSION CONTROL</a:t>
+            </a:r>
+            <a:endParaRPr lang="en-US" sz="1100" dirty="0"/>
+          </a:p>
+        </p:txBody>
+      </p:sp>
+      <p:sp>
+        <p:nvSpPr>
+          <p:cNvPr id="36" name="Text 34"/>
+          <p:cNvSpPr/>
+          <p:nvPr/>
+        </p:nvSpPr>
+        <p:spPr>
+          <a:xfrm>
+            <a:off x="9258300" y="4754880"/>
+            <a:ext cx="2080260" cy="640080"/>
+          </a:xfrm>
+          <a:prstGeom prst="rect">
+            <a:avLst/>
+          </a:prstGeom>
+          <a:noFill/>
+          <a:ln/>
+        </p:spPr>
+        <p:txBody>
+          <a:bodyPr wrap="square" lIns="0" tIns="0" rIns="0" bIns="0" rtlCol="0" anchor="ctr"/>
+          <a:lstStyle/>
+          <a:p>
+            <a:pPr indent="0" marL="0">
+              <a:buNone/>
+            </a:pPr>
+            <a:r>
+              <a:rPr lang="en-US" sz="1500" b="1" dirty="0">
+                <a:solidFill>
+                  <a:srgbClr val="ECECF3"/>
+                </a:solidFill>
+                <a:latin typeface="Calibri" pitchFamily="34" charset="0"/>
+                <a:ea typeface="Calibri" pitchFamily="34" charset="-122"/>
+                <a:cs typeface="Calibri" pitchFamily="34" charset="-120"/>
+              </a:rPr>
+              <a:t>Git + GitHub</a:t>
+            </a:r>
+            <a:endParaRPr lang="en-US" sz="1500" dirty="0"/>
+          </a:p>
+        </p:txBody>
+      </p:sp>
+      <p:sp>
+        <p:nvSpPr>
+          <p:cNvPr id="37" name="Text 35"/>
+          <p:cNvSpPr/>
+          <p:nvPr/>
+        </p:nvSpPr>
+        <p:spPr>
+          <a:xfrm>
+            <a:off x="640080" y="6400800"/>
+            <a:ext cx="8229600" cy="274320"/>
+          </a:xfrm>
+          <a:prstGeom prst="rect">
+            <a:avLst/>
+          </a:prstGeom>
+          <a:noFill/>
+          <a:ln/>
+        </p:spPr>
+        <p:txBody>
+          <a:bodyPr wrap="square" lIns="0" tIns="0" rIns="0" bIns="0" rtlCol="0" anchor="ctr"/>
+          <a:lstStyle/>
+          <a:p>
+            <a:pPr indent="0" marL="0">
+              <a:buNone/>
+            </a:pPr>
+            <a:r>
+              <a:rPr lang="en-US" sz="900" b="1" dirty="0">
+                <a:solidFill>
+                  <a:srgbClr val="FFB347"/>
+                </a:solidFill>
+                <a:latin typeface="Calibri" pitchFamily="34" charset="0"/>
+                <a:ea typeface="Calibri" pitchFamily="34" charset="-122"/>
+                <a:cs typeface="Calibri" pitchFamily="34" charset="-120"/>
+              </a:rPr>
+              <a:t>CINEMATCH</a:t>
+            </a:r>
+            <a:pPr indent="0" marL="0">
+              <a:buNone/>
+            </a:pPr>
+            <a:r>
+              <a:rPr lang="en-US" sz="900" dirty="0">
+                <a:solidFill>
+                  <a:srgbClr val="9AA0B4"/>
+                </a:solidFill>
+                <a:latin typeface="Calibri" pitchFamily="34" charset="0"/>
+                <a:ea typeface="Calibri" pitchFamily="34" charset="-122"/>
+                <a:cs typeface="Calibri" pitchFamily="34" charset="-120"/>
+              </a:rPr>
+              <a:t>   ·   AI-Powered Movie &amp; Game Recommender</a:t>
+            </a:r>
+            <a:endParaRPr lang="en-US" sz="900" dirty="0"/>
+          </a:p>
+        </p:txBody>
+      </p:sp>
+      <p:sp>
+        <p:nvSpPr>
+          <p:cNvPr id="38" name="Text 36"/>
+          <p:cNvSpPr/>
+          <p:nvPr/>
+        </p:nvSpPr>
+        <p:spPr>
+          <a:xfrm>
+            <a:off x="11064240" y="6400800"/>
+            <a:ext cx="457200" cy="274320"/>
+          </a:xfrm>
+          <a:prstGeom prst="rect">
+            <a:avLst/>
+          </a:prstGeom>
+          <a:noFill/>
+          <a:ln/>
+        </p:spPr>
+        <p:txBody>
+          <a:bodyPr wrap="square" lIns="0" tIns="0" rIns="0" bIns="0" rtlCol="0" anchor="ctr"/>
+          <a:lstStyle/>
+          <a:p>
+            <a:pPr algn="r" indent="0" marL="0">
+              <a:buNone/>
+            </a:pPr>
+            <a:r>
+              <a:rPr lang="en-US" sz="900" dirty="0">
+                <a:solidFill>
+                  <a:srgbClr val="9AA0B4"/>
+                </a:solidFill>
+                <a:latin typeface="Calibri" pitchFamily="34" charset="0"/>
+                <a:ea typeface="Calibri" pitchFamily="34" charset="-122"/>
+                <a:cs typeface="Calibri" pitchFamily="34" charset="-120"/>
+              </a:rPr>
+              <a:t>14</a:t>
+            </a:r>
+            <a:endParaRPr lang="en-US" sz="900" dirty="0"/>
+          </a:p>
+        </p:txBody>
+      </p:sp>
+    </p:spTree>
+  </p:cSld>
+  <p:clrMapOvr>
+    <a:masterClrMapping/>
+  </p:clrMapOvr>
+</p:sld>
+</file>
+
+<file path=ppt/slides/slide15.xml><?xml version="1.0" encoding="utf-8"?>
+<p:sld xmlns:a="http://schemas.openxmlformats.org/drawingml/2006/main" xmlns:r="http://schemas.openxmlformats.org/officeDocument/2006/relationships" xmlns:p="http://schemas.openxmlformats.org/presentationml/2006/main">
+  <p:cSld name="Slide 15">
+    <p:bg>
+      <p:bgPr>
+        <a:solidFill>
+          <a:srgbClr val="0F1117"/>
+        </a:solidFill>
+      </p:bgPr>
+    </p:bg>
+    <p:spTree>
+      <p:nvGrpSpPr>
+        <p:cNvPr id="1" name=""/>
+        <p:cNvGrpSpPr/>
+        <p:nvPr/>
+      </p:nvGrpSpPr>
+      <p:grpSpPr>
+        <a:xfrm>
+          <a:off x="0" y="0"/>
+          <a:ext cx="0" cy="0"/>
+          <a:chOff x="0" y="0"/>
+          <a:chExt cx="0" cy="0"/>
+        </a:xfrm>
+      </p:grpSpPr>
+      <p:sp>
+        <p:nvSpPr>
+          <p:cNvPr id="2" name="Shape 0"/>
+          <p:cNvSpPr/>
+          <p:nvPr/>
+        </p:nvSpPr>
+        <p:spPr>
+          <a:xfrm>
             <a:off x="0" y="0"/>
             <a:ext cx="12161520" cy="109728"/>
           </a:xfrm>
@@ -10346,7 +13568,7 @@
                 <a:ea typeface="Calibri" pitchFamily="34" charset="-122"/>
                 <a:cs typeface="Calibri" pitchFamily="34" charset="-120"/>
               </a:rPr>
-              <a:t>THE PRODUCT</a:t>
+              <a:t>ADVANCED C · DATA</a:t>
             </a:r>
             <a:endParaRPr lang="en-US" sz="1200" dirty="0"/>
           </a:p>
@@ -10385,7 +13607,7 @@
                 <a:ea typeface="Georgia" pitchFamily="34" charset="-122"/>
                 <a:cs typeface="Georgia" pitchFamily="34" charset="-120"/>
               </a:rPr>
-              <a:t>Four pages, one app</a:t>
+              <a:t>Modeling the library with structs</a:t>
             </a:r>
             <a:endParaRPr lang="en-US" sz="3200" dirty="0"/>
           </a:p>
@@ -10399,12 +13621,528 @@
         </p:nvSpPr>
         <p:spPr>
           <a:xfrm>
-            <a:off x="640080" y="1920240"/>
-            <a:ext cx="5212080" cy="1874520"/>
+            <a:off x="640080" y="1783080"/>
+            <a:ext cx="6858000" cy="4297680"/>
           </a:xfrm>
           <a:prstGeom prst="roundRect">
             <a:avLst>
-              <a:gd name="adj" fmla="val 3902"/>
+              <a:gd name="adj" fmla="val 1277"/>
+            </a:avLst>
+          </a:prstGeom>
+          <a:solidFill>
+            <a:srgbClr val="0A0C12"/>
+          </a:solidFill>
+          <a:ln w="12700">
+            <a:solidFill>
+              <a:srgbClr val="2A2F3E"/>
+            </a:solidFill>
+            <a:prstDash val="solid"/>
+          </a:ln>
+          <a:effectLst>
+            <a:outerShdw sx="100000" sy="100000" kx="0" ky="0" algn="bl" rotWithShape="0" blurRad="101600" dist="38100" dir="8100000">
+              <a:srgbClr val="000000">
+                <a:alpha val="35000"/>
+              </a:srgbClr>
+            </a:outerShdw>
+          </a:effectLst>
+        </p:spPr>
+      </p:sp>
+      <p:sp>
+        <p:nvSpPr>
+          <p:cNvPr id="6" name="Shape 4"/>
+          <p:cNvSpPr/>
+          <p:nvPr/>
+        </p:nvSpPr>
+        <p:spPr>
+          <a:xfrm>
+            <a:off x="841248" y="1947672"/>
+            <a:ext cx="91440" cy="91440"/>
+          </a:xfrm>
+          <a:prstGeom prst="ellipse">
+            <a:avLst/>
+          </a:prstGeom>
+          <a:solidFill>
+            <a:srgbClr val="E0696A"/>
+          </a:solidFill>
+          <a:ln/>
+        </p:spPr>
+      </p:sp>
+      <p:sp>
+        <p:nvSpPr>
+          <p:cNvPr id="7" name="Shape 5"/>
+          <p:cNvSpPr/>
+          <p:nvPr/>
+        </p:nvSpPr>
+        <p:spPr>
+          <a:xfrm>
+            <a:off x="987552" y="1947672"/>
+            <a:ext cx="91440" cy="91440"/>
+          </a:xfrm>
+          <a:prstGeom prst="ellipse">
+            <a:avLst/>
+          </a:prstGeom>
+          <a:solidFill>
+            <a:srgbClr val="E8B14C"/>
+          </a:solidFill>
+          <a:ln/>
+        </p:spPr>
+      </p:sp>
+      <p:sp>
+        <p:nvSpPr>
+          <p:cNvPr id="8" name="Shape 6"/>
+          <p:cNvSpPr/>
+          <p:nvPr/>
+        </p:nvSpPr>
+        <p:spPr>
+          <a:xfrm>
+            <a:off x="1133856" y="1947672"/>
+            <a:ext cx="91440" cy="91440"/>
+          </a:xfrm>
+          <a:prstGeom prst="ellipse">
+            <a:avLst/>
+          </a:prstGeom>
+          <a:solidFill>
+            <a:srgbClr val="6FB39A"/>
+          </a:solidFill>
+          <a:ln/>
+        </p:spPr>
+      </p:sp>
+      <p:sp>
+        <p:nvSpPr>
+          <p:cNvPr id="9" name="Text 7"/>
+          <p:cNvSpPr/>
+          <p:nvPr/>
+        </p:nvSpPr>
+        <p:spPr>
+          <a:xfrm>
+            <a:off x="914400" y="2194560"/>
+            <a:ext cx="6355080" cy="3703320"/>
+          </a:xfrm>
+          <a:prstGeom prst="rect">
+            <a:avLst/>
+          </a:prstGeom>
+          <a:noFill/>
+          <a:ln/>
+        </p:spPr>
+        <p:txBody>
+          <a:bodyPr wrap="square" lIns="0" tIns="0" rIns="0" bIns="0" rtlCol="0" anchor="t"/>
+          <a:lstStyle/>
+          <a:p>
+            <a:pPr algn="l" indent="0" marL="0">
+              <a:lnSpc>
+                <a:spcPct val="102000"/>
+              </a:lnSpc>
+              <a:buNone/>
+            </a:pPr>
+            <a:r>
+              <a:rPr lang="en-US" sz="1100" b="1" dirty="0">
+                <a:solidFill>
+                  <a:srgbClr val="FFCB7A"/>
+                </a:solidFill>
+                <a:latin typeface="Consolas" pitchFamily="34" charset="0"/>
+                <a:ea typeface="Consolas" pitchFamily="34" charset="-122"/>
+                <a:cs typeface="Consolas" pitchFamily="34" charset="-120"/>
+              </a:rPr>
+              <a:t>typedef struct {</a:t>
+            </a:r>
+            <a:endParaRPr lang="en-US" sz="1100" dirty="0"/>
+          </a:p>
+          <a:p>
+            <a:pPr algn="l" indent="0" marL="0">
+              <a:lnSpc>
+                <a:spcPct val="102000"/>
+              </a:lnSpc>
+              <a:buNone/>
+            </a:pPr>
+            <a:r>
+              <a:rPr lang="en-US" sz="1100" dirty="0">
+                <a:solidFill>
+                  <a:srgbClr val="DCDFE8"/>
+                </a:solidFill>
+                <a:latin typeface="Consolas" pitchFamily="34" charset="0"/>
+                <a:ea typeface="Consolas" pitchFamily="34" charset="-122"/>
+                <a:cs typeface="Consolas" pitchFamily="34" charset="-120"/>
+              </a:rPr>
+              <a:t>    const char *type;   /* Movie or Game */</a:t>
+            </a:r>
+            <a:endParaRPr lang="en-US" sz="1100" dirty="0"/>
+          </a:p>
+          <a:p>
+            <a:pPr algn="l" indent="0" marL="0">
+              <a:lnSpc>
+                <a:spcPct val="102000"/>
+              </a:lnSpc>
+              <a:buNone/>
+            </a:pPr>
+            <a:r>
+              <a:rPr lang="en-US" sz="1100" dirty="0">
+                <a:solidFill>
+                  <a:srgbClr val="DCDFE8"/>
+                </a:solidFill>
+                <a:latin typeface="Consolas" pitchFamily="34" charset="0"/>
+                <a:ea typeface="Consolas" pitchFamily="34" charset="-122"/>
+                <a:cs typeface="Consolas" pitchFamily="34" charset="-120"/>
+              </a:rPr>
+              <a:t>    const char *title;</a:t>
+            </a:r>
+            <a:endParaRPr lang="en-US" sz="1100" dirty="0"/>
+          </a:p>
+          <a:p>
+            <a:pPr algn="l" indent="0" marL="0">
+              <a:lnSpc>
+                <a:spcPct val="102000"/>
+              </a:lnSpc>
+              <a:buNone/>
+            </a:pPr>
+            <a:r>
+              <a:rPr lang="en-US" sz="1100" dirty="0">
+                <a:solidFill>
+                  <a:srgbClr val="DCDFE8"/>
+                </a:solidFill>
+                <a:latin typeface="Consolas" pitchFamily="34" charset="0"/>
+                <a:ea typeface="Consolas" pitchFamily="34" charset="-122"/>
+                <a:cs typeface="Consolas" pitchFamily="34" charset="-120"/>
+              </a:rPr>
+              <a:t>    int   year;</a:t>
+            </a:r>
+            <a:endParaRPr lang="en-US" sz="1100" dirty="0"/>
+          </a:p>
+          <a:p>
+            <a:pPr algn="l" indent="0" marL="0">
+              <a:lnSpc>
+                <a:spcPct val="102000"/>
+              </a:lnSpc>
+              <a:buNone/>
+            </a:pPr>
+            <a:r>
+              <a:rPr lang="en-US" sz="1100" dirty="0">
+                <a:solidFill>
+                  <a:srgbClr val="DCDFE8"/>
+                </a:solidFill>
+                <a:latin typeface="Consolas" pitchFamily="34" charset="0"/>
+                <a:ea typeface="Consolas" pitchFamily="34" charset="-122"/>
+                <a:cs typeface="Consolas" pitchFamily="34" charset="-120"/>
+              </a:rPr>
+              <a:t>    const char *genre;</a:t>
+            </a:r>
+            <a:endParaRPr lang="en-US" sz="1100" dirty="0"/>
+          </a:p>
+          <a:p>
+            <a:pPr algn="l" indent="0" marL="0">
+              <a:lnSpc>
+                <a:spcPct val="102000"/>
+              </a:lnSpc>
+              <a:buNone/>
+            </a:pPr>
+            <a:r>
+              <a:rPr lang="en-US" sz="1100" dirty="0">
+                <a:solidFill>
+                  <a:srgbClr val="DCDFE8"/>
+                </a:solidFill>
+                <a:latin typeface="Consolas" pitchFamily="34" charset="0"/>
+                <a:ea typeface="Consolas" pitchFamily="34" charset="-122"/>
+                <a:cs typeface="Consolas" pitchFamily="34" charset="-120"/>
+              </a:rPr>
+              <a:t>    const char *mood;</a:t>
+            </a:r>
+            <a:endParaRPr lang="en-US" sz="1100" dirty="0"/>
+          </a:p>
+          <a:p>
+            <a:pPr algn="l" indent="0" marL="0">
+              <a:lnSpc>
+                <a:spcPct val="102000"/>
+              </a:lnSpc>
+              <a:buNone/>
+            </a:pPr>
+            <a:r>
+              <a:rPr lang="en-US" sz="1100" dirty="0">
+                <a:solidFill>
+                  <a:srgbClr val="DCDFE8"/>
+                </a:solidFill>
+                <a:latin typeface="Consolas" pitchFamily="34" charset="0"/>
+                <a:ea typeface="Consolas" pitchFamily="34" charset="-122"/>
+                <a:cs typeface="Consolas" pitchFamily="34" charset="-120"/>
+              </a:rPr>
+              <a:t>    const char *timeNeed;</a:t>
+            </a:r>
+            <a:endParaRPr lang="en-US" sz="1100" dirty="0"/>
+          </a:p>
+          <a:p>
+            <a:pPr algn="l" indent="0" marL="0">
+              <a:lnSpc>
+                <a:spcPct val="102000"/>
+              </a:lnSpc>
+              <a:buNone/>
+            </a:pPr>
+            <a:r>
+              <a:rPr lang="en-US" sz="1100" dirty="0">
+                <a:solidFill>
+                  <a:srgbClr val="DCDFE8"/>
+                </a:solidFill>
+                <a:latin typeface="Consolas" pitchFamily="34" charset="0"/>
+                <a:ea typeface="Consolas" pitchFamily="34" charset="-122"/>
+                <a:cs typeface="Consolas" pitchFamily="34" charset="-120"/>
+              </a:rPr>
+              <a:t>    const char *social;</a:t>
+            </a:r>
+            <a:endParaRPr lang="en-US" sz="1100" dirty="0"/>
+          </a:p>
+          <a:p>
+            <a:pPr algn="l" indent="0" marL="0">
+              <a:lnSpc>
+                <a:spcPct val="102000"/>
+              </a:lnSpc>
+              <a:buNone/>
+            </a:pPr>
+            <a:r>
+              <a:rPr lang="en-US" sz="1100" dirty="0">
+                <a:solidFill>
+                  <a:srgbClr val="DCDFE8"/>
+                </a:solidFill>
+                <a:latin typeface="Consolas" pitchFamily="34" charset="0"/>
+                <a:ea typeface="Consolas" pitchFamily="34" charset="-122"/>
+                <a:cs typeface="Consolas" pitchFamily="34" charset="-120"/>
+              </a:rPr>
+              <a:t>    const char *rating;</a:t>
+            </a:r>
+            <a:endParaRPr lang="en-US" sz="1100" dirty="0"/>
+          </a:p>
+          <a:p>
+            <a:pPr algn="l" indent="0" marL="0">
+              <a:lnSpc>
+                <a:spcPct val="102000"/>
+              </a:lnSpc>
+              <a:buNone/>
+            </a:pPr>
+            <a:r>
+              <a:rPr lang="en-US" sz="1100" dirty="0">
+                <a:solidFill>
+                  <a:srgbClr val="DCDFE8"/>
+                </a:solidFill>
+                <a:latin typeface="Consolas" pitchFamily="34" charset="0"/>
+                <a:ea typeface="Consolas" pitchFamily="34" charset="-122"/>
+                <a:cs typeface="Consolas" pitchFamily="34" charset="-120"/>
+              </a:rPr>
+              <a:t>    const char *desc;</a:t>
+            </a:r>
+            <a:endParaRPr lang="en-US" sz="1100" dirty="0"/>
+          </a:p>
+          <a:p>
+            <a:pPr algn="l" indent="0" marL="0">
+              <a:lnSpc>
+                <a:spcPct val="102000"/>
+              </a:lnSpc>
+              <a:buNone/>
+            </a:pPr>
+            <a:r>
+              <a:rPr lang="en-US" sz="1100" b="1" dirty="0">
+                <a:solidFill>
+                  <a:srgbClr val="FFCB7A"/>
+                </a:solidFill>
+                <a:latin typeface="Consolas" pitchFamily="34" charset="0"/>
+                <a:ea typeface="Consolas" pitchFamily="34" charset="-122"/>
+                <a:cs typeface="Consolas" pitchFamily="34" charset="-120"/>
+              </a:rPr>
+              <a:t>} Title;</a:t>
+            </a:r>
+            <a:endParaRPr lang="en-US" sz="1100" dirty="0"/>
+          </a:p>
+          <a:p>
+            <a:pPr algn="l" indent="0" marL="0">
+              <a:lnSpc>
+                <a:spcPct val="102000"/>
+              </a:lnSpc>
+              <a:buNone/>
+            </a:pPr>
+            <a:r>
+              <a:rPr lang="en-US" sz="1100" dirty="0">
+                <a:solidFill>
+                  <a:srgbClr val="DCDFE8"/>
+                </a:solidFill>
+                <a:latin typeface="Consolas" pitchFamily="34" charset="0"/>
+                <a:ea typeface="Consolas" pitchFamily="34" charset="-122"/>
+                <a:cs typeface="Consolas" pitchFamily="34" charset="-120"/>
+              </a:rPr>
+              <a:t> </a:t>
+            </a:r>
+            <a:endParaRPr lang="en-US" sz="1100" dirty="0"/>
+          </a:p>
+          <a:p>
+            <a:pPr algn="l" indent="0" marL="0">
+              <a:lnSpc>
+                <a:spcPct val="102000"/>
+              </a:lnSpc>
+              <a:buNone/>
+            </a:pPr>
+            <a:r>
+              <a:rPr lang="en-US" sz="1100" dirty="0">
+                <a:solidFill>
+                  <a:srgbClr val="6FB39A"/>
+                </a:solidFill>
+                <a:latin typeface="Consolas" pitchFamily="34" charset="0"/>
+                <a:ea typeface="Consolas" pitchFamily="34" charset="-122"/>
+                <a:cs typeface="Consolas" pitchFamily="34" charset="-120"/>
+              </a:rPr>
+              <a:t>/* The fixed library of 55 titles */</a:t>
+            </a:r>
+            <a:endParaRPr lang="en-US" sz="1100" dirty="0"/>
+          </a:p>
+          <a:p>
+            <a:pPr algn="l" indent="0" marL="0">
+              <a:lnSpc>
+                <a:spcPct val="102000"/>
+              </a:lnSpc>
+              <a:buNone/>
+            </a:pPr>
+            <a:r>
+              <a:rPr lang="en-US" sz="1100" b="1" dirty="0">
+                <a:solidFill>
+                  <a:srgbClr val="FFCB7A"/>
+                </a:solidFill>
+                <a:latin typeface="Consolas" pitchFamily="34" charset="0"/>
+                <a:ea typeface="Consolas" pitchFamily="34" charset="-122"/>
+                <a:cs typeface="Consolas" pitchFamily="34" charset="-120"/>
+              </a:rPr>
+              <a:t>Title library[] = {</a:t>
+            </a:r>
+            <a:endParaRPr lang="en-US" sz="1100" dirty="0"/>
+          </a:p>
+          <a:p>
+            <a:pPr algn="l" indent="0" marL="0">
+              <a:lnSpc>
+                <a:spcPct val="102000"/>
+              </a:lnSpc>
+              <a:buNone/>
+            </a:pPr>
+            <a:r>
+              <a:rPr lang="en-US" sz="1100" dirty="0">
+                <a:solidFill>
+                  <a:srgbClr val="DCDFE8"/>
+                </a:solidFill>
+                <a:latin typeface="Consolas" pitchFamily="34" charset="0"/>
+                <a:ea typeface="Consolas" pitchFamily="34" charset="-122"/>
+                <a:cs typeface="Consolas" pitchFamily="34" charset="-120"/>
+              </a:rPr>
+              <a:t>  {"Movie","Interstellar",2014,"scifi",</a:t>
+            </a:r>
+            <a:endParaRPr lang="en-US" sz="1100" dirty="0"/>
+          </a:p>
+          <a:p>
+            <a:pPr algn="l" indent="0" marL="0">
+              <a:lnSpc>
+                <a:spcPct val="102000"/>
+              </a:lnSpc>
+              <a:buNone/>
+            </a:pPr>
+            <a:r>
+              <a:rPr lang="en-US" sz="1100" dirty="0">
+                <a:solidFill>
+                  <a:srgbClr val="DCDFE8"/>
+                </a:solidFill>
+                <a:latin typeface="Consolas" pitchFamily="34" charset="0"/>
+                <a:ea typeface="Consolas" pitchFamily="34" charset="-122"/>
+                <a:cs typeface="Consolas" pitchFamily="34" charset="-120"/>
+              </a:rPr>
+              <a:t>   "deep","medium","any","8.7", ... },</a:t>
+            </a:r>
+            <a:endParaRPr lang="en-US" sz="1100" dirty="0"/>
+          </a:p>
+          <a:p>
+            <a:pPr algn="l" indent="0" marL="0">
+              <a:lnSpc>
+                <a:spcPct val="102000"/>
+              </a:lnSpc>
+              <a:buNone/>
+            </a:pPr>
+            <a:r>
+              <a:rPr lang="en-US" sz="1100" dirty="0">
+                <a:solidFill>
+                  <a:srgbClr val="6FB39A"/>
+                </a:solidFill>
+                <a:latin typeface="Consolas" pitchFamily="34" charset="0"/>
+                <a:ea typeface="Consolas" pitchFamily="34" charset="-122"/>
+                <a:cs typeface="Consolas" pitchFamily="34" charset="-120"/>
+              </a:rPr>
+              <a:t>  /* ... 54 more titles ... */</a:t>
+            </a:r>
+            <a:endParaRPr lang="en-US" sz="1100" dirty="0"/>
+          </a:p>
+          <a:p>
+            <a:pPr algn="l" indent="0" marL="0">
+              <a:lnSpc>
+                <a:spcPct val="102000"/>
+              </a:lnSpc>
+              <a:buNone/>
+            </a:pPr>
+            <a:r>
+              <a:rPr lang="en-US" sz="1100" b="1" dirty="0">
+                <a:solidFill>
+                  <a:srgbClr val="FFCB7A"/>
+                </a:solidFill>
+                <a:latin typeface="Consolas" pitchFamily="34" charset="0"/>
+                <a:ea typeface="Consolas" pitchFamily="34" charset="-122"/>
+                <a:cs typeface="Consolas" pitchFamily="34" charset="-120"/>
+              </a:rPr>
+              <a:t>};</a:t>
+            </a:r>
+            <a:endParaRPr lang="en-US" sz="1100" dirty="0"/>
+          </a:p>
+          <a:p>
+            <a:pPr algn="l" indent="0" marL="0">
+              <a:lnSpc>
+                <a:spcPct val="102000"/>
+              </a:lnSpc>
+              <a:buNone/>
+            </a:pPr>
+            <a:r>
+              <a:rPr lang="en-US" sz="1100" dirty="0">
+                <a:solidFill>
+                  <a:srgbClr val="DCDFE8"/>
+                </a:solidFill>
+                <a:latin typeface="Consolas" pitchFamily="34" charset="0"/>
+                <a:ea typeface="Consolas" pitchFamily="34" charset="-122"/>
+                <a:cs typeface="Consolas" pitchFamily="34" charset="-120"/>
+              </a:rPr>
+              <a:t>int libSize =</a:t>
+            </a:r>
+            <a:endParaRPr lang="en-US" sz="1100" dirty="0"/>
+          </a:p>
+          <a:p>
+            <a:pPr algn="l" indent="0" marL="0">
+              <a:lnSpc>
+                <a:spcPct val="102000"/>
+              </a:lnSpc>
+              <a:buNone/>
+            </a:pPr>
+            <a:r>
+              <a:rPr lang="en-US" sz="1100" dirty="0">
+                <a:solidFill>
+                  <a:srgbClr val="DCDFE8"/>
+                </a:solidFill>
+                <a:latin typeface="Consolas" pitchFamily="34" charset="0"/>
+                <a:ea typeface="Consolas" pitchFamily="34" charset="-122"/>
+                <a:cs typeface="Consolas" pitchFamily="34" charset="-120"/>
+              </a:rPr>
+              <a:t>    sizeof(library)/sizeof(library[0]);</a:t>
+            </a:r>
+            <a:endParaRPr lang="en-US" sz="1100" dirty="0"/>
+          </a:p>
+        </p:txBody>
+      </p:sp>
+      <p:sp>
+        <p:nvSpPr>
+          <p:cNvPr id="10" name="Shape 8"/>
+          <p:cNvSpPr/>
+          <p:nvPr/>
+        </p:nvSpPr>
+        <p:spPr>
+          <a:xfrm>
+            <a:off x="7772400" y="1783080"/>
+            <a:ext cx="3749040" cy="4297680"/>
+          </a:xfrm>
+          <a:prstGeom prst="roundRect">
+            <a:avLst>
+              <a:gd name="adj" fmla="val 1951"/>
             </a:avLst>
           </a:prstGeom>
           <a:solidFill>
@@ -10427,75 +14165,14 @@
       </p:sp>
       <p:sp>
         <p:nvSpPr>
-          <p:cNvPr id="6" name="Shape 4"/>
-          <p:cNvSpPr/>
-          <p:nvPr/>
-        </p:nvSpPr>
-        <p:spPr>
-          <a:xfrm>
-            <a:off x="960120" y="2331720"/>
-            <a:ext cx="960120" cy="960120"/>
-          </a:xfrm>
-          <a:prstGeom prst="ellipse">
-            <a:avLst/>
-          </a:prstGeom>
-          <a:solidFill>
-            <a:srgbClr val="11141D"/>
-          </a:solidFill>
-          <a:ln w="19050">
-            <a:solidFill>
-              <a:srgbClr val="FFB347"/>
-            </a:solidFill>
-            <a:prstDash val="solid"/>
-          </a:ln>
-        </p:spPr>
-      </p:sp>
-      <p:sp>
-        <p:nvSpPr>
-          <p:cNvPr id="7" name="Text 5"/>
-          <p:cNvSpPr/>
-          <p:nvPr/>
-        </p:nvSpPr>
-        <p:spPr>
-          <a:xfrm>
-            <a:off x="960120" y="2331720"/>
-            <a:ext cx="960120" cy="960120"/>
-          </a:xfrm>
-          <a:prstGeom prst="rect">
-            <a:avLst/>
-          </a:prstGeom>
-          <a:noFill/>
-          <a:ln/>
-        </p:spPr>
-        <p:txBody>
-          <a:bodyPr wrap="square" lIns="0" tIns="0" rIns="0" bIns="0" rtlCol="0" anchor="ctr"/>
-          <a:lstStyle/>
-          <a:p>
-            <a:pPr algn="ctr" indent="0" marL="0">
-              <a:buNone/>
-            </a:pPr>
-            <a:r>
-              <a:rPr lang="en-US" sz="3200" dirty="0">
-                <a:solidFill>
-                  <a:srgbClr val="000000"/>
-                </a:solidFill>
-              </a:rPr>
-              <a:t>✨</a:t>
-            </a:r>
-            <a:endParaRPr lang="en-US" sz="3200" dirty="0"/>
-          </a:p>
-        </p:txBody>
-      </p:sp>
-      <p:sp>
-        <p:nvSpPr>
-          <p:cNvPr id="8" name="Text 6"/>
-          <p:cNvSpPr/>
-          <p:nvPr/>
-        </p:nvSpPr>
-        <p:spPr>
-          <a:xfrm>
-            <a:off x="2194560" y="2286000"/>
-            <a:ext cx="3383280" cy="457200"/>
+          <p:cNvPr id="11" name="Text 9"/>
+          <p:cNvSpPr/>
+          <p:nvPr/>
+        </p:nvSpPr>
+        <p:spPr>
+          <a:xfrm>
+            <a:off x="8046720" y="2011680"/>
+            <a:ext cx="3200400" cy="365760"/>
           </a:xfrm>
           <a:prstGeom prst="rect">
             <a:avLst/>
@@ -10511,49 +14188,50 @@
               <a:buNone/>
             </a:pPr>
             <a:r>
-              <a:rPr lang="en-US" sz="2200" b="1" dirty="0">
+              <a:rPr lang="en-US" sz="1500" b="1" dirty="0">
                 <a:solidFill>
                   <a:srgbClr val="FFB347"/>
                 </a:solidFill>
-                <a:latin typeface="Georgia" pitchFamily="34" charset="0"/>
-                <a:ea typeface="Georgia" pitchFamily="34" charset="-122"/>
-                <a:cs typeface="Georgia" pitchFamily="34" charset="-120"/>
-              </a:rPr>
-              <a:t>AI Match</a:t>
-            </a:r>
-            <a:endParaRPr lang="en-US" sz="2200" dirty="0"/>
-          </a:p>
-        </p:txBody>
-      </p:sp>
-      <p:sp>
-        <p:nvSpPr>
-          <p:cNvPr id="9" name="Text 7"/>
-          <p:cNvSpPr/>
-          <p:nvPr/>
-        </p:nvSpPr>
-        <p:spPr>
-          <a:xfrm>
-            <a:off x="2194560" y="2788920"/>
-            <a:ext cx="3383280" cy="868680"/>
-          </a:xfrm>
-          <a:prstGeom prst="rect">
-            <a:avLst/>
-          </a:prstGeom>
-          <a:noFill/>
-          <a:ln/>
-        </p:spPr>
-        <p:txBody>
-          <a:bodyPr wrap="square" lIns="0" tIns="0" rIns="0" bIns="0" rtlCol="0" anchor="ctr"/>
-          <a:lstStyle/>
-          <a:p>
-            <a:pPr indent="0" marL="0">
-              <a:lnSpc>
-                <a:spcPct val="112000"/>
-              </a:lnSpc>
-              <a:buNone/>
-            </a:pPr>
-            <a:r>
-              <a:rPr lang="en-US" sz="1350" dirty="0">
+                <a:latin typeface="Calibri" pitchFamily="34" charset="0"/>
+                <a:ea typeface="Calibri" pitchFamily="34" charset="-122"/>
+                <a:cs typeface="Calibri" pitchFamily="34" charset="-120"/>
+              </a:rPr>
+              <a:t>C techniques here</a:t>
+            </a:r>
+            <a:endParaRPr lang="en-US" sz="1500" dirty="0"/>
+          </a:p>
+        </p:txBody>
+      </p:sp>
+      <p:sp>
+        <p:nvSpPr>
+          <p:cNvPr id="12" name="Text 10"/>
+          <p:cNvSpPr/>
+          <p:nvPr/>
+        </p:nvSpPr>
+        <p:spPr>
+          <a:xfrm>
+            <a:off x="8046720" y="2514600"/>
+            <a:ext cx="3246120" cy="3383280"/>
+          </a:xfrm>
+          <a:prstGeom prst="rect">
+            <a:avLst/>
+          </a:prstGeom>
+          <a:noFill/>
+          <a:ln/>
+        </p:spPr>
+        <p:txBody>
+          <a:bodyPr wrap="square" lIns="0" tIns="0" rIns="0" bIns="0" rtlCol="0" anchor="t"/>
+          <a:lstStyle/>
+          <a:p>
+            <a:pPr marL="177800" indent="-177800">
+              <a:spcAft>
+                <a:spcPts val="700"/>
+              </a:spcAft>
+              <a:buSzPct val="100000"/>
+              <a:buChar char="•"/>
+            </a:pPr>
+            <a:r>
+              <a:rPr lang="en-US" sz="1250" dirty="0">
                 <a:solidFill>
                   <a:srgbClr val="ECECF3"/>
                 </a:solidFill>
@@ -10561,543 +14239,99 @@
                 <a:ea typeface="Calibri" pitchFamily="34" charset="-122"/>
                 <a:cs typeface="Calibri" pitchFamily="34" charset="-120"/>
               </a:rPr>
-              <a:t>The core feature. Type a mood, get one explained pick from the curated 55-title library.</a:t>
-            </a:r>
-            <a:endParaRPr lang="en-US" sz="1350" dirty="0"/>
-          </a:p>
-        </p:txBody>
-      </p:sp>
-      <p:sp>
-        <p:nvSpPr>
-          <p:cNvPr id="10" name="Shape 8"/>
-          <p:cNvSpPr/>
-          <p:nvPr/>
-        </p:nvSpPr>
-        <p:spPr>
-          <a:xfrm>
-            <a:off x="6309360" y="1920240"/>
-            <a:ext cx="5212080" cy="1874520"/>
-          </a:xfrm>
-          <a:prstGeom prst="roundRect">
-            <a:avLst>
-              <a:gd name="adj" fmla="val 3902"/>
-            </a:avLst>
-          </a:prstGeom>
-          <a:solidFill>
-            <a:srgbClr val="1A1D27"/>
-          </a:solidFill>
-          <a:ln w="12700">
-            <a:solidFill>
-              <a:srgbClr val="2A2F3E"/>
-            </a:solidFill>
-            <a:prstDash val="solid"/>
-          </a:ln>
-          <a:effectLst>
-            <a:outerShdw sx="100000" sy="100000" kx="0" ky="0" algn="bl" rotWithShape="0" blurRad="101600" dist="38100" dir="8100000">
-              <a:srgbClr val="000000">
-                <a:alpha val="35000"/>
-              </a:srgbClr>
-            </a:outerShdw>
-          </a:effectLst>
-        </p:spPr>
-      </p:sp>
-      <p:sp>
-        <p:nvSpPr>
-          <p:cNvPr id="11" name="Shape 9"/>
-          <p:cNvSpPr/>
-          <p:nvPr/>
-        </p:nvSpPr>
-        <p:spPr>
-          <a:xfrm>
-            <a:off x="6629400" y="2331720"/>
-            <a:ext cx="960120" cy="960120"/>
-          </a:xfrm>
-          <a:prstGeom prst="ellipse">
-            <a:avLst/>
-          </a:prstGeom>
-          <a:solidFill>
-            <a:srgbClr val="11141D"/>
-          </a:solidFill>
-          <a:ln w="19050">
-            <a:solidFill>
-              <a:srgbClr val="FFB347"/>
-            </a:solidFill>
-            <a:prstDash val="solid"/>
-          </a:ln>
-        </p:spPr>
-      </p:sp>
-      <p:sp>
-        <p:nvSpPr>
-          <p:cNvPr id="12" name="Text 10"/>
-          <p:cNvSpPr/>
-          <p:nvPr/>
-        </p:nvSpPr>
-        <p:spPr>
-          <a:xfrm>
-            <a:off x="6629400" y="2331720"/>
-            <a:ext cx="960120" cy="960120"/>
-          </a:xfrm>
-          <a:prstGeom prst="rect">
-            <a:avLst/>
-          </a:prstGeom>
-          <a:noFill/>
-          <a:ln/>
-        </p:spPr>
-        <p:txBody>
-          <a:bodyPr wrap="square" lIns="0" tIns="0" rIns="0" bIns="0" rtlCol="0" anchor="ctr"/>
-          <a:lstStyle/>
-          <a:p>
-            <a:pPr algn="ctr" indent="0" marL="0">
-              <a:buNone/>
-            </a:pPr>
-            <a:r>
-              <a:rPr lang="en-US" sz="3200" dirty="0">
-                <a:solidFill>
-                  <a:srgbClr val="000000"/>
-                </a:solidFill>
-              </a:rPr>
-              <a:t>🎬</a:t>
-            </a:r>
-            <a:endParaRPr lang="en-US" sz="3200" dirty="0"/>
+              <a:t>typedef struct — a custom data type</a:t>
+            </a:r>
+            <a:endParaRPr lang="en-US" sz="1250" dirty="0"/>
+          </a:p>
+          <a:p>
+            <a:pPr marL="177800" indent="-177800">
+              <a:spcAft>
+                <a:spcPts val="700"/>
+              </a:spcAft>
+              <a:buSzPct val="100000"/>
+              <a:buChar char="•"/>
+            </a:pPr>
+            <a:r>
+              <a:rPr lang="en-US" sz="1250" dirty="0">
+                <a:solidFill>
+                  <a:srgbClr val="ECECF3"/>
+                </a:solidFill>
+                <a:latin typeface="Calibri" pitchFamily="34" charset="0"/>
+                <a:ea typeface="Calibri" pitchFamily="34" charset="-122"/>
+                <a:cs typeface="Calibri" pitchFamily="34" charset="-120"/>
+              </a:rPr>
+              <a:t>Array of structs — the whole library</a:t>
+            </a:r>
+            <a:endParaRPr lang="en-US" sz="1250" dirty="0"/>
+          </a:p>
+          <a:p>
+            <a:pPr marL="177800" indent="-177800">
+              <a:spcAft>
+                <a:spcPts val="700"/>
+              </a:spcAft>
+              <a:buSzPct val="100000"/>
+              <a:buChar char="•"/>
+            </a:pPr>
+            <a:r>
+              <a:rPr lang="en-US" sz="1250" dirty="0">
+                <a:solidFill>
+                  <a:srgbClr val="ECECF3"/>
+                </a:solidFill>
+                <a:latin typeface="Calibri" pitchFamily="34" charset="0"/>
+                <a:ea typeface="Calibri" pitchFamily="34" charset="-122"/>
+                <a:cs typeface="Calibri" pitchFamily="34" charset="-120"/>
+              </a:rPr>
+              <a:t>const char * — pointers to strings</a:t>
+            </a:r>
+            <a:endParaRPr lang="en-US" sz="1250" dirty="0"/>
+          </a:p>
+          <a:p>
+            <a:pPr marL="177800" indent="-177800">
+              <a:spcAft>
+                <a:spcPts val="700"/>
+              </a:spcAft>
+              <a:buSzPct val="100000"/>
+              <a:buChar char="•"/>
+            </a:pPr>
+            <a:r>
+              <a:rPr lang="en-US" sz="1250" dirty="0">
+                <a:solidFill>
+                  <a:srgbClr val="ECECF3"/>
+                </a:solidFill>
+                <a:latin typeface="Calibri" pitchFamily="34" charset="0"/>
+                <a:ea typeface="Calibri" pitchFamily="34" charset="-122"/>
+                <a:cs typeface="Calibri" pitchFamily="34" charset="-120"/>
+              </a:rPr>
+              <a:t>sizeof trick — array length, computed at compile time</a:t>
+            </a:r>
+            <a:endParaRPr lang="en-US" sz="1250" dirty="0"/>
+          </a:p>
+          <a:p>
+            <a:pPr marL="177800" indent="-177800">
+              <a:spcAft>
+                <a:spcPts val="700"/>
+              </a:spcAft>
+              <a:buSzPct val="100000"/>
+              <a:buChar char="•"/>
+            </a:pPr>
+            <a:r>
+              <a:rPr lang="en-US" sz="1250" dirty="0">
+                <a:solidFill>
+                  <a:srgbClr val="ECECF3"/>
+                </a:solidFill>
+                <a:latin typeface="Calibri" pitchFamily="34" charset="0"/>
+                <a:ea typeface="Calibri" pitchFamily="34" charset="-122"/>
+                <a:cs typeface="Calibri" pitchFamily="34" charset="-120"/>
+              </a:rPr>
+              <a:t>One source of truth: titles.h</a:t>
+            </a:r>
+            <a:endParaRPr lang="en-US" sz="1250" dirty="0"/>
           </a:p>
         </p:txBody>
       </p:sp>
       <p:sp>
         <p:nvSpPr>
           <p:cNvPr id="13" name="Text 11"/>
-          <p:cNvSpPr/>
-          <p:nvPr/>
-        </p:nvSpPr>
-        <p:spPr>
-          <a:xfrm>
-            <a:off x="7863840" y="2286000"/>
-            <a:ext cx="3383280" cy="457200"/>
-          </a:xfrm>
-          <a:prstGeom prst="rect">
-            <a:avLst/>
-          </a:prstGeom>
-          <a:noFill/>
-          <a:ln/>
-        </p:spPr>
-        <p:txBody>
-          <a:bodyPr wrap="square" lIns="0" tIns="0" rIns="0" bIns="0" rtlCol="0" anchor="ctr"/>
-          <a:lstStyle/>
-          <a:p>
-            <a:pPr indent="0" marL="0">
-              <a:buNone/>
-            </a:pPr>
-            <a:r>
-              <a:rPr lang="en-US" sz="2200" b="1" dirty="0">
-                <a:solidFill>
-                  <a:srgbClr val="FFB347"/>
-                </a:solidFill>
-                <a:latin typeface="Georgia" pitchFamily="34" charset="0"/>
-                <a:ea typeface="Georgia" pitchFamily="34" charset="-122"/>
-                <a:cs typeface="Georgia" pitchFamily="34" charset="-120"/>
-              </a:rPr>
-              <a:t>Movies</a:t>
-            </a:r>
-            <a:endParaRPr lang="en-US" sz="2200" dirty="0"/>
-          </a:p>
-        </p:txBody>
-      </p:sp>
-      <p:sp>
-        <p:nvSpPr>
-          <p:cNvPr id="14" name="Text 12"/>
-          <p:cNvSpPr/>
-          <p:nvPr/>
-        </p:nvSpPr>
-        <p:spPr>
-          <a:xfrm>
-            <a:off x="7863840" y="2788920"/>
-            <a:ext cx="3383280" cy="868680"/>
-          </a:xfrm>
-          <a:prstGeom prst="rect">
-            <a:avLst/>
-          </a:prstGeom>
-          <a:noFill/>
-          <a:ln/>
-        </p:spPr>
-        <p:txBody>
-          <a:bodyPr wrap="square" lIns="0" tIns="0" rIns="0" bIns="0" rtlCol="0" anchor="ctr"/>
-          <a:lstStyle/>
-          <a:p>
-            <a:pPr indent="0" marL="0">
-              <a:lnSpc>
-                <a:spcPct val="112000"/>
-              </a:lnSpc>
-              <a:buNone/>
-            </a:pPr>
-            <a:r>
-              <a:rPr lang="en-US" sz="1350" dirty="0">
-                <a:solidFill>
-                  <a:srgbClr val="ECECF3"/>
-                </a:solidFill>
-                <a:latin typeface="Calibri" pitchFamily="34" charset="0"/>
-                <a:ea typeface="Calibri" pitchFamily="34" charset="-122"/>
-                <a:cs typeface="Calibri" pitchFamily="34" charset="-120"/>
-              </a:rPr>
-              <a:t>Browse thousands of real films from the open TMDB dataset — search, filter, posters, details.</a:t>
-            </a:r>
-            <a:endParaRPr lang="en-US" sz="1350" dirty="0"/>
-          </a:p>
-        </p:txBody>
-      </p:sp>
-      <p:sp>
-        <p:nvSpPr>
-          <p:cNvPr id="15" name="Shape 13"/>
-          <p:cNvSpPr/>
-          <p:nvPr/>
-        </p:nvSpPr>
-        <p:spPr>
-          <a:xfrm>
-            <a:off x="640080" y="4160520"/>
-            <a:ext cx="5212080" cy="1874520"/>
-          </a:xfrm>
-          <a:prstGeom prst="roundRect">
-            <a:avLst>
-              <a:gd name="adj" fmla="val 3902"/>
-            </a:avLst>
-          </a:prstGeom>
-          <a:solidFill>
-            <a:srgbClr val="1A1D27"/>
-          </a:solidFill>
-          <a:ln w="12700">
-            <a:solidFill>
-              <a:srgbClr val="2A2F3E"/>
-            </a:solidFill>
-            <a:prstDash val="solid"/>
-          </a:ln>
-          <a:effectLst>
-            <a:outerShdw sx="100000" sy="100000" kx="0" ky="0" algn="bl" rotWithShape="0" blurRad="101600" dist="38100" dir="8100000">
-              <a:srgbClr val="000000">
-                <a:alpha val="35000"/>
-              </a:srgbClr>
-            </a:outerShdw>
-          </a:effectLst>
-        </p:spPr>
-      </p:sp>
-      <p:sp>
-        <p:nvSpPr>
-          <p:cNvPr id="16" name="Shape 14"/>
-          <p:cNvSpPr/>
-          <p:nvPr/>
-        </p:nvSpPr>
-        <p:spPr>
-          <a:xfrm>
-            <a:off x="960120" y="4572000"/>
-            <a:ext cx="960120" cy="960120"/>
-          </a:xfrm>
-          <a:prstGeom prst="ellipse">
-            <a:avLst/>
-          </a:prstGeom>
-          <a:solidFill>
-            <a:srgbClr val="11141D"/>
-          </a:solidFill>
-          <a:ln w="19050">
-            <a:solidFill>
-              <a:srgbClr val="FFB347"/>
-            </a:solidFill>
-            <a:prstDash val="solid"/>
-          </a:ln>
-        </p:spPr>
-      </p:sp>
-      <p:sp>
-        <p:nvSpPr>
-          <p:cNvPr id="17" name="Text 15"/>
-          <p:cNvSpPr/>
-          <p:nvPr/>
-        </p:nvSpPr>
-        <p:spPr>
-          <a:xfrm>
-            <a:off x="960120" y="4572000"/>
-            <a:ext cx="960120" cy="960120"/>
-          </a:xfrm>
-          <a:prstGeom prst="rect">
-            <a:avLst/>
-          </a:prstGeom>
-          <a:noFill/>
-          <a:ln/>
-        </p:spPr>
-        <p:txBody>
-          <a:bodyPr wrap="square" lIns="0" tIns="0" rIns="0" bIns="0" rtlCol="0" anchor="ctr"/>
-          <a:lstStyle/>
-          <a:p>
-            <a:pPr algn="ctr" indent="0" marL="0">
-              <a:buNone/>
-            </a:pPr>
-            <a:r>
-              <a:rPr lang="en-US" sz="3200" dirty="0">
-                <a:solidFill>
-                  <a:srgbClr val="000000"/>
-                </a:solidFill>
-              </a:rPr>
-              <a:t>🎮</a:t>
-            </a:r>
-            <a:endParaRPr lang="en-US" sz="3200" dirty="0"/>
-          </a:p>
-        </p:txBody>
-      </p:sp>
-      <p:sp>
-        <p:nvSpPr>
-          <p:cNvPr id="18" name="Text 16"/>
-          <p:cNvSpPr/>
-          <p:nvPr/>
-        </p:nvSpPr>
-        <p:spPr>
-          <a:xfrm>
-            <a:off x="2194560" y="4526280"/>
-            <a:ext cx="3383280" cy="457200"/>
-          </a:xfrm>
-          <a:prstGeom prst="rect">
-            <a:avLst/>
-          </a:prstGeom>
-          <a:noFill/>
-          <a:ln/>
-        </p:spPr>
-        <p:txBody>
-          <a:bodyPr wrap="square" lIns="0" tIns="0" rIns="0" bIns="0" rtlCol="0" anchor="ctr"/>
-          <a:lstStyle/>
-          <a:p>
-            <a:pPr indent="0" marL="0">
-              <a:buNone/>
-            </a:pPr>
-            <a:r>
-              <a:rPr lang="en-US" sz="2200" b="1" dirty="0">
-                <a:solidFill>
-                  <a:srgbClr val="FFB347"/>
-                </a:solidFill>
-                <a:latin typeface="Georgia" pitchFamily="34" charset="0"/>
-                <a:ea typeface="Georgia" pitchFamily="34" charset="-122"/>
-                <a:cs typeface="Georgia" pitchFamily="34" charset="-120"/>
-              </a:rPr>
-              <a:t>Games</a:t>
-            </a:r>
-            <a:endParaRPr lang="en-US" sz="2200" dirty="0"/>
-          </a:p>
-        </p:txBody>
-      </p:sp>
-      <p:sp>
-        <p:nvSpPr>
-          <p:cNvPr id="19" name="Text 17"/>
-          <p:cNvSpPr/>
-          <p:nvPr/>
-        </p:nvSpPr>
-        <p:spPr>
-          <a:xfrm>
-            <a:off x="2194560" y="5029200"/>
-            <a:ext cx="3383280" cy="868680"/>
-          </a:xfrm>
-          <a:prstGeom prst="rect">
-            <a:avLst/>
-          </a:prstGeom>
-          <a:noFill/>
-          <a:ln/>
-        </p:spPr>
-        <p:txBody>
-          <a:bodyPr wrap="square" lIns="0" tIns="0" rIns="0" bIns="0" rtlCol="0" anchor="ctr"/>
-          <a:lstStyle/>
-          <a:p>
-            <a:pPr indent="0" marL="0">
-              <a:lnSpc>
-                <a:spcPct val="112000"/>
-              </a:lnSpc>
-              <a:buNone/>
-            </a:pPr>
-            <a:r>
-              <a:rPr lang="en-US" sz="1350" dirty="0">
-                <a:solidFill>
-                  <a:srgbClr val="ECECF3"/>
-                </a:solidFill>
-                <a:latin typeface="Calibri" pitchFamily="34" charset="0"/>
-                <a:ea typeface="Calibri" pitchFamily="34" charset="-122"/>
-                <a:cs typeface="Calibri" pitchFamily="34" charset="-120"/>
-              </a:rPr>
-              <a:t>Browse 800,000+ titles from the open RAWG dataset — covers, ratings, and detail views.</a:t>
-            </a:r>
-            <a:endParaRPr lang="en-US" sz="1350" dirty="0"/>
-          </a:p>
-        </p:txBody>
-      </p:sp>
-      <p:sp>
-        <p:nvSpPr>
-          <p:cNvPr id="20" name="Shape 18"/>
-          <p:cNvSpPr/>
-          <p:nvPr/>
-        </p:nvSpPr>
-        <p:spPr>
-          <a:xfrm>
-            <a:off x="6309360" y="4160520"/>
-            <a:ext cx="5212080" cy="1874520"/>
-          </a:xfrm>
-          <a:prstGeom prst="roundRect">
-            <a:avLst>
-              <a:gd name="adj" fmla="val 3902"/>
-            </a:avLst>
-          </a:prstGeom>
-          <a:solidFill>
-            <a:srgbClr val="1A1D27"/>
-          </a:solidFill>
-          <a:ln w="12700">
-            <a:solidFill>
-              <a:srgbClr val="2A2F3E"/>
-            </a:solidFill>
-            <a:prstDash val="solid"/>
-          </a:ln>
-          <a:effectLst>
-            <a:outerShdw sx="100000" sy="100000" kx="0" ky="0" algn="bl" rotWithShape="0" blurRad="101600" dist="38100" dir="8100000">
-              <a:srgbClr val="000000">
-                <a:alpha val="35000"/>
-              </a:srgbClr>
-            </a:outerShdw>
-          </a:effectLst>
-        </p:spPr>
-      </p:sp>
-      <p:sp>
-        <p:nvSpPr>
-          <p:cNvPr id="21" name="Shape 19"/>
-          <p:cNvSpPr/>
-          <p:nvPr/>
-        </p:nvSpPr>
-        <p:spPr>
-          <a:xfrm>
-            <a:off x="6629400" y="4572000"/>
-            <a:ext cx="960120" cy="960120"/>
-          </a:xfrm>
-          <a:prstGeom prst="ellipse">
-            <a:avLst/>
-          </a:prstGeom>
-          <a:solidFill>
-            <a:srgbClr val="11141D"/>
-          </a:solidFill>
-          <a:ln w="19050">
-            <a:solidFill>
-              <a:srgbClr val="FFB347"/>
-            </a:solidFill>
-            <a:prstDash val="solid"/>
-          </a:ln>
-        </p:spPr>
-      </p:sp>
-      <p:sp>
-        <p:nvSpPr>
-          <p:cNvPr id="22" name="Text 20"/>
-          <p:cNvSpPr/>
-          <p:nvPr/>
-        </p:nvSpPr>
-        <p:spPr>
-          <a:xfrm>
-            <a:off x="6629400" y="4572000"/>
-            <a:ext cx="960120" cy="960120"/>
-          </a:xfrm>
-          <a:prstGeom prst="rect">
-            <a:avLst/>
-          </a:prstGeom>
-          <a:noFill/>
-          <a:ln/>
-        </p:spPr>
-        <p:txBody>
-          <a:bodyPr wrap="square" lIns="0" tIns="0" rIns="0" bIns="0" rtlCol="0" anchor="ctr"/>
-          <a:lstStyle/>
-          <a:p>
-            <a:pPr algn="ctr" indent="0" marL="0">
-              <a:buNone/>
-            </a:pPr>
-            <a:r>
-              <a:rPr lang="en-US" sz="3200" dirty="0">
-                <a:solidFill>
-                  <a:srgbClr val="000000"/>
-                </a:solidFill>
-              </a:rPr>
-              <a:t>💬</a:t>
-            </a:r>
-            <a:endParaRPr lang="en-US" sz="3200" dirty="0"/>
-          </a:p>
-        </p:txBody>
-      </p:sp>
-      <p:sp>
-        <p:nvSpPr>
-          <p:cNvPr id="23" name="Text 21"/>
-          <p:cNvSpPr/>
-          <p:nvPr/>
-        </p:nvSpPr>
-        <p:spPr>
-          <a:xfrm>
-            <a:off x="7863840" y="4526280"/>
-            <a:ext cx="3383280" cy="457200"/>
-          </a:xfrm>
-          <a:prstGeom prst="rect">
-            <a:avLst/>
-          </a:prstGeom>
-          <a:noFill/>
-          <a:ln/>
-        </p:spPr>
-        <p:txBody>
-          <a:bodyPr wrap="square" lIns="0" tIns="0" rIns="0" bIns="0" rtlCol="0" anchor="ctr"/>
-          <a:lstStyle/>
-          <a:p>
-            <a:pPr indent="0" marL="0">
-              <a:buNone/>
-            </a:pPr>
-            <a:r>
-              <a:rPr lang="en-US" sz="2200" b="1" dirty="0">
-                <a:solidFill>
-                  <a:srgbClr val="FFB347"/>
-                </a:solidFill>
-                <a:latin typeface="Georgia" pitchFamily="34" charset="0"/>
-                <a:ea typeface="Georgia" pitchFamily="34" charset="-122"/>
-                <a:cs typeface="Georgia" pitchFamily="34" charset="-120"/>
-              </a:rPr>
-              <a:t>Discussion</a:t>
-            </a:r>
-            <a:endParaRPr lang="en-US" sz="2200" dirty="0"/>
-          </a:p>
-        </p:txBody>
-      </p:sp>
-      <p:sp>
-        <p:nvSpPr>
-          <p:cNvPr id="24" name="Text 22"/>
-          <p:cNvSpPr/>
-          <p:nvPr/>
-        </p:nvSpPr>
-        <p:spPr>
-          <a:xfrm>
-            <a:off x="7863840" y="5029200"/>
-            <a:ext cx="3383280" cy="868680"/>
-          </a:xfrm>
-          <a:prstGeom prst="rect">
-            <a:avLst/>
-          </a:prstGeom>
-          <a:noFill/>
-          <a:ln/>
-        </p:spPr>
-        <p:txBody>
-          <a:bodyPr wrap="square" lIns="0" tIns="0" rIns="0" bIns="0" rtlCol="0" anchor="ctr"/>
-          <a:lstStyle/>
-          <a:p>
-            <a:pPr indent="0" marL="0">
-              <a:lnSpc>
-                <a:spcPct val="112000"/>
-              </a:lnSpc>
-              <a:buNone/>
-            </a:pPr>
-            <a:r>
-              <a:rPr lang="en-US" sz="1350" dirty="0">
-                <a:solidFill>
-                  <a:srgbClr val="ECECF3"/>
-                </a:solidFill>
-                <a:latin typeface="Calibri" pitchFamily="34" charset="0"/>
-                <a:ea typeface="Calibri" pitchFamily="34" charset="-122"/>
-                <a:cs typeface="Calibri" pitchFamily="34" charset="-120"/>
-              </a:rPr>
-              <a:t>Search any film for AI analysis: cast, theme, epic moments, and discussion questions.</a:t>
-            </a:r>
-            <a:endParaRPr lang="en-US" sz="1350" dirty="0"/>
-          </a:p>
-        </p:txBody>
-      </p:sp>
-      <p:sp>
-        <p:nvSpPr>
-          <p:cNvPr id="25" name="Text 23"/>
           <p:cNvSpPr/>
           <p:nvPr/>
         </p:nvSpPr>
@@ -11150,7 +14384,7 @@
       </p:sp>
       <p:sp>
         <p:nvSpPr>
-          <p:cNvPr id="26" name="Text 24"/>
+          <p:cNvPr id="14" name="Text 12"/>
           <p:cNvSpPr/>
           <p:nvPr/>
         </p:nvSpPr>
@@ -11272,7 +14506,7 @@
                 <a:ea typeface="Calibri" pitchFamily="34" charset="-122"/>
                 <a:cs typeface="Calibri" pitchFamily="34" charset="-120"/>
               </a:rPr>
-              <a:t>RELIABILITY</a:t>
+              <a:t>ADVANCED C · LOGIC</a:t>
             </a:r>
             <a:endParaRPr lang="en-US" sz="1200" dirty="0"/>
           </a:p>
@@ -11311,7 +14545,7 @@
                 <a:ea typeface="Georgia" pitchFamily="34" charset="-122"/>
                 <a:cs typeface="Georgia" pitchFamily="34" charset="-120"/>
               </a:rPr>
-              <a:t>Never crash in a live demo</a:t>
+              <a:t>The scoring algorithm</a:t>
             </a:r>
             <a:endParaRPr lang="en-US" sz="3200" dirty="0"/>
           </a:p>
@@ -11319,61 +14553,22 @@
       </p:sp>
       <p:sp>
         <p:nvSpPr>
-          <p:cNvPr id="5" name="Text 3"/>
-          <p:cNvSpPr/>
-          <p:nvPr/>
-        </p:nvSpPr>
-        <p:spPr>
-          <a:xfrm>
-            <a:off x="640080" y="1554480"/>
-            <a:ext cx="10881360" cy="365760"/>
-          </a:xfrm>
-          <a:prstGeom prst="rect">
-            <a:avLst/>
-          </a:prstGeom>
-          <a:noFill/>
-          <a:ln/>
-        </p:spPr>
-        <p:txBody>
-          <a:bodyPr wrap="square" lIns="0" tIns="0" rIns="0" bIns="0" rtlCol="0" anchor="ctr"/>
-          <a:lstStyle/>
-          <a:p>
-            <a:pPr indent="0" marL="0">
-              <a:buNone/>
-            </a:pPr>
-            <a:r>
-              <a:rPr lang="en-US" sz="1400" dirty="0">
-                <a:solidFill>
-                  <a:srgbClr val="9AA0B4"/>
-                </a:solidFill>
-                <a:latin typeface="Calibri" pitchFamily="34" charset="0"/>
-                <a:ea typeface="Calibri" pitchFamily="34" charset="-122"/>
-                <a:cs typeface="Calibri" pitchFamily="34" charset="-120"/>
-              </a:rPr>
-              <a:t>Free AI models rate-limit and fail. CINEMATCH degrades gracefully at every layer.</a:t>
-            </a:r>
-            <a:endParaRPr lang="en-US" sz="1400" dirty="0"/>
-          </a:p>
-        </p:txBody>
-      </p:sp>
-      <p:sp>
-        <p:nvSpPr>
-          <p:cNvPr id="6" name="Shape 4"/>
-          <p:cNvSpPr/>
-          <p:nvPr/>
-        </p:nvSpPr>
-        <p:spPr>
-          <a:xfrm>
-            <a:off x="640080" y="2103120"/>
-            <a:ext cx="2468880" cy="868680"/>
+          <p:cNvPr id="5" name="Shape 3"/>
+          <p:cNvSpPr/>
+          <p:nvPr/>
+        </p:nvSpPr>
+        <p:spPr>
+          <a:xfrm>
+            <a:off x="640080" y="1783080"/>
+            <a:ext cx="6858000" cy="4297680"/>
           </a:xfrm>
           <a:prstGeom prst="roundRect">
             <a:avLst>
-              <a:gd name="adj" fmla="val 8421"/>
+              <a:gd name="adj" fmla="val 1277"/>
             </a:avLst>
           </a:prstGeom>
           <a:solidFill>
-            <a:srgbClr val="11141D"/>
+            <a:srgbClr val="0A0C12"/>
           </a:solidFill>
           <a:ln w="12700">
             <a:solidFill>
@@ -11392,320 +14587,420 @@
       </p:sp>
       <p:sp>
         <p:nvSpPr>
-          <p:cNvPr id="7" name="Text 5"/>
-          <p:cNvSpPr/>
-          <p:nvPr/>
-        </p:nvSpPr>
-        <p:spPr>
-          <a:xfrm>
-            <a:off x="640080" y="2103120"/>
-            <a:ext cx="2468880" cy="868680"/>
-          </a:xfrm>
-          <a:prstGeom prst="rect">
-            <a:avLst/>
-          </a:prstGeom>
-          <a:noFill/>
-          <a:ln/>
-        </p:spPr>
-        <p:txBody>
-          <a:bodyPr wrap="square" lIns="0" tIns="0" rIns="0" bIns="0" rtlCol="0" anchor="ctr"/>
-          <a:lstStyle/>
-          <a:p>
-            <a:pPr algn="ctr" indent="0" marL="0">
-              <a:buNone/>
-            </a:pPr>
-            <a:r>
-              <a:rPr lang="en-US" sz="1400" b="1" dirty="0">
-                <a:solidFill>
-                  <a:srgbClr val="ECECF3"/>
-                </a:solidFill>
-                <a:latin typeface="Calibri" pitchFamily="34" charset="0"/>
-                <a:ea typeface="Calibri" pitchFamily="34" charset="-122"/>
-                <a:cs typeface="Calibri" pitchFamily="34" charset="-120"/>
-              </a:rPr>
-              <a:t>Qwen3</a:t>
-            </a:r>
-            <a:endParaRPr lang="en-US" sz="1400" dirty="0"/>
-          </a:p>
-        </p:txBody>
-      </p:sp>
-      <p:sp>
-        <p:nvSpPr>
-          <p:cNvPr id="8" name="Text 6"/>
-          <p:cNvSpPr/>
-          <p:nvPr/>
-        </p:nvSpPr>
-        <p:spPr>
-          <a:xfrm>
-            <a:off x="3063240" y="2103120"/>
-            <a:ext cx="457200" cy="868680"/>
-          </a:xfrm>
-          <a:prstGeom prst="rect">
-            <a:avLst/>
-          </a:prstGeom>
-          <a:noFill/>
-          <a:ln/>
-        </p:spPr>
-        <p:txBody>
-          <a:bodyPr wrap="square" lIns="0" tIns="0" rIns="0" bIns="0" rtlCol="0" anchor="ctr"/>
-          <a:lstStyle/>
-          <a:p>
-            <a:pPr algn="ctr" indent="0" marL="0">
-              <a:buNone/>
-            </a:pPr>
-            <a:r>
-              <a:rPr lang="en-US" sz="2200" b="1" dirty="0">
-                <a:solidFill>
-                  <a:srgbClr val="FFB347"/>
-                </a:solidFill>
-                <a:latin typeface="Calibri" pitchFamily="34" charset="0"/>
-                <a:ea typeface="Calibri" pitchFamily="34" charset="-122"/>
-                <a:cs typeface="Calibri" pitchFamily="34" charset="-120"/>
-              </a:rPr>
-              <a:t>→</a:t>
-            </a:r>
-            <a:endParaRPr lang="en-US" sz="2200" dirty="0"/>
-          </a:p>
-        </p:txBody>
-      </p:sp>
-      <p:sp>
-        <p:nvSpPr>
-          <p:cNvPr id="9" name="Shape 7"/>
-          <p:cNvSpPr/>
-          <p:nvPr/>
-        </p:nvSpPr>
-        <p:spPr>
-          <a:xfrm>
-            <a:off x="3520440" y="2103120"/>
-            <a:ext cx="2468880" cy="868680"/>
+          <p:cNvPr id="6" name="Shape 4"/>
+          <p:cNvSpPr/>
+          <p:nvPr/>
+        </p:nvSpPr>
+        <p:spPr>
+          <a:xfrm>
+            <a:off x="841248" y="1947672"/>
+            <a:ext cx="91440" cy="91440"/>
+          </a:xfrm>
+          <a:prstGeom prst="ellipse">
+            <a:avLst/>
+          </a:prstGeom>
+          <a:solidFill>
+            <a:srgbClr val="E0696A"/>
+          </a:solidFill>
+          <a:ln/>
+        </p:spPr>
+      </p:sp>
+      <p:sp>
+        <p:nvSpPr>
+          <p:cNvPr id="7" name="Shape 5"/>
+          <p:cNvSpPr/>
+          <p:nvPr/>
+        </p:nvSpPr>
+        <p:spPr>
+          <a:xfrm>
+            <a:off x="987552" y="1947672"/>
+            <a:ext cx="91440" cy="91440"/>
+          </a:xfrm>
+          <a:prstGeom prst="ellipse">
+            <a:avLst/>
+          </a:prstGeom>
+          <a:solidFill>
+            <a:srgbClr val="E8B14C"/>
+          </a:solidFill>
+          <a:ln/>
+        </p:spPr>
+      </p:sp>
+      <p:sp>
+        <p:nvSpPr>
+          <p:cNvPr id="8" name="Shape 6"/>
+          <p:cNvSpPr/>
+          <p:nvPr/>
+        </p:nvSpPr>
+        <p:spPr>
+          <a:xfrm>
+            <a:off x="1133856" y="1947672"/>
+            <a:ext cx="91440" cy="91440"/>
+          </a:xfrm>
+          <a:prstGeom prst="ellipse">
+            <a:avLst/>
+          </a:prstGeom>
+          <a:solidFill>
+            <a:srgbClr val="6FB39A"/>
+          </a:solidFill>
+          <a:ln/>
+        </p:spPr>
+      </p:sp>
+      <p:sp>
+        <p:nvSpPr>
+          <p:cNvPr id="9" name="Text 7"/>
+          <p:cNvSpPr/>
+          <p:nvPr/>
+        </p:nvSpPr>
+        <p:spPr>
+          <a:xfrm>
+            <a:off x="914400" y="2194560"/>
+            <a:ext cx="6355080" cy="3703320"/>
+          </a:xfrm>
+          <a:prstGeom prst="rect">
+            <a:avLst/>
+          </a:prstGeom>
+          <a:noFill/>
+          <a:ln/>
+        </p:spPr>
+        <p:txBody>
+          <a:bodyPr wrap="square" lIns="0" tIns="0" rIns="0" bIns="0" rtlCol="0" anchor="t"/>
+          <a:lstStyle/>
+          <a:p>
+            <a:pPr algn="l" indent="0" marL="0">
+              <a:lnSpc>
+                <a:spcPct val="102000"/>
+              </a:lnSpc>
+              <a:buNone/>
+            </a:pPr>
+            <a:r>
+              <a:rPr lang="en-US" sz="1150" b="1" dirty="0">
+                <a:solidFill>
+                  <a:srgbClr val="FFCB7A"/>
+                </a:solidFill>
+                <a:latin typeface="Consolas" pitchFamily="34" charset="0"/>
+                <a:ea typeface="Consolas" pitchFamily="34" charset="-122"/>
+                <a:cs typeface="Consolas" pitchFamily="34" charset="-120"/>
+              </a:rPr>
+              <a:t>#define PTS_GENRE   6</a:t>
+            </a:r>
+            <a:endParaRPr lang="en-US" sz="1150" dirty="0"/>
+          </a:p>
+          <a:p>
+            <a:pPr algn="l" indent="0" marL="0">
+              <a:lnSpc>
+                <a:spcPct val="102000"/>
+              </a:lnSpc>
+              <a:buNone/>
+            </a:pPr>
+            <a:r>
+              <a:rPr lang="en-US" sz="1150" b="1" dirty="0">
+                <a:solidFill>
+                  <a:srgbClr val="FFCB7A"/>
+                </a:solidFill>
+                <a:latin typeface="Consolas" pitchFamily="34" charset="0"/>
+                <a:ea typeface="Consolas" pitchFamily="34" charset="-122"/>
+                <a:cs typeface="Consolas" pitchFamily="34" charset="-120"/>
+              </a:rPr>
+              <a:t>#define PTS_MOOD    4</a:t>
+            </a:r>
+            <a:endParaRPr lang="en-US" sz="1150" dirty="0"/>
+          </a:p>
+          <a:p>
+            <a:pPr algn="l" indent="0" marL="0">
+              <a:lnSpc>
+                <a:spcPct val="102000"/>
+              </a:lnSpc>
+              <a:buNone/>
+            </a:pPr>
+            <a:r>
+              <a:rPr lang="en-US" sz="1150" dirty="0">
+                <a:solidFill>
+                  <a:srgbClr val="DCDFE8"/>
+                </a:solidFill>
+                <a:latin typeface="Consolas" pitchFamily="34" charset="0"/>
+                <a:ea typeface="Consolas" pitchFamily="34" charset="-122"/>
+                <a:cs typeface="Consolas" pitchFamily="34" charset="-120"/>
+              </a:rPr>
+              <a:t> </a:t>
+            </a:r>
+            <a:endParaRPr lang="en-US" sz="1150" dirty="0"/>
+          </a:p>
+          <a:p>
+            <a:pPr algn="l" indent="0" marL="0">
+              <a:lnSpc>
+                <a:spcPct val="102000"/>
+              </a:lnSpc>
+              <a:buNone/>
+            </a:pPr>
+            <a:r>
+              <a:rPr lang="en-US" sz="1150" dirty="0">
+                <a:solidFill>
+                  <a:srgbClr val="6FB39A"/>
+                </a:solidFill>
+                <a:latin typeface="Consolas" pitchFamily="34" charset="0"/>
+                <a:ea typeface="Consolas" pitchFamily="34" charset="-122"/>
+                <a:cs typeface="Consolas" pitchFamily="34" charset="-120"/>
+              </a:rPr>
+              <a:t>/* How well one title fits the answers */</a:t>
+            </a:r>
+            <a:endParaRPr lang="en-US" sz="1150" dirty="0"/>
+          </a:p>
+          <a:p>
+            <a:pPr algn="l" indent="0" marL="0">
+              <a:lnSpc>
+                <a:spcPct val="102000"/>
+              </a:lnSpc>
+              <a:buNone/>
+            </a:pPr>
+            <a:r>
+              <a:rPr lang="en-US" sz="1150" dirty="0">
+                <a:solidFill>
+                  <a:srgbClr val="DCDFE8"/>
+                </a:solidFill>
+                <a:latin typeface="Consolas" pitchFamily="34" charset="0"/>
+                <a:ea typeface="Consolas" pitchFamily="34" charset="-122"/>
+                <a:cs typeface="Consolas" pitchFamily="34" charset="-120"/>
+              </a:rPr>
+              <a:t>static double scoreTitle(const Title *t,</a:t>
+            </a:r>
+            <a:endParaRPr lang="en-US" sz="1150" dirty="0"/>
+          </a:p>
+          <a:p>
+            <a:pPr algn="l" indent="0" marL="0">
+              <a:lnSpc>
+                <a:spcPct val="102000"/>
+              </a:lnSpc>
+              <a:buNone/>
+            </a:pPr>
+            <a:r>
+              <a:rPr lang="en-US" sz="1150" dirty="0">
+                <a:solidFill>
+                  <a:srgbClr val="DCDFE8"/>
+                </a:solidFill>
+                <a:latin typeface="Consolas" pitchFamily="34" charset="0"/>
+                <a:ea typeface="Consolas" pitchFamily="34" charset="-122"/>
+                <a:cs typeface="Consolas" pitchFamily="34" charset="-120"/>
+              </a:rPr>
+              <a:t>        const char *genre,</a:t>
+            </a:r>
+            <a:endParaRPr lang="en-US" sz="1150" dirty="0"/>
+          </a:p>
+          <a:p>
+            <a:pPr algn="l" indent="0" marL="0">
+              <a:lnSpc>
+                <a:spcPct val="102000"/>
+              </a:lnSpc>
+              <a:buNone/>
+            </a:pPr>
+            <a:r>
+              <a:rPr lang="en-US" sz="1150" dirty="0">
+                <a:solidFill>
+                  <a:srgbClr val="DCDFE8"/>
+                </a:solidFill>
+                <a:latin typeface="Consolas" pitchFamily="34" charset="0"/>
+                <a:ea typeface="Consolas" pitchFamily="34" charset="-122"/>
+                <a:cs typeface="Consolas" pitchFamily="34" charset="-120"/>
+              </a:rPr>
+              <a:t>        const char *mood, ...) {</a:t>
+            </a:r>
+            <a:endParaRPr lang="en-US" sz="1150" dirty="0"/>
+          </a:p>
+          <a:p>
+            <a:pPr algn="l" indent="0" marL="0">
+              <a:lnSpc>
+                <a:spcPct val="102000"/>
+              </a:lnSpc>
+              <a:buNone/>
+            </a:pPr>
+            <a:r>
+              <a:rPr lang="en-US" sz="1150" dirty="0">
+                <a:solidFill>
+                  <a:srgbClr val="DCDFE8"/>
+                </a:solidFill>
+                <a:latin typeface="Consolas" pitchFamily="34" charset="0"/>
+                <a:ea typeface="Consolas" pitchFamily="34" charset="-122"/>
+                <a:cs typeface="Consolas" pitchFamily="34" charset="-120"/>
+              </a:rPr>
+              <a:t>    double score = 0.0;</a:t>
+            </a:r>
+            <a:endParaRPr lang="en-US" sz="1150" dirty="0"/>
+          </a:p>
+          <a:p>
+            <a:pPr algn="l" indent="0" marL="0">
+              <a:lnSpc>
+                <a:spcPct val="102000"/>
+              </a:lnSpc>
+              <a:buNone/>
+            </a:pPr>
+            <a:r>
+              <a:rPr lang="en-US" sz="1150" dirty="0">
+                <a:solidFill>
+                  <a:srgbClr val="DCDFE8"/>
+                </a:solidFill>
+                <a:latin typeface="Consolas" pitchFamily="34" charset="0"/>
+                <a:ea typeface="Consolas" pitchFamily="34" charset="-122"/>
+                <a:cs typeface="Consolas" pitchFamily="34" charset="-120"/>
+              </a:rPr>
+              <a:t>    if (strcmp(t-&gt;genre, genre) == 0)</a:t>
+            </a:r>
+            <a:endParaRPr lang="en-US" sz="1150" dirty="0"/>
+          </a:p>
+          <a:p>
+            <a:pPr algn="l" indent="0" marL="0">
+              <a:lnSpc>
+                <a:spcPct val="102000"/>
+              </a:lnSpc>
+              <a:buNone/>
+            </a:pPr>
+            <a:r>
+              <a:rPr lang="en-US" sz="1150" dirty="0">
+                <a:solidFill>
+                  <a:srgbClr val="DCDFE8"/>
+                </a:solidFill>
+                <a:latin typeface="Consolas" pitchFamily="34" charset="0"/>
+                <a:ea typeface="Consolas" pitchFamily="34" charset="-122"/>
+                <a:cs typeface="Consolas" pitchFamily="34" charset="-120"/>
+              </a:rPr>
+              <a:t>        score += PTS_GENRE;</a:t>
+            </a:r>
+            <a:endParaRPr lang="en-US" sz="1150" dirty="0"/>
+          </a:p>
+          <a:p>
+            <a:pPr algn="l" indent="0" marL="0">
+              <a:lnSpc>
+                <a:spcPct val="102000"/>
+              </a:lnSpc>
+              <a:buNone/>
+            </a:pPr>
+            <a:r>
+              <a:rPr lang="en-US" sz="1150" dirty="0">
+                <a:solidFill>
+                  <a:srgbClr val="DCDFE8"/>
+                </a:solidFill>
+                <a:latin typeface="Consolas" pitchFamily="34" charset="0"/>
+                <a:ea typeface="Consolas" pitchFamily="34" charset="-122"/>
+                <a:cs typeface="Consolas" pitchFamily="34" charset="-120"/>
+              </a:rPr>
+              <a:t>    if (strcmp(t-&gt;mood, mood) == 0)</a:t>
+            </a:r>
+            <a:endParaRPr lang="en-US" sz="1150" dirty="0"/>
+          </a:p>
+          <a:p>
+            <a:pPr algn="l" indent="0" marL="0">
+              <a:lnSpc>
+                <a:spcPct val="102000"/>
+              </a:lnSpc>
+              <a:buNone/>
+            </a:pPr>
+            <a:r>
+              <a:rPr lang="en-US" sz="1150" dirty="0">
+                <a:solidFill>
+                  <a:srgbClr val="DCDFE8"/>
+                </a:solidFill>
+                <a:latin typeface="Consolas" pitchFamily="34" charset="0"/>
+                <a:ea typeface="Consolas" pitchFamily="34" charset="-122"/>
+                <a:cs typeface="Consolas" pitchFamily="34" charset="-120"/>
+              </a:rPr>
+              <a:t>        score += PTS_MOOD;</a:t>
+            </a:r>
+            <a:endParaRPr lang="en-US" sz="1150" dirty="0"/>
+          </a:p>
+          <a:p>
+            <a:pPr algn="l" indent="0" marL="0">
+              <a:lnSpc>
+                <a:spcPct val="102000"/>
+              </a:lnSpc>
+              <a:buNone/>
+            </a:pPr>
+            <a:r>
+              <a:rPr lang="en-US" sz="1150" dirty="0">
+                <a:solidFill>
+                  <a:srgbClr val="6FB39A"/>
+                </a:solidFill>
+                <a:latin typeface="Consolas" pitchFamily="34" charset="0"/>
+                <a:ea typeface="Consolas" pitchFamily="34" charset="-122"/>
+                <a:cs typeface="Consolas" pitchFamily="34" charset="-120"/>
+              </a:rPr>
+              <a:t>    /* rating breaks ties: 8.7 -&gt; +0.87 */</a:t>
+            </a:r>
+            <a:endParaRPr lang="en-US" sz="1150" dirty="0"/>
+          </a:p>
+          <a:p>
+            <a:pPr algn="l" indent="0" marL="0">
+              <a:lnSpc>
+                <a:spcPct val="102000"/>
+              </a:lnSpc>
+              <a:buNone/>
+            </a:pPr>
+            <a:r>
+              <a:rPr lang="en-US" sz="1150" dirty="0">
+                <a:solidFill>
+                  <a:srgbClr val="DCDFE8"/>
+                </a:solidFill>
+                <a:latin typeface="Consolas" pitchFamily="34" charset="0"/>
+                <a:ea typeface="Consolas" pitchFamily="34" charset="-122"/>
+                <a:cs typeface="Consolas" pitchFamily="34" charset="-120"/>
+              </a:rPr>
+              <a:t>    score += atof(t-&gt;rating) / 10.0;</a:t>
+            </a:r>
+            <a:endParaRPr lang="en-US" sz="1150" dirty="0"/>
+          </a:p>
+          <a:p>
+            <a:pPr algn="l" indent="0" marL="0">
+              <a:lnSpc>
+                <a:spcPct val="102000"/>
+              </a:lnSpc>
+              <a:buNone/>
+            </a:pPr>
+            <a:r>
+              <a:rPr lang="en-US" sz="1150" dirty="0">
+                <a:solidFill>
+                  <a:srgbClr val="DCDFE8"/>
+                </a:solidFill>
+                <a:latin typeface="Consolas" pitchFamily="34" charset="0"/>
+                <a:ea typeface="Consolas" pitchFamily="34" charset="-122"/>
+                <a:cs typeface="Consolas" pitchFamily="34" charset="-120"/>
+              </a:rPr>
+              <a:t>    return score;</a:t>
+            </a:r>
+            <a:endParaRPr lang="en-US" sz="1150" dirty="0"/>
+          </a:p>
+          <a:p>
+            <a:pPr algn="l" indent="0" marL="0">
+              <a:lnSpc>
+                <a:spcPct val="102000"/>
+              </a:lnSpc>
+              <a:buNone/>
+            </a:pPr>
+            <a:r>
+              <a:rPr lang="en-US" sz="1150" b="1" dirty="0">
+                <a:solidFill>
+                  <a:srgbClr val="FFCB7A"/>
+                </a:solidFill>
+                <a:latin typeface="Consolas" pitchFamily="34" charset="0"/>
+                <a:ea typeface="Consolas" pitchFamily="34" charset="-122"/>
+                <a:cs typeface="Consolas" pitchFamily="34" charset="-120"/>
+              </a:rPr>
+              <a:t>}</a:t>
+            </a:r>
+            <a:endParaRPr lang="en-US" sz="1150" dirty="0"/>
+          </a:p>
+        </p:txBody>
+      </p:sp>
+      <p:sp>
+        <p:nvSpPr>
+          <p:cNvPr id="10" name="Shape 8"/>
+          <p:cNvSpPr/>
+          <p:nvPr/>
+        </p:nvSpPr>
+        <p:spPr>
+          <a:xfrm>
+            <a:off x="7772400" y="1783080"/>
+            <a:ext cx="3749040" cy="4297680"/>
           </a:xfrm>
           <a:prstGeom prst="roundRect">
             <a:avLst>
-              <a:gd name="adj" fmla="val 8421"/>
-            </a:avLst>
-          </a:prstGeom>
-          <a:solidFill>
-            <a:srgbClr val="11141D"/>
-          </a:solidFill>
-          <a:ln w="12700">
-            <a:solidFill>
-              <a:srgbClr val="2A2F3E"/>
-            </a:solidFill>
-            <a:prstDash val="solid"/>
-          </a:ln>
-          <a:effectLst>
-            <a:outerShdw sx="100000" sy="100000" kx="0" ky="0" algn="bl" rotWithShape="0" blurRad="101600" dist="38100" dir="8100000">
-              <a:srgbClr val="000000">
-                <a:alpha val="35000"/>
-              </a:srgbClr>
-            </a:outerShdw>
-          </a:effectLst>
-        </p:spPr>
-      </p:sp>
-      <p:sp>
-        <p:nvSpPr>
-          <p:cNvPr id="10" name="Text 8"/>
-          <p:cNvSpPr/>
-          <p:nvPr/>
-        </p:nvSpPr>
-        <p:spPr>
-          <a:xfrm>
-            <a:off x="3520440" y="2103120"/>
-            <a:ext cx="2468880" cy="868680"/>
-          </a:xfrm>
-          <a:prstGeom prst="rect">
-            <a:avLst/>
-          </a:prstGeom>
-          <a:noFill/>
-          <a:ln/>
-        </p:spPr>
-        <p:txBody>
-          <a:bodyPr wrap="square" lIns="0" tIns="0" rIns="0" bIns="0" rtlCol="0" anchor="ctr"/>
-          <a:lstStyle/>
-          <a:p>
-            <a:pPr algn="ctr" indent="0" marL="0">
-              <a:buNone/>
-            </a:pPr>
-            <a:r>
-              <a:rPr lang="en-US" sz="1400" b="1" dirty="0">
-                <a:solidFill>
-                  <a:srgbClr val="ECECF3"/>
-                </a:solidFill>
-                <a:latin typeface="Calibri" pitchFamily="34" charset="0"/>
-                <a:ea typeface="Calibri" pitchFamily="34" charset="-122"/>
-                <a:cs typeface="Calibri" pitchFamily="34" charset="-120"/>
-              </a:rPr>
-              <a:t>Llama-3.3-70B</a:t>
-            </a:r>
-            <a:endParaRPr lang="en-US" sz="1400" dirty="0"/>
-          </a:p>
-        </p:txBody>
-      </p:sp>
-      <p:sp>
-        <p:nvSpPr>
-          <p:cNvPr id="11" name="Text 9"/>
-          <p:cNvSpPr/>
-          <p:nvPr/>
-        </p:nvSpPr>
-        <p:spPr>
-          <a:xfrm>
-            <a:off x="5943600" y="2103120"/>
-            <a:ext cx="457200" cy="868680"/>
-          </a:xfrm>
-          <a:prstGeom prst="rect">
-            <a:avLst/>
-          </a:prstGeom>
-          <a:noFill/>
-          <a:ln/>
-        </p:spPr>
-        <p:txBody>
-          <a:bodyPr wrap="square" lIns="0" tIns="0" rIns="0" bIns="0" rtlCol="0" anchor="ctr"/>
-          <a:lstStyle/>
-          <a:p>
-            <a:pPr algn="ctr" indent="0" marL="0">
-              <a:buNone/>
-            </a:pPr>
-            <a:r>
-              <a:rPr lang="en-US" sz="2200" b="1" dirty="0">
-                <a:solidFill>
-                  <a:srgbClr val="FFB347"/>
-                </a:solidFill>
-                <a:latin typeface="Calibri" pitchFamily="34" charset="0"/>
-                <a:ea typeface="Calibri" pitchFamily="34" charset="-122"/>
-                <a:cs typeface="Calibri" pitchFamily="34" charset="-120"/>
-              </a:rPr>
-              <a:t>→</a:t>
-            </a:r>
-            <a:endParaRPr lang="en-US" sz="2200" dirty="0"/>
-          </a:p>
-        </p:txBody>
-      </p:sp>
-      <p:sp>
-        <p:nvSpPr>
-          <p:cNvPr id="12" name="Shape 10"/>
-          <p:cNvSpPr/>
-          <p:nvPr/>
-        </p:nvSpPr>
-        <p:spPr>
-          <a:xfrm>
-            <a:off x="6400800" y="2103120"/>
-            <a:ext cx="2468880" cy="868680"/>
-          </a:xfrm>
-          <a:prstGeom prst="roundRect">
-            <a:avLst>
-              <a:gd name="adj" fmla="val 8421"/>
-            </a:avLst>
-          </a:prstGeom>
-          <a:solidFill>
-            <a:srgbClr val="11141D"/>
-          </a:solidFill>
-          <a:ln w="12700">
-            <a:solidFill>
-              <a:srgbClr val="2A2F3E"/>
-            </a:solidFill>
-            <a:prstDash val="solid"/>
-          </a:ln>
-          <a:effectLst>
-            <a:outerShdw sx="100000" sy="100000" kx="0" ky="0" algn="bl" rotWithShape="0" blurRad="101600" dist="38100" dir="8100000">
-              <a:srgbClr val="000000">
-                <a:alpha val="35000"/>
-              </a:srgbClr>
-            </a:outerShdw>
-          </a:effectLst>
-        </p:spPr>
-      </p:sp>
-      <p:sp>
-        <p:nvSpPr>
-          <p:cNvPr id="13" name="Text 11"/>
-          <p:cNvSpPr/>
-          <p:nvPr/>
-        </p:nvSpPr>
-        <p:spPr>
-          <a:xfrm>
-            <a:off x="6400800" y="2103120"/>
-            <a:ext cx="2468880" cy="868680"/>
-          </a:xfrm>
-          <a:prstGeom prst="rect">
-            <a:avLst/>
-          </a:prstGeom>
-          <a:noFill/>
-          <a:ln/>
-        </p:spPr>
-        <p:txBody>
-          <a:bodyPr wrap="square" lIns="0" tIns="0" rIns="0" bIns="0" rtlCol="0" anchor="ctr"/>
-          <a:lstStyle/>
-          <a:p>
-            <a:pPr algn="ctr" indent="0" marL="0">
-              <a:buNone/>
-            </a:pPr>
-            <a:r>
-              <a:rPr lang="en-US" sz="1400" b="1" dirty="0">
-                <a:solidFill>
-                  <a:srgbClr val="ECECF3"/>
-                </a:solidFill>
-                <a:latin typeface="Calibri" pitchFamily="34" charset="0"/>
-                <a:ea typeface="Calibri" pitchFamily="34" charset="-122"/>
-                <a:cs typeface="Calibri" pitchFamily="34" charset="-120"/>
-              </a:rPr>
-              <a:t>GPT-OSS-120B</a:t>
-            </a:r>
-            <a:endParaRPr lang="en-US" sz="1400" dirty="0"/>
-          </a:p>
-        </p:txBody>
-      </p:sp>
-      <p:sp>
-        <p:nvSpPr>
-          <p:cNvPr id="14" name="Text 12"/>
-          <p:cNvSpPr/>
-          <p:nvPr/>
-        </p:nvSpPr>
-        <p:spPr>
-          <a:xfrm>
-            <a:off x="8823960" y="2103120"/>
-            <a:ext cx="457200" cy="868680"/>
-          </a:xfrm>
-          <a:prstGeom prst="rect">
-            <a:avLst/>
-          </a:prstGeom>
-          <a:noFill/>
-          <a:ln/>
-        </p:spPr>
-        <p:txBody>
-          <a:bodyPr wrap="square" lIns="0" tIns="0" rIns="0" bIns="0" rtlCol="0" anchor="ctr"/>
-          <a:lstStyle/>
-          <a:p>
-            <a:pPr algn="ctr" indent="0" marL="0">
-              <a:buNone/>
-            </a:pPr>
-            <a:r>
-              <a:rPr lang="en-US" sz="2200" b="1" dirty="0">
-                <a:solidFill>
-                  <a:srgbClr val="FFB347"/>
-                </a:solidFill>
-                <a:latin typeface="Calibri" pitchFamily="34" charset="0"/>
-                <a:ea typeface="Calibri" pitchFamily="34" charset="-122"/>
-                <a:cs typeface="Calibri" pitchFamily="34" charset="-120"/>
-              </a:rPr>
-              <a:t>→</a:t>
-            </a:r>
-            <a:endParaRPr lang="en-US" sz="2200" dirty="0"/>
-          </a:p>
-        </p:txBody>
-      </p:sp>
-      <p:sp>
-        <p:nvSpPr>
-          <p:cNvPr id="15" name="Shape 13"/>
-          <p:cNvSpPr/>
-          <p:nvPr/>
-        </p:nvSpPr>
-        <p:spPr>
-          <a:xfrm>
-            <a:off x="9281160" y="2103120"/>
-            <a:ext cx="2468880" cy="868680"/>
-          </a:xfrm>
-          <a:prstGeom prst="roundRect">
-            <a:avLst>
-              <a:gd name="adj" fmla="val 8421"/>
+              <a:gd name="adj" fmla="val 1951"/>
             </a:avLst>
           </a:prstGeom>
           <a:solidFill>
@@ -11728,30 +15023,30 @@
       </p:sp>
       <p:sp>
         <p:nvSpPr>
-          <p:cNvPr id="16" name="Text 14"/>
-          <p:cNvSpPr/>
-          <p:nvPr/>
-        </p:nvSpPr>
-        <p:spPr>
-          <a:xfrm>
-            <a:off x="9281160" y="2103120"/>
-            <a:ext cx="2468880" cy="868680"/>
-          </a:xfrm>
-          <a:prstGeom prst="rect">
-            <a:avLst/>
-          </a:prstGeom>
-          <a:noFill/>
-          <a:ln/>
-        </p:spPr>
-        <p:txBody>
-          <a:bodyPr wrap="square" lIns="0" tIns="0" rIns="0" bIns="0" rtlCol="0" anchor="ctr"/>
-          <a:lstStyle/>
-          <a:p>
-            <a:pPr algn="ctr" indent="0" marL="0">
-              <a:buNone/>
-            </a:pPr>
-            <a:r>
-              <a:rPr lang="en-US" sz="1400" b="1" dirty="0">
+          <p:cNvPr id="11" name="Text 9"/>
+          <p:cNvSpPr/>
+          <p:nvPr/>
+        </p:nvSpPr>
+        <p:spPr>
+          <a:xfrm>
+            <a:off x="8046720" y="2011680"/>
+            <a:ext cx="3200400" cy="365760"/>
+          </a:xfrm>
+          <a:prstGeom prst="rect">
+            <a:avLst/>
+          </a:prstGeom>
+          <a:noFill/>
+          <a:ln/>
+        </p:spPr>
+        <p:txBody>
+          <a:bodyPr wrap="square" lIns="0" tIns="0" rIns="0" bIns="0" rtlCol="0" anchor="ctr"/>
+          <a:lstStyle/>
+          <a:p>
+            <a:pPr indent="0" marL="0">
+              <a:buNone/>
+            </a:pPr>
+            <a:r>
+              <a:rPr lang="en-US" sz="1500" b="1" dirty="0">
                 <a:solidFill>
                   <a:srgbClr val="FFB347"/>
                 </a:solidFill>
@@ -11759,150 +15054,42 @@
                 <a:ea typeface="Calibri" pitchFamily="34" charset="-122"/>
                 <a:cs typeface="Calibri" pitchFamily="34" charset="-120"/>
               </a:rPr>
-              <a:t>Keyword fallback</a:t>
-            </a:r>
-            <a:endParaRPr lang="en-US" sz="1400" dirty="0"/>
-          </a:p>
-        </p:txBody>
-      </p:sp>
-      <p:sp>
-        <p:nvSpPr>
-          <p:cNvPr id="17" name="Shape 15"/>
-          <p:cNvSpPr/>
-          <p:nvPr/>
-        </p:nvSpPr>
-        <p:spPr>
-          <a:xfrm>
-            <a:off x="640080" y="3383280"/>
-            <a:ext cx="3322320" cy="2286000"/>
-          </a:xfrm>
-          <a:prstGeom prst="roundRect">
-            <a:avLst>
-              <a:gd name="adj" fmla="val 3200"/>
-            </a:avLst>
-          </a:prstGeom>
-          <a:solidFill>
-            <a:srgbClr val="1A1D27"/>
-          </a:solidFill>
-          <a:ln w="12700">
-            <a:solidFill>
-              <a:srgbClr val="2A2F3E"/>
-            </a:solidFill>
-            <a:prstDash val="solid"/>
-          </a:ln>
-          <a:effectLst>
-            <a:outerShdw sx="100000" sy="100000" kx="0" ky="0" algn="bl" rotWithShape="0" blurRad="101600" dist="38100" dir="8100000">
-              <a:srgbClr val="000000">
-                <a:alpha val="35000"/>
-              </a:srgbClr>
-            </a:outerShdw>
-          </a:effectLst>
-        </p:spPr>
-      </p:sp>
-      <p:sp>
-        <p:nvSpPr>
-          <p:cNvPr id="18" name="Text 16"/>
-          <p:cNvSpPr/>
-          <p:nvPr/>
-        </p:nvSpPr>
-        <p:spPr>
-          <a:xfrm>
-            <a:off x="914400" y="3611880"/>
-            <a:ext cx="822960" cy="731520"/>
-          </a:xfrm>
-          <a:prstGeom prst="rect">
-            <a:avLst/>
-          </a:prstGeom>
-          <a:noFill/>
-          <a:ln/>
-        </p:spPr>
-        <p:txBody>
-          <a:bodyPr wrap="square" lIns="0" tIns="0" rIns="0" bIns="0" rtlCol="0" anchor="ctr"/>
-          <a:lstStyle/>
-          <a:p>
-            <a:pPr algn="ctr" indent="0" marL="0">
-              <a:buNone/>
-            </a:pPr>
-            <a:r>
-              <a:rPr lang="en-US" sz="2600" dirty="0">
-                <a:solidFill>
-                  <a:srgbClr val="000000"/>
-                </a:solidFill>
-              </a:rPr>
-              <a:t>🔁</a:t>
-            </a:r>
-            <a:endParaRPr lang="en-US" sz="2600" dirty="0"/>
-          </a:p>
-        </p:txBody>
-      </p:sp>
-      <p:sp>
-        <p:nvSpPr>
-          <p:cNvPr id="19" name="Text 17"/>
-          <p:cNvSpPr/>
-          <p:nvPr/>
-        </p:nvSpPr>
-        <p:spPr>
-          <a:xfrm>
-            <a:off x="914400" y="4343400"/>
-            <a:ext cx="2773680" cy="457200"/>
-          </a:xfrm>
-          <a:prstGeom prst="rect">
-            <a:avLst/>
-          </a:prstGeom>
-          <a:noFill/>
-          <a:ln/>
-        </p:spPr>
-        <p:txBody>
-          <a:bodyPr wrap="square" lIns="0" tIns="0" rIns="0" bIns="0" rtlCol="0" anchor="ctr"/>
-          <a:lstStyle/>
-          <a:p>
-            <a:pPr indent="0" marL="0">
-              <a:buNone/>
-            </a:pPr>
-            <a:r>
-              <a:rPr lang="en-US" sz="1600" b="1" dirty="0">
-                <a:solidFill>
-                  <a:srgbClr val="FFB347"/>
-                </a:solidFill>
-                <a:latin typeface="Calibri" pitchFamily="34" charset="0"/>
-                <a:ea typeface="Calibri" pitchFamily="34" charset="-122"/>
-                <a:cs typeface="Calibri" pitchFamily="34" charset="-120"/>
-              </a:rPr>
-              <a:t>Automatic retry</a:t>
-            </a:r>
-            <a:endParaRPr lang="en-US" sz="1600" dirty="0"/>
-          </a:p>
-        </p:txBody>
-      </p:sp>
-      <p:sp>
-        <p:nvSpPr>
-          <p:cNvPr id="20" name="Text 18"/>
-          <p:cNvSpPr/>
-          <p:nvPr/>
-        </p:nvSpPr>
-        <p:spPr>
-          <a:xfrm>
-            <a:off x="914400" y="4800600"/>
-            <a:ext cx="2773680" cy="822960"/>
-          </a:xfrm>
-          <a:prstGeom prst="rect">
-            <a:avLst/>
-          </a:prstGeom>
-          <a:noFill/>
-          <a:ln/>
-        </p:spPr>
-        <p:txBody>
-          <a:bodyPr wrap="square" lIns="0" tIns="0" rIns="0" bIns="0" rtlCol="0" anchor="ctr"/>
-          <a:lstStyle/>
-          <a:p>
-            <a:pPr indent="0" marL="0">
-              <a:lnSpc>
-                <a:spcPct val="110000"/>
-              </a:lnSpc>
-              <a:buNone/>
-            </a:pPr>
-            <a:r>
-              <a:rPr lang="en-US" sz="1300" dirty="0">
+              <a:t>C techniques here</a:t>
+            </a:r>
+            <a:endParaRPr lang="en-US" sz="1500" dirty="0"/>
+          </a:p>
+        </p:txBody>
+      </p:sp>
+      <p:sp>
+        <p:nvSpPr>
+          <p:cNvPr id="12" name="Text 10"/>
+          <p:cNvSpPr/>
+          <p:nvPr/>
+        </p:nvSpPr>
+        <p:spPr>
+          <a:xfrm>
+            <a:off x="8046720" y="2514600"/>
+            <a:ext cx="3246120" cy="3383280"/>
+          </a:xfrm>
+          <a:prstGeom prst="rect">
+            <a:avLst/>
+          </a:prstGeom>
+          <a:noFill/>
+          <a:ln/>
+        </p:spPr>
+        <p:txBody>
+          <a:bodyPr wrap="square" lIns="0" tIns="0" rIns="0" bIns="0" rtlCol="0" anchor="t"/>
+          <a:lstStyle/>
+          <a:p>
+            <a:pPr marL="177800" indent="-177800">
+              <a:spcAft>
+                <a:spcPts val="700"/>
+              </a:spcAft>
+              <a:buSzPct val="100000"/>
+              <a:buChar char="•"/>
+            </a:pPr>
+            <a:r>
+              <a:rPr lang="en-US" sz="1250" dirty="0">
                 <a:solidFill>
                   <a:srgbClr val="ECECF3"/>
                 </a:solidFill>
@@ -11910,150 +15097,20 @@
                 <a:ea typeface="Calibri" pitchFamily="34" charset="-122"/>
                 <a:cs typeface="Calibri" pitchFamily="34" charset="-120"/>
               </a:rPr>
-              <a:t>On a 429 or 5xx error, the request retries after a short delay.</a:t>
-            </a:r>
-            <a:endParaRPr lang="en-US" sz="1300" dirty="0"/>
-          </a:p>
-        </p:txBody>
-      </p:sp>
-      <p:sp>
-        <p:nvSpPr>
-          <p:cNvPr id="21" name="Shape 19"/>
-          <p:cNvSpPr/>
-          <p:nvPr/>
-        </p:nvSpPr>
-        <p:spPr>
-          <a:xfrm>
-            <a:off x="4419600" y="3383280"/>
-            <a:ext cx="3322320" cy="2286000"/>
-          </a:xfrm>
-          <a:prstGeom prst="roundRect">
-            <a:avLst>
-              <a:gd name="adj" fmla="val 3200"/>
-            </a:avLst>
-          </a:prstGeom>
-          <a:solidFill>
-            <a:srgbClr val="1A1D27"/>
-          </a:solidFill>
-          <a:ln w="12700">
-            <a:solidFill>
-              <a:srgbClr val="2A2F3E"/>
-            </a:solidFill>
-            <a:prstDash val="solid"/>
-          </a:ln>
-          <a:effectLst>
-            <a:outerShdw sx="100000" sy="100000" kx="0" ky="0" algn="bl" rotWithShape="0" blurRad="101600" dist="38100" dir="8100000">
-              <a:srgbClr val="000000">
-                <a:alpha val="35000"/>
-              </a:srgbClr>
-            </a:outerShdw>
-          </a:effectLst>
-        </p:spPr>
-      </p:sp>
-      <p:sp>
-        <p:nvSpPr>
-          <p:cNvPr id="22" name="Text 20"/>
-          <p:cNvSpPr/>
-          <p:nvPr/>
-        </p:nvSpPr>
-        <p:spPr>
-          <a:xfrm>
-            <a:off x="4693920" y="3611880"/>
-            <a:ext cx="822960" cy="731520"/>
-          </a:xfrm>
-          <a:prstGeom prst="rect">
-            <a:avLst/>
-          </a:prstGeom>
-          <a:noFill/>
-          <a:ln/>
-        </p:spPr>
-        <p:txBody>
-          <a:bodyPr wrap="square" lIns="0" tIns="0" rIns="0" bIns="0" rtlCol="0" anchor="ctr"/>
-          <a:lstStyle/>
-          <a:p>
-            <a:pPr algn="ctr" indent="0" marL="0">
-              <a:buNone/>
-            </a:pPr>
-            <a:r>
-              <a:rPr lang="en-US" sz="2600" dirty="0">
-                <a:solidFill>
-                  <a:srgbClr val="000000"/>
-                </a:solidFill>
-              </a:rPr>
-              <a:t>🔑</a:t>
-            </a:r>
-            <a:endParaRPr lang="en-US" sz="2600" dirty="0"/>
-          </a:p>
-        </p:txBody>
-      </p:sp>
-      <p:sp>
-        <p:nvSpPr>
-          <p:cNvPr id="23" name="Text 21"/>
-          <p:cNvSpPr/>
-          <p:nvPr/>
-        </p:nvSpPr>
-        <p:spPr>
-          <a:xfrm>
-            <a:off x="4693920" y="4343400"/>
-            <a:ext cx="2773680" cy="457200"/>
-          </a:xfrm>
-          <a:prstGeom prst="rect">
-            <a:avLst/>
-          </a:prstGeom>
-          <a:noFill/>
-          <a:ln/>
-        </p:spPr>
-        <p:txBody>
-          <a:bodyPr wrap="square" lIns="0" tIns="0" rIns="0" bIns="0" rtlCol="0" anchor="ctr"/>
-          <a:lstStyle/>
-          <a:p>
-            <a:pPr indent="0" marL="0">
-              <a:buNone/>
-            </a:pPr>
-            <a:r>
-              <a:rPr lang="en-US" sz="1600" b="1" dirty="0">
-                <a:solidFill>
-                  <a:srgbClr val="FFB347"/>
-                </a:solidFill>
-                <a:latin typeface="Calibri" pitchFamily="34" charset="0"/>
-                <a:ea typeface="Calibri" pitchFamily="34" charset="-122"/>
-                <a:cs typeface="Calibri" pitchFamily="34" charset="-120"/>
-              </a:rPr>
-              <a:t>Keyword fallback</a:t>
-            </a:r>
-            <a:endParaRPr lang="en-US" sz="1600" dirty="0"/>
-          </a:p>
-        </p:txBody>
-      </p:sp>
-      <p:sp>
-        <p:nvSpPr>
-          <p:cNvPr id="24" name="Text 22"/>
-          <p:cNvSpPr/>
-          <p:nvPr/>
-        </p:nvSpPr>
-        <p:spPr>
-          <a:xfrm>
-            <a:off x="4693920" y="4800600"/>
-            <a:ext cx="2773680" cy="822960"/>
-          </a:xfrm>
-          <a:prstGeom prst="rect">
-            <a:avLst/>
-          </a:prstGeom>
-          <a:noFill/>
-          <a:ln/>
-        </p:spPr>
-        <p:txBody>
-          <a:bodyPr wrap="square" lIns="0" tIns="0" rIns="0" bIns="0" rtlCol="0" anchor="ctr"/>
-          <a:lstStyle/>
-          <a:p>
-            <a:pPr indent="0" marL="0">
-              <a:lnSpc>
-                <a:spcPct val="110000"/>
-              </a:lnSpc>
-              <a:buNone/>
-            </a:pPr>
-            <a:r>
-              <a:rPr lang="en-US" sz="1300" dirty="0">
+              <a:t>static — file-private function (encapsulation)</a:t>
+            </a:r>
+            <a:endParaRPr lang="en-US" sz="1250" dirty="0"/>
+          </a:p>
+          <a:p>
+            <a:pPr marL="177800" indent="-177800">
+              <a:spcAft>
+                <a:spcPts val="700"/>
+              </a:spcAft>
+              <a:buSzPct val="100000"/>
+              <a:buChar char="•"/>
+            </a:pPr>
+            <a:r>
+              <a:rPr lang="en-US" sz="1250" dirty="0">
                 <a:solidFill>
                   <a:srgbClr val="ECECF3"/>
                 </a:solidFill>
@@ -12061,150 +15118,20 @@
                 <a:ea typeface="Calibri" pitchFamily="34" charset="-122"/>
                 <a:cs typeface="Calibri" pitchFamily="34" charset="-120"/>
               </a:rPr>
-              <a:t>If all AI fails, a local matcher still derives sensible preferences.</a:t>
-            </a:r>
-            <a:endParaRPr lang="en-US" sz="1300" dirty="0"/>
-          </a:p>
-        </p:txBody>
-      </p:sp>
-      <p:sp>
-        <p:nvSpPr>
-          <p:cNvPr id="25" name="Shape 23"/>
-          <p:cNvSpPr/>
-          <p:nvPr/>
-        </p:nvSpPr>
-        <p:spPr>
-          <a:xfrm>
-            <a:off x="8199120" y="3383280"/>
-            <a:ext cx="3322320" cy="2286000"/>
-          </a:xfrm>
-          <a:prstGeom prst="roundRect">
-            <a:avLst>
-              <a:gd name="adj" fmla="val 3200"/>
-            </a:avLst>
-          </a:prstGeom>
-          <a:solidFill>
-            <a:srgbClr val="1A1D27"/>
-          </a:solidFill>
-          <a:ln w="12700">
-            <a:solidFill>
-              <a:srgbClr val="2A2F3E"/>
-            </a:solidFill>
-            <a:prstDash val="solid"/>
-          </a:ln>
-          <a:effectLst>
-            <a:outerShdw sx="100000" sy="100000" kx="0" ky="0" algn="bl" rotWithShape="0" blurRad="101600" dist="38100" dir="8100000">
-              <a:srgbClr val="000000">
-                <a:alpha val="35000"/>
-              </a:srgbClr>
-            </a:outerShdw>
-          </a:effectLst>
-        </p:spPr>
-      </p:sp>
-      <p:sp>
-        <p:nvSpPr>
-          <p:cNvPr id="26" name="Text 24"/>
-          <p:cNvSpPr/>
-          <p:nvPr/>
-        </p:nvSpPr>
-        <p:spPr>
-          <a:xfrm>
-            <a:off x="8473440" y="3611880"/>
-            <a:ext cx="822960" cy="731520"/>
-          </a:xfrm>
-          <a:prstGeom prst="rect">
-            <a:avLst/>
-          </a:prstGeom>
-          <a:noFill/>
-          <a:ln/>
-        </p:spPr>
-        <p:txBody>
-          <a:bodyPr wrap="square" lIns="0" tIns="0" rIns="0" bIns="0" rtlCol="0" anchor="ctr"/>
-          <a:lstStyle/>
-          <a:p>
-            <a:pPr algn="ctr" indent="0" marL="0">
-              <a:buNone/>
-            </a:pPr>
-            <a:r>
-              <a:rPr lang="en-US" sz="2600" dirty="0">
-                <a:solidFill>
-                  <a:srgbClr val="000000"/>
-                </a:solidFill>
-              </a:rPr>
-              <a:t>📝</a:t>
-            </a:r>
-            <a:endParaRPr lang="en-US" sz="2600" dirty="0"/>
-          </a:p>
-        </p:txBody>
-      </p:sp>
-      <p:sp>
-        <p:nvSpPr>
-          <p:cNvPr id="27" name="Text 25"/>
-          <p:cNvSpPr/>
-          <p:nvPr/>
-        </p:nvSpPr>
-        <p:spPr>
-          <a:xfrm>
-            <a:off x="8473440" y="4343400"/>
-            <a:ext cx="2773680" cy="457200"/>
-          </a:xfrm>
-          <a:prstGeom prst="rect">
-            <a:avLst/>
-          </a:prstGeom>
-          <a:noFill/>
-          <a:ln/>
-        </p:spPr>
-        <p:txBody>
-          <a:bodyPr wrap="square" lIns="0" tIns="0" rIns="0" bIns="0" rtlCol="0" anchor="ctr"/>
-          <a:lstStyle/>
-          <a:p>
-            <a:pPr indent="0" marL="0">
-              <a:buNone/>
-            </a:pPr>
-            <a:r>
-              <a:rPr lang="en-US" sz="1600" b="1" dirty="0">
-                <a:solidFill>
-                  <a:srgbClr val="FFB347"/>
-                </a:solidFill>
-                <a:latin typeface="Calibri" pitchFamily="34" charset="0"/>
-                <a:ea typeface="Calibri" pitchFamily="34" charset="-122"/>
-                <a:cs typeface="Calibri" pitchFamily="34" charset="-120"/>
-              </a:rPr>
-              <a:t>Content fallback</a:t>
-            </a:r>
-            <a:endParaRPr lang="en-US" sz="1600" dirty="0"/>
-          </a:p>
-        </p:txBody>
-      </p:sp>
-      <p:sp>
-        <p:nvSpPr>
-          <p:cNvPr id="28" name="Text 26"/>
-          <p:cNvSpPr/>
-          <p:nvPr/>
-        </p:nvSpPr>
-        <p:spPr>
-          <a:xfrm>
-            <a:off x="8473440" y="4800600"/>
-            <a:ext cx="2773680" cy="822960"/>
-          </a:xfrm>
-          <a:prstGeom prst="rect">
-            <a:avLst/>
-          </a:prstGeom>
-          <a:noFill/>
-          <a:ln/>
-        </p:spPr>
-        <p:txBody>
-          <a:bodyPr wrap="square" lIns="0" tIns="0" rIns="0" bIns="0" rtlCol="0" anchor="ctr"/>
-          <a:lstStyle/>
-          <a:p>
-            <a:pPr indent="0" marL="0">
-              <a:lnSpc>
-                <a:spcPct val="110000"/>
-              </a:lnSpc>
-              <a:buNone/>
-            </a:pPr>
-            <a:r>
-              <a:rPr lang="en-US" sz="1300" dirty="0">
+              <a:t>const Title * — pointer to a read-only struct</a:t>
+            </a:r>
+            <a:endParaRPr lang="en-US" sz="1250" dirty="0"/>
+          </a:p>
+          <a:p>
+            <a:pPr marL="177800" indent="-177800">
+              <a:spcAft>
+                <a:spcPts val="700"/>
+              </a:spcAft>
+              <a:buSzPct val="100000"/>
+              <a:buChar char="•"/>
+            </a:pPr>
+            <a:r>
+              <a:rPr lang="en-US" sz="1250" dirty="0">
                 <a:solidFill>
                   <a:srgbClr val="ECECF3"/>
                 </a:solidFill>
@@ -12212,15 +15139,57 @@
                 <a:ea typeface="Calibri" pitchFamily="34" charset="-122"/>
                 <a:cs typeface="Calibri" pitchFamily="34" charset="-120"/>
               </a:rPr>
-              <a:t>Empty AI fields are replaced with rich, well-written defaults.</a:t>
-            </a:r>
-            <a:endParaRPr lang="en-US" sz="1300" dirty="0"/>
-          </a:p>
-        </p:txBody>
-      </p:sp>
-      <p:sp>
-        <p:nvSpPr>
-          <p:cNvPr id="29" name="Text 27"/>
+              <a:t>strcmp() — string compare, &lt;string.h&gt;</a:t>
+            </a:r>
+            <a:endParaRPr lang="en-US" sz="1250" dirty="0"/>
+          </a:p>
+          <a:p>
+            <a:pPr marL="177800" indent="-177800">
+              <a:spcAft>
+                <a:spcPts val="700"/>
+              </a:spcAft>
+              <a:buSzPct val="100000"/>
+              <a:buChar char="•"/>
+            </a:pPr>
+            <a:r>
+              <a:rPr lang="en-US" sz="1250" dirty="0">
+                <a:solidFill>
+                  <a:srgbClr val="ECECF3"/>
+                </a:solidFill>
+                <a:latin typeface="Calibri" pitchFamily="34" charset="0"/>
+                <a:ea typeface="Calibri" pitchFamily="34" charset="-122"/>
+                <a:cs typeface="Calibri" pitchFamily="34" charset="-120"/>
+              </a:rPr>
+              <a:t>atof() — text to double, &lt;stdlib.h&gt;</a:t>
+            </a:r>
+            <a:endParaRPr lang="en-US" sz="1250" dirty="0"/>
+          </a:p>
+          <a:p>
+            <a:pPr marL="177800" indent="-177800">
+              <a:spcAft>
+                <a:spcPts val="700"/>
+              </a:spcAft>
+              <a:buSzPct val="100000"/>
+              <a:buChar char="•"/>
+            </a:pPr>
+            <a:r>
+              <a:rPr lang="en-US" sz="1250" dirty="0">
+                <a:solidFill>
+                  <a:srgbClr val="ECECF3"/>
+                </a:solidFill>
+                <a:latin typeface="Calibri" pitchFamily="34" charset="0"/>
+                <a:ea typeface="Calibri" pitchFamily="34" charset="-122"/>
+                <a:cs typeface="Calibri" pitchFamily="34" charset="-120"/>
+              </a:rPr>
+              <a:t>#define — compile-time constants</a:t>
+            </a:r>
+            <a:endParaRPr lang="en-US" sz="1250" dirty="0"/>
+          </a:p>
+        </p:txBody>
+      </p:sp>
+      <p:sp>
+        <p:nvSpPr>
+          <p:cNvPr id="13" name="Text 11"/>
           <p:cNvSpPr/>
           <p:nvPr/>
         </p:nvSpPr>
@@ -12273,7 +15242,7 @@
       </p:sp>
       <p:sp>
         <p:nvSpPr>
-          <p:cNvPr id="30" name="Text 28"/>
+          <p:cNvPr id="14" name="Text 12"/>
           <p:cNvSpPr/>
           <p:nvPr/>
         </p:nvSpPr>

--- a/deliverables/CINEMATCH-Presentation.pptx
+++ b/deliverables/CINEMATCH-Presentation.pptx
@@ -20,9 +20,11 @@
     <p:sldId id="268" r:id="rId14"/>
     <p:sldId id="269" r:id="rId15"/>
     <p:sldId id="270" r:id="rId16"/>
+    <p:sldId id="271" r:id="rId17"/>
+    <p:sldId id="272" r:id="rId18"/>
   </p:sldIdLst>
   <p:notesMasterIdLst>
-    <p:notesMasterId r:id="rId17"/>
+    <p:notesMasterId r:id="rId19"/>
   </p:notesMasterIdLst>
   <p:sldSz cx="12192000" cy="6858000"/>
   <p:notesSz cx="6858000" cy="12192000"/>
@@ -1381,6 +1383,182 @@
             <a:fld id="{F7021451-1387-4CA6-816F-3879F97B5CBC}" type="slidenum">
               <a:rPr lang="en-US"/>
               <a:t>15</a:t>
+            </a:fld>
+            <a:endParaRPr lang="en-US"/>
+          </a:p>
+        </p:txBody>
+      </p:sp>
+    </p:spTree>
+    <p:extLst>
+      <p:ext uri="{BB962C8B-B14F-4D97-AF65-F5344CB8AC3E}">
+        <p14:creationId xmlns:p14="http://schemas.microsoft.com/office/powerpoint/2010/main" val="1024086991"/>
+      </p:ext>
+    </p:extLst>
+  </p:cSld>
+  <p:clrMapOvr>
+    <a:masterClrMapping/>
+  </p:clrMapOvr>
+</p:notes>
+</file>
+
+<file path=ppt/notesSlides/notesSlide16.xml><?xml version="1.0" encoding="utf-8"?>
+<p:notes xmlns:a="http://schemas.openxmlformats.org/drawingml/2006/main" xmlns:r="http://schemas.openxmlformats.org/officeDocument/2006/relationships" xmlns:p="http://schemas.openxmlformats.org/presentationml/2006/main">
+  <p:cSld>
+    <p:spTree>
+      <p:nvGrpSpPr>
+        <p:cNvPr id="1" name=""/>
+        <p:cNvGrpSpPr/>
+        <p:nvPr/>
+      </p:nvGrpSpPr>
+      <p:grpSpPr>
+        <a:xfrm>
+          <a:off x="0" y="0"/>
+          <a:ext cx="0" cy="0"/>
+          <a:chOff x="0" y="0"/>
+          <a:chExt cx="0" cy="0"/>
+        </a:xfrm>
+      </p:grpSpPr>
+      <p:sp>
+        <p:nvSpPr>
+          <p:cNvPr id="2" name="Slide Image Placeholder 1"/>
+          <p:cNvSpPr>
+            <a:spLocks noGrp="1" noRot="1" noChangeAspect="1"/>
+          </p:cNvSpPr>
+          <p:nvPr>
+            <p:ph type="sldImg"/>
+          </p:nvPr>
+        </p:nvSpPr>
+        <p:spPr/>
+      </p:sp>
+      <p:sp>
+        <p:nvSpPr>
+          <p:cNvPr id="3" name="Notes Placeholder 2"/>
+          <p:cNvSpPr>
+            <a:spLocks noGrp="1"/>
+          </p:cNvSpPr>
+          <p:nvPr>
+            <p:ph type="body" idx="1"/>
+          </p:nvPr>
+        </p:nvSpPr>
+        <p:spPr/>
+        <p:txBody>
+          <a:bodyPr/>
+          <a:lstStyle/>
+          <a:p>
+            <a:r>
+              <a:rPr lang="en-US" dirty="0"/>
+              <a:t/>
+            </a:r>
+            <a:endParaRPr lang="en-US" dirty="0"/>
+          </a:p>
+        </p:txBody>
+      </p:sp>
+      <p:sp>
+        <p:nvSpPr>
+          <p:cNvPr id="4" name="Slide Number Placeholder 3"/>
+          <p:cNvSpPr>
+            <a:spLocks noGrp="1"/>
+          </p:cNvSpPr>
+          <p:nvPr>
+            <p:ph type="sldNum" sz="quarter" idx="10"/>
+          </p:nvPr>
+        </p:nvSpPr>
+        <p:spPr/>
+        <p:txBody>
+          <a:bodyPr/>
+          <a:lstStyle/>
+          <a:p>
+            <a:fld id="{F7021451-1387-4CA6-816F-3879F97B5CBC}" type="slidenum">
+              <a:rPr lang="en-US"/>
+              <a:t>16</a:t>
+            </a:fld>
+            <a:endParaRPr lang="en-US"/>
+          </a:p>
+        </p:txBody>
+      </p:sp>
+    </p:spTree>
+    <p:extLst>
+      <p:ext uri="{BB962C8B-B14F-4D97-AF65-F5344CB8AC3E}">
+        <p14:creationId xmlns:p14="http://schemas.microsoft.com/office/powerpoint/2010/main" val="1024086991"/>
+      </p:ext>
+    </p:extLst>
+  </p:cSld>
+  <p:clrMapOvr>
+    <a:masterClrMapping/>
+  </p:clrMapOvr>
+</p:notes>
+</file>
+
+<file path=ppt/notesSlides/notesSlide17.xml><?xml version="1.0" encoding="utf-8"?>
+<p:notes xmlns:a="http://schemas.openxmlformats.org/drawingml/2006/main" xmlns:r="http://schemas.openxmlformats.org/officeDocument/2006/relationships" xmlns:p="http://schemas.openxmlformats.org/presentationml/2006/main">
+  <p:cSld>
+    <p:spTree>
+      <p:nvGrpSpPr>
+        <p:cNvPr id="1" name=""/>
+        <p:cNvGrpSpPr/>
+        <p:nvPr/>
+      </p:nvGrpSpPr>
+      <p:grpSpPr>
+        <a:xfrm>
+          <a:off x="0" y="0"/>
+          <a:ext cx="0" cy="0"/>
+          <a:chOff x="0" y="0"/>
+          <a:chExt cx="0" cy="0"/>
+        </a:xfrm>
+      </p:grpSpPr>
+      <p:sp>
+        <p:nvSpPr>
+          <p:cNvPr id="2" name="Slide Image Placeholder 1"/>
+          <p:cNvSpPr>
+            <a:spLocks noGrp="1" noRot="1" noChangeAspect="1"/>
+          </p:cNvSpPr>
+          <p:nvPr>
+            <p:ph type="sldImg"/>
+          </p:nvPr>
+        </p:nvSpPr>
+        <p:spPr/>
+      </p:sp>
+      <p:sp>
+        <p:nvSpPr>
+          <p:cNvPr id="3" name="Notes Placeholder 2"/>
+          <p:cNvSpPr>
+            <a:spLocks noGrp="1"/>
+          </p:cNvSpPr>
+          <p:nvPr>
+            <p:ph type="body" idx="1"/>
+          </p:nvPr>
+        </p:nvSpPr>
+        <p:spPr/>
+        <p:txBody>
+          <a:bodyPr/>
+          <a:lstStyle/>
+          <a:p>
+            <a:r>
+              <a:rPr lang="en-US" dirty="0"/>
+              <a:t/>
+            </a:r>
+            <a:endParaRPr lang="en-US" dirty="0"/>
+          </a:p>
+        </p:txBody>
+      </p:sp>
+      <p:sp>
+        <p:nvSpPr>
+          <p:cNvPr id="4" name="Slide Number Placeholder 3"/>
+          <p:cNvSpPr>
+            <a:spLocks noGrp="1"/>
+          </p:cNvSpPr>
+          <p:nvPr>
+            <p:ph type="sldNum" sz="quarter" idx="10"/>
+          </p:nvPr>
+        </p:nvSpPr>
+        <p:spPr/>
+        <p:txBody>
+          <a:bodyPr/>
+          <a:lstStyle/>
+          <a:p>
+            <a:fld id="{F7021451-1387-4CA6-816F-3879F97B5CBC}" type="slidenum">
+              <a:rPr lang="en-US"/>
+              <a:t>17</a:t>
             </a:fld>
             <a:endParaRPr lang="en-US"/>
           </a:p>
@@ -6648,7 +6826,7 @@
                 <a:ea typeface="Calibri" pitchFamily="34" charset="-122"/>
                 <a:cs typeface="Calibri" pitchFamily="34" charset="-120"/>
               </a:rPr>
-              <a:t>UNDER THE HOOD</a:t>
+              <a:t>EVALUATION</a:t>
             </a:r>
             <a:endParaRPr lang="en-US" sz="1200" dirty="0"/>
           </a:p>
@@ -6687,26 +6865,1467 @@
                 <a:ea typeface="Georgia" pitchFamily="34" charset="-122"/>
                 <a:cs typeface="Georgia" pitchFamily="34" charset="-120"/>
               </a:rPr>
-              <a:t>Tech stack &amp; open data</a:t>
+              <a:t>Testing the recommendation pipeline</a:t>
             </a:r>
             <a:endParaRPr lang="en-US" sz="3200" dirty="0"/>
           </a:p>
         </p:txBody>
       </p:sp>
-      <p:sp>
-        <p:nvSpPr>
-          <p:cNvPr id="5" name="Shape 3"/>
-          <p:cNvSpPr/>
-          <p:nvPr/>
-        </p:nvSpPr>
-        <p:spPr>
-          <a:xfrm>
-            <a:off x="640080" y="2103120"/>
-            <a:ext cx="2446020" cy="1554480"/>
+      <p:graphicFrame>
+        <p:nvGraphicFramePr>
+          <p:cNvPr id="15" name="Table 0"/>
+          <p:cNvGraphicFramePr>
+            <a:graphicFrameLocks noGrp="1"/>
+          </p:cNvGraphicFramePr>
+          <p:nvPr>
+            <p:extLst>
+              <p:ext uri="{D42A27DB-BD31-4B8C-83A1-F6EECF244321}">
+                <p14:modId xmlns:p14="http://schemas.microsoft.com/office/powerpoint/2010/main" val="1579011935"/>
+              </p:ext>
+            </p:extLst>
+          </p:nvPr>
+        </p:nvGraphicFramePr>
+        <p:xfrm>
+          <a:off x="640080" y="1737360"/>
+          <a:ext cx="10881360" cy="914400"/>
+        </p:xfrm>
+        <a:graphic>
+          <a:graphicData uri="http://schemas.openxmlformats.org/drawingml/2006/table">
+            <a:tbl>
+              <a:tblPr/>
+              <a:tblGrid>
+                <a:gridCol w="3383280"/>
+                <a:gridCol w="3017520"/>
+                <a:gridCol w="2651760"/>
+                <a:gridCol w="1828800"/>
+              </a:tblGrid>
+              <a:tr h="420624">
+                <a:tc>
+                  <a:txBody>
+                    <a:bodyPr/>
+                    <a:lstStyle/>
+                    <a:p>
+                      <a:pPr indent="0" marL="0">
+                        <a:buNone/>
+                      </a:pPr>
+                      <a:r>
+                        <a:rPr lang="en-US" sz="1250" b="1" dirty="0">
+                          <a:solidFill>
+                            <a:srgbClr val="1A1300"/>
+                          </a:solidFill>
+                          <a:latin typeface="Calibri" pitchFamily="34" charset="0"/>
+                          <a:ea typeface="Calibri" pitchFamily="34" charset="-122"/>
+                          <a:cs typeface="Calibri" pitchFamily="34" charset="-120"/>
+                        </a:rPr>
+                        <a:t>Mood input</a:t>
+                      </a:r>
+                      <a:endParaRPr lang="en-US" sz="1250" dirty="0">
+                        <a:latin typeface="Calibri" charset="0"/>
+                        <a:ea typeface="Calibri" charset="0"/>
+                        <a:cs typeface="Calibri" charset="0"/>
+                      </a:endParaRPr>
+                    </a:p>
+                  </a:txBody>
+                  <a:tcPr marL="63500" marR="63500" marT="63500" marB="63500" anchor="ctr">
+                    <a:lnL w="12700" cap="flat" cmpd="sng" algn="ctr">
+                      <a:solidFill>
+                        <a:srgbClr val="2A2F3E"/>
+                      </a:solidFill>
+                      <a:prstDash val="solid"/>
+                      <a:round/>
+                      <a:headEnd type="none" w="med" len="med"/>
+                      <a:tailEnd type="none" w="med" len="med"/>
+                    </a:lnL>
+                    <a:lnR w="12700" cap="flat" cmpd="sng" algn="ctr">
+                      <a:solidFill>
+                        <a:srgbClr val="2A2F3E"/>
+                      </a:solidFill>
+                      <a:prstDash val="solid"/>
+                      <a:round/>
+                      <a:headEnd type="none" w="med" len="med"/>
+                      <a:tailEnd type="none" w="med" len="med"/>
+                    </a:lnR>
+                    <a:lnT w="12700" cap="flat" cmpd="sng" algn="ctr">
+                      <a:solidFill>
+                        <a:srgbClr val="2A2F3E"/>
+                      </a:solidFill>
+                      <a:prstDash val="solid"/>
+                      <a:round/>
+                      <a:headEnd type="none" w="med" len="med"/>
+                      <a:tailEnd type="none" w="med" len="med"/>
+                    </a:lnT>
+                    <a:lnB w="12700" cap="flat" cmpd="sng" algn="ctr">
+                      <a:solidFill>
+                        <a:srgbClr val="2A2F3E"/>
+                      </a:solidFill>
+                      <a:prstDash val="solid"/>
+                      <a:round/>
+                      <a:headEnd type="none" w="med" len="med"/>
+                      <a:tailEnd type="none" w="med" len="med"/>
+                    </a:lnB>
+                    <a:solidFill>
+                      <a:srgbClr val="FFB347"/>
+                    </a:solidFill>
+                  </a:tcPr>
+                </a:tc>
+                <a:tc>
+                  <a:txBody>
+                    <a:bodyPr/>
+                    <a:lstStyle/>
+                    <a:p>
+                      <a:pPr indent="0" marL="0">
+                        <a:buNone/>
+                      </a:pPr>
+                      <a:r>
+                        <a:rPr lang="en-US" sz="1250" b="1" dirty="0">
+                          <a:solidFill>
+                            <a:srgbClr val="1A1300"/>
+                          </a:solidFill>
+                          <a:latin typeface="Calibri" pitchFamily="34" charset="0"/>
+                          <a:ea typeface="Calibri" pitchFamily="34" charset="-122"/>
+                          <a:cs typeface="Calibri" pitchFamily="34" charset="-120"/>
+                        </a:rPr>
+                        <a:t>Expected preferences</a:t>
+                      </a:r>
+                      <a:endParaRPr lang="en-US" sz="1250" dirty="0">
+                        <a:latin typeface="Calibri" charset="0"/>
+                        <a:ea typeface="Calibri" charset="0"/>
+                        <a:cs typeface="Calibri" charset="0"/>
+                      </a:endParaRPr>
+                    </a:p>
+                  </a:txBody>
+                  <a:tcPr marL="63500" marR="63500" marT="63500" marB="63500" anchor="ctr">
+                    <a:lnL w="12700" cap="flat" cmpd="sng" algn="ctr">
+                      <a:solidFill>
+                        <a:srgbClr val="2A2F3E"/>
+                      </a:solidFill>
+                      <a:prstDash val="solid"/>
+                      <a:round/>
+                      <a:headEnd type="none" w="med" len="med"/>
+                      <a:tailEnd type="none" w="med" len="med"/>
+                    </a:lnL>
+                    <a:lnR w="12700" cap="flat" cmpd="sng" algn="ctr">
+                      <a:solidFill>
+                        <a:srgbClr val="2A2F3E"/>
+                      </a:solidFill>
+                      <a:prstDash val="solid"/>
+                      <a:round/>
+                      <a:headEnd type="none" w="med" len="med"/>
+                      <a:tailEnd type="none" w="med" len="med"/>
+                    </a:lnR>
+                    <a:lnT w="12700" cap="flat" cmpd="sng" algn="ctr">
+                      <a:solidFill>
+                        <a:srgbClr val="2A2F3E"/>
+                      </a:solidFill>
+                      <a:prstDash val="solid"/>
+                      <a:round/>
+                      <a:headEnd type="none" w="med" len="med"/>
+                      <a:tailEnd type="none" w="med" len="med"/>
+                    </a:lnT>
+                    <a:lnB w="12700" cap="flat" cmpd="sng" algn="ctr">
+                      <a:solidFill>
+                        <a:srgbClr val="2A2F3E"/>
+                      </a:solidFill>
+                      <a:prstDash val="solid"/>
+                      <a:round/>
+                      <a:headEnd type="none" w="med" len="med"/>
+                      <a:tailEnd type="none" w="med" len="med"/>
+                    </a:lnB>
+                    <a:solidFill>
+                      <a:srgbClr val="FFB347"/>
+                    </a:solidFill>
+                  </a:tcPr>
+                </a:tc>
+                <a:tc>
+                  <a:txBody>
+                    <a:bodyPr/>
+                    <a:lstStyle/>
+                    <a:p>
+                      <a:pPr indent="0" marL="0">
+                        <a:buNone/>
+                      </a:pPr>
+                      <a:r>
+                        <a:rPr lang="en-US" sz="1250" b="1" dirty="0">
+                          <a:solidFill>
+                            <a:srgbClr val="1A1300"/>
+                          </a:solidFill>
+                          <a:latin typeface="Calibri" pitchFamily="34" charset="0"/>
+                          <a:ea typeface="Calibri" pitchFamily="34" charset="-122"/>
+                          <a:cs typeface="Calibri" pitchFamily="34" charset="-120"/>
+                        </a:rPr>
+                        <a:t>Actual output</a:t>
+                      </a:r>
+                      <a:endParaRPr lang="en-US" sz="1250" dirty="0">
+                        <a:latin typeface="Calibri" charset="0"/>
+                        <a:ea typeface="Calibri" charset="0"/>
+                        <a:cs typeface="Calibri" charset="0"/>
+                      </a:endParaRPr>
+                    </a:p>
+                  </a:txBody>
+                  <a:tcPr marL="63500" marR="63500" marT="63500" marB="63500" anchor="ctr">
+                    <a:lnL w="12700" cap="flat" cmpd="sng" algn="ctr">
+                      <a:solidFill>
+                        <a:srgbClr val="2A2F3E"/>
+                      </a:solidFill>
+                      <a:prstDash val="solid"/>
+                      <a:round/>
+                      <a:headEnd type="none" w="med" len="med"/>
+                      <a:tailEnd type="none" w="med" len="med"/>
+                    </a:lnL>
+                    <a:lnR w="12700" cap="flat" cmpd="sng" algn="ctr">
+                      <a:solidFill>
+                        <a:srgbClr val="2A2F3E"/>
+                      </a:solidFill>
+                      <a:prstDash val="solid"/>
+                      <a:round/>
+                      <a:headEnd type="none" w="med" len="med"/>
+                      <a:tailEnd type="none" w="med" len="med"/>
+                    </a:lnR>
+                    <a:lnT w="12700" cap="flat" cmpd="sng" algn="ctr">
+                      <a:solidFill>
+                        <a:srgbClr val="2A2F3E"/>
+                      </a:solidFill>
+                      <a:prstDash val="solid"/>
+                      <a:round/>
+                      <a:headEnd type="none" w="med" len="med"/>
+                      <a:tailEnd type="none" w="med" len="med"/>
+                    </a:lnT>
+                    <a:lnB w="12700" cap="flat" cmpd="sng" algn="ctr">
+                      <a:solidFill>
+                        <a:srgbClr val="2A2F3E"/>
+                      </a:solidFill>
+                      <a:prstDash val="solid"/>
+                      <a:round/>
+                      <a:headEnd type="none" w="med" len="med"/>
+                      <a:tailEnd type="none" w="med" len="med"/>
+                    </a:lnB>
+                    <a:solidFill>
+                      <a:srgbClr val="FFB347"/>
+                    </a:solidFill>
+                  </a:tcPr>
+                </a:tc>
+                <a:tc>
+                  <a:txBody>
+                    <a:bodyPr/>
+                    <a:lstStyle/>
+                    <a:p>
+                      <a:pPr indent="0" marL="0">
+                        <a:buNone/>
+                      </a:pPr>
+                      <a:r>
+                        <a:rPr lang="en-US" sz="1250" b="1" dirty="0">
+                          <a:solidFill>
+                            <a:srgbClr val="1A1300"/>
+                          </a:solidFill>
+                          <a:latin typeface="Calibri" pitchFamily="34" charset="0"/>
+                          <a:ea typeface="Calibri" pitchFamily="34" charset="-122"/>
+                          <a:cs typeface="Calibri" pitchFamily="34" charset="-120"/>
+                        </a:rPr>
+                        <a:t>Result</a:t>
+                      </a:r>
+                      <a:endParaRPr lang="en-US" sz="1250" dirty="0">
+                        <a:latin typeface="Calibri" charset="0"/>
+                        <a:ea typeface="Calibri" charset="0"/>
+                        <a:cs typeface="Calibri" charset="0"/>
+                      </a:endParaRPr>
+                    </a:p>
+                  </a:txBody>
+                  <a:tcPr marL="63500" marR="63500" marT="63500" marB="63500" anchor="ctr">
+                    <a:lnL w="12700" cap="flat" cmpd="sng" algn="ctr">
+                      <a:solidFill>
+                        <a:srgbClr val="2A2F3E"/>
+                      </a:solidFill>
+                      <a:prstDash val="solid"/>
+                      <a:round/>
+                      <a:headEnd type="none" w="med" len="med"/>
+                      <a:tailEnd type="none" w="med" len="med"/>
+                    </a:lnL>
+                    <a:lnR w="12700" cap="flat" cmpd="sng" algn="ctr">
+                      <a:solidFill>
+                        <a:srgbClr val="2A2F3E"/>
+                      </a:solidFill>
+                      <a:prstDash val="solid"/>
+                      <a:round/>
+                      <a:headEnd type="none" w="med" len="med"/>
+                      <a:tailEnd type="none" w="med" len="med"/>
+                    </a:lnR>
+                    <a:lnT w="12700" cap="flat" cmpd="sng" algn="ctr">
+                      <a:solidFill>
+                        <a:srgbClr val="2A2F3E"/>
+                      </a:solidFill>
+                      <a:prstDash val="solid"/>
+                      <a:round/>
+                      <a:headEnd type="none" w="med" len="med"/>
+                      <a:tailEnd type="none" w="med" len="med"/>
+                    </a:lnT>
+                    <a:lnB w="12700" cap="flat" cmpd="sng" algn="ctr">
+                      <a:solidFill>
+                        <a:srgbClr val="2A2F3E"/>
+                      </a:solidFill>
+                      <a:prstDash val="solid"/>
+                      <a:round/>
+                      <a:headEnd type="none" w="med" len="med"/>
+                      <a:tailEnd type="none" w="med" len="med"/>
+                    </a:lnB>
+                    <a:solidFill>
+                      <a:srgbClr val="FFB347"/>
+                    </a:solidFill>
+                  </a:tcPr>
+                </a:tc>
+              </a:tr>
+              <a:tr h="420624">
+                <a:tc>
+                  <a:txBody>
+                    <a:bodyPr/>
+                    <a:lstStyle/>
+                    <a:p>
+                      <a:pPr indent="0" marL="0">
+                        <a:buNone/>
+                      </a:pPr>
+                      <a:r>
+                        <a:rPr lang="en-US" sz="1200" dirty="0">
+                          <a:solidFill>
+                            <a:srgbClr val="ECECF3"/>
+                          </a:solidFill>
+                          <a:latin typeface="Calibri" pitchFamily="34" charset="0"/>
+                          <a:ea typeface="Calibri" pitchFamily="34" charset="-122"/>
+                          <a:cs typeface="Calibri" pitchFamily="34" charset="-120"/>
+                        </a:rPr>
+                        <a:t>"relaxing cozy solo night"</a:t>
+                      </a:r>
+                      <a:endParaRPr lang="en-US" sz="1200" dirty="0">
+                        <a:latin typeface="Calibri" charset="0"/>
+                        <a:ea typeface="Calibri" charset="0"/>
+                        <a:cs typeface="Calibri" charset="0"/>
+                      </a:endParaRPr>
+                    </a:p>
+                  </a:txBody>
+                  <a:tcPr marL="63500" marR="63500" marT="63500" marB="63500" anchor="ctr">
+                    <a:lnL w="12700" cap="flat" cmpd="sng" algn="ctr">
+                      <a:solidFill>
+                        <a:srgbClr val="2A2F3E"/>
+                      </a:solidFill>
+                      <a:prstDash val="solid"/>
+                      <a:round/>
+                      <a:headEnd type="none" w="med" len="med"/>
+                      <a:tailEnd type="none" w="med" len="med"/>
+                    </a:lnL>
+                    <a:lnR w="12700" cap="flat" cmpd="sng" algn="ctr">
+                      <a:solidFill>
+                        <a:srgbClr val="2A2F3E"/>
+                      </a:solidFill>
+                      <a:prstDash val="solid"/>
+                      <a:round/>
+                      <a:headEnd type="none" w="med" len="med"/>
+                      <a:tailEnd type="none" w="med" len="med"/>
+                    </a:lnR>
+                    <a:lnT w="12700" cap="flat" cmpd="sng" algn="ctr">
+                      <a:solidFill>
+                        <a:srgbClr val="2A2F3E"/>
+                      </a:solidFill>
+                      <a:prstDash val="solid"/>
+                      <a:round/>
+                      <a:headEnd type="none" w="med" len="med"/>
+                      <a:tailEnd type="none" w="med" len="med"/>
+                    </a:lnT>
+                    <a:lnB w="12700" cap="flat" cmpd="sng" algn="ctr">
+                      <a:solidFill>
+                        <a:srgbClr val="2A2F3E"/>
+                      </a:solidFill>
+                      <a:prstDash val="solid"/>
+                      <a:round/>
+                      <a:headEnd type="none" w="med" len="med"/>
+                      <a:tailEnd type="none" w="med" len="med"/>
+                    </a:lnB>
+                    <a:solidFill>
+                      <a:srgbClr val="1A1D27"/>
+                    </a:solidFill>
+                  </a:tcPr>
+                </a:tc>
+                <a:tc>
+                  <a:txBody>
+                    <a:bodyPr/>
+                    <a:lstStyle/>
+                    <a:p>
+                      <a:pPr indent="0" marL="0">
+                        <a:buNone/>
+                      </a:pPr>
+                      <a:r>
+                        <a:rPr lang="en-US" sz="1200" dirty="0">
+                          <a:solidFill>
+                            <a:srgbClr val="ECECF3"/>
+                          </a:solidFill>
+                          <a:latin typeface="Calibri" pitchFamily="34" charset="0"/>
+                          <a:ea typeface="Calibri" pitchFamily="34" charset="-122"/>
+                          <a:cs typeface="Calibri" pitchFamily="34" charset="-120"/>
+                        </a:rPr>
+                        <a:t>Cozy · Relaxed · solo</a:t>
+                      </a:r>
+                      <a:endParaRPr lang="en-US" sz="1200" dirty="0">
+                        <a:latin typeface="Calibri" charset="0"/>
+                        <a:ea typeface="Calibri" charset="0"/>
+                        <a:cs typeface="Calibri" charset="0"/>
+                      </a:endParaRPr>
+                    </a:p>
+                  </a:txBody>
+                  <a:tcPr marL="63500" marR="63500" marT="63500" marB="63500" anchor="ctr">
+                    <a:lnL w="12700" cap="flat" cmpd="sng" algn="ctr">
+                      <a:solidFill>
+                        <a:srgbClr val="2A2F3E"/>
+                      </a:solidFill>
+                      <a:prstDash val="solid"/>
+                      <a:round/>
+                      <a:headEnd type="none" w="med" len="med"/>
+                      <a:tailEnd type="none" w="med" len="med"/>
+                    </a:lnL>
+                    <a:lnR w="12700" cap="flat" cmpd="sng" algn="ctr">
+                      <a:solidFill>
+                        <a:srgbClr val="2A2F3E"/>
+                      </a:solidFill>
+                      <a:prstDash val="solid"/>
+                      <a:round/>
+                      <a:headEnd type="none" w="med" len="med"/>
+                      <a:tailEnd type="none" w="med" len="med"/>
+                    </a:lnR>
+                    <a:lnT w="12700" cap="flat" cmpd="sng" algn="ctr">
+                      <a:solidFill>
+                        <a:srgbClr val="2A2F3E"/>
+                      </a:solidFill>
+                      <a:prstDash val="solid"/>
+                      <a:round/>
+                      <a:headEnd type="none" w="med" len="med"/>
+                      <a:tailEnd type="none" w="med" len="med"/>
+                    </a:lnT>
+                    <a:lnB w="12700" cap="flat" cmpd="sng" algn="ctr">
+                      <a:solidFill>
+                        <a:srgbClr val="2A2F3E"/>
+                      </a:solidFill>
+                      <a:prstDash val="solid"/>
+                      <a:round/>
+                      <a:headEnd type="none" w="med" len="med"/>
+                      <a:tailEnd type="none" w="med" len="med"/>
+                    </a:lnB>
+                    <a:solidFill>
+                      <a:srgbClr val="1A1D27"/>
+                    </a:solidFill>
+                  </a:tcPr>
+                </a:tc>
+                <a:tc>
+                  <a:txBody>
+                    <a:bodyPr/>
+                    <a:lstStyle/>
+                    <a:p>
+                      <a:pPr indent="0" marL="0">
+                        <a:buNone/>
+                      </a:pPr>
+                      <a:r>
+                        <a:rPr lang="en-US" sz="1200" dirty="0">
+                          <a:solidFill>
+                            <a:srgbClr val="ECECF3"/>
+                          </a:solidFill>
+                          <a:latin typeface="Calibri" pitchFamily="34" charset="0"/>
+                          <a:ea typeface="Calibri" pitchFamily="34" charset="-122"/>
+                          <a:cs typeface="Calibri" pitchFamily="34" charset="-120"/>
+                        </a:rPr>
+                        <a:t>🎮 Balatro (2024)</a:t>
+                      </a:r>
+                      <a:endParaRPr lang="en-US" sz="1200" dirty="0">
+                        <a:latin typeface="Calibri" charset="0"/>
+                        <a:ea typeface="Calibri" charset="0"/>
+                        <a:cs typeface="Calibri" charset="0"/>
+                      </a:endParaRPr>
+                    </a:p>
+                  </a:txBody>
+                  <a:tcPr marL="63500" marR="63500" marT="63500" marB="63500" anchor="ctr">
+                    <a:lnL w="12700" cap="flat" cmpd="sng" algn="ctr">
+                      <a:solidFill>
+                        <a:srgbClr val="2A2F3E"/>
+                      </a:solidFill>
+                      <a:prstDash val="solid"/>
+                      <a:round/>
+                      <a:headEnd type="none" w="med" len="med"/>
+                      <a:tailEnd type="none" w="med" len="med"/>
+                    </a:lnL>
+                    <a:lnR w="12700" cap="flat" cmpd="sng" algn="ctr">
+                      <a:solidFill>
+                        <a:srgbClr val="2A2F3E"/>
+                      </a:solidFill>
+                      <a:prstDash val="solid"/>
+                      <a:round/>
+                      <a:headEnd type="none" w="med" len="med"/>
+                      <a:tailEnd type="none" w="med" len="med"/>
+                    </a:lnR>
+                    <a:lnT w="12700" cap="flat" cmpd="sng" algn="ctr">
+                      <a:solidFill>
+                        <a:srgbClr val="2A2F3E"/>
+                      </a:solidFill>
+                      <a:prstDash val="solid"/>
+                      <a:round/>
+                      <a:headEnd type="none" w="med" len="med"/>
+                      <a:tailEnd type="none" w="med" len="med"/>
+                    </a:lnT>
+                    <a:lnB w="12700" cap="flat" cmpd="sng" algn="ctr">
+                      <a:solidFill>
+                        <a:srgbClr val="2A2F3E"/>
+                      </a:solidFill>
+                      <a:prstDash val="solid"/>
+                      <a:round/>
+                      <a:headEnd type="none" w="med" len="med"/>
+                      <a:tailEnd type="none" w="med" len="med"/>
+                    </a:lnB>
+                    <a:solidFill>
+                      <a:srgbClr val="1A1D27"/>
+                    </a:solidFill>
+                  </a:tcPr>
+                </a:tc>
+                <a:tc>
+                  <a:txBody>
+                    <a:bodyPr/>
+                    <a:lstStyle/>
+                    <a:p>
+                      <a:pPr algn="ctr" indent="0" marL="0">
+                        <a:buNone/>
+                      </a:pPr>
+                      <a:r>
+                        <a:rPr lang="en-US" sz="1200" b="1" dirty="0">
+                          <a:solidFill>
+                            <a:srgbClr val="5BC8AF"/>
+                          </a:solidFill>
+                          <a:latin typeface="Calibri" pitchFamily="34" charset="0"/>
+                          <a:ea typeface="Calibri" pitchFamily="34" charset="-122"/>
+                          <a:cs typeface="Calibri" pitchFamily="34" charset="-120"/>
+                        </a:rPr>
+                        <a:t>✓ Pass</a:t>
+                      </a:r>
+                      <a:endParaRPr lang="en-US" sz="1200" dirty="0">
+                        <a:latin typeface="Calibri" charset="0"/>
+                        <a:ea typeface="Calibri" charset="0"/>
+                        <a:cs typeface="Calibri" charset="0"/>
+                      </a:endParaRPr>
+                    </a:p>
+                  </a:txBody>
+                  <a:tcPr marL="63500" marR="63500" marT="63500" marB="63500" anchor="ctr">
+                    <a:lnL w="12700" cap="flat" cmpd="sng" algn="ctr">
+                      <a:solidFill>
+                        <a:srgbClr val="2A2F3E"/>
+                      </a:solidFill>
+                      <a:prstDash val="solid"/>
+                      <a:round/>
+                      <a:headEnd type="none" w="med" len="med"/>
+                      <a:tailEnd type="none" w="med" len="med"/>
+                    </a:lnL>
+                    <a:lnR w="12700" cap="flat" cmpd="sng" algn="ctr">
+                      <a:solidFill>
+                        <a:srgbClr val="2A2F3E"/>
+                      </a:solidFill>
+                      <a:prstDash val="solid"/>
+                      <a:round/>
+                      <a:headEnd type="none" w="med" len="med"/>
+                      <a:tailEnd type="none" w="med" len="med"/>
+                    </a:lnR>
+                    <a:lnT w="12700" cap="flat" cmpd="sng" algn="ctr">
+                      <a:solidFill>
+                        <a:srgbClr val="2A2F3E"/>
+                      </a:solidFill>
+                      <a:prstDash val="solid"/>
+                      <a:round/>
+                      <a:headEnd type="none" w="med" len="med"/>
+                      <a:tailEnd type="none" w="med" len="med"/>
+                    </a:lnT>
+                    <a:lnB w="12700" cap="flat" cmpd="sng" algn="ctr">
+                      <a:solidFill>
+                        <a:srgbClr val="2A2F3E"/>
+                      </a:solidFill>
+                      <a:prstDash val="solid"/>
+                      <a:round/>
+                      <a:headEnd type="none" w="med" len="med"/>
+                      <a:tailEnd type="none" w="med" len="med"/>
+                    </a:lnB>
+                    <a:solidFill>
+                      <a:srgbClr val="1A1D27"/>
+                    </a:solidFill>
+                  </a:tcPr>
+                </a:tc>
+              </a:tr>
+              <a:tr h="420624">
+                <a:tc>
+                  <a:txBody>
+                    <a:bodyPr/>
+                    <a:lstStyle/>
+                    <a:p>
+                      <a:pPr indent="0" marL="0">
+                        <a:buNone/>
+                      </a:pPr>
+                      <a:r>
+                        <a:rPr lang="en-US" sz="1200" dirty="0">
+                          <a:solidFill>
+                            <a:srgbClr val="ECECF3"/>
+                          </a:solidFill>
+                          <a:latin typeface="Calibri" pitchFamily="34" charset="0"/>
+                          <a:ea typeface="Calibri" pitchFamily="34" charset="-122"/>
+                          <a:cs typeface="Calibri" pitchFamily="34" charset="-120"/>
+                        </a:rPr>
+                        <a:t>"scary horror with a group"</a:t>
+                      </a:r>
+                      <a:endParaRPr lang="en-US" sz="1200" dirty="0">
+                        <a:latin typeface="Calibri" charset="0"/>
+                        <a:ea typeface="Calibri" charset="0"/>
+                        <a:cs typeface="Calibri" charset="0"/>
+                      </a:endParaRPr>
+                    </a:p>
+                  </a:txBody>
+                  <a:tcPr marL="63500" marR="63500" marT="63500" marB="63500" anchor="ctr">
+                    <a:lnL w="12700" cap="flat" cmpd="sng" algn="ctr">
+                      <a:solidFill>
+                        <a:srgbClr val="2A2F3E"/>
+                      </a:solidFill>
+                      <a:prstDash val="solid"/>
+                      <a:round/>
+                      <a:headEnd type="none" w="med" len="med"/>
+                      <a:tailEnd type="none" w="med" len="med"/>
+                    </a:lnL>
+                    <a:lnR w="12700" cap="flat" cmpd="sng" algn="ctr">
+                      <a:solidFill>
+                        <a:srgbClr val="2A2F3E"/>
+                      </a:solidFill>
+                      <a:prstDash val="solid"/>
+                      <a:round/>
+                      <a:headEnd type="none" w="med" len="med"/>
+                      <a:tailEnd type="none" w="med" len="med"/>
+                    </a:lnR>
+                    <a:lnT w="12700" cap="flat" cmpd="sng" algn="ctr">
+                      <a:solidFill>
+                        <a:srgbClr val="2A2F3E"/>
+                      </a:solidFill>
+                      <a:prstDash val="solid"/>
+                      <a:round/>
+                      <a:headEnd type="none" w="med" len="med"/>
+                      <a:tailEnd type="none" w="med" len="med"/>
+                    </a:lnT>
+                    <a:lnB w="12700" cap="flat" cmpd="sng" algn="ctr">
+                      <a:solidFill>
+                        <a:srgbClr val="2A2F3E"/>
+                      </a:solidFill>
+                      <a:prstDash val="solid"/>
+                      <a:round/>
+                      <a:headEnd type="none" w="med" len="med"/>
+                      <a:tailEnd type="none" w="med" len="med"/>
+                    </a:lnB>
+                    <a:solidFill>
+                      <a:srgbClr val="1A1D27"/>
+                    </a:solidFill>
+                  </a:tcPr>
+                </a:tc>
+                <a:tc>
+                  <a:txBody>
+                    <a:bodyPr/>
+                    <a:lstStyle/>
+                    <a:p>
+                      <a:pPr indent="0" marL="0">
+                        <a:buNone/>
+                      </a:pPr>
+                      <a:r>
+                        <a:rPr lang="en-US" sz="1200" dirty="0">
+                          <a:solidFill>
+                            <a:srgbClr val="ECECF3"/>
+                          </a:solidFill>
+                          <a:latin typeface="Calibri" pitchFamily="34" charset="0"/>
+                          <a:ea typeface="Calibri" pitchFamily="34" charset="-122"/>
+                          <a:cs typeface="Calibri" pitchFamily="34" charset="-120"/>
+                        </a:rPr>
+                        <a:t>Horror · Intense · group</a:t>
+                      </a:r>
+                      <a:endParaRPr lang="en-US" sz="1200" dirty="0">
+                        <a:latin typeface="Calibri" charset="0"/>
+                        <a:ea typeface="Calibri" charset="0"/>
+                        <a:cs typeface="Calibri" charset="0"/>
+                      </a:endParaRPr>
+                    </a:p>
+                  </a:txBody>
+                  <a:tcPr marL="63500" marR="63500" marT="63500" marB="63500" anchor="ctr">
+                    <a:lnL w="12700" cap="flat" cmpd="sng" algn="ctr">
+                      <a:solidFill>
+                        <a:srgbClr val="2A2F3E"/>
+                      </a:solidFill>
+                      <a:prstDash val="solid"/>
+                      <a:round/>
+                      <a:headEnd type="none" w="med" len="med"/>
+                      <a:tailEnd type="none" w="med" len="med"/>
+                    </a:lnL>
+                    <a:lnR w="12700" cap="flat" cmpd="sng" algn="ctr">
+                      <a:solidFill>
+                        <a:srgbClr val="2A2F3E"/>
+                      </a:solidFill>
+                      <a:prstDash val="solid"/>
+                      <a:round/>
+                      <a:headEnd type="none" w="med" len="med"/>
+                      <a:tailEnd type="none" w="med" len="med"/>
+                    </a:lnR>
+                    <a:lnT w="12700" cap="flat" cmpd="sng" algn="ctr">
+                      <a:solidFill>
+                        <a:srgbClr val="2A2F3E"/>
+                      </a:solidFill>
+                      <a:prstDash val="solid"/>
+                      <a:round/>
+                      <a:headEnd type="none" w="med" len="med"/>
+                      <a:tailEnd type="none" w="med" len="med"/>
+                    </a:lnT>
+                    <a:lnB w="12700" cap="flat" cmpd="sng" algn="ctr">
+                      <a:solidFill>
+                        <a:srgbClr val="2A2F3E"/>
+                      </a:solidFill>
+                      <a:prstDash val="solid"/>
+                      <a:round/>
+                      <a:headEnd type="none" w="med" len="med"/>
+                      <a:tailEnd type="none" w="med" len="med"/>
+                    </a:lnB>
+                    <a:solidFill>
+                      <a:srgbClr val="1A1D27"/>
+                    </a:solidFill>
+                  </a:tcPr>
+                </a:tc>
+                <a:tc>
+                  <a:txBody>
+                    <a:bodyPr/>
+                    <a:lstStyle/>
+                    <a:p>
+                      <a:pPr indent="0" marL="0">
+                        <a:buNone/>
+                      </a:pPr>
+                      <a:r>
+                        <a:rPr lang="en-US" sz="1200" dirty="0">
+                          <a:solidFill>
+                            <a:srgbClr val="ECECF3"/>
+                          </a:solidFill>
+                          <a:latin typeface="Calibri" pitchFamily="34" charset="0"/>
+                          <a:ea typeface="Calibri" pitchFamily="34" charset="-122"/>
+                          <a:cs typeface="Calibri" pitchFamily="34" charset="-120"/>
+                        </a:rPr>
+                        <a:t>🎬 Alien (1979)</a:t>
+                      </a:r>
+                      <a:endParaRPr lang="en-US" sz="1200" dirty="0">
+                        <a:latin typeface="Calibri" charset="0"/>
+                        <a:ea typeface="Calibri" charset="0"/>
+                        <a:cs typeface="Calibri" charset="0"/>
+                      </a:endParaRPr>
+                    </a:p>
+                  </a:txBody>
+                  <a:tcPr marL="63500" marR="63500" marT="63500" marB="63500" anchor="ctr">
+                    <a:lnL w="12700" cap="flat" cmpd="sng" algn="ctr">
+                      <a:solidFill>
+                        <a:srgbClr val="2A2F3E"/>
+                      </a:solidFill>
+                      <a:prstDash val="solid"/>
+                      <a:round/>
+                      <a:headEnd type="none" w="med" len="med"/>
+                      <a:tailEnd type="none" w="med" len="med"/>
+                    </a:lnL>
+                    <a:lnR w="12700" cap="flat" cmpd="sng" algn="ctr">
+                      <a:solidFill>
+                        <a:srgbClr val="2A2F3E"/>
+                      </a:solidFill>
+                      <a:prstDash val="solid"/>
+                      <a:round/>
+                      <a:headEnd type="none" w="med" len="med"/>
+                      <a:tailEnd type="none" w="med" len="med"/>
+                    </a:lnR>
+                    <a:lnT w="12700" cap="flat" cmpd="sng" algn="ctr">
+                      <a:solidFill>
+                        <a:srgbClr val="2A2F3E"/>
+                      </a:solidFill>
+                      <a:prstDash val="solid"/>
+                      <a:round/>
+                      <a:headEnd type="none" w="med" len="med"/>
+                      <a:tailEnd type="none" w="med" len="med"/>
+                    </a:lnT>
+                    <a:lnB w="12700" cap="flat" cmpd="sng" algn="ctr">
+                      <a:solidFill>
+                        <a:srgbClr val="2A2F3E"/>
+                      </a:solidFill>
+                      <a:prstDash val="solid"/>
+                      <a:round/>
+                      <a:headEnd type="none" w="med" len="med"/>
+                      <a:tailEnd type="none" w="med" len="med"/>
+                    </a:lnB>
+                    <a:solidFill>
+                      <a:srgbClr val="1A1D27"/>
+                    </a:solidFill>
+                  </a:tcPr>
+                </a:tc>
+                <a:tc>
+                  <a:txBody>
+                    <a:bodyPr/>
+                    <a:lstStyle/>
+                    <a:p>
+                      <a:pPr algn="ctr" indent="0" marL="0">
+                        <a:buNone/>
+                      </a:pPr>
+                      <a:r>
+                        <a:rPr lang="en-US" sz="1200" b="1" dirty="0">
+                          <a:solidFill>
+                            <a:srgbClr val="5BC8AF"/>
+                          </a:solidFill>
+                          <a:latin typeface="Calibri" pitchFamily="34" charset="0"/>
+                          <a:ea typeface="Calibri" pitchFamily="34" charset="-122"/>
+                          <a:cs typeface="Calibri" pitchFamily="34" charset="-120"/>
+                        </a:rPr>
+                        <a:t>✓ Pass</a:t>
+                      </a:r>
+                      <a:endParaRPr lang="en-US" sz="1200" dirty="0">
+                        <a:latin typeface="Calibri" charset="0"/>
+                        <a:ea typeface="Calibri" charset="0"/>
+                        <a:cs typeface="Calibri" charset="0"/>
+                      </a:endParaRPr>
+                    </a:p>
+                  </a:txBody>
+                  <a:tcPr marL="63500" marR="63500" marT="63500" marB="63500" anchor="ctr">
+                    <a:lnL w="12700" cap="flat" cmpd="sng" algn="ctr">
+                      <a:solidFill>
+                        <a:srgbClr val="2A2F3E"/>
+                      </a:solidFill>
+                      <a:prstDash val="solid"/>
+                      <a:round/>
+                      <a:headEnd type="none" w="med" len="med"/>
+                      <a:tailEnd type="none" w="med" len="med"/>
+                    </a:lnL>
+                    <a:lnR w="12700" cap="flat" cmpd="sng" algn="ctr">
+                      <a:solidFill>
+                        <a:srgbClr val="2A2F3E"/>
+                      </a:solidFill>
+                      <a:prstDash val="solid"/>
+                      <a:round/>
+                      <a:headEnd type="none" w="med" len="med"/>
+                      <a:tailEnd type="none" w="med" len="med"/>
+                    </a:lnR>
+                    <a:lnT w="12700" cap="flat" cmpd="sng" algn="ctr">
+                      <a:solidFill>
+                        <a:srgbClr val="2A2F3E"/>
+                      </a:solidFill>
+                      <a:prstDash val="solid"/>
+                      <a:round/>
+                      <a:headEnd type="none" w="med" len="med"/>
+                      <a:tailEnd type="none" w="med" len="med"/>
+                    </a:lnT>
+                    <a:lnB w="12700" cap="flat" cmpd="sng" algn="ctr">
+                      <a:solidFill>
+                        <a:srgbClr val="2A2F3E"/>
+                      </a:solidFill>
+                      <a:prstDash val="solid"/>
+                      <a:round/>
+                      <a:headEnd type="none" w="med" len="med"/>
+                      <a:tailEnd type="none" w="med" len="med"/>
+                    </a:lnB>
+                    <a:solidFill>
+                      <a:srgbClr val="1A1D27"/>
+                    </a:solidFill>
+                  </a:tcPr>
+                </a:tc>
+              </a:tr>
+              <a:tr h="420624">
+                <a:tc>
+                  <a:txBody>
+                    <a:bodyPr/>
+                    <a:lstStyle/>
+                    <a:p>
+                      <a:pPr indent="0" marL="0">
+                        <a:buNone/>
+                      </a:pPr>
+                      <a:r>
+                        <a:rPr lang="en-US" sz="1200" dirty="0">
+                          <a:solidFill>
+                            <a:srgbClr val="ECECF3"/>
+                          </a:solidFill>
+                          <a:latin typeface="Calibri" pitchFamily="34" charset="0"/>
+                          <a:ea typeface="Calibri" pitchFamily="34" charset="-122"/>
+                          <a:cs typeface="Calibri" pitchFamily="34" charset="-120"/>
+                        </a:rPr>
+                        <a:t>"epic action game for hours"</a:t>
+                      </a:r>
+                      <a:endParaRPr lang="en-US" sz="1200" dirty="0">
+                        <a:latin typeface="Calibri" charset="0"/>
+                        <a:ea typeface="Calibri" charset="0"/>
+                        <a:cs typeface="Calibri" charset="0"/>
+                      </a:endParaRPr>
+                    </a:p>
+                  </a:txBody>
+                  <a:tcPr marL="63500" marR="63500" marT="63500" marB="63500" anchor="ctr">
+                    <a:lnL w="12700" cap="flat" cmpd="sng" algn="ctr">
+                      <a:solidFill>
+                        <a:srgbClr val="2A2F3E"/>
+                      </a:solidFill>
+                      <a:prstDash val="solid"/>
+                      <a:round/>
+                      <a:headEnd type="none" w="med" len="med"/>
+                      <a:tailEnd type="none" w="med" len="med"/>
+                    </a:lnL>
+                    <a:lnR w="12700" cap="flat" cmpd="sng" algn="ctr">
+                      <a:solidFill>
+                        <a:srgbClr val="2A2F3E"/>
+                      </a:solidFill>
+                      <a:prstDash val="solid"/>
+                      <a:round/>
+                      <a:headEnd type="none" w="med" len="med"/>
+                      <a:tailEnd type="none" w="med" len="med"/>
+                    </a:lnR>
+                    <a:lnT w="12700" cap="flat" cmpd="sng" algn="ctr">
+                      <a:solidFill>
+                        <a:srgbClr val="2A2F3E"/>
+                      </a:solidFill>
+                      <a:prstDash val="solid"/>
+                      <a:round/>
+                      <a:headEnd type="none" w="med" len="med"/>
+                      <a:tailEnd type="none" w="med" len="med"/>
+                    </a:lnT>
+                    <a:lnB w="12700" cap="flat" cmpd="sng" algn="ctr">
+                      <a:solidFill>
+                        <a:srgbClr val="2A2F3E"/>
+                      </a:solidFill>
+                      <a:prstDash val="solid"/>
+                      <a:round/>
+                      <a:headEnd type="none" w="med" len="med"/>
+                      <a:tailEnd type="none" w="med" len="med"/>
+                    </a:lnB>
+                    <a:solidFill>
+                      <a:srgbClr val="1A1D27"/>
+                    </a:solidFill>
+                  </a:tcPr>
+                </a:tc>
+                <a:tc>
+                  <a:txBody>
+                    <a:bodyPr/>
+                    <a:lstStyle/>
+                    <a:p>
+                      <a:pPr indent="0" marL="0">
+                        <a:buNone/>
+                      </a:pPr>
+                      <a:r>
+                        <a:rPr lang="en-US" sz="1200" dirty="0">
+                          <a:solidFill>
+                            <a:srgbClr val="ECECF3"/>
+                          </a:solidFill>
+                          <a:latin typeface="Calibri" pitchFamily="34" charset="0"/>
+                          <a:ea typeface="Calibri" pitchFamily="34" charset="-122"/>
+                          <a:cs typeface="Calibri" pitchFamily="34" charset="-120"/>
+                        </a:rPr>
+                        <a:t>Action · long · solo</a:t>
+                      </a:r>
+                      <a:endParaRPr lang="en-US" sz="1200" dirty="0">
+                        <a:latin typeface="Calibri" charset="0"/>
+                        <a:ea typeface="Calibri" charset="0"/>
+                        <a:cs typeface="Calibri" charset="0"/>
+                      </a:endParaRPr>
+                    </a:p>
+                  </a:txBody>
+                  <a:tcPr marL="63500" marR="63500" marT="63500" marB="63500" anchor="ctr">
+                    <a:lnL w="12700" cap="flat" cmpd="sng" algn="ctr">
+                      <a:solidFill>
+                        <a:srgbClr val="2A2F3E"/>
+                      </a:solidFill>
+                      <a:prstDash val="solid"/>
+                      <a:round/>
+                      <a:headEnd type="none" w="med" len="med"/>
+                      <a:tailEnd type="none" w="med" len="med"/>
+                    </a:lnL>
+                    <a:lnR w="12700" cap="flat" cmpd="sng" algn="ctr">
+                      <a:solidFill>
+                        <a:srgbClr val="2A2F3E"/>
+                      </a:solidFill>
+                      <a:prstDash val="solid"/>
+                      <a:round/>
+                      <a:headEnd type="none" w="med" len="med"/>
+                      <a:tailEnd type="none" w="med" len="med"/>
+                    </a:lnR>
+                    <a:lnT w="12700" cap="flat" cmpd="sng" algn="ctr">
+                      <a:solidFill>
+                        <a:srgbClr val="2A2F3E"/>
+                      </a:solidFill>
+                      <a:prstDash val="solid"/>
+                      <a:round/>
+                      <a:headEnd type="none" w="med" len="med"/>
+                      <a:tailEnd type="none" w="med" len="med"/>
+                    </a:lnT>
+                    <a:lnB w="12700" cap="flat" cmpd="sng" algn="ctr">
+                      <a:solidFill>
+                        <a:srgbClr val="2A2F3E"/>
+                      </a:solidFill>
+                      <a:prstDash val="solid"/>
+                      <a:round/>
+                      <a:headEnd type="none" w="med" len="med"/>
+                      <a:tailEnd type="none" w="med" len="med"/>
+                    </a:lnB>
+                    <a:solidFill>
+                      <a:srgbClr val="1A1D27"/>
+                    </a:solidFill>
+                  </a:tcPr>
+                </a:tc>
+                <a:tc>
+                  <a:txBody>
+                    <a:bodyPr/>
+                    <a:lstStyle/>
+                    <a:p>
+                      <a:pPr indent="0" marL="0">
+                        <a:buNone/>
+                      </a:pPr>
+                      <a:r>
+                        <a:rPr lang="en-US" sz="1200" dirty="0">
+                          <a:solidFill>
+                            <a:srgbClr val="ECECF3"/>
+                          </a:solidFill>
+                          <a:latin typeface="Calibri" pitchFamily="34" charset="0"/>
+                          <a:ea typeface="Calibri" pitchFamily="34" charset="-122"/>
+                          <a:cs typeface="Calibri" pitchFamily="34" charset="-120"/>
+                        </a:rPr>
+                        <a:t>🎮 Super Mario Odyssey</a:t>
+                      </a:r>
+                      <a:endParaRPr lang="en-US" sz="1200" dirty="0">
+                        <a:latin typeface="Calibri" charset="0"/>
+                        <a:ea typeface="Calibri" charset="0"/>
+                        <a:cs typeface="Calibri" charset="0"/>
+                      </a:endParaRPr>
+                    </a:p>
+                  </a:txBody>
+                  <a:tcPr marL="63500" marR="63500" marT="63500" marB="63500" anchor="ctr">
+                    <a:lnL w="12700" cap="flat" cmpd="sng" algn="ctr">
+                      <a:solidFill>
+                        <a:srgbClr val="2A2F3E"/>
+                      </a:solidFill>
+                      <a:prstDash val="solid"/>
+                      <a:round/>
+                      <a:headEnd type="none" w="med" len="med"/>
+                      <a:tailEnd type="none" w="med" len="med"/>
+                    </a:lnL>
+                    <a:lnR w="12700" cap="flat" cmpd="sng" algn="ctr">
+                      <a:solidFill>
+                        <a:srgbClr val="2A2F3E"/>
+                      </a:solidFill>
+                      <a:prstDash val="solid"/>
+                      <a:round/>
+                      <a:headEnd type="none" w="med" len="med"/>
+                      <a:tailEnd type="none" w="med" len="med"/>
+                    </a:lnR>
+                    <a:lnT w="12700" cap="flat" cmpd="sng" algn="ctr">
+                      <a:solidFill>
+                        <a:srgbClr val="2A2F3E"/>
+                      </a:solidFill>
+                      <a:prstDash val="solid"/>
+                      <a:round/>
+                      <a:headEnd type="none" w="med" len="med"/>
+                      <a:tailEnd type="none" w="med" len="med"/>
+                    </a:lnT>
+                    <a:lnB w="12700" cap="flat" cmpd="sng" algn="ctr">
+                      <a:solidFill>
+                        <a:srgbClr val="2A2F3E"/>
+                      </a:solidFill>
+                      <a:prstDash val="solid"/>
+                      <a:round/>
+                      <a:headEnd type="none" w="med" len="med"/>
+                      <a:tailEnd type="none" w="med" len="med"/>
+                    </a:lnB>
+                    <a:solidFill>
+                      <a:srgbClr val="1A1D27"/>
+                    </a:solidFill>
+                  </a:tcPr>
+                </a:tc>
+                <a:tc>
+                  <a:txBody>
+                    <a:bodyPr/>
+                    <a:lstStyle/>
+                    <a:p>
+                      <a:pPr algn="ctr" indent="0" marL="0">
+                        <a:buNone/>
+                      </a:pPr>
+                      <a:r>
+                        <a:rPr lang="en-US" sz="1200" b="1" dirty="0">
+                          <a:solidFill>
+                            <a:srgbClr val="5BC8AF"/>
+                          </a:solidFill>
+                          <a:latin typeface="Calibri" pitchFamily="34" charset="0"/>
+                          <a:ea typeface="Calibri" pitchFamily="34" charset="-122"/>
+                          <a:cs typeface="Calibri" pitchFamily="34" charset="-120"/>
+                        </a:rPr>
+                        <a:t>✓ Pass</a:t>
+                      </a:r>
+                      <a:endParaRPr lang="en-US" sz="1200" dirty="0">
+                        <a:latin typeface="Calibri" charset="0"/>
+                        <a:ea typeface="Calibri" charset="0"/>
+                        <a:cs typeface="Calibri" charset="0"/>
+                      </a:endParaRPr>
+                    </a:p>
+                  </a:txBody>
+                  <a:tcPr marL="63500" marR="63500" marT="63500" marB="63500" anchor="ctr">
+                    <a:lnL w="12700" cap="flat" cmpd="sng" algn="ctr">
+                      <a:solidFill>
+                        <a:srgbClr val="2A2F3E"/>
+                      </a:solidFill>
+                      <a:prstDash val="solid"/>
+                      <a:round/>
+                      <a:headEnd type="none" w="med" len="med"/>
+                      <a:tailEnd type="none" w="med" len="med"/>
+                    </a:lnL>
+                    <a:lnR w="12700" cap="flat" cmpd="sng" algn="ctr">
+                      <a:solidFill>
+                        <a:srgbClr val="2A2F3E"/>
+                      </a:solidFill>
+                      <a:prstDash val="solid"/>
+                      <a:round/>
+                      <a:headEnd type="none" w="med" len="med"/>
+                      <a:tailEnd type="none" w="med" len="med"/>
+                    </a:lnR>
+                    <a:lnT w="12700" cap="flat" cmpd="sng" algn="ctr">
+                      <a:solidFill>
+                        <a:srgbClr val="2A2F3E"/>
+                      </a:solidFill>
+                      <a:prstDash val="solid"/>
+                      <a:round/>
+                      <a:headEnd type="none" w="med" len="med"/>
+                      <a:tailEnd type="none" w="med" len="med"/>
+                    </a:lnT>
+                    <a:lnB w="12700" cap="flat" cmpd="sng" algn="ctr">
+                      <a:solidFill>
+                        <a:srgbClr val="2A2F3E"/>
+                      </a:solidFill>
+                      <a:prstDash val="solid"/>
+                      <a:round/>
+                      <a:headEnd type="none" w="med" len="med"/>
+                      <a:tailEnd type="none" w="med" len="med"/>
+                    </a:lnB>
+                    <a:solidFill>
+                      <a:srgbClr val="1A1D27"/>
+                    </a:solidFill>
+                  </a:tcPr>
+                </a:tc>
+              </a:tr>
+              <a:tr h="420624">
+                <a:tc>
+                  <a:txBody>
+                    <a:bodyPr/>
+                    <a:lstStyle/>
+                    <a:p>
+                      <a:pPr indent="0" marL="0">
+                        <a:buNone/>
+                      </a:pPr>
+                      <a:r>
+                        <a:rPr lang="en-US" sz="1200" dirty="0">
+                          <a:solidFill>
+                            <a:srgbClr val="ECECF3"/>
+                          </a:solidFill>
+                          <a:latin typeface="Calibri" pitchFamily="34" charset="0"/>
+                          <a:ea typeface="Calibri" pitchFamily="34" charset="-122"/>
+                          <a:cs typeface="Calibri" pitchFamily="34" charset="-120"/>
+                        </a:rPr>
+                        <a:t>"thoughtful sci-fi, alone"</a:t>
+                      </a:r>
+                      <a:endParaRPr lang="en-US" sz="1200" dirty="0">
+                        <a:latin typeface="Calibri" charset="0"/>
+                        <a:ea typeface="Calibri" charset="0"/>
+                        <a:cs typeface="Calibri" charset="0"/>
+                      </a:endParaRPr>
+                    </a:p>
+                  </a:txBody>
+                  <a:tcPr marL="63500" marR="63500" marT="63500" marB="63500" anchor="ctr">
+                    <a:lnL w="12700" cap="flat" cmpd="sng" algn="ctr">
+                      <a:solidFill>
+                        <a:srgbClr val="2A2F3E"/>
+                      </a:solidFill>
+                      <a:prstDash val="solid"/>
+                      <a:round/>
+                      <a:headEnd type="none" w="med" len="med"/>
+                      <a:tailEnd type="none" w="med" len="med"/>
+                    </a:lnL>
+                    <a:lnR w="12700" cap="flat" cmpd="sng" algn="ctr">
+                      <a:solidFill>
+                        <a:srgbClr val="2A2F3E"/>
+                      </a:solidFill>
+                      <a:prstDash val="solid"/>
+                      <a:round/>
+                      <a:headEnd type="none" w="med" len="med"/>
+                      <a:tailEnd type="none" w="med" len="med"/>
+                    </a:lnR>
+                    <a:lnT w="12700" cap="flat" cmpd="sng" algn="ctr">
+                      <a:solidFill>
+                        <a:srgbClr val="2A2F3E"/>
+                      </a:solidFill>
+                      <a:prstDash val="solid"/>
+                      <a:round/>
+                      <a:headEnd type="none" w="med" len="med"/>
+                      <a:tailEnd type="none" w="med" len="med"/>
+                    </a:lnT>
+                    <a:lnB w="12700" cap="flat" cmpd="sng" algn="ctr">
+                      <a:solidFill>
+                        <a:srgbClr val="2A2F3E"/>
+                      </a:solidFill>
+                      <a:prstDash val="solid"/>
+                      <a:round/>
+                      <a:headEnd type="none" w="med" len="med"/>
+                      <a:tailEnd type="none" w="med" len="med"/>
+                    </a:lnB>
+                    <a:solidFill>
+                      <a:srgbClr val="1A1D27"/>
+                    </a:solidFill>
+                  </a:tcPr>
+                </a:tc>
+                <a:tc>
+                  <a:txBody>
+                    <a:bodyPr/>
+                    <a:lstStyle/>
+                    <a:p>
+                      <a:pPr indent="0" marL="0">
+                        <a:buNone/>
+                      </a:pPr>
+                      <a:r>
+                        <a:rPr lang="en-US" sz="1200" dirty="0">
+                          <a:solidFill>
+                            <a:srgbClr val="ECECF3"/>
+                          </a:solidFill>
+                          <a:latin typeface="Calibri" pitchFamily="34" charset="0"/>
+                          <a:ea typeface="Calibri" pitchFamily="34" charset="-122"/>
+                          <a:cs typeface="Calibri" pitchFamily="34" charset="-120"/>
+                        </a:rPr>
+                        <a:t>Sci-Fi · deep · solo</a:t>
+                      </a:r>
+                      <a:endParaRPr lang="en-US" sz="1200" dirty="0">
+                        <a:latin typeface="Calibri" charset="0"/>
+                        <a:ea typeface="Calibri" charset="0"/>
+                        <a:cs typeface="Calibri" charset="0"/>
+                      </a:endParaRPr>
+                    </a:p>
+                  </a:txBody>
+                  <a:tcPr marL="63500" marR="63500" marT="63500" marB="63500" anchor="ctr">
+                    <a:lnL w="12700" cap="flat" cmpd="sng" algn="ctr">
+                      <a:solidFill>
+                        <a:srgbClr val="2A2F3E"/>
+                      </a:solidFill>
+                      <a:prstDash val="solid"/>
+                      <a:round/>
+                      <a:headEnd type="none" w="med" len="med"/>
+                      <a:tailEnd type="none" w="med" len="med"/>
+                    </a:lnL>
+                    <a:lnR w="12700" cap="flat" cmpd="sng" algn="ctr">
+                      <a:solidFill>
+                        <a:srgbClr val="2A2F3E"/>
+                      </a:solidFill>
+                      <a:prstDash val="solid"/>
+                      <a:round/>
+                      <a:headEnd type="none" w="med" len="med"/>
+                      <a:tailEnd type="none" w="med" len="med"/>
+                    </a:lnR>
+                    <a:lnT w="12700" cap="flat" cmpd="sng" algn="ctr">
+                      <a:solidFill>
+                        <a:srgbClr val="2A2F3E"/>
+                      </a:solidFill>
+                      <a:prstDash val="solid"/>
+                      <a:round/>
+                      <a:headEnd type="none" w="med" len="med"/>
+                      <a:tailEnd type="none" w="med" len="med"/>
+                    </a:lnT>
+                    <a:lnB w="12700" cap="flat" cmpd="sng" algn="ctr">
+                      <a:solidFill>
+                        <a:srgbClr val="2A2F3E"/>
+                      </a:solidFill>
+                      <a:prstDash val="solid"/>
+                      <a:round/>
+                      <a:headEnd type="none" w="med" len="med"/>
+                      <a:tailEnd type="none" w="med" len="med"/>
+                    </a:lnB>
+                    <a:solidFill>
+                      <a:srgbClr val="1A1D27"/>
+                    </a:solidFill>
+                  </a:tcPr>
+                </a:tc>
+                <a:tc>
+                  <a:txBody>
+                    <a:bodyPr/>
+                    <a:lstStyle/>
+                    <a:p>
+                      <a:pPr indent="0" marL="0">
+                        <a:buNone/>
+                      </a:pPr>
+                      <a:r>
+                        <a:rPr lang="en-US" sz="1200" dirty="0">
+                          <a:solidFill>
+                            <a:srgbClr val="ECECF3"/>
+                          </a:solidFill>
+                          <a:latin typeface="Calibri" pitchFamily="34" charset="0"/>
+                          <a:ea typeface="Calibri" pitchFamily="34" charset="-122"/>
+                          <a:cs typeface="Calibri" pitchFamily="34" charset="-120"/>
+                        </a:rPr>
+                        <a:t>🎬 Arrival (2016)</a:t>
+                      </a:r>
+                      <a:endParaRPr lang="en-US" sz="1200" dirty="0">
+                        <a:latin typeface="Calibri" charset="0"/>
+                        <a:ea typeface="Calibri" charset="0"/>
+                        <a:cs typeface="Calibri" charset="0"/>
+                      </a:endParaRPr>
+                    </a:p>
+                  </a:txBody>
+                  <a:tcPr marL="63500" marR="63500" marT="63500" marB="63500" anchor="ctr">
+                    <a:lnL w="12700" cap="flat" cmpd="sng" algn="ctr">
+                      <a:solidFill>
+                        <a:srgbClr val="2A2F3E"/>
+                      </a:solidFill>
+                      <a:prstDash val="solid"/>
+                      <a:round/>
+                      <a:headEnd type="none" w="med" len="med"/>
+                      <a:tailEnd type="none" w="med" len="med"/>
+                    </a:lnL>
+                    <a:lnR w="12700" cap="flat" cmpd="sng" algn="ctr">
+                      <a:solidFill>
+                        <a:srgbClr val="2A2F3E"/>
+                      </a:solidFill>
+                      <a:prstDash val="solid"/>
+                      <a:round/>
+                      <a:headEnd type="none" w="med" len="med"/>
+                      <a:tailEnd type="none" w="med" len="med"/>
+                    </a:lnR>
+                    <a:lnT w="12700" cap="flat" cmpd="sng" algn="ctr">
+                      <a:solidFill>
+                        <a:srgbClr val="2A2F3E"/>
+                      </a:solidFill>
+                      <a:prstDash val="solid"/>
+                      <a:round/>
+                      <a:headEnd type="none" w="med" len="med"/>
+                      <a:tailEnd type="none" w="med" len="med"/>
+                    </a:lnT>
+                    <a:lnB w="12700" cap="flat" cmpd="sng" algn="ctr">
+                      <a:solidFill>
+                        <a:srgbClr val="2A2F3E"/>
+                      </a:solidFill>
+                      <a:prstDash val="solid"/>
+                      <a:round/>
+                      <a:headEnd type="none" w="med" len="med"/>
+                      <a:tailEnd type="none" w="med" len="med"/>
+                    </a:lnB>
+                    <a:solidFill>
+                      <a:srgbClr val="1A1D27"/>
+                    </a:solidFill>
+                  </a:tcPr>
+                </a:tc>
+                <a:tc>
+                  <a:txBody>
+                    <a:bodyPr/>
+                    <a:lstStyle/>
+                    <a:p>
+                      <a:pPr algn="ctr" indent="0" marL="0">
+                        <a:buNone/>
+                      </a:pPr>
+                      <a:r>
+                        <a:rPr lang="en-US" sz="1200" b="1" dirty="0">
+                          <a:solidFill>
+                            <a:srgbClr val="5BC8AF"/>
+                          </a:solidFill>
+                          <a:latin typeface="Calibri" pitchFamily="34" charset="0"/>
+                          <a:ea typeface="Calibri" pitchFamily="34" charset="-122"/>
+                          <a:cs typeface="Calibri" pitchFamily="34" charset="-120"/>
+                        </a:rPr>
+                        <a:t>✓ Pass</a:t>
+                      </a:r>
+                      <a:endParaRPr lang="en-US" sz="1200" dirty="0">
+                        <a:latin typeface="Calibri" charset="0"/>
+                        <a:ea typeface="Calibri" charset="0"/>
+                        <a:cs typeface="Calibri" charset="0"/>
+                      </a:endParaRPr>
+                    </a:p>
+                  </a:txBody>
+                  <a:tcPr marL="63500" marR="63500" marT="63500" marB="63500" anchor="ctr">
+                    <a:lnL w="12700" cap="flat" cmpd="sng" algn="ctr">
+                      <a:solidFill>
+                        <a:srgbClr val="2A2F3E"/>
+                      </a:solidFill>
+                      <a:prstDash val="solid"/>
+                      <a:round/>
+                      <a:headEnd type="none" w="med" len="med"/>
+                      <a:tailEnd type="none" w="med" len="med"/>
+                    </a:lnL>
+                    <a:lnR w="12700" cap="flat" cmpd="sng" algn="ctr">
+                      <a:solidFill>
+                        <a:srgbClr val="2A2F3E"/>
+                      </a:solidFill>
+                      <a:prstDash val="solid"/>
+                      <a:round/>
+                      <a:headEnd type="none" w="med" len="med"/>
+                      <a:tailEnd type="none" w="med" len="med"/>
+                    </a:lnR>
+                    <a:lnT w="12700" cap="flat" cmpd="sng" algn="ctr">
+                      <a:solidFill>
+                        <a:srgbClr val="2A2F3E"/>
+                      </a:solidFill>
+                      <a:prstDash val="solid"/>
+                      <a:round/>
+                      <a:headEnd type="none" w="med" len="med"/>
+                      <a:tailEnd type="none" w="med" len="med"/>
+                    </a:lnT>
+                    <a:lnB w="12700" cap="flat" cmpd="sng" algn="ctr">
+                      <a:solidFill>
+                        <a:srgbClr val="2A2F3E"/>
+                      </a:solidFill>
+                      <a:prstDash val="solid"/>
+                      <a:round/>
+                      <a:headEnd type="none" w="med" len="med"/>
+                      <a:tailEnd type="none" w="med" len="med"/>
+                    </a:lnB>
+                    <a:solidFill>
+                      <a:srgbClr val="1A1D27"/>
+                    </a:solidFill>
+                  </a:tcPr>
+                </a:tc>
+              </a:tr>
+            </a:tbl>
+          </a:graphicData>
+        </a:graphic>
+      </p:graphicFrame>
+      <p:sp>
+        <p:nvSpPr>
+          <p:cNvPr id="6" name="Text 3"/>
+          <p:cNvSpPr/>
+          <p:nvPr/>
+        </p:nvSpPr>
+        <p:spPr>
+          <a:xfrm>
+            <a:off x="640080" y="4297680"/>
+            <a:ext cx="7315200" cy="365760"/>
+          </a:xfrm>
+          <a:prstGeom prst="rect">
+            <a:avLst/>
+          </a:prstGeom>
+          <a:noFill/>
+          <a:ln/>
+        </p:spPr>
+        <p:txBody>
+          <a:bodyPr wrap="square" lIns="0" tIns="0" rIns="0" bIns="0" rtlCol="0" anchor="ctr"/>
+          <a:lstStyle/>
+          <a:p>
+            <a:pPr indent="0" marL="0">
+              <a:buNone/>
+            </a:pPr>
+            <a:r>
+              <a:rPr lang="en-US" sz="1500" b="1" dirty="0">
+                <a:solidFill>
+                  <a:srgbClr val="FFB347"/>
+                </a:solidFill>
+                <a:latin typeface="Calibri" pitchFamily="34" charset="0"/>
+                <a:ea typeface="Calibri" pitchFamily="34" charset="-122"/>
+                <a:cs typeface="Calibri" pitchFamily="34" charset="-120"/>
+              </a:rPr>
+              <a:t>Edge cases handled</a:t>
+            </a:r>
+            <a:endParaRPr lang="en-US" sz="1500" dirty="0"/>
+          </a:p>
+        </p:txBody>
+      </p:sp>
+      <p:sp>
+        <p:nvSpPr>
+          <p:cNvPr id="7" name="Shape 4"/>
+          <p:cNvSpPr/>
+          <p:nvPr/>
+        </p:nvSpPr>
+        <p:spPr>
+          <a:xfrm>
+            <a:off x="640080" y="4663440"/>
+            <a:ext cx="2446020" cy="1417320"/>
           </a:xfrm>
           <a:prstGeom prst="roundRect">
             <a:avLst>
-              <a:gd name="adj" fmla="val 4706"/>
+              <a:gd name="adj" fmla="val 5161"/>
             </a:avLst>
           </a:prstGeom>
           <a:solidFill>
@@ -6729,34 +8348,14 @@
       </p:sp>
       <p:sp>
         <p:nvSpPr>
-          <p:cNvPr id="6" name="Shape 4"/>
-          <p:cNvSpPr/>
-          <p:nvPr/>
-        </p:nvSpPr>
-        <p:spPr>
-          <a:xfrm>
-            <a:off x="640080" y="2103120"/>
-            <a:ext cx="2446020" cy="82296"/>
-          </a:xfrm>
-          <a:prstGeom prst="rect">
-            <a:avLst/>
-          </a:prstGeom>
-          <a:solidFill>
-            <a:srgbClr val="FFB347"/>
-          </a:solidFill>
-          <a:ln/>
-        </p:spPr>
-      </p:sp>
-      <p:sp>
-        <p:nvSpPr>
-          <p:cNvPr id="7" name="Text 5"/>
-          <p:cNvSpPr/>
-          <p:nvPr/>
-        </p:nvSpPr>
-        <p:spPr>
-          <a:xfrm>
-            <a:off x="822960" y="2423160"/>
-            <a:ext cx="2080260" cy="365760"/>
+          <p:cNvPr id="8" name="Text 5"/>
+          <p:cNvSpPr/>
+          <p:nvPr/>
+        </p:nvSpPr>
+        <p:spPr>
+          <a:xfrm>
+            <a:off x="841248" y="4828032"/>
+            <a:ext cx="548640" cy="457200"/>
           </a:xfrm>
           <a:prstGeom prst="rect">
             <a:avLst/>
@@ -6772,7 +8371,85 @@
               <a:buNone/>
             </a:pPr>
             <a:r>
-              <a:rPr lang="en-US" sz="1100" b="1" spc="100" kern="0" dirty="0">
+              <a:rPr lang="en-US" sz="2000" dirty="0">
+                <a:solidFill>
+                  <a:srgbClr val="000000"/>
+                </a:solidFill>
+              </a:rPr>
+              <a:t>🎭</a:t>
+            </a:r>
+            <a:endParaRPr lang="en-US" sz="2000" dirty="0"/>
+          </a:p>
+        </p:txBody>
+      </p:sp>
+      <p:sp>
+        <p:nvSpPr>
+          <p:cNvPr id="9" name="Text 6"/>
+          <p:cNvSpPr/>
+          <p:nvPr/>
+        </p:nvSpPr>
+        <p:spPr>
+          <a:xfrm>
+            <a:off x="1353312" y="4846320"/>
+            <a:ext cx="1577340" cy="365760"/>
+          </a:xfrm>
+          <a:prstGeom prst="rect">
+            <a:avLst/>
+          </a:prstGeom>
+          <a:noFill/>
+          <a:ln/>
+        </p:spPr>
+        <p:txBody>
+          <a:bodyPr wrap="square" lIns="0" tIns="0" rIns="0" bIns="0" rtlCol="0" anchor="ctr"/>
+          <a:lstStyle/>
+          <a:p>
+            <a:pPr indent="0" marL="0">
+              <a:buNone/>
+            </a:pPr>
+            <a:r>
+              <a:rPr lang="en-US" sz="1350" b="1" dirty="0">
+                <a:solidFill>
+                  <a:srgbClr val="ECECF3"/>
+                </a:solidFill>
+                <a:latin typeface="Calibri" pitchFamily="34" charset="0"/>
+                <a:ea typeface="Calibri" pitchFamily="34" charset="-122"/>
+                <a:cs typeface="Calibri" pitchFamily="34" charset="-120"/>
+              </a:rPr>
+              <a:t>Mixed mood</a:t>
+            </a:r>
+            <a:endParaRPr lang="en-US" sz="1350" dirty="0"/>
+          </a:p>
+        </p:txBody>
+      </p:sp>
+      <p:sp>
+        <p:nvSpPr>
+          <p:cNvPr id="10" name="Text 7"/>
+          <p:cNvSpPr/>
+          <p:nvPr/>
+        </p:nvSpPr>
+        <p:spPr>
+          <a:xfrm>
+            <a:off x="841248" y="5321808"/>
+            <a:ext cx="2043684" cy="713232"/>
+          </a:xfrm>
+          <a:prstGeom prst="rect">
+            <a:avLst/>
+          </a:prstGeom>
+          <a:noFill/>
+          <a:ln/>
+        </p:spPr>
+        <p:txBody>
+          <a:bodyPr wrap="square" lIns="0" tIns="0" rIns="0" bIns="0" rtlCol="0" anchor="ctr"/>
+          <a:lstStyle/>
+          <a:p>
+            <a:pPr indent="0" marL="0">
+              <a:lnSpc>
+                <a:spcPct val="108000"/>
+              </a:lnSpc>
+              <a:buNone/>
+            </a:pPr>
+            <a:r>
+              <a:rPr lang="en-US" sz="1050" dirty="0">
                 <a:solidFill>
                   <a:srgbClr val="9AA0B4"/>
                 </a:solidFill>
@@ -6780,65 +8457,26 @@
                 <a:ea typeface="Calibri" pitchFamily="34" charset="-122"/>
                 <a:cs typeface="Calibri" pitchFamily="34" charset="-120"/>
               </a:rPr>
-              <a:t>ENGINE</a:t>
-            </a:r>
-            <a:endParaRPr lang="en-US" sz="1100" dirty="0"/>
-          </a:p>
-        </p:txBody>
-      </p:sp>
-      <p:sp>
-        <p:nvSpPr>
-          <p:cNvPr id="8" name="Text 6"/>
-          <p:cNvSpPr/>
-          <p:nvPr/>
-        </p:nvSpPr>
-        <p:spPr>
-          <a:xfrm>
-            <a:off x="822960" y="2834640"/>
-            <a:ext cx="2080260" cy="640080"/>
-          </a:xfrm>
-          <a:prstGeom prst="rect">
-            <a:avLst/>
-          </a:prstGeom>
-          <a:noFill/>
-          <a:ln/>
-        </p:spPr>
-        <p:txBody>
-          <a:bodyPr wrap="square" lIns="0" tIns="0" rIns="0" bIns="0" rtlCol="0" anchor="ctr"/>
-          <a:lstStyle/>
-          <a:p>
-            <a:pPr indent="0" marL="0">
-              <a:buNone/>
-            </a:pPr>
-            <a:r>
-              <a:rPr lang="en-US" sz="1500" b="1" dirty="0">
-                <a:solidFill>
-                  <a:srgbClr val="ECECF3"/>
-                </a:solidFill>
-                <a:latin typeface="Calibri" pitchFamily="34" charset="0"/>
-                <a:ea typeface="Calibri" pitchFamily="34" charset="-122"/>
-                <a:cs typeface="Calibri" pitchFamily="34" charset="-120"/>
-              </a:rPr>
-              <a:t>C → cinematch.exe</a:t>
-            </a:r>
-            <a:endParaRPr lang="en-US" sz="1500" dirty="0"/>
-          </a:p>
-        </p:txBody>
-      </p:sp>
-      <p:sp>
-        <p:nvSpPr>
-          <p:cNvPr id="9" name="Shape 7"/>
-          <p:cNvSpPr/>
-          <p:nvPr/>
-        </p:nvSpPr>
-        <p:spPr>
-          <a:xfrm>
-            <a:off x="3451860" y="2103120"/>
-            <a:ext cx="2446020" cy="1554480"/>
+              <a:t>“happy but tense” → the AI picks the dominant signal; a valid pick still returns.</a:t>
+            </a:r>
+            <a:endParaRPr lang="en-US" sz="1050" dirty="0"/>
+          </a:p>
+        </p:txBody>
+      </p:sp>
+      <p:sp>
+        <p:nvSpPr>
+          <p:cNvPr id="11" name="Shape 8"/>
+          <p:cNvSpPr/>
+          <p:nvPr/>
+        </p:nvSpPr>
+        <p:spPr>
+          <a:xfrm>
+            <a:off x="3451860" y="4663440"/>
+            <a:ext cx="2446020" cy="1417320"/>
           </a:xfrm>
           <a:prstGeom prst="roundRect">
             <a:avLst>
-              <a:gd name="adj" fmla="val 4706"/>
+              <a:gd name="adj" fmla="val 5161"/>
             </a:avLst>
           </a:prstGeom>
           <a:solidFill>
@@ -6861,34 +8499,14 @@
       </p:sp>
       <p:sp>
         <p:nvSpPr>
-          <p:cNvPr id="10" name="Shape 8"/>
-          <p:cNvSpPr/>
-          <p:nvPr/>
-        </p:nvSpPr>
-        <p:spPr>
-          <a:xfrm>
-            <a:off x="3451860" y="2103120"/>
-            <a:ext cx="2446020" cy="82296"/>
-          </a:xfrm>
-          <a:prstGeom prst="rect">
-            <a:avLst/>
-          </a:prstGeom>
-          <a:solidFill>
-            <a:srgbClr val="FFB347"/>
-          </a:solidFill>
-          <a:ln/>
-        </p:spPr>
-      </p:sp>
-      <p:sp>
-        <p:nvSpPr>
-          <p:cNvPr id="11" name="Text 9"/>
-          <p:cNvSpPr/>
-          <p:nvPr/>
-        </p:nvSpPr>
-        <p:spPr>
-          <a:xfrm>
-            <a:off x="3634740" y="2423160"/>
-            <a:ext cx="2080260" cy="365760"/>
+          <p:cNvPr id="12" name="Text 9"/>
+          <p:cNvSpPr/>
+          <p:nvPr/>
+        </p:nvSpPr>
+        <p:spPr>
+          <a:xfrm>
+            <a:off x="3653028" y="4828032"/>
+            <a:ext cx="548640" cy="457200"/>
           </a:xfrm>
           <a:prstGeom prst="rect">
             <a:avLst/>
@@ -6904,7 +8522,85 @@
               <a:buNone/>
             </a:pPr>
             <a:r>
-              <a:rPr lang="en-US" sz="1100" b="1" spc="100" kern="0" dirty="0">
+              <a:rPr lang="en-US" sz="2000" dirty="0">
+                <a:solidFill>
+                  <a:srgbClr val="000000"/>
+                </a:solidFill>
+              </a:rPr>
+              <a:t>⚡</a:t>
+            </a:r>
+            <a:endParaRPr lang="en-US" sz="2000" dirty="0"/>
+          </a:p>
+        </p:txBody>
+      </p:sp>
+      <p:sp>
+        <p:nvSpPr>
+          <p:cNvPr id="13" name="Text 10"/>
+          <p:cNvSpPr/>
+          <p:nvPr/>
+        </p:nvSpPr>
+        <p:spPr>
+          <a:xfrm>
+            <a:off x="4165092" y="4846320"/>
+            <a:ext cx="1577340" cy="365760"/>
+          </a:xfrm>
+          <a:prstGeom prst="rect">
+            <a:avLst/>
+          </a:prstGeom>
+          <a:noFill/>
+          <a:ln/>
+        </p:spPr>
+        <p:txBody>
+          <a:bodyPr wrap="square" lIns="0" tIns="0" rIns="0" bIns="0" rtlCol="0" anchor="ctr"/>
+          <a:lstStyle/>
+          <a:p>
+            <a:pPr indent="0" marL="0">
+              <a:buNone/>
+            </a:pPr>
+            <a:r>
+              <a:rPr lang="en-US" sz="1350" b="1" dirty="0">
+                <a:solidFill>
+                  <a:srgbClr val="ECECF3"/>
+                </a:solidFill>
+                <a:latin typeface="Calibri" pitchFamily="34" charset="0"/>
+                <a:ea typeface="Calibri" pitchFamily="34" charset="-122"/>
+                <a:cs typeface="Calibri" pitchFamily="34" charset="-120"/>
+              </a:rPr>
+              <a:t>AI failure</a:t>
+            </a:r>
+            <a:endParaRPr lang="en-US" sz="1350" dirty="0"/>
+          </a:p>
+        </p:txBody>
+      </p:sp>
+      <p:sp>
+        <p:nvSpPr>
+          <p:cNvPr id="14" name="Text 11"/>
+          <p:cNvSpPr/>
+          <p:nvPr/>
+        </p:nvSpPr>
+        <p:spPr>
+          <a:xfrm>
+            <a:off x="3653028" y="5321808"/>
+            <a:ext cx="2043684" cy="713232"/>
+          </a:xfrm>
+          <a:prstGeom prst="rect">
+            <a:avLst/>
+          </a:prstGeom>
+          <a:noFill/>
+          <a:ln/>
+        </p:spPr>
+        <p:txBody>
+          <a:bodyPr wrap="square" lIns="0" tIns="0" rIns="0" bIns="0" rtlCol="0" anchor="ctr"/>
+          <a:lstStyle/>
+          <a:p>
+            <a:pPr indent="0" marL="0">
+              <a:lnSpc>
+                <a:spcPct val="108000"/>
+              </a:lnSpc>
+              <a:buNone/>
+            </a:pPr>
+            <a:r>
+              <a:rPr lang="en-US" sz="1050" dirty="0">
                 <a:solidFill>
                   <a:srgbClr val="9AA0B4"/>
                 </a:solidFill>
@@ -6912,65 +8608,26 @@
                 <a:ea typeface="Calibri" pitchFamily="34" charset="-122"/>
                 <a:cs typeface="Calibri" pitchFamily="34" charset="-120"/>
               </a:rPr>
-              <a:t>BACKEND</a:t>
-            </a:r>
-            <a:endParaRPr lang="en-US" sz="1100" dirty="0"/>
-          </a:p>
-        </p:txBody>
-      </p:sp>
-      <p:sp>
-        <p:nvSpPr>
-          <p:cNvPr id="12" name="Text 10"/>
-          <p:cNvSpPr/>
-          <p:nvPr/>
-        </p:nvSpPr>
-        <p:spPr>
-          <a:xfrm>
-            <a:off x="3634740" y="2834640"/>
-            <a:ext cx="2080260" cy="640080"/>
-          </a:xfrm>
-          <a:prstGeom prst="rect">
-            <a:avLst/>
-          </a:prstGeom>
-          <a:noFill/>
-          <a:ln/>
-        </p:spPr>
-        <p:txBody>
-          <a:bodyPr wrap="square" lIns="0" tIns="0" rIns="0" bIns="0" rtlCol="0" anchor="ctr"/>
-          <a:lstStyle/>
-          <a:p>
-            <a:pPr indent="0" marL="0">
-              <a:buNone/>
-            </a:pPr>
-            <a:r>
-              <a:rPr lang="en-US" sz="1500" b="1" dirty="0">
-                <a:solidFill>
-                  <a:srgbClr val="ECECF3"/>
-                </a:solidFill>
-                <a:latin typeface="Calibri" pitchFamily="34" charset="0"/>
-                <a:ea typeface="Calibri" pitchFamily="34" charset="-122"/>
-                <a:cs typeface="Calibri" pitchFamily="34" charset="-120"/>
-              </a:rPr>
-              <a:t>Node.js + Express</a:t>
-            </a:r>
-            <a:endParaRPr lang="en-US" sz="1500" dirty="0"/>
-          </a:p>
-        </p:txBody>
-      </p:sp>
-      <p:sp>
-        <p:nvSpPr>
-          <p:cNvPr id="13" name="Shape 11"/>
-          <p:cNvSpPr/>
-          <p:nvPr/>
-        </p:nvSpPr>
-        <p:spPr>
-          <a:xfrm>
-            <a:off x="6263640" y="2103120"/>
-            <a:ext cx="2446020" cy="1554480"/>
+              <a:t>Rate-limit or error → keyword fallback derives preferences. Never crashes.</a:t>
+            </a:r>
+            <a:endParaRPr lang="en-US" sz="1050" dirty="0"/>
+          </a:p>
+        </p:txBody>
+      </p:sp>
+      <p:sp>
+        <p:nvSpPr>
+          <p:cNvPr id="15" name="Shape 12"/>
+          <p:cNvSpPr/>
+          <p:nvPr/>
+        </p:nvSpPr>
+        <p:spPr>
+          <a:xfrm>
+            <a:off x="6263640" y="4663440"/>
+            <a:ext cx="2446020" cy="1417320"/>
           </a:xfrm>
           <a:prstGeom prst="roundRect">
             <a:avLst>
-              <a:gd name="adj" fmla="val 4706"/>
+              <a:gd name="adj" fmla="val 5161"/>
             </a:avLst>
           </a:prstGeom>
           <a:solidFill>
@@ -6993,34 +8650,14 @@
       </p:sp>
       <p:sp>
         <p:nvSpPr>
-          <p:cNvPr id="14" name="Shape 12"/>
-          <p:cNvSpPr/>
-          <p:nvPr/>
-        </p:nvSpPr>
-        <p:spPr>
-          <a:xfrm>
-            <a:off x="6263640" y="2103120"/>
-            <a:ext cx="2446020" cy="82296"/>
-          </a:xfrm>
-          <a:prstGeom prst="rect">
-            <a:avLst/>
-          </a:prstGeom>
-          <a:solidFill>
-            <a:srgbClr val="FFB347"/>
-          </a:solidFill>
-          <a:ln/>
-        </p:spPr>
-      </p:sp>
-      <p:sp>
-        <p:nvSpPr>
-          <p:cNvPr id="15" name="Text 13"/>
-          <p:cNvSpPr/>
-          <p:nvPr/>
-        </p:nvSpPr>
-        <p:spPr>
-          <a:xfrm>
-            <a:off x="6446520" y="2423160"/>
-            <a:ext cx="2080260" cy="365760"/>
+          <p:cNvPr id="16" name="Text 13"/>
+          <p:cNvSpPr/>
+          <p:nvPr/>
+        </p:nvSpPr>
+        <p:spPr>
+          <a:xfrm>
+            <a:off x="6464808" y="4828032"/>
+            <a:ext cx="548640" cy="457200"/>
           </a:xfrm>
           <a:prstGeom prst="rect">
             <a:avLst/>
@@ -7036,7 +8673,85 @@
               <a:buNone/>
             </a:pPr>
             <a:r>
-              <a:rPr lang="en-US" sz="1100" b="1" spc="100" kern="0" dirty="0">
+              <a:rPr lang="en-US" sz="2000" dirty="0">
+                <a:solidFill>
+                  <a:srgbClr val="000000"/>
+                </a:solidFill>
+              </a:rPr>
+              <a:t>🚫</a:t>
+            </a:r>
+            <a:endParaRPr lang="en-US" sz="2000" dirty="0"/>
+          </a:p>
+        </p:txBody>
+      </p:sp>
+      <p:sp>
+        <p:nvSpPr>
+          <p:cNvPr id="17" name="Text 14"/>
+          <p:cNvSpPr/>
+          <p:nvPr/>
+        </p:nvSpPr>
+        <p:spPr>
+          <a:xfrm>
+            <a:off x="6976872" y="4846320"/>
+            <a:ext cx="1577340" cy="365760"/>
+          </a:xfrm>
+          <a:prstGeom prst="rect">
+            <a:avLst/>
+          </a:prstGeom>
+          <a:noFill/>
+          <a:ln/>
+        </p:spPr>
+        <p:txBody>
+          <a:bodyPr wrap="square" lIns="0" tIns="0" rIns="0" bIns="0" rtlCol="0" anchor="ctr"/>
+          <a:lstStyle/>
+          <a:p>
+            <a:pPr indent="0" marL="0">
+              <a:buNone/>
+            </a:pPr>
+            <a:r>
+              <a:rPr lang="en-US" sz="1350" b="1" dirty="0">
+                <a:solidFill>
+                  <a:srgbClr val="ECECF3"/>
+                </a:solidFill>
+                <a:latin typeface="Calibri" pitchFamily="34" charset="0"/>
+                <a:ea typeface="Calibri" pitchFamily="34" charset="-122"/>
+                <a:cs typeface="Calibri" pitchFamily="34" charset="-120"/>
+              </a:rPr>
+              <a:t>Empty input</a:t>
+            </a:r>
+            <a:endParaRPr lang="en-US" sz="1350" dirty="0"/>
+          </a:p>
+        </p:txBody>
+      </p:sp>
+      <p:sp>
+        <p:nvSpPr>
+          <p:cNvPr id="18" name="Text 15"/>
+          <p:cNvSpPr/>
+          <p:nvPr/>
+        </p:nvSpPr>
+        <p:spPr>
+          <a:xfrm>
+            <a:off x="6464808" y="5321808"/>
+            <a:ext cx="2043684" cy="713232"/>
+          </a:xfrm>
+          <a:prstGeom prst="rect">
+            <a:avLst/>
+          </a:prstGeom>
+          <a:noFill/>
+          <a:ln/>
+        </p:spPr>
+        <p:txBody>
+          <a:bodyPr wrap="square" lIns="0" tIns="0" rIns="0" bIns="0" rtlCol="0" anchor="ctr"/>
+          <a:lstStyle/>
+          <a:p>
+            <a:pPr indent="0" marL="0">
+              <a:lnSpc>
+                <a:spcPct val="108000"/>
+              </a:lnSpc>
+              <a:buNone/>
+            </a:pPr>
+            <a:r>
+              <a:rPr lang="en-US" sz="1050" dirty="0">
                 <a:solidFill>
                   <a:srgbClr val="9AA0B4"/>
                 </a:solidFill>
@@ -7044,65 +8759,26 @@
                 <a:ea typeface="Calibri" pitchFamily="34" charset="-122"/>
                 <a:cs typeface="Calibri" pitchFamily="34" charset="-120"/>
               </a:rPr>
-              <a:t>FRONTEND</a:t>
-            </a:r>
-            <a:endParaRPr lang="en-US" sz="1100" dirty="0"/>
-          </a:p>
-        </p:txBody>
-      </p:sp>
-      <p:sp>
-        <p:nvSpPr>
-          <p:cNvPr id="16" name="Text 14"/>
-          <p:cNvSpPr/>
-          <p:nvPr/>
-        </p:nvSpPr>
-        <p:spPr>
-          <a:xfrm>
-            <a:off x="6446520" y="2834640"/>
-            <a:ext cx="2080260" cy="640080"/>
-          </a:xfrm>
-          <a:prstGeom prst="rect">
-            <a:avLst/>
-          </a:prstGeom>
-          <a:noFill/>
-          <a:ln/>
-        </p:spPr>
-        <p:txBody>
-          <a:bodyPr wrap="square" lIns="0" tIns="0" rIns="0" bIns="0" rtlCol="0" anchor="ctr"/>
-          <a:lstStyle/>
-          <a:p>
-            <a:pPr indent="0" marL="0">
-              <a:buNone/>
-            </a:pPr>
-            <a:r>
-              <a:rPr lang="en-US" sz="1500" b="1" dirty="0">
-                <a:solidFill>
-                  <a:srgbClr val="ECECF3"/>
-                </a:solidFill>
-                <a:latin typeface="Calibri" pitchFamily="34" charset="0"/>
-                <a:ea typeface="Calibri" pitchFamily="34" charset="-122"/>
-                <a:cs typeface="Calibri" pitchFamily="34" charset="-120"/>
-              </a:rPr>
-              <a:t>Vite + React</a:t>
-            </a:r>
-            <a:endParaRPr lang="en-US" sz="1500" dirty="0"/>
-          </a:p>
-        </p:txBody>
-      </p:sp>
-      <p:sp>
-        <p:nvSpPr>
-          <p:cNvPr id="17" name="Shape 15"/>
-          <p:cNvSpPr/>
-          <p:nvPr/>
-        </p:nvSpPr>
-        <p:spPr>
-          <a:xfrm>
-            <a:off x="9075420" y="2103120"/>
-            <a:ext cx="2446020" cy="1554480"/>
+              <a:t>Blank text is rejected with a friendly message before any work runs.</a:t>
+            </a:r>
+            <a:endParaRPr lang="en-US" sz="1050" dirty="0"/>
+          </a:p>
+        </p:txBody>
+      </p:sp>
+      <p:sp>
+        <p:nvSpPr>
+          <p:cNvPr id="19" name="Shape 16"/>
+          <p:cNvSpPr/>
+          <p:nvPr/>
+        </p:nvSpPr>
+        <p:spPr>
+          <a:xfrm>
+            <a:off x="9075420" y="4663440"/>
+            <a:ext cx="2446020" cy="1417320"/>
           </a:xfrm>
           <a:prstGeom prst="roundRect">
             <a:avLst>
-              <a:gd name="adj" fmla="val 4706"/>
+              <a:gd name="adj" fmla="val 5161"/>
             </a:avLst>
           </a:prstGeom>
           <a:solidFill>
@@ -7125,16 +8801,257 @@
       </p:sp>
       <p:sp>
         <p:nvSpPr>
-          <p:cNvPr id="18" name="Shape 16"/>
-          <p:cNvSpPr/>
-          <p:nvPr/>
-        </p:nvSpPr>
-        <p:spPr>
-          <a:xfrm>
-            <a:off x="9075420" y="2103120"/>
-            <a:ext cx="2446020" cy="82296"/>
-          </a:xfrm>
-          <a:prstGeom prst="rect">
+          <p:cNvPr id="20" name="Text 17"/>
+          <p:cNvSpPr/>
+          <p:nvPr/>
+        </p:nvSpPr>
+        <p:spPr>
+          <a:xfrm>
+            <a:off x="9276588" y="4828032"/>
+            <a:ext cx="548640" cy="457200"/>
+          </a:xfrm>
+          <a:prstGeom prst="rect">
+            <a:avLst/>
+          </a:prstGeom>
+          <a:noFill/>
+          <a:ln/>
+        </p:spPr>
+        <p:txBody>
+          <a:bodyPr wrap="square" lIns="0" tIns="0" rIns="0" bIns="0" rtlCol="0" anchor="ctr"/>
+          <a:lstStyle/>
+          <a:p>
+            <a:pPr indent="0" marL="0">
+              <a:buNone/>
+            </a:pPr>
+            <a:r>
+              <a:rPr lang="en-US" sz="2000" dirty="0">
+                <a:solidFill>
+                  <a:srgbClr val="000000"/>
+                </a:solidFill>
+              </a:rPr>
+              <a:t>🔀</a:t>
+            </a:r>
+            <a:endParaRPr lang="en-US" sz="2000" dirty="0"/>
+          </a:p>
+        </p:txBody>
+      </p:sp>
+      <p:sp>
+        <p:nvSpPr>
+          <p:cNvPr id="21" name="Text 18"/>
+          <p:cNvSpPr/>
+          <p:nvPr/>
+        </p:nvSpPr>
+        <p:spPr>
+          <a:xfrm>
+            <a:off x="9788652" y="4846320"/>
+            <a:ext cx="1577340" cy="365760"/>
+          </a:xfrm>
+          <a:prstGeom prst="rect">
+            <a:avLst/>
+          </a:prstGeom>
+          <a:noFill/>
+          <a:ln/>
+        </p:spPr>
+        <p:txBody>
+          <a:bodyPr wrap="square" lIns="0" tIns="0" rIns="0" bIns="0" rtlCol="0" anchor="ctr"/>
+          <a:lstStyle/>
+          <a:p>
+            <a:pPr indent="0" marL="0">
+              <a:buNone/>
+            </a:pPr>
+            <a:r>
+              <a:rPr lang="en-US" sz="1350" b="1" dirty="0">
+                <a:solidFill>
+                  <a:srgbClr val="ECECF3"/>
+                </a:solidFill>
+                <a:latin typeface="Calibri" pitchFamily="34" charset="0"/>
+                <a:ea typeface="Calibri" pitchFamily="34" charset="-122"/>
+                <a:cs typeface="Calibri" pitchFamily="34" charset="-120"/>
+              </a:rPr>
+              <a:t>Gibberish</a:t>
+            </a:r>
+            <a:endParaRPr lang="en-US" sz="1350" dirty="0"/>
+          </a:p>
+        </p:txBody>
+      </p:sp>
+      <p:sp>
+        <p:nvSpPr>
+          <p:cNvPr id="22" name="Text 19"/>
+          <p:cNvSpPr/>
+          <p:nvPr/>
+        </p:nvSpPr>
+        <p:spPr>
+          <a:xfrm>
+            <a:off x="9276588" y="5321808"/>
+            <a:ext cx="2043684" cy="713232"/>
+          </a:xfrm>
+          <a:prstGeom prst="rect">
+            <a:avLst/>
+          </a:prstGeom>
+          <a:noFill/>
+          <a:ln/>
+        </p:spPr>
+        <p:txBody>
+          <a:bodyPr wrap="square" lIns="0" tIns="0" rIns="0" bIns="0" rtlCol="0" anchor="ctr"/>
+          <a:lstStyle/>
+          <a:p>
+            <a:pPr indent="0" marL="0">
+              <a:lnSpc>
+                <a:spcPct val="108000"/>
+              </a:lnSpc>
+              <a:buNone/>
+            </a:pPr>
+            <a:r>
+              <a:rPr lang="en-US" sz="1050" dirty="0">
+                <a:solidFill>
+                  <a:srgbClr val="9AA0B4"/>
+                </a:solidFill>
+                <a:latin typeface="Calibri" pitchFamily="34" charset="0"/>
+                <a:ea typeface="Calibri" pitchFamily="34" charset="-122"/>
+                <a:cs typeface="Calibri" pitchFamily="34" charset="-120"/>
+              </a:rPr>
+              <a:t>Unrecognised text falls back to safe default preferences — always a result.</a:t>
+            </a:r>
+            <a:endParaRPr lang="en-US" sz="1050" dirty="0"/>
+          </a:p>
+        </p:txBody>
+      </p:sp>
+      <p:sp>
+        <p:nvSpPr>
+          <p:cNvPr id="23" name="Text 20"/>
+          <p:cNvSpPr/>
+          <p:nvPr/>
+        </p:nvSpPr>
+        <p:spPr>
+          <a:xfrm>
+            <a:off x="640080" y="6400800"/>
+            <a:ext cx="8229600" cy="274320"/>
+          </a:xfrm>
+          <a:prstGeom prst="rect">
+            <a:avLst/>
+          </a:prstGeom>
+          <a:noFill/>
+          <a:ln/>
+        </p:spPr>
+        <p:txBody>
+          <a:bodyPr wrap="square" lIns="0" tIns="0" rIns="0" bIns="0" rtlCol="0" anchor="ctr"/>
+          <a:lstStyle/>
+          <a:p>
+            <a:pPr indent="0" marL="0">
+              <a:buNone/>
+            </a:pPr>
+            <a:r>
+              <a:rPr lang="en-US" sz="900" b="1" dirty="0">
+                <a:solidFill>
+                  <a:srgbClr val="FFB347"/>
+                </a:solidFill>
+                <a:latin typeface="Calibri" pitchFamily="34" charset="0"/>
+                <a:ea typeface="Calibri" pitchFamily="34" charset="-122"/>
+                <a:cs typeface="Calibri" pitchFamily="34" charset="-120"/>
+              </a:rPr>
+              <a:t>CINEMATCH</a:t>
+            </a:r>
+            <a:pPr indent="0" marL="0">
+              <a:buNone/>
+            </a:pPr>
+            <a:r>
+              <a:rPr lang="en-US" sz="900" dirty="0">
+                <a:solidFill>
+                  <a:srgbClr val="9AA0B4"/>
+                </a:solidFill>
+                <a:latin typeface="Calibri" pitchFamily="34" charset="0"/>
+                <a:ea typeface="Calibri" pitchFamily="34" charset="-122"/>
+                <a:cs typeface="Calibri" pitchFamily="34" charset="-120"/>
+              </a:rPr>
+              <a:t>   ·   AI-Powered Movie &amp; Game Recommender</a:t>
+            </a:r>
+            <a:endParaRPr lang="en-US" sz="900" dirty="0"/>
+          </a:p>
+        </p:txBody>
+      </p:sp>
+      <p:sp>
+        <p:nvSpPr>
+          <p:cNvPr id="24" name="Text 21"/>
+          <p:cNvSpPr/>
+          <p:nvPr/>
+        </p:nvSpPr>
+        <p:spPr>
+          <a:xfrm>
+            <a:off x="11064240" y="6400800"/>
+            <a:ext cx="457200" cy="274320"/>
+          </a:xfrm>
+          <a:prstGeom prst="rect">
+            <a:avLst/>
+          </a:prstGeom>
+          <a:noFill/>
+          <a:ln/>
+        </p:spPr>
+        <p:txBody>
+          <a:bodyPr wrap="square" lIns="0" tIns="0" rIns="0" bIns="0" rtlCol="0" anchor="ctr"/>
+          <a:lstStyle/>
+          <a:p>
+            <a:pPr algn="r" indent="0" marL="0">
+              <a:buNone/>
+            </a:pPr>
+            <a:r>
+              <a:rPr lang="en-US" sz="900" dirty="0">
+                <a:solidFill>
+                  <a:srgbClr val="9AA0B4"/>
+                </a:solidFill>
+                <a:latin typeface="Calibri" pitchFamily="34" charset="0"/>
+                <a:ea typeface="Calibri" pitchFamily="34" charset="-122"/>
+                <a:cs typeface="Calibri" pitchFamily="34" charset="-120"/>
+              </a:rPr>
+              <a:t>14</a:t>
+            </a:r>
+            <a:endParaRPr lang="en-US" sz="900" dirty="0"/>
+          </a:p>
+        </p:txBody>
+      </p:sp>
+    </p:spTree>
+  </p:cSld>
+  <p:clrMapOvr>
+    <a:masterClrMapping/>
+  </p:clrMapOvr>
+</p:sld>
+</file>
+
+<file path=ppt/slides/slide15.xml><?xml version="1.0" encoding="utf-8"?>
+<p:sld xmlns:a="http://schemas.openxmlformats.org/drawingml/2006/main" xmlns:r="http://schemas.openxmlformats.org/officeDocument/2006/relationships" xmlns:p="http://schemas.openxmlformats.org/presentationml/2006/main">
+  <p:cSld name="Slide 15">
+    <p:bg>
+      <p:bgPr>
+        <a:solidFill>
+          <a:srgbClr val="0F1117"/>
+        </a:solidFill>
+      </p:bgPr>
+    </p:bg>
+    <p:spTree>
+      <p:nvGrpSpPr>
+        <p:cNvPr id="1" name=""/>
+        <p:cNvGrpSpPr/>
+        <p:nvPr/>
+      </p:nvGrpSpPr>
+      <p:grpSpPr>
+        <a:xfrm>
+          <a:off x="0" y="0"/>
+          <a:ext cx="0" cy="0"/>
+          <a:chOff x="0" y="0"/>
+          <a:chExt cx="0" cy="0"/>
+        </a:xfrm>
+      </p:grpSpPr>
+      <p:sp>
+        <p:nvSpPr>
+          <p:cNvPr id="2" name="Shape 0"/>
+          <p:cNvSpPr/>
+          <p:nvPr/>
+        </p:nvSpPr>
+        <p:spPr>
+          <a:xfrm>
+            <a:off x="640080" y="566928"/>
+            <a:ext cx="146304" cy="146304"/>
+          </a:xfrm>
+          <a:prstGeom prst="ellipse">
             <a:avLst/>
           </a:prstGeom>
           <a:solidFill>
@@ -7145,14 +9062,14 @@
       </p:sp>
       <p:sp>
         <p:nvSpPr>
-          <p:cNvPr id="19" name="Text 17"/>
-          <p:cNvSpPr/>
-          <p:nvPr/>
-        </p:nvSpPr>
-        <p:spPr>
-          <a:xfrm>
-            <a:off x="9258300" y="2423160"/>
-            <a:ext cx="2080260" cy="365760"/>
+          <p:cNvPr id="3" name="Text 1"/>
+          <p:cNvSpPr/>
+          <p:nvPr/>
+        </p:nvSpPr>
+        <p:spPr>
+          <a:xfrm>
+            <a:off x="896112" y="457200"/>
+            <a:ext cx="9144000" cy="365760"/>
           </a:xfrm>
           <a:prstGeom prst="rect">
             <a:avLst/>
@@ -7168,30 +9085,30 @@
               <a:buNone/>
             </a:pPr>
             <a:r>
-              <a:rPr lang="en-US" sz="1100" b="1" spc="100" kern="0" dirty="0">
-                <a:solidFill>
-                  <a:srgbClr val="9AA0B4"/>
-                </a:solidFill>
-                <a:latin typeface="Calibri" pitchFamily="34" charset="0"/>
-                <a:ea typeface="Calibri" pitchFamily="34" charset="-122"/>
-                <a:cs typeface="Calibri" pitchFamily="34" charset="-120"/>
-              </a:rPr>
-              <a:t>PACKAGES</a:t>
-            </a:r>
-            <a:endParaRPr lang="en-US" sz="1100" dirty="0"/>
-          </a:p>
-        </p:txBody>
-      </p:sp>
-      <p:sp>
-        <p:nvSpPr>
-          <p:cNvPr id="20" name="Text 18"/>
-          <p:cNvSpPr/>
-          <p:nvPr/>
-        </p:nvSpPr>
-        <p:spPr>
-          <a:xfrm>
-            <a:off x="9258300" y="2834640"/>
-            <a:ext cx="2080260" cy="640080"/>
+              <a:rPr lang="en-US" sz="1200" b="1" spc="300" kern="0" dirty="0">
+                <a:solidFill>
+                  <a:srgbClr val="FFB347"/>
+                </a:solidFill>
+                <a:latin typeface="Calibri" pitchFamily="34" charset="0"/>
+                <a:ea typeface="Calibri" pitchFamily="34" charset="-122"/>
+                <a:cs typeface="Calibri" pitchFamily="34" charset="-120"/>
+              </a:rPr>
+              <a:t>UNDER THE HOOD</a:t>
+            </a:r>
+            <a:endParaRPr lang="en-US" sz="1200" dirty="0"/>
+          </a:p>
+        </p:txBody>
+      </p:sp>
+      <p:sp>
+        <p:nvSpPr>
+          <p:cNvPr id="4" name="Text 2"/>
+          <p:cNvSpPr/>
+          <p:nvPr/>
+        </p:nvSpPr>
+        <p:spPr>
+          <a:xfrm>
+            <a:off x="640080" y="777240"/>
+            <a:ext cx="10881360" cy="731520"/>
           </a:xfrm>
           <a:prstGeom prst="rect">
             <a:avLst/>
@@ -7207,29 +9124,29 @@
               <a:buNone/>
             </a:pPr>
             <a:r>
-              <a:rPr lang="en-US" sz="1500" b="1" dirty="0">
+              <a:rPr lang="en-US" sz="3200" b="1" dirty="0">
                 <a:solidFill>
                   <a:srgbClr val="ECECF3"/>
                 </a:solidFill>
-                <a:latin typeface="Calibri" pitchFamily="34" charset="0"/>
-                <a:ea typeface="Calibri" pitchFamily="34" charset="-122"/>
-                <a:cs typeface="Calibri" pitchFamily="34" charset="-120"/>
-              </a:rPr>
-              <a:t>pnpm</a:t>
-            </a:r>
-            <a:endParaRPr lang="en-US" sz="1500" dirty="0"/>
-          </a:p>
-        </p:txBody>
-      </p:sp>
-      <p:sp>
-        <p:nvSpPr>
-          <p:cNvPr id="21" name="Shape 19"/>
-          <p:cNvSpPr/>
-          <p:nvPr/>
-        </p:nvSpPr>
-        <p:spPr>
-          <a:xfrm>
-            <a:off x="640080" y="4023360"/>
+                <a:latin typeface="Georgia" pitchFamily="34" charset="0"/>
+                <a:ea typeface="Georgia" pitchFamily="34" charset="-122"/>
+                <a:cs typeface="Georgia" pitchFamily="34" charset="-120"/>
+              </a:rPr>
+              <a:t>Tech stack &amp; open data</a:t>
+            </a:r>
+            <a:endParaRPr lang="en-US" sz="3200" dirty="0"/>
+          </a:p>
+        </p:txBody>
+      </p:sp>
+      <p:sp>
+        <p:nvSpPr>
+          <p:cNvPr id="5" name="Shape 3"/>
+          <p:cNvSpPr/>
+          <p:nvPr/>
+        </p:nvSpPr>
+        <p:spPr>
+          <a:xfrm>
+            <a:off x="640080" y="2103120"/>
             <a:ext cx="2446020" cy="1554480"/>
           </a:xfrm>
           <a:prstGeom prst="roundRect">
@@ -7257,13 +9174,13 @@
       </p:sp>
       <p:sp>
         <p:nvSpPr>
-          <p:cNvPr id="22" name="Shape 20"/>
-          <p:cNvSpPr/>
-          <p:nvPr/>
-        </p:nvSpPr>
-        <p:spPr>
-          <a:xfrm>
-            <a:off x="640080" y="4023360"/>
+          <p:cNvPr id="6" name="Shape 4"/>
+          <p:cNvSpPr/>
+          <p:nvPr/>
+        </p:nvSpPr>
+        <p:spPr>
+          <a:xfrm>
+            <a:off x="640080" y="2103120"/>
             <a:ext cx="2446020" cy="82296"/>
           </a:xfrm>
           <a:prstGeom prst="rect">
@@ -7277,13 +9194,13 @@
       </p:sp>
       <p:sp>
         <p:nvSpPr>
-          <p:cNvPr id="23" name="Text 21"/>
-          <p:cNvSpPr/>
-          <p:nvPr/>
-        </p:nvSpPr>
-        <p:spPr>
-          <a:xfrm>
-            <a:off x="822960" y="4343400"/>
+          <p:cNvPr id="7" name="Text 5"/>
+          <p:cNvSpPr/>
+          <p:nvPr/>
+        </p:nvSpPr>
+        <p:spPr>
+          <a:xfrm>
+            <a:off x="822960" y="2423160"/>
             <a:ext cx="2080260" cy="365760"/>
           </a:xfrm>
           <a:prstGeom prst="rect">
@@ -7308,7 +9225,7 @@
                 <a:ea typeface="Calibri" pitchFamily="34" charset="-122"/>
                 <a:cs typeface="Calibri" pitchFamily="34" charset="-120"/>
               </a:rPr>
-              <a:t>AI</a:t>
+              <a:t>ENGINE</a:t>
             </a:r>
             <a:endParaRPr lang="en-US" sz="1100" dirty="0"/>
           </a:p>
@@ -7316,13 +9233,13 @@
       </p:sp>
       <p:sp>
         <p:nvSpPr>
-          <p:cNvPr id="24" name="Text 22"/>
-          <p:cNvSpPr/>
-          <p:nvPr/>
-        </p:nvSpPr>
-        <p:spPr>
-          <a:xfrm>
-            <a:off x="822960" y="4754880"/>
+          <p:cNvPr id="8" name="Text 6"/>
+          <p:cNvSpPr/>
+          <p:nvPr/>
+        </p:nvSpPr>
+        <p:spPr>
+          <a:xfrm>
+            <a:off x="822960" y="2834640"/>
             <a:ext cx="2080260" cy="640080"/>
           </a:xfrm>
           <a:prstGeom prst="rect">
@@ -7347,7 +9264,7 @@
                 <a:ea typeface="Calibri" pitchFamily="34" charset="-122"/>
                 <a:cs typeface="Calibri" pitchFamily="34" charset="-120"/>
               </a:rPr>
-              <a:t>OpenRouter (Qwen3)</a:t>
+              <a:t>C → cinematch.exe</a:t>
             </a:r>
             <a:endParaRPr lang="en-US" sz="1500" dirty="0"/>
           </a:p>
@@ -7355,13 +9272,13 @@
       </p:sp>
       <p:sp>
         <p:nvSpPr>
-          <p:cNvPr id="25" name="Shape 23"/>
-          <p:cNvSpPr/>
-          <p:nvPr/>
-        </p:nvSpPr>
-        <p:spPr>
-          <a:xfrm>
-            <a:off x="3451860" y="4023360"/>
+          <p:cNvPr id="9" name="Shape 7"/>
+          <p:cNvSpPr/>
+          <p:nvPr/>
+        </p:nvSpPr>
+        <p:spPr>
+          <a:xfrm>
+            <a:off x="3451860" y="2103120"/>
             <a:ext cx="2446020" cy="1554480"/>
           </a:xfrm>
           <a:prstGeom prst="roundRect">
@@ -7389,13 +9306,13 @@
       </p:sp>
       <p:sp>
         <p:nvSpPr>
-          <p:cNvPr id="26" name="Shape 24"/>
-          <p:cNvSpPr/>
-          <p:nvPr/>
-        </p:nvSpPr>
-        <p:spPr>
-          <a:xfrm>
-            <a:off x="3451860" y="4023360"/>
+          <p:cNvPr id="10" name="Shape 8"/>
+          <p:cNvSpPr/>
+          <p:nvPr/>
+        </p:nvSpPr>
+        <p:spPr>
+          <a:xfrm>
+            <a:off x="3451860" y="2103120"/>
             <a:ext cx="2446020" cy="82296"/>
           </a:xfrm>
           <a:prstGeom prst="rect">
@@ -7409,13 +9326,13 @@
       </p:sp>
       <p:sp>
         <p:nvSpPr>
-          <p:cNvPr id="27" name="Text 25"/>
-          <p:cNvSpPr/>
-          <p:nvPr/>
-        </p:nvSpPr>
-        <p:spPr>
-          <a:xfrm>
-            <a:off x="3634740" y="4343400"/>
+          <p:cNvPr id="11" name="Text 9"/>
+          <p:cNvSpPr/>
+          <p:nvPr/>
+        </p:nvSpPr>
+        <p:spPr>
+          <a:xfrm>
+            <a:off x="3634740" y="2423160"/>
             <a:ext cx="2080260" cy="365760"/>
           </a:xfrm>
           <a:prstGeom prst="rect">
@@ -7440,7 +9357,7 @@
                 <a:ea typeface="Calibri" pitchFamily="34" charset="-122"/>
                 <a:cs typeface="Calibri" pitchFamily="34" charset="-120"/>
               </a:rPr>
-              <a:t>MOVIES</a:t>
+              <a:t>BACKEND</a:t>
             </a:r>
             <a:endParaRPr lang="en-US" sz="1100" dirty="0"/>
           </a:p>
@@ -7448,13 +9365,13 @@
       </p:sp>
       <p:sp>
         <p:nvSpPr>
-          <p:cNvPr id="28" name="Text 26"/>
-          <p:cNvSpPr/>
-          <p:nvPr/>
-        </p:nvSpPr>
-        <p:spPr>
-          <a:xfrm>
-            <a:off x="3634740" y="4754880"/>
+          <p:cNvPr id="12" name="Text 10"/>
+          <p:cNvSpPr/>
+          <p:nvPr/>
+        </p:nvSpPr>
+        <p:spPr>
+          <a:xfrm>
+            <a:off x="3634740" y="2834640"/>
             <a:ext cx="2080260" cy="640080"/>
           </a:xfrm>
           <a:prstGeom prst="rect">
@@ -7479,7 +9396,7 @@
                 <a:ea typeface="Calibri" pitchFamily="34" charset="-122"/>
                 <a:cs typeface="Calibri" pitchFamily="34" charset="-120"/>
               </a:rPr>
-              <a:t>TMDB open dataset</a:t>
+              <a:t>Node.js + Express</a:t>
             </a:r>
             <a:endParaRPr lang="en-US" sz="1500" dirty="0"/>
           </a:p>
@@ -7487,13 +9404,13 @@
       </p:sp>
       <p:sp>
         <p:nvSpPr>
-          <p:cNvPr id="29" name="Shape 27"/>
-          <p:cNvSpPr/>
-          <p:nvPr/>
-        </p:nvSpPr>
-        <p:spPr>
-          <a:xfrm>
-            <a:off x="6263640" y="4023360"/>
+          <p:cNvPr id="13" name="Shape 11"/>
+          <p:cNvSpPr/>
+          <p:nvPr/>
+        </p:nvSpPr>
+        <p:spPr>
+          <a:xfrm>
+            <a:off x="6263640" y="2103120"/>
             <a:ext cx="2446020" cy="1554480"/>
           </a:xfrm>
           <a:prstGeom prst="roundRect">
@@ -7521,13 +9438,13 @@
       </p:sp>
       <p:sp>
         <p:nvSpPr>
-          <p:cNvPr id="30" name="Shape 28"/>
-          <p:cNvSpPr/>
-          <p:nvPr/>
-        </p:nvSpPr>
-        <p:spPr>
-          <a:xfrm>
-            <a:off x="6263640" y="4023360"/>
+          <p:cNvPr id="14" name="Shape 12"/>
+          <p:cNvSpPr/>
+          <p:nvPr/>
+        </p:nvSpPr>
+        <p:spPr>
+          <a:xfrm>
+            <a:off x="6263640" y="2103120"/>
             <a:ext cx="2446020" cy="82296"/>
           </a:xfrm>
           <a:prstGeom prst="rect">
@@ -7541,13 +9458,13 @@
       </p:sp>
       <p:sp>
         <p:nvSpPr>
-          <p:cNvPr id="31" name="Text 29"/>
-          <p:cNvSpPr/>
-          <p:nvPr/>
-        </p:nvSpPr>
-        <p:spPr>
-          <a:xfrm>
-            <a:off x="6446520" y="4343400"/>
+          <p:cNvPr id="15" name="Text 13"/>
+          <p:cNvSpPr/>
+          <p:nvPr/>
+        </p:nvSpPr>
+        <p:spPr>
+          <a:xfrm>
+            <a:off x="6446520" y="2423160"/>
             <a:ext cx="2080260" cy="365760"/>
           </a:xfrm>
           <a:prstGeom prst="rect">
@@ -7572,7 +9489,7 @@
                 <a:ea typeface="Calibri" pitchFamily="34" charset="-122"/>
                 <a:cs typeface="Calibri" pitchFamily="34" charset="-120"/>
               </a:rPr>
-              <a:t>GAMES</a:t>
+              <a:t>FRONTEND</a:t>
             </a:r>
             <a:endParaRPr lang="en-US" sz="1100" dirty="0"/>
           </a:p>
@@ -7580,13 +9497,13 @@
       </p:sp>
       <p:sp>
         <p:nvSpPr>
-          <p:cNvPr id="32" name="Text 30"/>
-          <p:cNvSpPr/>
-          <p:nvPr/>
-        </p:nvSpPr>
-        <p:spPr>
-          <a:xfrm>
-            <a:off x="6446520" y="4754880"/>
+          <p:cNvPr id="16" name="Text 14"/>
+          <p:cNvSpPr/>
+          <p:nvPr/>
+        </p:nvSpPr>
+        <p:spPr>
+          <a:xfrm>
+            <a:off x="6446520" y="2834640"/>
             <a:ext cx="2080260" cy="640080"/>
           </a:xfrm>
           <a:prstGeom prst="rect">
@@ -7611,7 +9528,7 @@
                 <a:ea typeface="Calibri" pitchFamily="34" charset="-122"/>
                 <a:cs typeface="Calibri" pitchFamily="34" charset="-120"/>
               </a:rPr>
-              <a:t>RAWG open dataset</a:t>
+              <a:t>Vite + React</a:t>
             </a:r>
             <a:endParaRPr lang="en-US" sz="1500" dirty="0"/>
           </a:p>
@@ -7619,13 +9536,13 @@
       </p:sp>
       <p:sp>
         <p:nvSpPr>
-          <p:cNvPr id="33" name="Shape 31"/>
-          <p:cNvSpPr/>
-          <p:nvPr/>
-        </p:nvSpPr>
-        <p:spPr>
-          <a:xfrm>
-            <a:off x="9075420" y="4023360"/>
+          <p:cNvPr id="17" name="Shape 15"/>
+          <p:cNvSpPr/>
+          <p:nvPr/>
+        </p:nvSpPr>
+        <p:spPr>
+          <a:xfrm>
+            <a:off x="9075420" y="2103120"/>
             <a:ext cx="2446020" cy="1554480"/>
           </a:xfrm>
           <a:prstGeom prst="roundRect">
@@ -7653,13 +9570,13 @@
       </p:sp>
       <p:sp>
         <p:nvSpPr>
-          <p:cNvPr id="34" name="Shape 32"/>
-          <p:cNvSpPr/>
-          <p:nvPr/>
-        </p:nvSpPr>
-        <p:spPr>
-          <a:xfrm>
-            <a:off x="9075420" y="4023360"/>
+          <p:cNvPr id="18" name="Shape 16"/>
+          <p:cNvSpPr/>
+          <p:nvPr/>
+        </p:nvSpPr>
+        <p:spPr>
+          <a:xfrm>
+            <a:off x="9075420" y="2103120"/>
             <a:ext cx="2446020" cy="82296"/>
           </a:xfrm>
           <a:prstGeom prst="rect">
@@ -7673,6 +9590,534 @@
       </p:sp>
       <p:sp>
         <p:nvSpPr>
+          <p:cNvPr id="19" name="Text 17"/>
+          <p:cNvSpPr/>
+          <p:nvPr/>
+        </p:nvSpPr>
+        <p:spPr>
+          <a:xfrm>
+            <a:off x="9258300" y="2423160"/>
+            <a:ext cx="2080260" cy="365760"/>
+          </a:xfrm>
+          <a:prstGeom prst="rect">
+            <a:avLst/>
+          </a:prstGeom>
+          <a:noFill/>
+          <a:ln/>
+        </p:spPr>
+        <p:txBody>
+          <a:bodyPr wrap="square" lIns="0" tIns="0" rIns="0" bIns="0" rtlCol="0" anchor="ctr"/>
+          <a:lstStyle/>
+          <a:p>
+            <a:pPr indent="0" marL="0">
+              <a:buNone/>
+            </a:pPr>
+            <a:r>
+              <a:rPr lang="en-US" sz="1100" b="1" spc="100" kern="0" dirty="0">
+                <a:solidFill>
+                  <a:srgbClr val="9AA0B4"/>
+                </a:solidFill>
+                <a:latin typeface="Calibri" pitchFamily="34" charset="0"/>
+                <a:ea typeface="Calibri" pitchFamily="34" charset="-122"/>
+                <a:cs typeface="Calibri" pitchFamily="34" charset="-120"/>
+              </a:rPr>
+              <a:t>PACKAGES</a:t>
+            </a:r>
+            <a:endParaRPr lang="en-US" sz="1100" dirty="0"/>
+          </a:p>
+        </p:txBody>
+      </p:sp>
+      <p:sp>
+        <p:nvSpPr>
+          <p:cNvPr id="20" name="Text 18"/>
+          <p:cNvSpPr/>
+          <p:nvPr/>
+        </p:nvSpPr>
+        <p:spPr>
+          <a:xfrm>
+            <a:off x="9258300" y="2834640"/>
+            <a:ext cx="2080260" cy="640080"/>
+          </a:xfrm>
+          <a:prstGeom prst="rect">
+            <a:avLst/>
+          </a:prstGeom>
+          <a:noFill/>
+          <a:ln/>
+        </p:spPr>
+        <p:txBody>
+          <a:bodyPr wrap="square" lIns="0" tIns="0" rIns="0" bIns="0" rtlCol="0" anchor="ctr"/>
+          <a:lstStyle/>
+          <a:p>
+            <a:pPr indent="0" marL="0">
+              <a:buNone/>
+            </a:pPr>
+            <a:r>
+              <a:rPr lang="en-US" sz="1500" b="1" dirty="0">
+                <a:solidFill>
+                  <a:srgbClr val="ECECF3"/>
+                </a:solidFill>
+                <a:latin typeface="Calibri" pitchFamily="34" charset="0"/>
+                <a:ea typeface="Calibri" pitchFamily="34" charset="-122"/>
+                <a:cs typeface="Calibri" pitchFamily="34" charset="-120"/>
+              </a:rPr>
+              <a:t>pnpm</a:t>
+            </a:r>
+            <a:endParaRPr lang="en-US" sz="1500" dirty="0"/>
+          </a:p>
+        </p:txBody>
+      </p:sp>
+      <p:sp>
+        <p:nvSpPr>
+          <p:cNvPr id="21" name="Shape 19"/>
+          <p:cNvSpPr/>
+          <p:nvPr/>
+        </p:nvSpPr>
+        <p:spPr>
+          <a:xfrm>
+            <a:off x="640080" y="4023360"/>
+            <a:ext cx="2446020" cy="1554480"/>
+          </a:xfrm>
+          <a:prstGeom prst="roundRect">
+            <a:avLst>
+              <a:gd name="adj" fmla="val 4706"/>
+            </a:avLst>
+          </a:prstGeom>
+          <a:solidFill>
+            <a:srgbClr val="11141D"/>
+          </a:solidFill>
+          <a:ln w="12700">
+            <a:solidFill>
+              <a:srgbClr val="2A2F3E"/>
+            </a:solidFill>
+            <a:prstDash val="solid"/>
+          </a:ln>
+          <a:effectLst>
+            <a:outerShdw sx="100000" sy="100000" kx="0" ky="0" algn="bl" rotWithShape="0" blurRad="101600" dist="38100" dir="8100000">
+              <a:srgbClr val="000000">
+                <a:alpha val="35000"/>
+              </a:srgbClr>
+            </a:outerShdw>
+          </a:effectLst>
+        </p:spPr>
+      </p:sp>
+      <p:sp>
+        <p:nvSpPr>
+          <p:cNvPr id="22" name="Shape 20"/>
+          <p:cNvSpPr/>
+          <p:nvPr/>
+        </p:nvSpPr>
+        <p:spPr>
+          <a:xfrm>
+            <a:off x="640080" y="4023360"/>
+            <a:ext cx="2446020" cy="82296"/>
+          </a:xfrm>
+          <a:prstGeom prst="rect">
+            <a:avLst/>
+          </a:prstGeom>
+          <a:solidFill>
+            <a:srgbClr val="FFB347"/>
+          </a:solidFill>
+          <a:ln/>
+        </p:spPr>
+      </p:sp>
+      <p:sp>
+        <p:nvSpPr>
+          <p:cNvPr id="23" name="Text 21"/>
+          <p:cNvSpPr/>
+          <p:nvPr/>
+        </p:nvSpPr>
+        <p:spPr>
+          <a:xfrm>
+            <a:off x="822960" y="4343400"/>
+            <a:ext cx="2080260" cy="365760"/>
+          </a:xfrm>
+          <a:prstGeom prst="rect">
+            <a:avLst/>
+          </a:prstGeom>
+          <a:noFill/>
+          <a:ln/>
+        </p:spPr>
+        <p:txBody>
+          <a:bodyPr wrap="square" lIns="0" tIns="0" rIns="0" bIns="0" rtlCol="0" anchor="ctr"/>
+          <a:lstStyle/>
+          <a:p>
+            <a:pPr indent="0" marL="0">
+              <a:buNone/>
+            </a:pPr>
+            <a:r>
+              <a:rPr lang="en-US" sz="1100" b="1" spc="100" kern="0" dirty="0">
+                <a:solidFill>
+                  <a:srgbClr val="9AA0B4"/>
+                </a:solidFill>
+                <a:latin typeface="Calibri" pitchFamily="34" charset="0"/>
+                <a:ea typeface="Calibri" pitchFamily="34" charset="-122"/>
+                <a:cs typeface="Calibri" pitchFamily="34" charset="-120"/>
+              </a:rPr>
+              <a:t>AI</a:t>
+            </a:r>
+            <a:endParaRPr lang="en-US" sz="1100" dirty="0"/>
+          </a:p>
+        </p:txBody>
+      </p:sp>
+      <p:sp>
+        <p:nvSpPr>
+          <p:cNvPr id="24" name="Text 22"/>
+          <p:cNvSpPr/>
+          <p:nvPr/>
+        </p:nvSpPr>
+        <p:spPr>
+          <a:xfrm>
+            <a:off x="822960" y="4754880"/>
+            <a:ext cx="2080260" cy="640080"/>
+          </a:xfrm>
+          <a:prstGeom prst="rect">
+            <a:avLst/>
+          </a:prstGeom>
+          <a:noFill/>
+          <a:ln/>
+        </p:spPr>
+        <p:txBody>
+          <a:bodyPr wrap="square" lIns="0" tIns="0" rIns="0" bIns="0" rtlCol="0" anchor="ctr"/>
+          <a:lstStyle/>
+          <a:p>
+            <a:pPr indent="0" marL="0">
+              <a:buNone/>
+            </a:pPr>
+            <a:r>
+              <a:rPr lang="en-US" sz="1500" b="1" dirty="0">
+                <a:solidFill>
+                  <a:srgbClr val="ECECF3"/>
+                </a:solidFill>
+                <a:latin typeface="Calibri" pitchFamily="34" charset="0"/>
+                <a:ea typeface="Calibri" pitchFamily="34" charset="-122"/>
+                <a:cs typeface="Calibri" pitchFamily="34" charset="-120"/>
+              </a:rPr>
+              <a:t>OpenRouter (Qwen3)</a:t>
+            </a:r>
+            <a:endParaRPr lang="en-US" sz="1500" dirty="0"/>
+          </a:p>
+        </p:txBody>
+      </p:sp>
+      <p:sp>
+        <p:nvSpPr>
+          <p:cNvPr id="25" name="Shape 23"/>
+          <p:cNvSpPr/>
+          <p:nvPr/>
+        </p:nvSpPr>
+        <p:spPr>
+          <a:xfrm>
+            <a:off x="3451860" y="4023360"/>
+            <a:ext cx="2446020" cy="1554480"/>
+          </a:xfrm>
+          <a:prstGeom prst="roundRect">
+            <a:avLst>
+              <a:gd name="adj" fmla="val 4706"/>
+            </a:avLst>
+          </a:prstGeom>
+          <a:solidFill>
+            <a:srgbClr val="11141D"/>
+          </a:solidFill>
+          <a:ln w="12700">
+            <a:solidFill>
+              <a:srgbClr val="2A2F3E"/>
+            </a:solidFill>
+            <a:prstDash val="solid"/>
+          </a:ln>
+          <a:effectLst>
+            <a:outerShdw sx="100000" sy="100000" kx="0" ky="0" algn="bl" rotWithShape="0" blurRad="101600" dist="38100" dir="8100000">
+              <a:srgbClr val="000000">
+                <a:alpha val="35000"/>
+              </a:srgbClr>
+            </a:outerShdw>
+          </a:effectLst>
+        </p:spPr>
+      </p:sp>
+      <p:sp>
+        <p:nvSpPr>
+          <p:cNvPr id="26" name="Shape 24"/>
+          <p:cNvSpPr/>
+          <p:nvPr/>
+        </p:nvSpPr>
+        <p:spPr>
+          <a:xfrm>
+            <a:off x="3451860" y="4023360"/>
+            <a:ext cx="2446020" cy="82296"/>
+          </a:xfrm>
+          <a:prstGeom prst="rect">
+            <a:avLst/>
+          </a:prstGeom>
+          <a:solidFill>
+            <a:srgbClr val="FFB347"/>
+          </a:solidFill>
+          <a:ln/>
+        </p:spPr>
+      </p:sp>
+      <p:sp>
+        <p:nvSpPr>
+          <p:cNvPr id="27" name="Text 25"/>
+          <p:cNvSpPr/>
+          <p:nvPr/>
+        </p:nvSpPr>
+        <p:spPr>
+          <a:xfrm>
+            <a:off x="3634740" y="4343400"/>
+            <a:ext cx="2080260" cy="365760"/>
+          </a:xfrm>
+          <a:prstGeom prst="rect">
+            <a:avLst/>
+          </a:prstGeom>
+          <a:noFill/>
+          <a:ln/>
+        </p:spPr>
+        <p:txBody>
+          <a:bodyPr wrap="square" lIns="0" tIns="0" rIns="0" bIns="0" rtlCol="0" anchor="ctr"/>
+          <a:lstStyle/>
+          <a:p>
+            <a:pPr indent="0" marL="0">
+              <a:buNone/>
+            </a:pPr>
+            <a:r>
+              <a:rPr lang="en-US" sz="1100" b="1" spc="100" kern="0" dirty="0">
+                <a:solidFill>
+                  <a:srgbClr val="9AA0B4"/>
+                </a:solidFill>
+                <a:latin typeface="Calibri" pitchFamily="34" charset="0"/>
+                <a:ea typeface="Calibri" pitchFamily="34" charset="-122"/>
+                <a:cs typeface="Calibri" pitchFamily="34" charset="-120"/>
+              </a:rPr>
+              <a:t>MOVIES</a:t>
+            </a:r>
+            <a:endParaRPr lang="en-US" sz="1100" dirty="0"/>
+          </a:p>
+        </p:txBody>
+      </p:sp>
+      <p:sp>
+        <p:nvSpPr>
+          <p:cNvPr id="28" name="Text 26"/>
+          <p:cNvSpPr/>
+          <p:nvPr/>
+        </p:nvSpPr>
+        <p:spPr>
+          <a:xfrm>
+            <a:off x="3634740" y="4754880"/>
+            <a:ext cx="2080260" cy="640080"/>
+          </a:xfrm>
+          <a:prstGeom prst="rect">
+            <a:avLst/>
+          </a:prstGeom>
+          <a:noFill/>
+          <a:ln/>
+        </p:spPr>
+        <p:txBody>
+          <a:bodyPr wrap="square" lIns="0" tIns="0" rIns="0" bIns="0" rtlCol="0" anchor="ctr"/>
+          <a:lstStyle/>
+          <a:p>
+            <a:pPr indent="0" marL="0">
+              <a:buNone/>
+            </a:pPr>
+            <a:r>
+              <a:rPr lang="en-US" sz="1500" b="1" dirty="0">
+                <a:solidFill>
+                  <a:srgbClr val="ECECF3"/>
+                </a:solidFill>
+                <a:latin typeface="Calibri" pitchFamily="34" charset="0"/>
+                <a:ea typeface="Calibri" pitchFamily="34" charset="-122"/>
+                <a:cs typeface="Calibri" pitchFamily="34" charset="-120"/>
+              </a:rPr>
+              <a:t>TMDB open dataset</a:t>
+            </a:r>
+            <a:endParaRPr lang="en-US" sz="1500" dirty="0"/>
+          </a:p>
+        </p:txBody>
+      </p:sp>
+      <p:sp>
+        <p:nvSpPr>
+          <p:cNvPr id="29" name="Shape 27"/>
+          <p:cNvSpPr/>
+          <p:nvPr/>
+        </p:nvSpPr>
+        <p:spPr>
+          <a:xfrm>
+            <a:off x="6263640" y="4023360"/>
+            <a:ext cx="2446020" cy="1554480"/>
+          </a:xfrm>
+          <a:prstGeom prst="roundRect">
+            <a:avLst>
+              <a:gd name="adj" fmla="val 4706"/>
+            </a:avLst>
+          </a:prstGeom>
+          <a:solidFill>
+            <a:srgbClr val="11141D"/>
+          </a:solidFill>
+          <a:ln w="12700">
+            <a:solidFill>
+              <a:srgbClr val="2A2F3E"/>
+            </a:solidFill>
+            <a:prstDash val="solid"/>
+          </a:ln>
+          <a:effectLst>
+            <a:outerShdw sx="100000" sy="100000" kx="0" ky="0" algn="bl" rotWithShape="0" blurRad="101600" dist="38100" dir="8100000">
+              <a:srgbClr val="000000">
+                <a:alpha val="35000"/>
+              </a:srgbClr>
+            </a:outerShdw>
+          </a:effectLst>
+        </p:spPr>
+      </p:sp>
+      <p:sp>
+        <p:nvSpPr>
+          <p:cNvPr id="30" name="Shape 28"/>
+          <p:cNvSpPr/>
+          <p:nvPr/>
+        </p:nvSpPr>
+        <p:spPr>
+          <a:xfrm>
+            <a:off x="6263640" y="4023360"/>
+            <a:ext cx="2446020" cy="82296"/>
+          </a:xfrm>
+          <a:prstGeom prst="rect">
+            <a:avLst/>
+          </a:prstGeom>
+          <a:solidFill>
+            <a:srgbClr val="FFB347"/>
+          </a:solidFill>
+          <a:ln/>
+        </p:spPr>
+      </p:sp>
+      <p:sp>
+        <p:nvSpPr>
+          <p:cNvPr id="31" name="Text 29"/>
+          <p:cNvSpPr/>
+          <p:nvPr/>
+        </p:nvSpPr>
+        <p:spPr>
+          <a:xfrm>
+            <a:off x="6446520" y="4343400"/>
+            <a:ext cx="2080260" cy="365760"/>
+          </a:xfrm>
+          <a:prstGeom prst="rect">
+            <a:avLst/>
+          </a:prstGeom>
+          <a:noFill/>
+          <a:ln/>
+        </p:spPr>
+        <p:txBody>
+          <a:bodyPr wrap="square" lIns="0" tIns="0" rIns="0" bIns="0" rtlCol="0" anchor="ctr"/>
+          <a:lstStyle/>
+          <a:p>
+            <a:pPr indent="0" marL="0">
+              <a:buNone/>
+            </a:pPr>
+            <a:r>
+              <a:rPr lang="en-US" sz="1100" b="1" spc="100" kern="0" dirty="0">
+                <a:solidFill>
+                  <a:srgbClr val="9AA0B4"/>
+                </a:solidFill>
+                <a:latin typeface="Calibri" pitchFamily="34" charset="0"/>
+                <a:ea typeface="Calibri" pitchFamily="34" charset="-122"/>
+                <a:cs typeface="Calibri" pitchFamily="34" charset="-120"/>
+              </a:rPr>
+              <a:t>GAMES</a:t>
+            </a:r>
+            <a:endParaRPr lang="en-US" sz="1100" dirty="0"/>
+          </a:p>
+        </p:txBody>
+      </p:sp>
+      <p:sp>
+        <p:nvSpPr>
+          <p:cNvPr id="32" name="Text 30"/>
+          <p:cNvSpPr/>
+          <p:nvPr/>
+        </p:nvSpPr>
+        <p:spPr>
+          <a:xfrm>
+            <a:off x="6446520" y="4754880"/>
+            <a:ext cx="2080260" cy="640080"/>
+          </a:xfrm>
+          <a:prstGeom prst="rect">
+            <a:avLst/>
+          </a:prstGeom>
+          <a:noFill/>
+          <a:ln/>
+        </p:spPr>
+        <p:txBody>
+          <a:bodyPr wrap="square" lIns="0" tIns="0" rIns="0" bIns="0" rtlCol="0" anchor="ctr"/>
+          <a:lstStyle/>
+          <a:p>
+            <a:pPr indent="0" marL="0">
+              <a:buNone/>
+            </a:pPr>
+            <a:r>
+              <a:rPr lang="en-US" sz="1500" b="1" dirty="0">
+                <a:solidFill>
+                  <a:srgbClr val="ECECF3"/>
+                </a:solidFill>
+                <a:latin typeface="Calibri" pitchFamily="34" charset="0"/>
+                <a:ea typeface="Calibri" pitchFamily="34" charset="-122"/>
+                <a:cs typeface="Calibri" pitchFamily="34" charset="-120"/>
+              </a:rPr>
+              <a:t>RAWG open dataset</a:t>
+            </a:r>
+            <a:endParaRPr lang="en-US" sz="1500" dirty="0"/>
+          </a:p>
+        </p:txBody>
+      </p:sp>
+      <p:sp>
+        <p:nvSpPr>
+          <p:cNvPr id="33" name="Shape 31"/>
+          <p:cNvSpPr/>
+          <p:nvPr/>
+        </p:nvSpPr>
+        <p:spPr>
+          <a:xfrm>
+            <a:off x="9075420" y="4023360"/>
+            <a:ext cx="2446020" cy="1554480"/>
+          </a:xfrm>
+          <a:prstGeom prst="roundRect">
+            <a:avLst>
+              <a:gd name="adj" fmla="val 4706"/>
+            </a:avLst>
+          </a:prstGeom>
+          <a:solidFill>
+            <a:srgbClr val="11141D"/>
+          </a:solidFill>
+          <a:ln w="12700">
+            <a:solidFill>
+              <a:srgbClr val="2A2F3E"/>
+            </a:solidFill>
+            <a:prstDash val="solid"/>
+          </a:ln>
+          <a:effectLst>
+            <a:outerShdw sx="100000" sy="100000" kx="0" ky="0" algn="bl" rotWithShape="0" blurRad="101600" dist="38100" dir="8100000">
+              <a:srgbClr val="000000">
+                <a:alpha val="35000"/>
+              </a:srgbClr>
+            </a:outerShdw>
+          </a:effectLst>
+        </p:spPr>
+      </p:sp>
+      <p:sp>
+        <p:nvSpPr>
+          <p:cNvPr id="34" name="Shape 32"/>
+          <p:cNvSpPr/>
+          <p:nvPr/>
+        </p:nvSpPr>
+        <p:spPr>
+          <a:xfrm>
+            <a:off x="9075420" y="4023360"/>
+            <a:ext cx="2446020" cy="82296"/>
+          </a:xfrm>
+          <a:prstGeom prst="rect">
+            <a:avLst/>
+          </a:prstGeom>
+          <a:solidFill>
+            <a:srgbClr val="FFB347"/>
+          </a:solidFill>
+          <a:ln/>
+        </p:spPr>
+      </p:sp>
+      <p:sp>
+        <p:nvSpPr>
           <p:cNvPr id="35" name="Text 33"/>
           <p:cNvSpPr/>
           <p:nvPr/>
@@ -7835,7 +10280,7 @@
                 <a:ea typeface="Calibri" pitchFamily="34" charset="-122"/>
                 <a:cs typeface="Calibri" pitchFamily="34" charset="-120"/>
               </a:rPr>
-              <a:t>14</a:t>
+              <a:t>15</a:t>
             </a:r>
             <a:endParaRPr lang="en-US" sz="900" dirty="0"/>
           </a:p>
@@ -7849,9 +10294,672 @@
 </p:sld>
 </file>
 
-<file path=ppt/slides/slide15.xml><?xml version="1.0" encoding="utf-8"?>
+<file path=ppt/slides/slide16.xml><?xml version="1.0" encoding="utf-8"?>
 <p:sld xmlns:a="http://schemas.openxmlformats.org/drawingml/2006/main" xmlns:r="http://schemas.openxmlformats.org/officeDocument/2006/relationships" xmlns:p="http://schemas.openxmlformats.org/presentationml/2006/main">
-  <p:cSld name="Slide 15">
+  <p:cSld name="Slide 16">
+    <p:bg>
+      <p:bgPr>
+        <a:solidFill>
+          <a:srgbClr val="0F1117"/>
+        </a:solidFill>
+      </p:bgPr>
+    </p:bg>
+    <p:spTree>
+      <p:nvGrpSpPr>
+        <p:cNvPr id="1" name=""/>
+        <p:cNvGrpSpPr/>
+        <p:nvPr/>
+      </p:nvGrpSpPr>
+      <p:grpSpPr>
+        <a:xfrm>
+          <a:off x="0" y="0"/>
+          <a:ext cx="0" cy="0"/>
+          <a:chOff x="0" y="0"/>
+          <a:chExt cx="0" cy="0"/>
+        </a:xfrm>
+      </p:grpSpPr>
+      <p:sp>
+        <p:nvSpPr>
+          <p:cNvPr id="2" name="Shape 0"/>
+          <p:cNvSpPr/>
+          <p:nvPr/>
+        </p:nvSpPr>
+        <p:spPr>
+          <a:xfrm>
+            <a:off x="640080" y="566928"/>
+            <a:ext cx="146304" cy="146304"/>
+          </a:xfrm>
+          <a:prstGeom prst="ellipse">
+            <a:avLst/>
+          </a:prstGeom>
+          <a:solidFill>
+            <a:srgbClr val="FFB347"/>
+          </a:solidFill>
+          <a:ln/>
+        </p:spPr>
+      </p:sp>
+      <p:sp>
+        <p:nvSpPr>
+          <p:cNvPr id="3" name="Text 1"/>
+          <p:cNvSpPr/>
+          <p:nvPr/>
+        </p:nvSpPr>
+        <p:spPr>
+          <a:xfrm>
+            <a:off x="896112" y="457200"/>
+            <a:ext cx="9144000" cy="365760"/>
+          </a:xfrm>
+          <a:prstGeom prst="rect">
+            <a:avLst/>
+          </a:prstGeom>
+          <a:noFill/>
+          <a:ln/>
+        </p:spPr>
+        <p:txBody>
+          <a:bodyPr wrap="square" lIns="0" tIns="0" rIns="0" bIns="0" rtlCol="0" anchor="ctr"/>
+          <a:lstStyle/>
+          <a:p>
+            <a:pPr indent="0" marL="0">
+              <a:buNone/>
+            </a:pPr>
+            <a:r>
+              <a:rPr lang="en-US" sz="1200" b="1" spc="300" kern="0" dirty="0">
+                <a:solidFill>
+                  <a:srgbClr val="FFB347"/>
+                </a:solidFill>
+                <a:latin typeface="Calibri" pitchFamily="34" charset="0"/>
+                <a:ea typeface="Calibri" pitchFamily="34" charset="-122"/>
+                <a:cs typeface="Calibri" pitchFamily="34" charset="-120"/>
+              </a:rPr>
+              <a:t>LOOKING AHEAD</a:t>
+            </a:r>
+            <a:endParaRPr lang="en-US" sz="1200" dirty="0"/>
+          </a:p>
+        </p:txBody>
+      </p:sp>
+      <p:sp>
+        <p:nvSpPr>
+          <p:cNvPr id="4" name="Text 2"/>
+          <p:cNvSpPr/>
+          <p:nvPr/>
+        </p:nvSpPr>
+        <p:spPr>
+          <a:xfrm>
+            <a:off x="640080" y="777240"/>
+            <a:ext cx="10881360" cy="731520"/>
+          </a:xfrm>
+          <a:prstGeom prst="rect">
+            <a:avLst/>
+          </a:prstGeom>
+          <a:noFill/>
+          <a:ln/>
+        </p:spPr>
+        <p:txBody>
+          <a:bodyPr wrap="square" lIns="0" tIns="0" rIns="0" bIns="0" rtlCol="0" anchor="ctr"/>
+          <a:lstStyle/>
+          <a:p>
+            <a:pPr indent="0" marL="0">
+              <a:buNone/>
+            </a:pPr>
+            <a:r>
+              <a:rPr lang="en-US" sz="3200" b="1" dirty="0">
+                <a:solidFill>
+                  <a:srgbClr val="ECECF3"/>
+                </a:solidFill>
+                <a:latin typeface="Georgia" pitchFamily="34" charset="0"/>
+                <a:ea typeface="Georgia" pitchFamily="34" charset="-122"/>
+                <a:cs typeface="Georgia" pitchFamily="34" charset="-120"/>
+              </a:rPr>
+              <a:t>Limitations &amp; future work</a:t>
+            </a:r>
+            <a:endParaRPr lang="en-US" sz="3200" dirty="0"/>
+          </a:p>
+        </p:txBody>
+      </p:sp>
+      <p:sp>
+        <p:nvSpPr>
+          <p:cNvPr id="5" name="Shape 3"/>
+          <p:cNvSpPr/>
+          <p:nvPr/>
+        </p:nvSpPr>
+        <p:spPr>
+          <a:xfrm>
+            <a:off x="640080" y="1828800"/>
+            <a:ext cx="5212080" cy="4114800"/>
+          </a:xfrm>
+          <a:prstGeom prst="roundRect">
+            <a:avLst>
+              <a:gd name="adj" fmla="val 1778"/>
+            </a:avLst>
+          </a:prstGeom>
+          <a:solidFill>
+            <a:srgbClr val="11141D"/>
+          </a:solidFill>
+          <a:ln w="12700">
+            <a:solidFill>
+              <a:srgbClr val="2A2F3E"/>
+            </a:solidFill>
+            <a:prstDash val="solid"/>
+          </a:ln>
+          <a:effectLst>
+            <a:outerShdw sx="100000" sy="100000" kx="0" ky="0" algn="bl" rotWithShape="0" blurRad="101600" dist="38100" dir="8100000">
+              <a:srgbClr val="000000">
+                <a:alpha val="35000"/>
+              </a:srgbClr>
+            </a:outerShdw>
+          </a:effectLst>
+        </p:spPr>
+      </p:sp>
+      <p:sp>
+        <p:nvSpPr>
+          <p:cNvPr id="6" name="Text 4"/>
+          <p:cNvSpPr/>
+          <p:nvPr/>
+        </p:nvSpPr>
+        <p:spPr>
+          <a:xfrm>
+            <a:off x="960120" y="2057400"/>
+            <a:ext cx="4572000" cy="365760"/>
+          </a:xfrm>
+          <a:prstGeom prst="rect">
+            <a:avLst/>
+          </a:prstGeom>
+          <a:noFill/>
+          <a:ln/>
+        </p:spPr>
+        <p:txBody>
+          <a:bodyPr wrap="square" lIns="0" tIns="0" rIns="0" bIns="0" rtlCol="0" anchor="ctr"/>
+          <a:lstStyle/>
+          <a:p>
+            <a:pPr indent="0" marL="0">
+              <a:buNone/>
+            </a:pPr>
+            <a:r>
+              <a:rPr lang="en-US" sz="1600" b="1" dirty="0">
+                <a:solidFill>
+                  <a:srgbClr val="ECECF3"/>
+                </a:solidFill>
+                <a:latin typeface="Calibri" pitchFamily="34" charset="0"/>
+                <a:ea typeface="Calibri" pitchFamily="34" charset="-122"/>
+                <a:cs typeface="Calibri" pitchFamily="34" charset="-120"/>
+              </a:rPr>
+              <a:t>⚠  Current limitations</a:t>
+            </a:r>
+            <a:endParaRPr lang="en-US" sz="1600" dirty="0"/>
+          </a:p>
+        </p:txBody>
+      </p:sp>
+      <p:sp>
+        <p:nvSpPr>
+          <p:cNvPr id="7" name="Text 5"/>
+          <p:cNvSpPr/>
+          <p:nvPr/>
+        </p:nvSpPr>
+        <p:spPr>
+          <a:xfrm>
+            <a:off x="1005840" y="2651760"/>
+            <a:ext cx="4526280" cy="3108960"/>
+          </a:xfrm>
+          <a:prstGeom prst="rect">
+            <a:avLst/>
+          </a:prstGeom>
+          <a:noFill/>
+          <a:ln/>
+        </p:spPr>
+        <p:txBody>
+          <a:bodyPr wrap="square" lIns="0" tIns="0" rIns="0" bIns="0" rtlCol="0" anchor="t"/>
+          <a:lstStyle/>
+          <a:p>
+            <a:pPr marL="342900" indent="-342900">
+              <a:spcAft>
+                <a:spcPts val="1100"/>
+              </a:spcAft>
+              <a:buSzPct val="100000"/>
+              <a:buChar char="•"/>
+            </a:pPr>
+            <a:r>
+              <a:rPr lang="en-US" sz="1350" dirty="0">
+                <a:solidFill>
+                  <a:srgbClr val="9AA0B4"/>
+                </a:solidFill>
+                <a:latin typeface="Calibri" pitchFamily="34" charset="0"/>
+                <a:ea typeface="Calibri" pitchFamily="34" charset="-122"/>
+                <a:cs typeface="Calibri" pitchFamily="34" charset="-120"/>
+              </a:rPr>
+              <a:t>No user accounts — the app is stateless</a:t>
+            </a:r>
+            <a:endParaRPr lang="en-US" sz="1350" dirty="0"/>
+          </a:p>
+          <a:p>
+            <a:pPr marL="342900" indent="-342900">
+              <a:spcAft>
+                <a:spcPts val="1100"/>
+              </a:spcAft>
+              <a:buSzPct val="100000"/>
+              <a:buChar char="•"/>
+            </a:pPr>
+            <a:r>
+              <a:rPr lang="en-US" sz="1350" dirty="0">
+                <a:solidFill>
+                  <a:srgbClr val="9AA0B4"/>
+                </a:solidFill>
+                <a:latin typeface="Calibri" pitchFamily="34" charset="0"/>
+                <a:ea typeface="Calibri" pitchFamily="34" charset="-122"/>
+                <a:cs typeface="Calibri" pitchFamily="34" charset="-120"/>
+              </a:rPr>
+              <a:t>Recommends only from the 55-title curated library</a:t>
+            </a:r>
+            <a:endParaRPr lang="en-US" sz="1350" dirty="0"/>
+          </a:p>
+          <a:p>
+            <a:pPr marL="342900" indent="-342900">
+              <a:spcAft>
+                <a:spcPts val="1100"/>
+              </a:spcAft>
+              <a:buSzPct val="100000"/>
+              <a:buChar char="•"/>
+            </a:pPr>
+            <a:r>
+              <a:rPr lang="en-US" sz="1350" dirty="0">
+                <a:solidFill>
+                  <a:srgbClr val="9AA0B4"/>
+                </a:solidFill>
+                <a:latin typeface="Calibri" pitchFamily="34" charset="0"/>
+                <a:ea typeface="Calibri" pitchFamily="34" charset="-122"/>
+                <a:cs typeface="Calibri" pitchFamily="34" charset="-120"/>
+              </a:rPr>
+              <a:t>Runs locally — not yet deployed publicly</a:t>
+            </a:r>
+            <a:endParaRPr lang="en-US" sz="1350" dirty="0"/>
+          </a:p>
+          <a:p>
+            <a:pPr marL="342900" indent="-342900">
+              <a:buSzPct val="100000"/>
+              <a:buChar char="•"/>
+            </a:pPr>
+            <a:r>
+              <a:rPr lang="en-US" sz="1350" dirty="0">
+                <a:solidFill>
+                  <a:srgbClr val="9AA0B4"/>
+                </a:solidFill>
+                <a:latin typeface="Calibri" pitchFamily="34" charset="0"/>
+                <a:ea typeface="Calibri" pitchFamily="34" charset="-122"/>
+                <a:cs typeface="Calibri" pitchFamily="34" charset="-120"/>
+              </a:rPr>
+              <a:t>Free AI models can be slow or rate-limited</a:t>
+            </a:r>
+            <a:endParaRPr lang="en-US" sz="1350" dirty="0"/>
+          </a:p>
+        </p:txBody>
+      </p:sp>
+      <p:sp>
+        <p:nvSpPr>
+          <p:cNvPr id="8" name="Shape 6"/>
+          <p:cNvSpPr/>
+          <p:nvPr/>
+        </p:nvSpPr>
+        <p:spPr>
+          <a:xfrm>
+            <a:off x="6309360" y="1828800"/>
+            <a:ext cx="5212080" cy="4114800"/>
+          </a:xfrm>
+          <a:prstGeom prst="roundRect">
+            <a:avLst>
+              <a:gd name="adj" fmla="val 1778"/>
+            </a:avLst>
+          </a:prstGeom>
+          <a:solidFill>
+            <a:srgbClr val="1A1D27"/>
+          </a:solidFill>
+          <a:ln w="12700">
+            <a:solidFill>
+              <a:srgbClr val="2A2F3E"/>
+            </a:solidFill>
+            <a:prstDash val="solid"/>
+          </a:ln>
+          <a:effectLst>
+            <a:outerShdw sx="100000" sy="100000" kx="0" ky="0" algn="bl" rotWithShape="0" blurRad="101600" dist="38100" dir="8100000">
+              <a:srgbClr val="000000">
+                <a:alpha val="35000"/>
+              </a:srgbClr>
+            </a:outerShdw>
+          </a:effectLst>
+        </p:spPr>
+      </p:sp>
+      <p:sp>
+        <p:nvSpPr>
+          <p:cNvPr id="9" name="Text 7"/>
+          <p:cNvSpPr/>
+          <p:nvPr/>
+        </p:nvSpPr>
+        <p:spPr>
+          <a:xfrm>
+            <a:off x="6629400" y="2057400"/>
+            <a:ext cx="4572000" cy="365760"/>
+          </a:xfrm>
+          <a:prstGeom prst="rect">
+            <a:avLst/>
+          </a:prstGeom>
+          <a:noFill/>
+          <a:ln/>
+        </p:spPr>
+        <p:txBody>
+          <a:bodyPr wrap="square" lIns="0" tIns="0" rIns="0" bIns="0" rtlCol="0" anchor="ctr"/>
+          <a:lstStyle/>
+          <a:p>
+            <a:pPr indent="0" marL="0">
+              <a:buNone/>
+            </a:pPr>
+            <a:r>
+              <a:rPr lang="en-US" sz="1600" b="1" dirty="0">
+                <a:solidFill>
+                  <a:srgbClr val="FFB347"/>
+                </a:solidFill>
+                <a:latin typeface="Calibri" pitchFamily="34" charset="0"/>
+                <a:ea typeface="Calibri" pitchFamily="34" charset="-122"/>
+                <a:cs typeface="Calibri" pitchFamily="34" charset="-120"/>
+              </a:rPr>
+              <a:t>🚀  Future work</a:t>
+            </a:r>
+            <a:endParaRPr lang="en-US" sz="1600" dirty="0"/>
+          </a:p>
+        </p:txBody>
+      </p:sp>
+      <p:sp>
+        <p:nvSpPr>
+          <p:cNvPr id="10" name="Text 8"/>
+          <p:cNvSpPr/>
+          <p:nvPr/>
+        </p:nvSpPr>
+        <p:spPr>
+          <a:xfrm>
+            <a:off x="6675120" y="2651760"/>
+            <a:ext cx="4526280" cy="3108960"/>
+          </a:xfrm>
+          <a:prstGeom prst="rect">
+            <a:avLst/>
+          </a:prstGeom>
+          <a:noFill/>
+          <a:ln/>
+        </p:spPr>
+        <p:txBody>
+          <a:bodyPr wrap="square" lIns="0" tIns="0" rIns="0" bIns="0" rtlCol="0" anchor="t"/>
+          <a:lstStyle/>
+          <a:p>
+            <a:pPr indent="0" marL="0">
+              <a:buNone/>
+            </a:pPr>
+            <a:r>
+              <a:rPr lang="en-US" sz="1350" b="1" dirty="0">
+                <a:solidFill>
+                  <a:srgbClr val="FFB347"/>
+                </a:solidFill>
+                <a:latin typeface="Calibri" pitchFamily="34" charset="0"/>
+                <a:ea typeface="Calibri" pitchFamily="34" charset="-122"/>
+                <a:cs typeface="Calibri" pitchFamily="34" charset="-120"/>
+              </a:rPr>
+              <a:t>1.  </a:t>
+            </a:r>
+            <a:pPr indent="0" marL="0">
+              <a:spcAft>
+                <a:spcPts val="1300"/>
+              </a:spcAft>
+              <a:buNone/>
+            </a:pPr>
+            <a:r>
+              <a:rPr lang="en-US" sz="1350" dirty="0">
+                <a:solidFill>
+                  <a:srgbClr val="ECECF3"/>
+                </a:solidFill>
+                <a:latin typeface="Calibri" pitchFamily="34" charset="0"/>
+                <a:ea typeface="Calibri" pitchFamily="34" charset="-122"/>
+                <a:cs typeface="Calibri" pitchFamily="34" charset="-120"/>
+              </a:rPr>
+              <a:t>User profiles &amp; saved watch history</a:t>
+            </a:r>
+            <a:endParaRPr lang="en-US" sz="1350" dirty="0"/>
+          </a:p>
+          <a:p>
+            <a:pPr indent="0" marL="0">
+              <a:buNone/>
+            </a:pPr>
+            <a:r>
+              <a:rPr lang="en-US" sz="1350" b="1" dirty="0">
+                <a:solidFill>
+                  <a:srgbClr val="FFB347"/>
+                </a:solidFill>
+                <a:latin typeface="Calibri" pitchFamily="34" charset="0"/>
+                <a:ea typeface="Calibri" pitchFamily="34" charset="-122"/>
+                <a:cs typeface="Calibri" pitchFamily="34" charset="-120"/>
+              </a:rPr>
+              <a:t>2.  </a:t>
+            </a:r>
+            <a:pPr indent="0" marL="0">
+              <a:spcAft>
+                <a:spcPts val="1300"/>
+              </a:spcAft>
+              <a:buNone/>
+            </a:pPr>
+            <a:r>
+              <a:rPr lang="en-US" sz="1350" dirty="0">
+                <a:solidFill>
+                  <a:srgbClr val="ECECF3"/>
+                </a:solidFill>
+                <a:latin typeface="Calibri" pitchFamily="34" charset="0"/>
+                <a:ea typeface="Calibri" pitchFamily="34" charset="-122"/>
+                <a:cs typeface="Calibri" pitchFamily="34" charset="-120"/>
+              </a:rPr>
+              <a:t>Personalization that learns from your feedback</a:t>
+            </a:r>
+            <a:endParaRPr lang="en-US" sz="1350" dirty="0"/>
+          </a:p>
+          <a:p>
+            <a:pPr indent="0" marL="0">
+              <a:buNone/>
+            </a:pPr>
+            <a:r>
+              <a:rPr lang="en-US" sz="1350" b="1" dirty="0">
+                <a:solidFill>
+                  <a:srgbClr val="FFB347"/>
+                </a:solidFill>
+                <a:latin typeface="Calibri" pitchFamily="34" charset="0"/>
+                <a:ea typeface="Calibri" pitchFamily="34" charset="-122"/>
+                <a:cs typeface="Calibri" pitchFamily="34" charset="-120"/>
+              </a:rPr>
+              <a:t>3.  </a:t>
+            </a:r>
+            <a:pPr indent="0" marL="0">
+              <a:spcAft>
+                <a:spcPts val="1300"/>
+              </a:spcAft>
+              <a:buNone/>
+            </a:pPr>
+            <a:r>
+              <a:rPr lang="en-US" sz="1350" dirty="0">
+                <a:solidFill>
+                  <a:srgbClr val="ECECF3"/>
+                </a:solidFill>
+                <a:latin typeface="Calibri" pitchFamily="34" charset="0"/>
+                <a:ea typeface="Calibri" pitchFamily="34" charset="-122"/>
+                <a:cs typeface="Calibri" pitchFamily="34" charset="-120"/>
+              </a:rPr>
+              <a:t>Larger library — recommend from TMDB &amp; RAWG directly</a:t>
+            </a:r>
+            <a:endParaRPr lang="en-US" sz="1350" dirty="0"/>
+          </a:p>
+          <a:p>
+            <a:pPr indent="0" marL="0">
+              <a:buNone/>
+            </a:pPr>
+            <a:r>
+              <a:rPr lang="en-US" sz="1350" b="1" dirty="0">
+                <a:solidFill>
+                  <a:srgbClr val="FFB347"/>
+                </a:solidFill>
+                <a:latin typeface="Calibri" pitchFamily="34" charset="0"/>
+                <a:ea typeface="Calibri" pitchFamily="34" charset="-122"/>
+                <a:cs typeface="Calibri" pitchFamily="34" charset="-120"/>
+              </a:rPr>
+              <a:t>4.  </a:t>
+            </a:r>
+            <a:pPr indent="0" marL="0">
+              <a:spcAft>
+                <a:spcPts val="1300"/>
+              </a:spcAft>
+              <a:buNone/>
+            </a:pPr>
+            <a:r>
+              <a:rPr lang="en-US" sz="1350" dirty="0">
+                <a:solidFill>
+                  <a:srgbClr val="ECECF3"/>
+                </a:solidFill>
+                <a:latin typeface="Calibri" pitchFamily="34" charset="0"/>
+                <a:ea typeface="Calibri" pitchFamily="34" charset="-122"/>
+                <a:cs typeface="Calibri" pitchFamily="34" charset="-120"/>
+              </a:rPr>
+              <a:t>Deployment: web hosting + database integration</a:t>
+            </a:r>
+            <a:endParaRPr lang="en-US" sz="1350" dirty="0"/>
+          </a:p>
+          <a:p>
+            <a:pPr indent="0" marL="0">
+              <a:buNone/>
+            </a:pPr>
+            <a:r>
+              <a:rPr lang="en-US" sz="1350" b="1" dirty="0">
+                <a:solidFill>
+                  <a:srgbClr val="FFB347"/>
+                </a:solidFill>
+                <a:latin typeface="Calibri" pitchFamily="34" charset="0"/>
+                <a:ea typeface="Calibri" pitchFamily="34" charset="-122"/>
+                <a:cs typeface="Calibri" pitchFamily="34" charset="-120"/>
+              </a:rPr>
+              <a:t>5.  </a:t>
+            </a:r>
+            <a:pPr indent="0" marL="0">
+              <a:spcAft>
+                <a:spcPts val="1300"/>
+              </a:spcAft>
+              <a:buNone/>
+            </a:pPr>
+            <a:r>
+              <a:rPr lang="en-US" sz="1350" dirty="0">
+                <a:solidFill>
+                  <a:srgbClr val="ECECF3"/>
+                </a:solidFill>
+                <a:latin typeface="Calibri" pitchFamily="34" charset="0"/>
+                <a:ea typeface="Calibri" pitchFamily="34" charset="-122"/>
+                <a:cs typeface="Calibri" pitchFamily="34" charset="-120"/>
+              </a:rPr>
+              <a:t>Automated tests (TDD) for the domain layer</a:t>
+            </a:r>
+            <a:endParaRPr lang="en-US" sz="1350" dirty="0"/>
+          </a:p>
+        </p:txBody>
+      </p:sp>
+      <p:sp>
+        <p:nvSpPr>
+          <p:cNvPr id="11" name="Text 9"/>
+          <p:cNvSpPr/>
+          <p:nvPr/>
+        </p:nvSpPr>
+        <p:spPr>
+          <a:xfrm>
+            <a:off x="640080" y="6400800"/>
+            <a:ext cx="8229600" cy="274320"/>
+          </a:xfrm>
+          <a:prstGeom prst="rect">
+            <a:avLst/>
+          </a:prstGeom>
+          <a:noFill/>
+          <a:ln/>
+        </p:spPr>
+        <p:txBody>
+          <a:bodyPr wrap="square" lIns="0" tIns="0" rIns="0" bIns="0" rtlCol="0" anchor="ctr"/>
+          <a:lstStyle/>
+          <a:p>
+            <a:pPr indent="0" marL="0">
+              <a:buNone/>
+            </a:pPr>
+            <a:r>
+              <a:rPr lang="en-US" sz="900" b="1" dirty="0">
+                <a:solidFill>
+                  <a:srgbClr val="FFB347"/>
+                </a:solidFill>
+                <a:latin typeface="Calibri" pitchFamily="34" charset="0"/>
+                <a:ea typeface="Calibri" pitchFamily="34" charset="-122"/>
+                <a:cs typeface="Calibri" pitchFamily="34" charset="-120"/>
+              </a:rPr>
+              <a:t>CINEMATCH</a:t>
+            </a:r>
+            <a:pPr indent="0" marL="0">
+              <a:buNone/>
+            </a:pPr>
+            <a:r>
+              <a:rPr lang="en-US" sz="900" dirty="0">
+                <a:solidFill>
+                  <a:srgbClr val="9AA0B4"/>
+                </a:solidFill>
+                <a:latin typeface="Calibri" pitchFamily="34" charset="0"/>
+                <a:ea typeface="Calibri" pitchFamily="34" charset="-122"/>
+                <a:cs typeface="Calibri" pitchFamily="34" charset="-120"/>
+              </a:rPr>
+              <a:t>   ·   AI-Powered Movie &amp; Game Recommender</a:t>
+            </a:r>
+            <a:endParaRPr lang="en-US" sz="900" dirty="0"/>
+          </a:p>
+        </p:txBody>
+      </p:sp>
+      <p:sp>
+        <p:nvSpPr>
+          <p:cNvPr id="12" name="Text 10"/>
+          <p:cNvSpPr/>
+          <p:nvPr/>
+        </p:nvSpPr>
+        <p:spPr>
+          <a:xfrm>
+            <a:off x="11064240" y="6400800"/>
+            <a:ext cx="457200" cy="274320"/>
+          </a:xfrm>
+          <a:prstGeom prst="rect">
+            <a:avLst/>
+          </a:prstGeom>
+          <a:noFill/>
+          <a:ln/>
+        </p:spPr>
+        <p:txBody>
+          <a:bodyPr wrap="square" lIns="0" tIns="0" rIns="0" bIns="0" rtlCol="0" anchor="ctr"/>
+          <a:lstStyle/>
+          <a:p>
+            <a:pPr algn="r" indent="0" marL="0">
+              <a:buNone/>
+            </a:pPr>
+            <a:r>
+              <a:rPr lang="en-US" sz="900" dirty="0">
+                <a:solidFill>
+                  <a:srgbClr val="9AA0B4"/>
+                </a:solidFill>
+                <a:latin typeface="Calibri" pitchFamily="34" charset="0"/>
+                <a:ea typeface="Calibri" pitchFamily="34" charset="-122"/>
+                <a:cs typeface="Calibri" pitchFamily="34" charset="-120"/>
+              </a:rPr>
+              <a:t>16</a:t>
+            </a:r>
+            <a:endParaRPr lang="en-US" sz="900" dirty="0"/>
+          </a:p>
+        </p:txBody>
+      </p:sp>
+    </p:spTree>
+  </p:cSld>
+  <p:clrMapOvr>
+    <a:masterClrMapping/>
+  </p:clrMapOvr>
+</p:sld>
+</file>
+
+<file path=ppt/slides/slide17.xml><?xml version="1.0" encoding="utf-8"?>
+<p:sld xmlns:a="http://schemas.openxmlformats.org/drawingml/2006/main" xmlns:r="http://schemas.openxmlformats.org/officeDocument/2006/relationships" xmlns:p="http://schemas.openxmlformats.org/presentationml/2006/main">
+  <p:cSld name="Slide 17">
     <p:bg>
       <p:bgPr>
         <a:solidFill>

--- a/deliverables/CINEMATCH-Presentation.pptx
+++ b/deliverables/CINEMATCH-Presentation.pptx
@@ -2451,34 +2451,34 @@
         </p:nvSpPr>
         <p:spPr>
           <a:xfrm>
-            <a:off x="3200400" y="4160520"/>
-            <a:ext cx="1188720" cy="310896"/>
-          </a:xfrm>
-          <a:prstGeom prst="rect">
-            <a:avLst/>
-          </a:prstGeom>
-          <a:noFill/>
-          <a:ln/>
-        </p:spPr>
-        <p:txBody>
-          <a:bodyPr wrap="square" lIns="0" tIns="0" rIns="0" bIns="0" rtlCol="0" anchor="ctr"/>
-          <a:lstStyle/>
-          <a:p>
-            <a:pPr algn="r" indent="0" marL="0">
-              <a:buNone/>
-            </a:pPr>
-            <a:r>
-              <a:rPr lang="en-US" sz="1200" b="1" dirty="0">
-                <a:solidFill>
-                  <a:srgbClr val="FFB347"/>
-                </a:solidFill>
-                <a:latin typeface="Calibri" pitchFamily="34" charset="0"/>
-                <a:ea typeface="Calibri" pitchFamily="34" charset="-122"/>
-                <a:cs typeface="Calibri" pitchFamily="34" charset="-120"/>
-              </a:rPr>
-              <a:t>Member 1  </a:t>
-            </a:r>
-            <a:endParaRPr lang="en-US" sz="1200" dirty="0"/>
+            <a:off x="3474720" y="4160520"/>
+            <a:ext cx="2560320" cy="329184"/>
+          </a:xfrm>
+          <a:prstGeom prst="rect">
+            <a:avLst/>
+          </a:prstGeom>
+          <a:noFill/>
+          <a:ln/>
+        </p:spPr>
+        <p:txBody>
+          <a:bodyPr wrap="square" lIns="0" tIns="0" rIns="0" bIns="0" rtlCol="0" anchor="ctr"/>
+          <a:lstStyle/>
+          <a:p>
+            <a:pPr algn="ctr" indent="0" marL="0">
+              <a:buNone/>
+            </a:pPr>
+            <a:r>
+              <a:rPr lang="en-US" sz="1300" dirty="0">
+                <a:solidFill>
+                  <a:srgbClr val="ECECF3"/>
+                </a:solidFill>
+                <a:latin typeface="Calibri" pitchFamily="34" charset="0"/>
+                <a:ea typeface="Calibri" pitchFamily="34" charset="-122"/>
+                <a:cs typeface="Calibri" pitchFamily="34" charset="-120"/>
+              </a:rPr>
+              <a:t>[Name]</a:t>
+            </a:r>
+            <a:endParaRPr lang="en-US" sz="1300" dirty="0"/>
           </a:p>
         </p:txBody>
       </p:sp>
@@ -2490,24 +2490,24 @@
         </p:nvSpPr>
         <p:spPr>
           <a:xfrm>
-            <a:off x="4434840" y="4160520"/>
-            <a:ext cx="1737360" cy="310896"/>
-          </a:xfrm>
-          <a:prstGeom prst="rect">
-            <a:avLst/>
-          </a:prstGeom>
-          <a:noFill/>
-          <a:ln/>
-        </p:spPr>
-        <p:txBody>
-          <a:bodyPr wrap="square" lIns="0" tIns="0" rIns="0" bIns="0" rtlCol="0" anchor="ctr"/>
-          <a:lstStyle/>
-          <a:p>
-            <a:pPr indent="0" marL="0">
-              <a:buNone/>
-            </a:pPr>
-            <a:r>
-              <a:rPr lang="en-US" sz="1200" dirty="0">
+            <a:off x="6400800" y="4160520"/>
+            <a:ext cx="2560320" cy="329184"/>
+          </a:xfrm>
+          <a:prstGeom prst="rect">
+            <a:avLst/>
+          </a:prstGeom>
+          <a:noFill/>
+          <a:ln/>
+        </p:spPr>
+        <p:txBody>
+          <a:bodyPr wrap="square" lIns="0" tIns="0" rIns="0" bIns="0" rtlCol="0" anchor="ctr"/>
+          <a:lstStyle/>
+          <a:p>
+            <a:pPr algn="ctr" indent="0" marL="0">
+              <a:buNone/>
+            </a:pPr>
+            <a:r>
+              <a:rPr lang="en-US" sz="1300" dirty="0">
                 <a:solidFill>
                   <a:srgbClr val="ECECF3"/>
                 </a:solidFill>
@@ -2517,7 +2517,7 @@
               </a:rPr>
               <a:t>[Name]</a:t>
             </a:r>
-            <a:endParaRPr lang="en-US" sz="1200" dirty="0"/>
+            <a:endParaRPr lang="en-US" sz="1300" dirty="0"/>
           </a:p>
         </p:txBody>
       </p:sp>
@@ -2529,34 +2529,34 @@
         </p:nvSpPr>
         <p:spPr>
           <a:xfrm>
-            <a:off x="3200400" y="4507992"/>
-            <a:ext cx="1188720" cy="310896"/>
-          </a:xfrm>
-          <a:prstGeom prst="rect">
-            <a:avLst/>
-          </a:prstGeom>
-          <a:noFill/>
-          <a:ln/>
-        </p:spPr>
-        <p:txBody>
-          <a:bodyPr wrap="square" lIns="0" tIns="0" rIns="0" bIns="0" rtlCol="0" anchor="ctr"/>
-          <a:lstStyle/>
-          <a:p>
-            <a:pPr algn="r" indent="0" marL="0">
-              <a:buNone/>
-            </a:pPr>
-            <a:r>
-              <a:rPr lang="en-US" sz="1200" b="1" dirty="0">
-                <a:solidFill>
-                  <a:srgbClr val="FFB347"/>
-                </a:solidFill>
-                <a:latin typeface="Calibri" pitchFamily="34" charset="0"/>
-                <a:ea typeface="Calibri" pitchFamily="34" charset="-122"/>
-                <a:cs typeface="Calibri" pitchFamily="34" charset="-120"/>
-              </a:rPr>
-              <a:t>Member 2  </a:t>
-            </a:r>
-            <a:endParaRPr lang="en-US" sz="1200" dirty="0"/>
+            <a:off x="3474720" y="4544568"/>
+            <a:ext cx="2560320" cy="329184"/>
+          </a:xfrm>
+          <a:prstGeom prst="rect">
+            <a:avLst/>
+          </a:prstGeom>
+          <a:noFill/>
+          <a:ln/>
+        </p:spPr>
+        <p:txBody>
+          <a:bodyPr wrap="square" lIns="0" tIns="0" rIns="0" bIns="0" rtlCol="0" anchor="ctr"/>
+          <a:lstStyle/>
+          <a:p>
+            <a:pPr algn="ctr" indent="0" marL="0">
+              <a:buNone/>
+            </a:pPr>
+            <a:r>
+              <a:rPr lang="en-US" sz="1300" dirty="0">
+                <a:solidFill>
+                  <a:srgbClr val="ECECF3"/>
+                </a:solidFill>
+                <a:latin typeface="Calibri" pitchFamily="34" charset="0"/>
+                <a:ea typeface="Calibri" pitchFamily="34" charset="-122"/>
+                <a:cs typeface="Calibri" pitchFamily="34" charset="-120"/>
+              </a:rPr>
+              <a:t>[Name]</a:t>
+            </a:r>
+            <a:endParaRPr lang="en-US" sz="1300" dirty="0"/>
           </a:p>
         </p:txBody>
       </p:sp>
@@ -2568,24 +2568,24 @@
         </p:nvSpPr>
         <p:spPr>
           <a:xfrm>
-            <a:off x="4434840" y="4507992"/>
-            <a:ext cx="1737360" cy="310896"/>
-          </a:xfrm>
-          <a:prstGeom prst="rect">
-            <a:avLst/>
-          </a:prstGeom>
-          <a:noFill/>
-          <a:ln/>
-        </p:spPr>
-        <p:txBody>
-          <a:bodyPr wrap="square" lIns="0" tIns="0" rIns="0" bIns="0" rtlCol="0" anchor="ctr"/>
-          <a:lstStyle/>
-          <a:p>
-            <a:pPr indent="0" marL="0">
-              <a:buNone/>
-            </a:pPr>
-            <a:r>
-              <a:rPr lang="en-US" sz="1200" dirty="0">
+            <a:off x="6400800" y="4544568"/>
+            <a:ext cx="2560320" cy="329184"/>
+          </a:xfrm>
+          <a:prstGeom prst="rect">
+            <a:avLst/>
+          </a:prstGeom>
+          <a:noFill/>
+          <a:ln/>
+        </p:spPr>
+        <p:txBody>
+          <a:bodyPr wrap="square" lIns="0" tIns="0" rIns="0" bIns="0" rtlCol="0" anchor="ctr"/>
+          <a:lstStyle/>
+          <a:p>
+            <a:pPr algn="ctr" indent="0" marL="0">
+              <a:buNone/>
+            </a:pPr>
+            <a:r>
+              <a:rPr lang="en-US" sz="1300" dirty="0">
                 <a:solidFill>
                   <a:srgbClr val="ECECF3"/>
                 </a:solidFill>
@@ -2595,7 +2595,7 @@
               </a:rPr>
               <a:t>[Name]</a:t>
             </a:r>
-            <a:endParaRPr lang="en-US" sz="1200" dirty="0"/>
+            <a:endParaRPr lang="en-US" sz="1300" dirty="0"/>
           </a:p>
         </p:txBody>
       </p:sp>
@@ -2607,34 +2607,34 @@
         </p:nvSpPr>
         <p:spPr>
           <a:xfrm>
-            <a:off x="3200400" y="4855464"/>
-            <a:ext cx="1188720" cy="310896"/>
-          </a:xfrm>
-          <a:prstGeom prst="rect">
-            <a:avLst/>
-          </a:prstGeom>
-          <a:noFill/>
-          <a:ln/>
-        </p:spPr>
-        <p:txBody>
-          <a:bodyPr wrap="square" lIns="0" tIns="0" rIns="0" bIns="0" rtlCol="0" anchor="ctr"/>
-          <a:lstStyle/>
-          <a:p>
-            <a:pPr algn="r" indent="0" marL="0">
-              <a:buNone/>
-            </a:pPr>
-            <a:r>
-              <a:rPr lang="en-US" sz="1200" b="1" dirty="0">
-                <a:solidFill>
-                  <a:srgbClr val="FFB347"/>
-                </a:solidFill>
-                <a:latin typeface="Calibri" pitchFamily="34" charset="0"/>
-                <a:ea typeface="Calibri" pitchFamily="34" charset="-122"/>
-                <a:cs typeface="Calibri" pitchFamily="34" charset="-120"/>
-              </a:rPr>
-              <a:t>Member 3  </a:t>
-            </a:r>
-            <a:endParaRPr lang="en-US" sz="1200" dirty="0"/>
+            <a:off x="3474720" y="4928616"/>
+            <a:ext cx="2560320" cy="329184"/>
+          </a:xfrm>
+          <a:prstGeom prst="rect">
+            <a:avLst/>
+          </a:prstGeom>
+          <a:noFill/>
+          <a:ln/>
+        </p:spPr>
+        <p:txBody>
+          <a:bodyPr wrap="square" lIns="0" tIns="0" rIns="0" bIns="0" rtlCol="0" anchor="ctr"/>
+          <a:lstStyle/>
+          <a:p>
+            <a:pPr algn="ctr" indent="0" marL="0">
+              <a:buNone/>
+            </a:pPr>
+            <a:r>
+              <a:rPr lang="en-US" sz="1300" dirty="0">
+                <a:solidFill>
+                  <a:srgbClr val="ECECF3"/>
+                </a:solidFill>
+                <a:latin typeface="Calibri" pitchFamily="34" charset="0"/>
+                <a:ea typeface="Calibri" pitchFamily="34" charset="-122"/>
+                <a:cs typeface="Calibri" pitchFamily="34" charset="-120"/>
+              </a:rPr>
+              <a:t>[Name]</a:t>
+            </a:r>
+            <a:endParaRPr lang="en-US" sz="1300" dirty="0"/>
           </a:p>
         </p:txBody>
       </p:sp>
@@ -2646,24 +2646,24 @@
         </p:nvSpPr>
         <p:spPr>
           <a:xfrm>
-            <a:off x="4434840" y="4855464"/>
-            <a:ext cx="1737360" cy="310896"/>
-          </a:xfrm>
-          <a:prstGeom prst="rect">
-            <a:avLst/>
-          </a:prstGeom>
-          <a:noFill/>
-          <a:ln/>
-        </p:spPr>
-        <p:txBody>
-          <a:bodyPr wrap="square" lIns="0" tIns="0" rIns="0" bIns="0" rtlCol="0" anchor="ctr"/>
-          <a:lstStyle/>
-          <a:p>
-            <a:pPr indent="0" marL="0">
-              <a:buNone/>
-            </a:pPr>
-            <a:r>
-              <a:rPr lang="en-US" sz="1200" dirty="0">
+            <a:off x="6400800" y="4928616"/>
+            <a:ext cx="2560320" cy="329184"/>
+          </a:xfrm>
+          <a:prstGeom prst="rect">
+            <a:avLst/>
+          </a:prstGeom>
+          <a:noFill/>
+          <a:ln/>
+        </p:spPr>
+        <p:txBody>
+          <a:bodyPr wrap="square" lIns="0" tIns="0" rIns="0" bIns="0" rtlCol="0" anchor="ctr"/>
+          <a:lstStyle/>
+          <a:p>
+            <a:pPr algn="ctr" indent="0" marL="0">
+              <a:buNone/>
+            </a:pPr>
+            <a:r>
+              <a:rPr lang="en-US" sz="1300" dirty="0">
                 <a:solidFill>
                   <a:srgbClr val="ECECF3"/>
                 </a:solidFill>
@@ -2673,247 +2673,13 @@
               </a:rPr>
               <a:t>[Name]</a:t>
             </a:r>
-            <a:endParaRPr lang="en-US" sz="1200" dirty="0"/>
+            <a:endParaRPr lang="en-US" sz="1300" dirty="0"/>
           </a:p>
         </p:txBody>
       </p:sp>
       <p:sp>
         <p:nvSpPr>
           <p:cNvPr id="12" name="Text 10"/>
-          <p:cNvSpPr/>
-          <p:nvPr/>
-        </p:nvSpPr>
-        <p:spPr>
-          <a:xfrm>
-            <a:off x="6217920" y="4160520"/>
-            <a:ext cx="1188720" cy="310896"/>
-          </a:xfrm>
-          <a:prstGeom prst="rect">
-            <a:avLst/>
-          </a:prstGeom>
-          <a:noFill/>
-          <a:ln/>
-        </p:spPr>
-        <p:txBody>
-          <a:bodyPr wrap="square" lIns="0" tIns="0" rIns="0" bIns="0" rtlCol="0" anchor="ctr"/>
-          <a:lstStyle/>
-          <a:p>
-            <a:pPr algn="r" indent="0" marL="0">
-              <a:buNone/>
-            </a:pPr>
-            <a:r>
-              <a:rPr lang="en-US" sz="1200" b="1" dirty="0">
-                <a:solidFill>
-                  <a:srgbClr val="FFB347"/>
-                </a:solidFill>
-                <a:latin typeface="Calibri" pitchFamily="34" charset="0"/>
-                <a:ea typeface="Calibri" pitchFamily="34" charset="-122"/>
-                <a:cs typeface="Calibri" pitchFamily="34" charset="-120"/>
-              </a:rPr>
-              <a:t>Member 4  </a:t>
-            </a:r>
-            <a:endParaRPr lang="en-US" sz="1200" dirty="0"/>
-          </a:p>
-        </p:txBody>
-      </p:sp>
-      <p:sp>
-        <p:nvSpPr>
-          <p:cNvPr id="13" name="Text 11"/>
-          <p:cNvSpPr/>
-          <p:nvPr/>
-        </p:nvSpPr>
-        <p:spPr>
-          <a:xfrm>
-            <a:off x="7452360" y="4160520"/>
-            <a:ext cx="1737360" cy="310896"/>
-          </a:xfrm>
-          <a:prstGeom prst="rect">
-            <a:avLst/>
-          </a:prstGeom>
-          <a:noFill/>
-          <a:ln/>
-        </p:spPr>
-        <p:txBody>
-          <a:bodyPr wrap="square" lIns="0" tIns="0" rIns="0" bIns="0" rtlCol="0" anchor="ctr"/>
-          <a:lstStyle/>
-          <a:p>
-            <a:pPr indent="0" marL="0">
-              <a:buNone/>
-            </a:pPr>
-            <a:r>
-              <a:rPr lang="en-US" sz="1200" dirty="0">
-                <a:solidFill>
-                  <a:srgbClr val="ECECF3"/>
-                </a:solidFill>
-                <a:latin typeface="Calibri" pitchFamily="34" charset="0"/>
-                <a:ea typeface="Calibri" pitchFamily="34" charset="-122"/>
-                <a:cs typeface="Calibri" pitchFamily="34" charset="-120"/>
-              </a:rPr>
-              <a:t>[Name]</a:t>
-            </a:r>
-            <a:endParaRPr lang="en-US" sz="1200" dirty="0"/>
-          </a:p>
-        </p:txBody>
-      </p:sp>
-      <p:sp>
-        <p:nvSpPr>
-          <p:cNvPr id="14" name="Text 12"/>
-          <p:cNvSpPr/>
-          <p:nvPr/>
-        </p:nvSpPr>
-        <p:spPr>
-          <a:xfrm>
-            <a:off x="6217920" y="4507992"/>
-            <a:ext cx="1188720" cy="310896"/>
-          </a:xfrm>
-          <a:prstGeom prst="rect">
-            <a:avLst/>
-          </a:prstGeom>
-          <a:noFill/>
-          <a:ln/>
-        </p:spPr>
-        <p:txBody>
-          <a:bodyPr wrap="square" lIns="0" tIns="0" rIns="0" bIns="0" rtlCol="0" anchor="ctr"/>
-          <a:lstStyle/>
-          <a:p>
-            <a:pPr algn="r" indent="0" marL="0">
-              <a:buNone/>
-            </a:pPr>
-            <a:r>
-              <a:rPr lang="en-US" sz="1200" b="1" dirty="0">
-                <a:solidFill>
-                  <a:srgbClr val="FFB347"/>
-                </a:solidFill>
-                <a:latin typeface="Calibri" pitchFamily="34" charset="0"/>
-                <a:ea typeface="Calibri" pitchFamily="34" charset="-122"/>
-                <a:cs typeface="Calibri" pitchFamily="34" charset="-120"/>
-              </a:rPr>
-              <a:t>Member 5  </a:t>
-            </a:r>
-            <a:endParaRPr lang="en-US" sz="1200" dirty="0"/>
-          </a:p>
-        </p:txBody>
-      </p:sp>
-      <p:sp>
-        <p:nvSpPr>
-          <p:cNvPr id="15" name="Text 13"/>
-          <p:cNvSpPr/>
-          <p:nvPr/>
-        </p:nvSpPr>
-        <p:spPr>
-          <a:xfrm>
-            <a:off x="7452360" y="4507992"/>
-            <a:ext cx="1737360" cy="310896"/>
-          </a:xfrm>
-          <a:prstGeom prst="rect">
-            <a:avLst/>
-          </a:prstGeom>
-          <a:noFill/>
-          <a:ln/>
-        </p:spPr>
-        <p:txBody>
-          <a:bodyPr wrap="square" lIns="0" tIns="0" rIns="0" bIns="0" rtlCol="0" anchor="ctr"/>
-          <a:lstStyle/>
-          <a:p>
-            <a:pPr indent="0" marL="0">
-              <a:buNone/>
-            </a:pPr>
-            <a:r>
-              <a:rPr lang="en-US" sz="1200" dirty="0">
-                <a:solidFill>
-                  <a:srgbClr val="ECECF3"/>
-                </a:solidFill>
-                <a:latin typeface="Calibri" pitchFamily="34" charset="0"/>
-                <a:ea typeface="Calibri" pitchFamily="34" charset="-122"/>
-                <a:cs typeface="Calibri" pitchFamily="34" charset="-120"/>
-              </a:rPr>
-              <a:t>[Name]</a:t>
-            </a:r>
-            <a:endParaRPr lang="en-US" sz="1200" dirty="0"/>
-          </a:p>
-        </p:txBody>
-      </p:sp>
-      <p:sp>
-        <p:nvSpPr>
-          <p:cNvPr id="16" name="Text 14"/>
-          <p:cNvSpPr/>
-          <p:nvPr/>
-        </p:nvSpPr>
-        <p:spPr>
-          <a:xfrm>
-            <a:off x="6217920" y="4855464"/>
-            <a:ext cx="1188720" cy="310896"/>
-          </a:xfrm>
-          <a:prstGeom prst="rect">
-            <a:avLst/>
-          </a:prstGeom>
-          <a:noFill/>
-          <a:ln/>
-        </p:spPr>
-        <p:txBody>
-          <a:bodyPr wrap="square" lIns="0" tIns="0" rIns="0" bIns="0" rtlCol="0" anchor="ctr"/>
-          <a:lstStyle/>
-          <a:p>
-            <a:pPr algn="r" indent="0" marL="0">
-              <a:buNone/>
-            </a:pPr>
-            <a:r>
-              <a:rPr lang="en-US" sz="1200" b="1" dirty="0">
-                <a:solidFill>
-                  <a:srgbClr val="FFB347"/>
-                </a:solidFill>
-                <a:latin typeface="Calibri" pitchFamily="34" charset="0"/>
-                <a:ea typeface="Calibri" pitchFamily="34" charset="-122"/>
-                <a:cs typeface="Calibri" pitchFamily="34" charset="-120"/>
-              </a:rPr>
-              <a:t>Member 6  </a:t>
-            </a:r>
-            <a:endParaRPr lang="en-US" sz="1200" dirty="0"/>
-          </a:p>
-        </p:txBody>
-      </p:sp>
-      <p:sp>
-        <p:nvSpPr>
-          <p:cNvPr id="17" name="Text 15"/>
-          <p:cNvSpPr/>
-          <p:nvPr/>
-        </p:nvSpPr>
-        <p:spPr>
-          <a:xfrm>
-            <a:off x="7452360" y="4855464"/>
-            <a:ext cx="1737360" cy="310896"/>
-          </a:xfrm>
-          <a:prstGeom prst="rect">
-            <a:avLst/>
-          </a:prstGeom>
-          <a:noFill/>
-          <a:ln/>
-        </p:spPr>
-        <p:txBody>
-          <a:bodyPr wrap="square" lIns="0" tIns="0" rIns="0" bIns="0" rtlCol="0" anchor="ctr"/>
-          <a:lstStyle/>
-          <a:p>
-            <a:pPr indent="0" marL="0">
-              <a:buNone/>
-            </a:pPr>
-            <a:r>
-              <a:rPr lang="en-US" sz="1200" dirty="0">
-                <a:solidFill>
-                  <a:srgbClr val="ECECF3"/>
-                </a:solidFill>
-                <a:latin typeface="Calibri" pitchFamily="34" charset="0"/>
-                <a:ea typeface="Calibri" pitchFamily="34" charset="-122"/>
-                <a:cs typeface="Calibri" pitchFamily="34" charset="-120"/>
-              </a:rPr>
-              <a:t>[Name]</a:t>
-            </a:r>
-            <a:endParaRPr lang="en-US" sz="1200" dirty="0"/>
-          </a:p>
-        </p:txBody>
-      </p:sp>
-      <p:sp>
-        <p:nvSpPr>
-          <p:cNvPr id="18" name="Text 16"/>
           <p:cNvSpPr/>
           <p:nvPr/>
         </p:nvSpPr>
@@ -2966,7 +2732,7 @@
       </p:sp>
       <p:sp>
         <p:nvSpPr>
-          <p:cNvPr id="19" name="Text 17"/>
+          <p:cNvPr id="13" name="Text 11"/>
           <p:cNvSpPr/>
           <p:nvPr/>
         </p:nvSpPr>
@@ -3088,7 +2854,7 @@
                 <a:ea typeface="Calibri" pitchFamily="34" charset="-122"/>
                 <a:cs typeface="Calibri" pitchFamily="34" charset="-120"/>
               </a:rPr>
-              <a:t>MEMBER 4  ·  AI &amp; APIS</a:t>
+              <a:t>AI &amp; APIS</a:t>
             </a:r>
             <a:endParaRPr lang="en-US" sz="1200" dirty="0"/>
           </a:p>
@@ -3136,72 +2902,6 @@
       <p:sp>
         <p:nvSpPr>
           <p:cNvPr id="5" name="Shape 3"/>
-          <p:cNvSpPr/>
-          <p:nvPr/>
-        </p:nvSpPr>
-        <p:spPr>
-          <a:xfrm>
-            <a:off x="9601200" y="384048"/>
-            <a:ext cx="1920240" cy="292608"/>
-          </a:xfrm>
-          <a:prstGeom prst="roundRect">
-            <a:avLst>
-              <a:gd name="adj" fmla="val 18750"/>
-            </a:avLst>
-          </a:prstGeom>
-          <a:solidFill>
-            <a:srgbClr val="1A1D27"/>
-          </a:solidFill>
-          <a:ln w="25400">
-            <a:solidFill>
-              <a:srgbClr val="FFB347"/>
-            </a:solidFill>
-            <a:prstDash val="solid"/>
-          </a:ln>
-        </p:spPr>
-      </p:sp>
-      <p:sp>
-        <p:nvSpPr>
-          <p:cNvPr id="6" name="Text 4"/>
-          <p:cNvSpPr/>
-          <p:nvPr/>
-        </p:nvSpPr>
-        <p:spPr>
-          <a:xfrm>
-            <a:off x="9601200" y="384048"/>
-            <a:ext cx="1920240" cy="292608"/>
-          </a:xfrm>
-          <a:prstGeom prst="rect">
-            <a:avLst/>
-          </a:prstGeom>
-          <a:noFill/>
-          <a:ln/>
-        </p:spPr>
-        <p:txBody>
-          <a:bodyPr wrap="square" lIns="0" tIns="0" rIns="0" bIns="0" rtlCol="0" anchor="ctr"/>
-          <a:lstStyle/>
-          <a:p>
-            <a:pPr algn="ctr" indent="0" marL="0">
-              <a:buNone/>
-            </a:pPr>
-            <a:r>
-              <a:rPr lang="en-US" sz="950" b="1" dirty="0">
-                <a:solidFill>
-                  <a:srgbClr val="FFB347"/>
-                </a:solidFill>
-                <a:latin typeface="Calibri" pitchFamily="34" charset="0"/>
-                <a:ea typeface="Calibri" pitchFamily="34" charset="-122"/>
-                <a:cs typeface="Calibri" pitchFamily="34" charset="-120"/>
-              </a:rPr>
-              <a:t>◀  Member 4  ·  AI &amp; APIs</a:t>
-            </a:r>
-            <a:endParaRPr lang="en-US" sz="950" dirty="0"/>
-          </a:p>
-        </p:txBody>
-      </p:sp>
-      <p:sp>
-        <p:nvSpPr>
-          <p:cNvPr id="7" name="Shape 5"/>
           <p:cNvSpPr/>
           <p:nvPr/>
         </p:nvSpPr>
@@ -3235,7 +2935,7 @@
       </p:sp>
       <p:sp>
         <p:nvSpPr>
-          <p:cNvPr id="8" name="Text 6"/>
+          <p:cNvPr id="6" name="Text 4"/>
           <p:cNvSpPr/>
           <p:nvPr/>
         </p:nvSpPr>
@@ -3274,7 +2974,7 @@
       </p:sp>
       <p:sp>
         <p:nvSpPr>
-          <p:cNvPr id="9" name="Shape 7"/>
+          <p:cNvPr id="7" name="Shape 5"/>
           <p:cNvSpPr/>
           <p:nvPr/>
         </p:nvSpPr>
@@ -3308,7 +3008,7 @@
       </p:sp>
       <p:sp>
         <p:nvSpPr>
-          <p:cNvPr id="10" name="Text 8"/>
+          <p:cNvPr id="8" name="Text 6"/>
           <p:cNvSpPr/>
           <p:nvPr/>
         </p:nvSpPr>
@@ -3347,7 +3047,7 @@
       </p:sp>
       <p:sp>
         <p:nvSpPr>
-          <p:cNvPr id="11" name="Text 9"/>
+          <p:cNvPr id="9" name="Text 7"/>
           <p:cNvSpPr/>
           <p:nvPr/>
         </p:nvSpPr>
@@ -3386,7 +3086,7 @@
       </p:sp>
       <p:sp>
         <p:nvSpPr>
-          <p:cNvPr id="12" name="Shape 10"/>
+          <p:cNvPr id="10" name="Shape 8"/>
           <p:cNvSpPr/>
           <p:nvPr/>
         </p:nvSpPr>
@@ -3420,7 +3120,7 @@
       </p:sp>
       <p:sp>
         <p:nvSpPr>
-          <p:cNvPr id="13" name="Shape 11"/>
+          <p:cNvPr id="11" name="Shape 9"/>
           <p:cNvSpPr/>
           <p:nvPr/>
         </p:nvSpPr>
@@ -3440,7 +3140,7 @@
       </p:sp>
       <p:sp>
         <p:nvSpPr>
-          <p:cNvPr id="14" name="Shape 12"/>
+          <p:cNvPr id="12" name="Shape 10"/>
           <p:cNvSpPr/>
           <p:nvPr/>
         </p:nvSpPr>
@@ -3460,7 +3160,7 @@
       </p:sp>
       <p:sp>
         <p:nvSpPr>
-          <p:cNvPr id="15" name="Shape 13"/>
+          <p:cNvPr id="13" name="Shape 11"/>
           <p:cNvSpPr/>
           <p:nvPr/>
         </p:nvSpPr>
@@ -3480,7 +3180,7 @@
       </p:sp>
       <p:sp>
         <p:nvSpPr>
-          <p:cNvPr id="16" name="Text 14"/>
+          <p:cNvPr id="14" name="Text 12"/>
           <p:cNvSpPr/>
           <p:nvPr/>
         </p:nvSpPr>
@@ -3622,7 +3322,7 @@
       </p:sp>
       <p:sp>
         <p:nvSpPr>
-          <p:cNvPr id="17" name="Text 15"/>
+          <p:cNvPr id="15" name="Text 13"/>
           <p:cNvSpPr/>
           <p:nvPr/>
         </p:nvSpPr>
@@ -3661,7 +3361,7 @@
       </p:sp>
       <p:sp>
         <p:nvSpPr>
-          <p:cNvPr id="18" name="Text 16"/>
+          <p:cNvPr id="16" name="Text 14"/>
           <p:cNvSpPr/>
           <p:nvPr/>
         </p:nvSpPr>
@@ -3717,7 +3417,7 @@
       </p:sp>
       <p:sp>
         <p:nvSpPr>
-          <p:cNvPr id="19" name="Shape 17"/>
+          <p:cNvPr id="17" name="Shape 15"/>
           <p:cNvSpPr/>
           <p:nvPr/>
         </p:nvSpPr>
@@ -3751,7 +3451,7 @@
       </p:sp>
       <p:sp>
         <p:nvSpPr>
-          <p:cNvPr id="20" name="Text 18"/>
+          <p:cNvPr id="18" name="Text 16"/>
           <p:cNvSpPr/>
           <p:nvPr/>
         </p:nvSpPr>
@@ -3790,7 +3490,7 @@
       </p:sp>
       <p:sp>
         <p:nvSpPr>
-          <p:cNvPr id="21" name="Text 19"/>
+          <p:cNvPr id="19" name="Text 17"/>
           <p:cNvSpPr/>
           <p:nvPr/>
         </p:nvSpPr>
@@ -3829,7 +3529,7 @@
       </p:sp>
       <p:sp>
         <p:nvSpPr>
-          <p:cNvPr id="22" name="Shape 20"/>
+          <p:cNvPr id="20" name="Shape 18"/>
           <p:cNvSpPr/>
           <p:nvPr/>
         </p:nvSpPr>
@@ -3863,7 +3563,7 @@
       </p:sp>
       <p:sp>
         <p:nvSpPr>
-          <p:cNvPr id="23" name="Text 21"/>
+          <p:cNvPr id="21" name="Text 19"/>
           <p:cNvSpPr/>
           <p:nvPr/>
         </p:nvSpPr>
@@ -3905,7 +3605,7 @@
       </p:sp>
       <p:sp>
         <p:nvSpPr>
-          <p:cNvPr id="24" name="Text 22"/>
+          <p:cNvPr id="22" name="Text 20"/>
           <p:cNvSpPr/>
           <p:nvPr/>
         </p:nvSpPr>
@@ -3944,7 +3644,7 @@
       </p:sp>
       <p:sp>
         <p:nvSpPr>
-          <p:cNvPr id="25" name="Text 23"/>
+          <p:cNvPr id="23" name="Text 21"/>
           <p:cNvSpPr/>
           <p:nvPr/>
         </p:nvSpPr>
@@ -4029,7 +3729,7 @@
       </p:sp>
       <p:sp>
         <p:nvSpPr>
-          <p:cNvPr id="26" name="Text 24"/>
+          <p:cNvPr id="24" name="Text 22"/>
           <p:cNvSpPr/>
           <p:nvPr/>
         </p:nvSpPr>
@@ -4082,73 +3782,7 @@
       </p:sp>
       <p:sp>
         <p:nvSpPr>
-          <p:cNvPr id="27" name="Shape 25"/>
-          <p:cNvSpPr/>
-          <p:nvPr/>
-        </p:nvSpPr>
-        <p:spPr>
-          <a:xfrm>
-            <a:off x="9601200" y="6355080"/>
-            <a:ext cx="1280160" cy="256032"/>
-          </a:xfrm>
-          <a:prstGeom prst="roundRect">
-            <a:avLst>
-              <a:gd name="adj" fmla="val 21429"/>
-            </a:avLst>
-          </a:prstGeom>
-          <a:solidFill>
-            <a:srgbClr val="1A1D27"/>
-          </a:solidFill>
-          <a:ln w="12700">
-            <a:solidFill>
-              <a:srgbClr val="2A2F3E"/>
-            </a:solidFill>
-            <a:prstDash val="solid"/>
-          </a:ln>
-        </p:spPr>
-      </p:sp>
-      <p:sp>
-        <p:nvSpPr>
-          <p:cNvPr id="28" name="Text 26"/>
-          <p:cNvSpPr/>
-          <p:nvPr/>
-        </p:nvSpPr>
-        <p:spPr>
-          <a:xfrm>
-            <a:off x="9601200" y="6355080"/>
-            <a:ext cx="1280160" cy="256032"/>
-          </a:xfrm>
-          <a:prstGeom prst="rect">
-            <a:avLst/>
-          </a:prstGeom>
-          <a:noFill/>
-          <a:ln/>
-        </p:spPr>
-        <p:txBody>
-          <a:bodyPr wrap="square" lIns="0" tIns="0" rIns="0" bIns="0" rtlCol="0" anchor="ctr"/>
-          <a:lstStyle/>
-          <a:p>
-            <a:pPr algn="ctr" indent="0" marL="0">
-              <a:buNone/>
-            </a:pPr>
-            <a:r>
-              <a:rPr lang="en-US" sz="900" b="1" dirty="0">
-                <a:solidFill>
-                  <a:srgbClr val="FFB347"/>
-                </a:solidFill>
-                <a:latin typeface="Calibri" pitchFamily="34" charset="0"/>
-                <a:ea typeface="Calibri" pitchFamily="34" charset="-122"/>
-                <a:cs typeface="Calibri" pitchFamily="34" charset="-120"/>
-              </a:rPr>
-              <a:t>Member 4</a:t>
-            </a:r>
-            <a:endParaRPr lang="en-US" sz="900" dirty="0"/>
-          </a:p>
-        </p:txBody>
-      </p:sp>
-      <p:sp>
-        <p:nvSpPr>
-          <p:cNvPr id="29" name="Text 27"/>
+          <p:cNvPr id="25" name="Text 23"/>
           <p:cNvSpPr/>
           <p:nvPr/>
         </p:nvSpPr>
@@ -4270,7 +3904,7 @@
                 <a:ea typeface="Calibri" pitchFamily="34" charset="-122"/>
                 <a:cs typeface="Calibri" pitchFamily="34" charset="-120"/>
               </a:rPr>
-              <a:t>MEMBER 4  ·  AI &amp; APIS</a:t>
+              <a:t>AI &amp; APIS</a:t>
             </a:r>
             <a:endParaRPr lang="en-US" sz="1200" dirty="0"/>
           </a:p>
@@ -4318,72 +3952,6 @@
       <p:sp>
         <p:nvSpPr>
           <p:cNvPr id="5" name="Shape 3"/>
-          <p:cNvSpPr/>
-          <p:nvPr/>
-        </p:nvSpPr>
-        <p:spPr>
-          <a:xfrm>
-            <a:off x="9601200" y="384048"/>
-            <a:ext cx="1920240" cy="292608"/>
-          </a:xfrm>
-          <a:prstGeom prst="roundRect">
-            <a:avLst>
-              <a:gd name="adj" fmla="val 18750"/>
-            </a:avLst>
-          </a:prstGeom>
-          <a:solidFill>
-            <a:srgbClr val="1A1D27"/>
-          </a:solidFill>
-          <a:ln w="25400">
-            <a:solidFill>
-              <a:srgbClr val="FFB347"/>
-            </a:solidFill>
-            <a:prstDash val="solid"/>
-          </a:ln>
-        </p:spPr>
-      </p:sp>
-      <p:sp>
-        <p:nvSpPr>
-          <p:cNvPr id="6" name="Text 4"/>
-          <p:cNvSpPr/>
-          <p:nvPr/>
-        </p:nvSpPr>
-        <p:spPr>
-          <a:xfrm>
-            <a:off x="9601200" y="384048"/>
-            <a:ext cx="1920240" cy="292608"/>
-          </a:xfrm>
-          <a:prstGeom prst="rect">
-            <a:avLst/>
-          </a:prstGeom>
-          <a:noFill/>
-          <a:ln/>
-        </p:spPr>
-        <p:txBody>
-          <a:bodyPr wrap="square" lIns="0" tIns="0" rIns="0" bIns="0" rtlCol="0" anchor="ctr"/>
-          <a:lstStyle/>
-          <a:p>
-            <a:pPr algn="ctr" indent="0" marL="0">
-              <a:buNone/>
-            </a:pPr>
-            <a:r>
-              <a:rPr lang="en-US" sz="950" b="1" dirty="0">
-                <a:solidFill>
-                  <a:srgbClr val="FFB347"/>
-                </a:solidFill>
-                <a:latin typeface="Calibri" pitchFamily="34" charset="0"/>
-                <a:ea typeface="Calibri" pitchFamily="34" charset="-122"/>
-                <a:cs typeface="Calibri" pitchFamily="34" charset="-120"/>
-              </a:rPr>
-              <a:t>◀  Member 4  ·  AI &amp; APIs</a:t>
-            </a:r>
-            <a:endParaRPr lang="en-US" sz="950" dirty="0"/>
-          </a:p>
-        </p:txBody>
-      </p:sp>
-      <p:sp>
-        <p:nvSpPr>
-          <p:cNvPr id="7" name="Shape 5"/>
           <p:cNvSpPr/>
           <p:nvPr/>
         </p:nvSpPr>
@@ -4417,7 +3985,7 @@
       </p:sp>
       <p:sp>
         <p:nvSpPr>
-          <p:cNvPr id="8" name="Text 6"/>
+          <p:cNvPr id="6" name="Text 4"/>
           <p:cNvSpPr/>
           <p:nvPr/>
         </p:nvSpPr>
@@ -4456,7 +4024,7 @@
       </p:sp>
       <p:sp>
         <p:nvSpPr>
-          <p:cNvPr id="9" name="Text 7"/>
+          <p:cNvPr id="7" name="Text 5"/>
           <p:cNvSpPr/>
           <p:nvPr/>
         </p:nvSpPr>
@@ -4495,7 +4063,7 @@
       </p:sp>
       <p:sp>
         <p:nvSpPr>
-          <p:cNvPr id="10" name="Text 8"/>
+          <p:cNvPr id="8" name="Text 6"/>
           <p:cNvSpPr/>
           <p:nvPr/>
         </p:nvSpPr>
@@ -4643,7 +4211,7 @@
       </p:sp>
       <p:sp>
         <p:nvSpPr>
-          <p:cNvPr id="11" name="Shape 9"/>
+          <p:cNvPr id="9" name="Shape 7"/>
           <p:cNvSpPr/>
           <p:nvPr/>
         </p:nvSpPr>
@@ -4677,7 +4245,7 @@
       </p:sp>
       <p:sp>
         <p:nvSpPr>
-          <p:cNvPr id="12" name="Text 10"/>
+          <p:cNvPr id="10" name="Text 8"/>
           <p:cNvSpPr/>
           <p:nvPr/>
         </p:nvSpPr>
@@ -4716,7 +4284,7 @@
       </p:sp>
       <p:sp>
         <p:nvSpPr>
-          <p:cNvPr id="13" name="Text 11"/>
+          <p:cNvPr id="11" name="Text 9"/>
           <p:cNvSpPr/>
           <p:nvPr/>
         </p:nvSpPr>
@@ -4755,7 +4323,7 @@
       </p:sp>
       <p:sp>
         <p:nvSpPr>
-          <p:cNvPr id="14" name="Text 12"/>
+          <p:cNvPr id="12" name="Text 10"/>
           <p:cNvSpPr/>
           <p:nvPr/>
         </p:nvSpPr>
@@ -4882,7 +4450,7 @@
       </p:sp>
       <p:sp>
         <p:nvSpPr>
-          <p:cNvPr id="15" name="Shape 13"/>
+          <p:cNvPr id="13" name="Shape 11"/>
           <p:cNvSpPr/>
           <p:nvPr/>
         </p:nvSpPr>
@@ -4916,7 +4484,7 @@
       </p:sp>
       <p:sp>
         <p:nvSpPr>
-          <p:cNvPr id="16" name="Text 14"/>
+          <p:cNvPr id="14" name="Text 12"/>
           <p:cNvSpPr/>
           <p:nvPr/>
         </p:nvSpPr>
@@ -4955,7 +4523,7 @@
       </p:sp>
       <p:sp>
         <p:nvSpPr>
-          <p:cNvPr id="17" name="Text 15"/>
+          <p:cNvPr id="15" name="Text 13"/>
           <p:cNvSpPr/>
           <p:nvPr/>
         </p:nvSpPr>
@@ -5008,73 +4576,7 @@
       </p:sp>
       <p:sp>
         <p:nvSpPr>
-          <p:cNvPr id="18" name="Shape 16"/>
-          <p:cNvSpPr/>
-          <p:nvPr/>
-        </p:nvSpPr>
-        <p:spPr>
-          <a:xfrm>
-            <a:off x="9601200" y="6355080"/>
-            <a:ext cx="1280160" cy="256032"/>
-          </a:xfrm>
-          <a:prstGeom prst="roundRect">
-            <a:avLst>
-              <a:gd name="adj" fmla="val 21429"/>
-            </a:avLst>
-          </a:prstGeom>
-          <a:solidFill>
-            <a:srgbClr val="1A1D27"/>
-          </a:solidFill>
-          <a:ln w="12700">
-            <a:solidFill>
-              <a:srgbClr val="2A2F3E"/>
-            </a:solidFill>
-            <a:prstDash val="solid"/>
-          </a:ln>
-        </p:spPr>
-      </p:sp>
-      <p:sp>
-        <p:nvSpPr>
-          <p:cNvPr id="19" name="Text 17"/>
-          <p:cNvSpPr/>
-          <p:nvPr/>
-        </p:nvSpPr>
-        <p:spPr>
-          <a:xfrm>
-            <a:off x="9601200" y="6355080"/>
-            <a:ext cx="1280160" cy="256032"/>
-          </a:xfrm>
-          <a:prstGeom prst="rect">
-            <a:avLst/>
-          </a:prstGeom>
-          <a:noFill/>
-          <a:ln/>
-        </p:spPr>
-        <p:txBody>
-          <a:bodyPr wrap="square" lIns="0" tIns="0" rIns="0" bIns="0" rtlCol="0" anchor="ctr"/>
-          <a:lstStyle/>
-          <a:p>
-            <a:pPr algn="ctr" indent="0" marL="0">
-              <a:buNone/>
-            </a:pPr>
-            <a:r>
-              <a:rPr lang="en-US" sz="900" b="1" dirty="0">
-                <a:solidFill>
-                  <a:srgbClr val="FFB347"/>
-                </a:solidFill>
-                <a:latin typeface="Calibri" pitchFamily="34" charset="0"/>
-                <a:ea typeface="Calibri" pitchFamily="34" charset="-122"/>
-                <a:cs typeface="Calibri" pitchFamily="34" charset="-120"/>
-              </a:rPr>
-              <a:t>Member 4</a:t>
-            </a:r>
-            <a:endParaRPr lang="en-US" sz="900" dirty="0"/>
-          </a:p>
-        </p:txBody>
-      </p:sp>
-      <p:sp>
-        <p:nvSpPr>
-          <p:cNvPr id="20" name="Text 18"/>
+          <p:cNvPr id="16" name="Text 14"/>
           <p:cNvSpPr/>
           <p:nvPr/>
         </p:nvSpPr>
@@ -5196,7 +4698,7 @@
                 <a:ea typeface="Calibri" pitchFamily="34" charset="-122"/>
                 <a:cs typeface="Calibri" pitchFamily="34" charset="-120"/>
               </a:rPr>
-              <a:t>MEMBER 5  ·  BACKEND</a:t>
+              <a:t>BACKEND</a:t>
             </a:r>
             <a:endParaRPr lang="en-US" sz="1200" dirty="0"/>
           </a:p>
@@ -5243,73 +4745,7 @@
       </p:sp>
       <p:sp>
         <p:nvSpPr>
-          <p:cNvPr id="5" name="Shape 3"/>
-          <p:cNvSpPr/>
-          <p:nvPr/>
-        </p:nvSpPr>
-        <p:spPr>
-          <a:xfrm>
-            <a:off x="9601200" y="384048"/>
-            <a:ext cx="1920240" cy="292608"/>
-          </a:xfrm>
-          <a:prstGeom prst="roundRect">
-            <a:avLst>
-              <a:gd name="adj" fmla="val 18750"/>
-            </a:avLst>
-          </a:prstGeom>
-          <a:solidFill>
-            <a:srgbClr val="1A1D27"/>
-          </a:solidFill>
-          <a:ln w="25400">
-            <a:solidFill>
-              <a:srgbClr val="FFB347"/>
-            </a:solidFill>
-            <a:prstDash val="solid"/>
-          </a:ln>
-        </p:spPr>
-      </p:sp>
-      <p:sp>
-        <p:nvSpPr>
-          <p:cNvPr id="6" name="Text 4"/>
-          <p:cNvSpPr/>
-          <p:nvPr/>
-        </p:nvSpPr>
-        <p:spPr>
-          <a:xfrm>
-            <a:off x="9601200" y="384048"/>
-            <a:ext cx="1920240" cy="292608"/>
-          </a:xfrm>
-          <a:prstGeom prst="rect">
-            <a:avLst/>
-          </a:prstGeom>
-          <a:noFill/>
-          <a:ln/>
-        </p:spPr>
-        <p:txBody>
-          <a:bodyPr wrap="square" lIns="0" tIns="0" rIns="0" bIns="0" rtlCol="0" anchor="ctr"/>
-          <a:lstStyle/>
-          <a:p>
-            <a:pPr algn="ctr" indent="0" marL="0">
-              <a:buNone/>
-            </a:pPr>
-            <a:r>
-              <a:rPr lang="en-US" sz="950" b="1" dirty="0">
-                <a:solidFill>
-                  <a:srgbClr val="FFB347"/>
-                </a:solidFill>
-                <a:latin typeface="Calibri" pitchFamily="34" charset="0"/>
-                <a:ea typeface="Calibri" pitchFamily="34" charset="-122"/>
-                <a:cs typeface="Calibri" pitchFamily="34" charset="-120"/>
-              </a:rPr>
-              <a:t>◀  Member 5  ·  Backend</a:t>
-            </a:r>
-            <a:endParaRPr lang="en-US" sz="950" dirty="0"/>
-          </a:p>
-        </p:txBody>
-      </p:sp>
-      <p:sp>
-        <p:nvSpPr>
-          <p:cNvPr id="7" name="Text 5"/>
+          <p:cNvPr id="5" name="Text 3"/>
           <p:cNvSpPr/>
           <p:nvPr/>
         </p:nvSpPr>
@@ -5348,7 +4784,7 @@
       </p:sp>
       <p:sp>
         <p:nvSpPr>
-          <p:cNvPr id="8" name="Text 6"/>
+          <p:cNvPr id="6" name="Text 4"/>
           <p:cNvSpPr/>
           <p:nvPr/>
         </p:nvSpPr>
@@ -5387,7 +4823,7 @@
       </p:sp>
       <p:sp>
         <p:nvSpPr>
-          <p:cNvPr id="9" name="Text 7"/>
+          <p:cNvPr id="7" name="Text 5"/>
           <p:cNvSpPr/>
           <p:nvPr/>
         </p:nvSpPr>
@@ -5426,7 +4862,7 @@
       </p:sp>
       <p:sp>
         <p:nvSpPr>
-          <p:cNvPr id="10" name="Text 8"/>
+          <p:cNvPr id="8" name="Text 6"/>
           <p:cNvSpPr/>
           <p:nvPr/>
         </p:nvSpPr>
@@ -5465,7 +4901,7 @@
       </p:sp>
       <p:sp>
         <p:nvSpPr>
-          <p:cNvPr id="11" name="Text 9"/>
+          <p:cNvPr id="9" name="Text 7"/>
           <p:cNvSpPr/>
           <p:nvPr/>
         </p:nvSpPr>
@@ -5504,7 +4940,7 @@
       </p:sp>
       <p:sp>
         <p:nvSpPr>
-          <p:cNvPr id="12" name="Shape 10"/>
+          <p:cNvPr id="10" name="Shape 8"/>
           <p:cNvSpPr/>
           <p:nvPr/>
         </p:nvSpPr>
@@ -5524,7 +4960,7 @@
       </p:sp>
       <p:sp>
         <p:nvSpPr>
-          <p:cNvPr id="13" name="Text 11"/>
+          <p:cNvPr id="11" name="Text 9"/>
           <p:cNvSpPr/>
           <p:nvPr/>
         </p:nvSpPr>
@@ -5563,7 +4999,7 @@
       </p:sp>
       <p:sp>
         <p:nvSpPr>
-          <p:cNvPr id="14" name="Text 12"/>
+          <p:cNvPr id="12" name="Text 10"/>
           <p:cNvSpPr/>
           <p:nvPr/>
         </p:nvSpPr>
@@ -5602,7 +5038,7 @@
       </p:sp>
       <p:sp>
         <p:nvSpPr>
-          <p:cNvPr id="15" name="Text 13"/>
+          <p:cNvPr id="13" name="Text 11"/>
           <p:cNvSpPr/>
           <p:nvPr/>
         </p:nvSpPr>
@@ -5641,7 +5077,7 @@
       </p:sp>
       <p:sp>
         <p:nvSpPr>
-          <p:cNvPr id="16" name="Text 14"/>
+          <p:cNvPr id="14" name="Text 12"/>
           <p:cNvSpPr/>
           <p:nvPr/>
         </p:nvSpPr>
@@ -5680,7 +5116,7 @@
       </p:sp>
       <p:sp>
         <p:nvSpPr>
-          <p:cNvPr id="17" name="Shape 15"/>
+          <p:cNvPr id="15" name="Shape 13"/>
           <p:cNvSpPr/>
           <p:nvPr/>
         </p:nvSpPr>
@@ -5700,7 +5136,7 @@
       </p:sp>
       <p:sp>
         <p:nvSpPr>
-          <p:cNvPr id="18" name="Text 16"/>
+          <p:cNvPr id="16" name="Text 14"/>
           <p:cNvSpPr/>
           <p:nvPr/>
         </p:nvSpPr>
@@ -5739,7 +5175,7 @@
       </p:sp>
       <p:sp>
         <p:nvSpPr>
-          <p:cNvPr id="19" name="Text 17"/>
+          <p:cNvPr id="17" name="Text 15"/>
           <p:cNvSpPr/>
           <p:nvPr/>
         </p:nvSpPr>
@@ -5778,7 +5214,7 @@
       </p:sp>
       <p:sp>
         <p:nvSpPr>
-          <p:cNvPr id="20" name="Text 18"/>
+          <p:cNvPr id="18" name="Text 16"/>
           <p:cNvSpPr/>
           <p:nvPr/>
         </p:nvSpPr>
@@ -5817,7 +5253,7 @@
       </p:sp>
       <p:sp>
         <p:nvSpPr>
-          <p:cNvPr id="21" name="Text 19"/>
+          <p:cNvPr id="19" name="Text 17"/>
           <p:cNvSpPr/>
           <p:nvPr/>
         </p:nvSpPr>
@@ -5856,7 +5292,7 @@
       </p:sp>
       <p:sp>
         <p:nvSpPr>
-          <p:cNvPr id="22" name="Shape 20"/>
+          <p:cNvPr id="20" name="Shape 18"/>
           <p:cNvSpPr/>
           <p:nvPr/>
         </p:nvSpPr>
@@ -5876,7 +5312,7 @@
       </p:sp>
       <p:sp>
         <p:nvSpPr>
-          <p:cNvPr id="23" name="Text 21"/>
+          <p:cNvPr id="21" name="Text 19"/>
           <p:cNvSpPr/>
           <p:nvPr/>
         </p:nvSpPr>
@@ -5915,7 +5351,7 @@
       </p:sp>
       <p:sp>
         <p:nvSpPr>
-          <p:cNvPr id="24" name="Text 22"/>
+          <p:cNvPr id="22" name="Text 20"/>
           <p:cNvSpPr/>
           <p:nvPr/>
         </p:nvSpPr>
@@ -5954,7 +5390,7 @@
       </p:sp>
       <p:sp>
         <p:nvSpPr>
-          <p:cNvPr id="25" name="Text 23"/>
+          <p:cNvPr id="23" name="Text 21"/>
           <p:cNvSpPr/>
           <p:nvPr/>
         </p:nvSpPr>
@@ -5993,7 +5429,7 @@
       </p:sp>
       <p:sp>
         <p:nvSpPr>
-          <p:cNvPr id="26" name="Text 24"/>
+          <p:cNvPr id="24" name="Text 22"/>
           <p:cNvSpPr/>
           <p:nvPr/>
         </p:nvSpPr>
@@ -6032,7 +5468,7 @@
       </p:sp>
       <p:sp>
         <p:nvSpPr>
-          <p:cNvPr id="27" name="Shape 25"/>
+          <p:cNvPr id="25" name="Shape 23"/>
           <p:cNvSpPr/>
           <p:nvPr/>
         </p:nvSpPr>
@@ -6052,7 +5488,7 @@
       </p:sp>
       <p:sp>
         <p:nvSpPr>
-          <p:cNvPr id="28" name="Text 26"/>
+          <p:cNvPr id="26" name="Text 24"/>
           <p:cNvSpPr/>
           <p:nvPr/>
         </p:nvSpPr>
@@ -6091,7 +5527,7 @@
       </p:sp>
       <p:sp>
         <p:nvSpPr>
-          <p:cNvPr id="29" name="Text 27"/>
+          <p:cNvPr id="27" name="Text 25"/>
           <p:cNvSpPr/>
           <p:nvPr/>
         </p:nvSpPr>
@@ -6130,7 +5566,7 @@
       </p:sp>
       <p:sp>
         <p:nvSpPr>
-          <p:cNvPr id="30" name="Text 28"/>
+          <p:cNvPr id="28" name="Text 26"/>
           <p:cNvSpPr/>
           <p:nvPr/>
         </p:nvSpPr>
@@ -6169,7 +5605,7 @@
       </p:sp>
       <p:sp>
         <p:nvSpPr>
-          <p:cNvPr id="31" name="Text 29"/>
+          <p:cNvPr id="29" name="Text 27"/>
           <p:cNvSpPr/>
           <p:nvPr/>
         </p:nvSpPr>
@@ -6208,7 +5644,7 @@
       </p:sp>
       <p:sp>
         <p:nvSpPr>
-          <p:cNvPr id="32" name="Shape 30"/>
+          <p:cNvPr id="30" name="Shape 28"/>
           <p:cNvSpPr/>
           <p:nvPr/>
         </p:nvSpPr>
@@ -6228,7 +5664,7 @@
       </p:sp>
       <p:sp>
         <p:nvSpPr>
-          <p:cNvPr id="33" name="Text 31"/>
+          <p:cNvPr id="31" name="Text 29"/>
           <p:cNvSpPr/>
           <p:nvPr/>
         </p:nvSpPr>
@@ -6267,7 +5703,7 @@
       </p:sp>
       <p:sp>
         <p:nvSpPr>
-          <p:cNvPr id="34" name="Text 32"/>
+          <p:cNvPr id="32" name="Text 30"/>
           <p:cNvSpPr/>
           <p:nvPr/>
         </p:nvSpPr>
@@ -6306,7 +5742,7 @@
       </p:sp>
       <p:sp>
         <p:nvSpPr>
-          <p:cNvPr id="35" name="Text 33"/>
+          <p:cNvPr id="33" name="Text 31"/>
           <p:cNvSpPr/>
           <p:nvPr/>
         </p:nvSpPr>
@@ -6345,7 +5781,7 @@
       </p:sp>
       <p:sp>
         <p:nvSpPr>
-          <p:cNvPr id="36" name="Text 34"/>
+          <p:cNvPr id="34" name="Text 32"/>
           <p:cNvSpPr/>
           <p:nvPr/>
         </p:nvSpPr>
@@ -6384,7 +5820,7 @@
       </p:sp>
       <p:sp>
         <p:nvSpPr>
-          <p:cNvPr id="37" name="Shape 35"/>
+          <p:cNvPr id="35" name="Shape 33"/>
           <p:cNvSpPr/>
           <p:nvPr/>
         </p:nvSpPr>
@@ -6404,7 +5840,7 @@
       </p:sp>
       <p:sp>
         <p:nvSpPr>
-          <p:cNvPr id="38" name="Text 36"/>
+          <p:cNvPr id="36" name="Text 34"/>
           <p:cNvSpPr/>
           <p:nvPr/>
         </p:nvSpPr>
@@ -6443,7 +5879,7 @@
       </p:sp>
       <p:sp>
         <p:nvSpPr>
-          <p:cNvPr id="39" name="Text 37"/>
+          <p:cNvPr id="37" name="Text 35"/>
           <p:cNvSpPr/>
           <p:nvPr/>
         </p:nvSpPr>
@@ -6482,7 +5918,7 @@
       </p:sp>
       <p:sp>
         <p:nvSpPr>
-          <p:cNvPr id="40" name="Text 38"/>
+          <p:cNvPr id="38" name="Text 36"/>
           <p:cNvSpPr/>
           <p:nvPr/>
         </p:nvSpPr>
@@ -6521,7 +5957,7 @@
       </p:sp>
       <p:sp>
         <p:nvSpPr>
-          <p:cNvPr id="41" name="Text 39"/>
+          <p:cNvPr id="39" name="Text 37"/>
           <p:cNvSpPr/>
           <p:nvPr/>
         </p:nvSpPr>
@@ -6560,7 +5996,7 @@
       </p:sp>
       <p:sp>
         <p:nvSpPr>
-          <p:cNvPr id="42" name="Shape 40"/>
+          <p:cNvPr id="40" name="Shape 38"/>
           <p:cNvSpPr/>
           <p:nvPr/>
         </p:nvSpPr>
@@ -6580,7 +6016,7 @@
       </p:sp>
       <p:sp>
         <p:nvSpPr>
-          <p:cNvPr id="43" name="Text 41"/>
+          <p:cNvPr id="41" name="Text 39"/>
           <p:cNvSpPr/>
           <p:nvPr/>
         </p:nvSpPr>
@@ -6619,7 +6055,7 @@
       </p:sp>
       <p:sp>
         <p:nvSpPr>
-          <p:cNvPr id="44" name="Text 42"/>
+          <p:cNvPr id="42" name="Text 40"/>
           <p:cNvSpPr/>
           <p:nvPr/>
         </p:nvSpPr>
@@ -6658,7 +6094,7 @@
       </p:sp>
       <p:sp>
         <p:nvSpPr>
-          <p:cNvPr id="45" name="Text 43"/>
+          <p:cNvPr id="43" name="Text 41"/>
           <p:cNvSpPr/>
           <p:nvPr/>
         </p:nvSpPr>
@@ -6697,7 +6133,7 @@
       </p:sp>
       <p:sp>
         <p:nvSpPr>
-          <p:cNvPr id="46" name="Shape 44"/>
+          <p:cNvPr id="44" name="Shape 42"/>
           <p:cNvSpPr/>
           <p:nvPr/>
         </p:nvSpPr>
@@ -6731,7 +6167,7 @@
       </p:sp>
       <p:sp>
         <p:nvSpPr>
-          <p:cNvPr id="47" name="Text 45"/>
+          <p:cNvPr id="45" name="Text 43"/>
           <p:cNvSpPr/>
           <p:nvPr/>
         </p:nvSpPr>
@@ -6770,7 +6206,7 @@
       </p:sp>
       <p:sp>
         <p:nvSpPr>
-          <p:cNvPr id="48" name="Text 46"/>
+          <p:cNvPr id="46" name="Text 44"/>
           <p:cNvSpPr/>
           <p:nvPr/>
         </p:nvSpPr>
@@ -6809,7 +6245,7 @@
       </p:sp>
       <p:sp>
         <p:nvSpPr>
-          <p:cNvPr id="49" name="Text 47"/>
+          <p:cNvPr id="47" name="Text 45"/>
           <p:cNvSpPr/>
           <p:nvPr/>
         </p:nvSpPr>
@@ -6862,73 +6298,7 @@
       </p:sp>
       <p:sp>
         <p:nvSpPr>
-          <p:cNvPr id="50" name="Shape 48"/>
-          <p:cNvSpPr/>
-          <p:nvPr/>
-        </p:nvSpPr>
-        <p:spPr>
-          <a:xfrm>
-            <a:off x="9601200" y="6355080"/>
-            <a:ext cx="1280160" cy="256032"/>
-          </a:xfrm>
-          <a:prstGeom prst="roundRect">
-            <a:avLst>
-              <a:gd name="adj" fmla="val 21429"/>
-            </a:avLst>
-          </a:prstGeom>
-          <a:solidFill>
-            <a:srgbClr val="1A1D27"/>
-          </a:solidFill>
-          <a:ln w="12700">
-            <a:solidFill>
-              <a:srgbClr val="2A2F3E"/>
-            </a:solidFill>
-            <a:prstDash val="solid"/>
-          </a:ln>
-        </p:spPr>
-      </p:sp>
-      <p:sp>
-        <p:nvSpPr>
-          <p:cNvPr id="51" name="Text 49"/>
-          <p:cNvSpPr/>
-          <p:nvPr/>
-        </p:nvSpPr>
-        <p:spPr>
-          <a:xfrm>
-            <a:off x="9601200" y="6355080"/>
-            <a:ext cx="1280160" cy="256032"/>
-          </a:xfrm>
-          <a:prstGeom prst="rect">
-            <a:avLst/>
-          </a:prstGeom>
-          <a:noFill/>
-          <a:ln/>
-        </p:spPr>
-        <p:txBody>
-          <a:bodyPr wrap="square" lIns="0" tIns="0" rIns="0" bIns="0" rtlCol="0" anchor="ctr"/>
-          <a:lstStyle/>
-          <a:p>
-            <a:pPr algn="ctr" indent="0" marL="0">
-              <a:buNone/>
-            </a:pPr>
-            <a:r>
-              <a:rPr lang="en-US" sz="900" b="1" dirty="0">
-                <a:solidFill>
-                  <a:srgbClr val="FFB347"/>
-                </a:solidFill>
-                <a:latin typeface="Calibri" pitchFamily="34" charset="0"/>
-                <a:ea typeface="Calibri" pitchFamily="34" charset="-122"/>
-                <a:cs typeface="Calibri" pitchFamily="34" charset="-120"/>
-              </a:rPr>
-              <a:t>Member 5</a:t>
-            </a:r>
-            <a:endParaRPr lang="en-US" sz="900" dirty="0"/>
-          </a:p>
-        </p:txBody>
-      </p:sp>
-      <p:sp>
-        <p:nvSpPr>
-          <p:cNvPr id="52" name="Text 50"/>
+          <p:cNvPr id="48" name="Text 46"/>
           <p:cNvSpPr/>
           <p:nvPr/>
         </p:nvSpPr>
@@ -7050,7 +6420,7 @@
                 <a:ea typeface="Calibri" pitchFamily="34" charset="-122"/>
                 <a:cs typeface="Calibri" pitchFamily="34" charset="-120"/>
               </a:rPr>
-              <a:t>MEMBER 5  ·  BACKEND</a:t>
+              <a:t>BACKEND</a:t>
             </a:r>
             <a:endParaRPr lang="en-US" sz="1200" dirty="0"/>
           </a:p>
@@ -7098,72 +6468,6 @@
       <p:sp>
         <p:nvSpPr>
           <p:cNvPr id="5" name="Shape 3"/>
-          <p:cNvSpPr/>
-          <p:nvPr/>
-        </p:nvSpPr>
-        <p:spPr>
-          <a:xfrm>
-            <a:off x="9601200" y="384048"/>
-            <a:ext cx="1920240" cy="292608"/>
-          </a:xfrm>
-          <a:prstGeom prst="roundRect">
-            <a:avLst>
-              <a:gd name="adj" fmla="val 18750"/>
-            </a:avLst>
-          </a:prstGeom>
-          <a:solidFill>
-            <a:srgbClr val="1A1D27"/>
-          </a:solidFill>
-          <a:ln w="25400">
-            <a:solidFill>
-              <a:srgbClr val="FFB347"/>
-            </a:solidFill>
-            <a:prstDash val="solid"/>
-          </a:ln>
-        </p:spPr>
-      </p:sp>
-      <p:sp>
-        <p:nvSpPr>
-          <p:cNvPr id="6" name="Text 4"/>
-          <p:cNvSpPr/>
-          <p:nvPr/>
-        </p:nvSpPr>
-        <p:spPr>
-          <a:xfrm>
-            <a:off x="9601200" y="384048"/>
-            <a:ext cx="1920240" cy="292608"/>
-          </a:xfrm>
-          <a:prstGeom prst="rect">
-            <a:avLst/>
-          </a:prstGeom>
-          <a:noFill/>
-          <a:ln/>
-        </p:spPr>
-        <p:txBody>
-          <a:bodyPr wrap="square" lIns="0" tIns="0" rIns="0" bIns="0" rtlCol="0" anchor="ctr"/>
-          <a:lstStyle/>
-          <a:p>
-            <a:pPr algn="ctr" indent="0" marL="0">
-              <a:buNone/>
-            </a:pPr>
-            <a:r>
-              <a:rPr lang="en-US" sz="950" b="1" dirty="0">
-                <a:solidFill>
-                  <a:srgbClr val="FFB347"/>
-                </a:solidFill>
-                <a:latin typeface="Calibri" pitchFamily="34" charset="0"/>
-                <a:ea typeface="Calibri" pitchFamily="34" charset="-122"/>
-                <a:cs typeface="Calibri" pitchFamily="34" charset="-120"/>
-              </a:rPr>
-              <a:t>◀  Member 5  ·  Backend</a:t>
-            </a:r>
-            <a:endParaRPr lang="en-US" sz="950" dirty="0"/>
-          </a:p>
-        </p:txBody>
-      </p:sp>
-      <p:sp>
-        <p:nvSpPr>
-          <p:cNvPr id="7" name="Shape 5"/>
           <p:cNvSpPr/>
           <p:nvPr/>
         </p:nvSpPr>
@@ -7197,7 +6501,7 @@
       </p:sp>
       <p:sp>
         <p:nvSpPr>
-          <p:cNvPr id="8" name="Text 6"/>
+          <p:cNvPr id="6" name="Text 4"/>
           <p:cNvSpPr/>
           <p:nvPr/>
         </p:nvSpPr>
@@ -7236,7 +6540,7 @@
       </p:sp>
       <p:sp>
         <p:nvSpPr>
-          <p:cNvPr id="9" name="Shape 7"/>
+          <p:cNvPr id="7" name="Shape 5"/>
           <p:cNvSpPr/>
           <p:nvPr/>
         </p:nvSpPr>
@@ -7270,7 +6574,7 @@
       </p:sp>
       <p:sp>
         <p:nvSpPr>
-          <p:cNvPr id="10" name="Shape 8"/>
+          <p:cNvPr id="8" name="Shape 6"/>
           <p:cNvSpPr/>
           <p:nvPr/>
         </p:nvSpPr>
@@ -7290,7 +6594,7 @@
       </p:sp>
       <p:sp>
         <p:nvSpPr>
-          <p:cNvPr id="11" name="Shape 9"/>
+          <p:cNvPr id="9" name="Shape 7"/>
           <p:cNvSpPr/>
           <p:nvPr/>
         </p:nvSpPr>
@@ -7310,7 +6614,7 @@
       </p:sp>
       <p:sp>
         <p:nvSpPr>
-          <p:cNvPr id="12" name="Shape 10"/>
+          <p:cNvPr id="10" name="Shape 8"/>
           <p:cNvSpPr/>
           <p:nvPr/>
         </p:nvSpPr>
@@ -7330,7 +6634,7 @@
       </p:sp>
       <p:sp>
         <p:nvSpPr>
-          <p:cNvPr id="13" name="Text 11"/>
+          <p:cNvPr id="11" name="Text 9"/>
           <p:cNvSpPr/>
           <p:nvPr/>
         </p:nvSpPr>
@@ -7452,7 +6756,7 @@
       </p:sp>
       <p:sp>
         <p:nvSpPr>
-          <p:cNvPr id="14" name="Shape 12"/>
+          <p:cNvPr id="12" name="Shape 10"/>
           <p:cNvSpPr/>
           <p:nvPr/>
         </p:nvSpPr>
@@ -7486,7 +6790,7 @@
       </p:sp>
       <p:sp>
         <p:nvSpPr>
-          <p:cNvPr id="15" name="Text 13"/>
+          <p:cNvPr id="13" name="Text 11"/>
           <p:cNvSpPr/>
           <p:nvPr/>
         </p:nvSpPr>
@@ -7525,7 +6829,7 @@
       </p:sp>
       <p:sp>
         <p:nvSpPr>
-          <p:cNvPr id="16" name="Shape 14"/>
+          <p:cNvPr id="14" name="Shape 12"/>
           <p:cNvSpPr/>
           <p:nvPr/>
         </p:nvSpPr>
@@ -7559,7 +6863,7 @@
       </p:sp>
       <p:sp>
         <p:nvSpPr>
-          <p:cNvPr id="17" name="Shape 15"/>
+          <p:cNvPr id="15" name="Shape 13"/>
           <p:cNvSpPr/>
           <p:nvPr/>
         </p:nvSpPr>
@@ -7579,7 +6883,7 @@
       </p:sp>
       <p:sp>
         <p:nvSpPr>
-          <p:cNvPr id="18" name="Shape 16"/>
+          <p:cNvPr id="16" name="Shape 14"/>
           <p:cNvSpPr/>
           <p:nvPr/>
         </p:nvSpPr>
@@ -7599,7 +6903,7 @@
       </p:sp>
       <p:sp>
         <p:nvSpPr>
-          <p:cNvPr id="19" name="Shape 17"/>
+          <p:cNvPr id="17" name="Shape 15"/>
           <p:cNvSpPr/>
           <p:nvPr/>
         </p:nvSpPr>
@@ -7619,7 +6923,7 @@
       </p:sp>
       <p:sp>
         <p:nvSpPr>
-          <p:cNvPr id="20" name="Text 18"/>
+          <p:cNvPr id="18" name="Text 16"/>
           <p:cNvSpPr/>
           <p:nvPr/>
         </p:nvSpPr>
@@ -7721,7 +7025,7 @@
       </p:sp>
       <p:sp>
         <p:nvSpPr>
-          <p:cNvPr id="21" name="Shape 19"/>
+          <p:cNvPr id="19" name="Shape 17"/>
           <p:cNvSpPr/>
           <p:nvPr/>
         </p:nvSpPr>
@@ -7755,7 +7059,7 @@
       </p:sp>
       <p:sp>
         <p:nvSpPr>
-          <p:cNvPr id="22" name="Text 20"/>
+          <p:cNvPr id="20" name="Text 18"/>
           <p:cNvSpPr/>
           <p:nvPr/>
         </p:nvSpPr>
@@ -7794,7 +7098,7 @@
       </p:sp>
       <p:sp>
         <p:nvSpPr>
-          <p:cNvPr id="23" name="Text 21"/>
+          <p:cNvPr id="21" name="Text 19"/>
           <p:cNvSpPr/>
           <p:nvPr/>
         </p:nvSpPr>
@@ -7942,7 +7246,7 @@
       </p:sp>
       <p:sp>
         <p:nvSpPr>
-          <p:cNvPr id="24" name="Shape 22"/>
+          <p:cNvPr id="22" name="Shape 20"/>
           <p:cNvSpPr/>
           <p:nvPr/>
         </p:nvSpPr>
@@ -7976,7 +7280,7 @@
       </p:sp>
       <p:sp>
         <p:nvSpPr>
-          <p:cNvPr id="25" name="Text 23"/>
+          <p:cNvPr id="23" name="Text 21"/>
           <p:cNvSpPr/>
           <p:nvPr/>
         </p:nvSpPr>
@@ -8015,7 +7319,7 @@
       </p:sp>
       <p:sp>
         <p:nvSpPr>
-          <p:cNvPr id="26" name="Shape 24"/>
+          <p:cNvPr id="24" name="Shape 22"/>
           <p:cNvSpPr/>
           <p:nvPr/>
         </p:nvSpPr>
@@ -8049,7 +7353,7 @@
       </p:sp>
       <p:sp>
         <p:nvSpPr>
-          <p:cNvPr id="27" name="Shape 25"/>
+          <p:cNvPr id="25" name="Shape 23"/>
           <p:cNvSpPr/>
           <p:nvPr/>
         </p:nvSpPr>
@@ -8069,7 +7373,7 @@
       </p:sp>
       <p:sp>
         <p:nvSpPr>
-          <p:cNvPr id="28" name="Shape 26"/>
+          <p:cNvPr id="26" name="Shape 24"/>
           <p:cNvSpPr/>
           <p:nvPr/>
         </p:nvSpPr>
@@ -8089,7 +7393,7 @@
       </p:sp>
       <p:sp>
         <p:nvSpPr>
-          <p:cNvPr id="29" name="Shape 27"/>
+          <p:cNvPr id="27" name="Shape 25"/>
           <p:cNvSpPr/>
           <p:nvPr/>
         </p:nvSpPr>
@@ -8109,7 +7413,7 @@
       </p:sp>
       <p:sp>
         <p:nvSpPr>
-          <p:cNvPr id="30" name="Text 28"/>
+          <p:cNvPr id="28" name="Text 26"/>
           <p:cNvSpPr/>
           <p:nvPr/>
         </p:nvSpPr>
@@ -8191,7 +7495,7 @@
       </p:sp>
       <p:sp>
         <p:nvSpPr>
-          <p:cNvPr id="31" name="Text 29"/>
+          <p:cNvPr id="29" name="Text 27"/>
           <p:cNvSpPr/>
           <p:nvPr/>
         </p:nvSpPr>
@@ -8244,73 +7548,7 @@
       </p:sp>
       <p:sp>
         <p:nvSpPr>
-          <p:cNvPr id="32" name="Shape 30"/>
-          <p:cNvSpPr/>
-          <p:nvPr/>
-        </p:nvSpPr>
-        <p:spPr>
-          <a:xfrm>
-            <a:off x="9601200" y="6355080"/>
-            <a:ext cx="1280160" cy="256032"/>
-          </a:xfrm>
-          <a:prstGeom prst="roundRect">
-            <a:avLst>
-              <a:gd name="adj" fmla="val 21429"/>
-            </a:avLst>
-          </a:prstGeom>
-          <a:solidFill>
-            <a:srgbClr val="1A1D27"/>
-          </a:solidFill>
-          <a:ln w="12700">
-            <a:solidFill>
-              <a:srgbClr val="2A2F3E"/>
-            </a:solidFill>
-            <a:prstDash val="solid"/>
-          </a:ln>
-        </p:spPr>
-      </p:sp>
-      <p:sp>
-        <p:nvSpPr>
-          <p:cNvPr id="33" name="Text 31"/>
-          <p:cNvSpPr/>
-          <p:nvPr/>
-        </p:nvSpPr>
-        <p:spPr>
-          <a:xfrm>
-            <a:off x="9601200" y="6355080"/>
-            <a:ext cx="1280160" cy="256032"/>
-          </a:xfrm>
-          <a:prstGeom prst="rect">
-            <a:avLst/>
-          </a:prstGeom>
-          <a:noFill/>
-          <a:ln/>
-        </p:spPr>
-        <p:txBody>
-          <a:bodyPr wrap="square" lIns="0" tIns="0" rIns="0" bIns="0" rtlCol="0" anchor="ctr"/>
-          <a:lstStyle/>
-          <a:p>
-            <a:pPr algn="ctr" indent="0" marL="0">
-              <a:buNone/>
-            </a:pPr>
-            <a:r>
-              <a:rPr lang="en-US" sz="900" b="1" dirty="0">
-                <a:solidFill>
-                  <a:srgbClr val="FFB347"/>
-                </a:solidFill>
-                <a:latin typeface="Calibri" pitchFamily="34" charset="0"/>
-                <a:ea typeface="Calibri" pitchFamily="34" charset="-122"/>
-                <a:cs typeface="Calibri" pitchFamily="34" charset="-120"/>
-              </a:rPr>
-              <a:t>Member 5</a:t>
-            </a:r>
-            <a:endParaRPr lang="en-US" sz="900" dirty="0"/>
-          </a:p>
-        </p:txBody>
-      </p:sp>
-      <p:sp>
-        <p:nvSpPr>
-          <p:cNvPr id="34" name="Text 32"/>
+          <p:cNvPr id="30" name="Text 28"/>
           <p:cNvSpPr/>
           <p:nvPr/>
         </p:nvSpPr>
@@ -8432,7 +7670,7 @@
                 <a:ea typeface="Calibri" pitchFamily="34" charset="-122"/>
                 <a:cs typeface="Calibri" pitchFamily="34" charset="-120"/>
               </a:rPr>
-              <a:t>MEMBER 6  ·  CONCLUSION</a:t>
+              <a:t>CONCLUSION</a:t>
             </a:r>
             <a:endParaRPr lang="en-US" sz="1200" dirty="0"/>
           </a:p>
@@ -8480,72 +7718,6 @@
       <p:sp>
         <p:nvSpPr>
           <p:cNvPr id="5" name="Shape 3"/>
-          <p:cNvSpPr/>
-          <p:nvPr/>
-        </p:nvSpPr>
-        <p:spPr>
-          <a:xfrm>
-            <a:off x="9601200" y="384048"/>
-            <a:ext cx="1920240" cy="292608"/>
-          </a:xfrm>
-          <a:prstGeom prst="roundRect">
-            <a:avLst>
-              <a:gd name="adj" fmla="val 18750"/>
-            </a:avLst>
-          </a:prstGeom>
-          <a:solidFill>
-            <a:srgbClr val="1A1D27"/>
-          </a:solidFill>
-          <a:ln w="25400">
-            <a:solidFill>
-              <a:srgbClr val="FFB347"/>
-            </a:solidFill>
-            <a:prstDash val="solid"/>
-          </a:ln>
-        </p:spPr>
-      </p:sp>
-      <p:sp>
-        <p:nvSpPr>
-          <p:cNvPr id="6" name="Text 4"/>
-          <p:cNvSpPr/>
-          <p:nvPr/>
-        </p:nvSpPr>
-        <p:spPr>
-          <a:xfrm>
-            <a:off x="9601200" y="384048"/>
-            <a:ext cx="1920240" cy="292608"/>
-          </a:xfrm>
-          <a:prstGeom prst="rect">
-            <a:avLst/>
-          </a:prstGeom>
-          <a:noFill/>
-          <a:ln/>
-        </p:spPr>
-        <p:txBody>
-          <a:bodyPr wrap="square" lIns="0" tIns="0" rIns="0" bIns="0" rtlCol="0" anchor="ctr"/>
-          <a:lstStyle/>
-          <a:p>
-            <a:pPr algn="ctr" indent="0" marL="0">
-              <a:buNone/>
-            </a:pPr>
-            <a:r>
-              <a:rPr lang="en-US" sz="950" b="1" dirty="0">
-                <a:solidFill>
-                  <a:srgbClr val="FFB347"/>
-                </a:solidFill>
-                <a:latin typeface="Calibri" pitchFamily="34" charset="0"/>
-                <a:ea typeface="Calibri" pitchFamily="34" charset="-122"/>
-                <a:cs typeface="Calibri" pitchFamily="34" charset="-120"/>
-              </a:rPr>
-              <a:t>◀  Member 6  ·  Conclusion</a:t>
-            </a:r>
-            <a:endParaRPr lang="en-US" sz="950" dirty="0"/>
-          </a:p>
-        </p:txBody>
-      </p:sp>
-      <p:sp>
-        <p:nvSpPr>
-          <p:cNvPr id="7" name="Shape 5"/>
           <p:cNvSpPr/>
           <p:nvPr/>
         </p:nvSpPr>
@@ -8579,7 +7751,7 @@
       </p:sp>
       <p:sp>
         <p:nvSpPr>
-          <p:cNvPr id="8" name="Shape 6"/>
+          <p:cNvPr id="6" name="Shape 4"/>
           <p:cNvSpPr/>
           <p:nvPr/>
         </p:nvSpPr>
@@ -8599,7 +7771,7 @@
       </p:sp>
       <p:sp>
         <p:nvSpPr>
-          <p:cNvPr id="9" name="Text 7"/>
+          <p:cNvPr id="7" name="Text 5"/>
           <p:cNvSpPr/>
           <p:nvPr/>
         </p:nvSpPr>
@@ -8638,7 +7810,7 @@
       </p:sp>
       <p:sp>
         <p:nvSpPr>
-          <p:cNvPr id="10" name="Text 8"/>
+          <p:cNvPr id="8" name="Text 6"/>
           <p:cNvSpPr/>
           <p:nvPr/>
         </p:nvSpPr>
@@ -8677,7 +7849,7 @@
       </p:sp>
       <p:sp>
         <p:nvSpPr>
-          <p:cNvPr id="11" name="Shape 9"/>
+          <p:cNvPr id="9" name="Shape 7"/>
           <p:cNvSpPr/>
           <p:nvPr/>
         </p:nvSpPr>
@@ -8697,7 +7869,7 @@
       </p:sp>
       <p:sp>
         <p:nvSpPr>
-          <p:cNvPr id="12" name="Text 10"/>
+          <p:cNvPr id="10" name="Text 8"/>
           <p:cNvSpPr/>
           <p:nvPr/>
         </p:nvSpPr>
@@ -8788,7 +7960,7 @@
       </p:sp>
       <p:sp>
         <p:nvSpPr>
-          <p:cNvPr id="13" name="Shape 11"/>
+          <p:cNvPr id="11" name="Shape 9"/>
           <p:cNvSpPr/>
           <p:nvPr/>
         </p:nvSpPr>
@@ -8808,7 +7980,7 @@
       </p:sp>
       <p:sp>
         <p:nvSpPr>
-          <p:cNvPr id="14" name="Shape 12"/>
+          <p:cNvPr id="12" name="Shape 10"/>
           <p:cNvSpPr/>
           <p:nvPr/>
         </p:nvSpPr>
@@ -8842,7 +8014,7 @@
       </p:sp>
       <p:sp>
         <p:nvSpPr>
-          <p:cNvPr id="15" name="Shape 13"/>
+          <p:cNvPr id="13" name="Shape 11"/>
           <p:cNvSpPr/>
           <p:nvPr/>
         </p:nvSpPr>
@@ -8862,7 +8034,7 @@
       </p:sp>
       <p:sp>
         <p:nvSpPr>
-          <p:cNvPr id="16" name="Text 14"/>
+          <p:cNvPr id="14" name="Text 12"/>
           <p:cNvSpPr/>
           <p:nvPr/>
         </p:nvSpPr>
@@ -8901,7 +8073,7 @@
       </p:sp>
       <p:sp>
         <p:nvSpPr>
-          <p:cNvPr id="17" name="Text 15"/>
+          <p:cNvPr id="15" name="Text 13"/>
           <p:cNvSpPr/>
           <p:nvPr/>
         </p:nvSpPr>
@@ -8940,7 +8112,7 @@
       </p:sp>
       <p:sp>
         <p:nvSpPr>
-          <p:cNvPr id="18" name="Shape 16"/>
+          <p:cNvPr id="16" name="Shape 14"/>
           <p:cNvSpPr/>
           <p:nvPr/>
         </p:nvSpPr>
@@ -8960,7 +8132,7 @@
       </p:sp>
       <p:sp>
         <p:nvSpPr>
-          <p:cNvPr id="19" name="Text 17"/>
+          <p:cNvPr id="17" name="Text 15"/>
           <p:cNvSpPr/>
           <p:nvPr/>
         </p:nvSpPr>
@@ -9071,7 +8243,7 @@
       </p:sp>
       <p:sp>
         <p:nvSpPr>
-          <p:cNvPr id="20" name="Shape 18"/>
+          <p:cNvPr id="18" name="Shape 16"/>
           <p:cNvSpPr/>
           <p:nvPr/>
         </p:nvSpPr>
@@ -9091,7 +8263,7 @@
       </p:sp>
       <p:sp>
         <p:nvSpPr>
-          <p:cNvPr id="21" name="Shape 19"/>
+          <p:cNvPr id="19" name="Shape 17"/>
           <p:cNvSpPr/>
           <p:nvPr/>
         </p:nvSpPr>
@@ -9125,7 +8297,7 @@
       </p:sp>
       <p:sp>
         <p:nvSpPr>
-          <p:cNvPr id="22" name="Shape 20"/>
+          <p:cNvPr id="20" name="Shape 18"/>
           <p:cNvSpPr/>
           <p:nvPr/>
         </p:nvSpPr>
@@ -9145,7 +8317,7 @@
       </p:sp>
       <p:sp>
         <p:nvSpPr>
-          <p:cNvPr id="23" name="Text 21"/>
+          <p:cNvPr id="21" name="Text 19"/>
           <p:cNvSpPr/>
           <p:nvPr/>
         </p:nvSpPr>
@@ -9184,7 +8356,7 @@
       </p:sp>
       <p:sp>
         <p:nvSpPr>
-          <p:cNvPr id="24" name="Text 22"/>
+          <p:cNvPr id="22" name="Text 20"/>
           <p:cNvSpPr/>
           <p:nvPr/>
         </p:nvSpPr>
@@ -9223,7 +8395,7 @@
       </p:sp>
       <p:sp>
         <p:nvSpPr>
-          <p:cNvPr id="25" name="Shape 23"/>
+          <p:cNvPr id="23" name="Shape 21"/>
           <p:cNvSpPr/>
           <p:nvPr/>
         </p:nvSpPr>
@@ -9243,7 +8415,7 @@
       </p:sp>
       <p:sp>
         <p:nvSpPr>
-          <p:cNvPr id="26" name="Text 24"/>
+          <p:cNvPr id="24" name="Text 22"/>
           <p:cNvSpPr/>
           <p:nvPr/>
         </p:nvSpPr>
@@ -9354,7 +8526,7 @@
       </p:sp>
       <p:sp>
         <p:nvSpPr>
-          <p:cNvPr id="27" name="Shape 25"/>
+          <p:cNvPr id="25" name="Shape 23"/>
           <p:cNvSpPr/>
           <p:nvPr/>
         </p:nvSpPr>
@@ -9374,7 +8546,7 @@
       </p:sp>
       <p:sp>
         <p:nvSpPr>
-          <p:cNvPr id="28" name="Shape 26"/>
+          <p:cNvPr id="26" name="Shape 24"/>
           <p:cNvSpPr/>
           <p:nvPr/>
         </p:nvSpPr>
@@ -9408,7 +8580,7 @@
       </p:sp>
       <p:sp>
         <p:nvSpPr>
-          <p:cNvPr id="29" name="Shape 27"/>
+          <p:cNvPr id="27" name="Shape 25"/>
           <p:cNvSpPr/>
           <p:nvPr/>
         </p:nvSpPr>
@@ -9428,7 +8600,7 @@
       </p:sp>
       <p:sp>
         <p:nvSpPr>
-          <p:cNvPr id="30" name="Text 28"/>
+          <p:cNvPr id="28" name="Text 26"/>
           <p:cNvSpPr/>
           <p:nvPr/>
         </p:nvSpPr>
@@ -9467,7 +8639,7 @@
       </p:sp>
       <p:sp>
         <p:nvSpPr>
-          <p:cNvPr id="31" name="Text 29"/>
+          <p:cNvPr id="29" name="Text 27"/>
           <p:cNvSpPr/>
           <p:nvPr/>
         </p:nvSpPr>
@@ -9506,7 +8678,7 @@
       </p:sp>
       <p:sp>
         <p:nvSpPr>
-          <p:cNvPr id="32" name="Shape 30"/>
+          <p:cNvPr id="30" name="Shape 28"/>
           <p:cNvSpPr/>
           <p:nvPr/>
         </p:nvSpPr>
@@ -9526,7 +8698,7 @@
       </p:sp>
       <p:sp>
         <p:nvSpPr>
-          <p:cNvPr id="33" name="Text 31"/>
+          <p:cNvPr id="31" name="Text 29"/>
           <p:cNvSpPr/>
           <p:nvPr/>
         </p:nvSpPr>
@@ -9637,7 +8809,7 @@
       </p:sp>
       <p:sp>
         <p:nvSpPr>
-          <p:cNvPr id="34" name="Shape 32"/>
+          <p:cNvPr id="32" name="Shape 30"/>
           <p:cNvSpPr/>
           <p:nvPr/>
         </p:nvSpPr>
@@ -9657,7 +8829,7 @@
       </p:sp>
       <p:sp>
         <p:nvSpPr>
-          <p:cNvPr id="35" name="Shape 33"/>
+          <p:cNvPr id="33" name="Shape 31"/>
           <p:cNvSpPr/>
           <p:nvPr/>
         </p:nvSpPr>
@@ -9691,7 +8863,7 @@
       </p:sp>
       <p:sp>
         <p:nvSpPr>
-          <p:cNvPr id="36" name="Shape 34"/>
+          <p:cNvPr id="34" name="Shape 32"/>
           <p:cNvSpPr/>
           <p:nvPr/>
         </p:nvSpPr>
@@ -9711,7 +8883,7 @@
       </p:sp>
       <p:sp>
         <p:nvSpPr>
-          <p:cNvPr id="37" name="Text 35"/>
+          <p:cNvPr id="35" name="Text 33"/>
           <p:cNvSpPr/>
           <p:nvPr/>
         </p:nvSpPr>
@@ -9750,7 +8922,7 @@
       </p:sp>
       <p:sp>
         <p:nvSpPr>
-          <p:cNvPr id="38" name="Text 36"/>
+          <p:cNvPr id="36" name="Text 34"/>
           <p:cNvSpPr/>
           <p:nvPr/>
         </p:nvSpPr>
@@ -9789,7 +8961,7 @@
       </p:sp>
       <p:sp>
         <p:nvSpPr>
-          <p:cNvPr id="39" name="Shape 37"/>
+          <p:cNvPr id="37" name="Shape 35"/>
           <p:cNvSpPr/>
           <p:nvPr/>
         </p:nvSpPr>
@@ -9809,7 +8981,7 @@
       </p:sp>
       <p:sp>
         <p:nvSpPr>
-          <p:cNvPr id="40" name="Text 38"/>
+          <p:cNvPr id="38" name="Text 36"/>
           <p:cNvSpPr/>
           <p:nvPr/>
         </p:nvSpPr>
@@ -9920,7 +9092,7 @@
       </p:sp>
       <p:sp>
         <p:nvSpPr>
-          <p:cNvPr id="41" name="Shape 39"/>
+          <p:cNvPr id="39" name="Shape 37"/>
           <p:cNvSpPr/>
           <p:nvPr/>
         </p:nvSpPr>
@@ -9954,7 +9126,7 @@
       </p:sp>
       <p:sp>
         <p:nvSpPr>
-          <p:cNvPr id="42" name="Text 40"/>
+          <p:cNvPr id="40" name="Text 38"/>
           <p:cNvSpPr/>
           <p:nvPr/>
         </p:nvSpPr>
@@ -9993,7 +9165,7 @@
       </p:sp>
       <p:sp>
         <p:nvSpPr>
-          <p:cNvPr id="43" name="Text 41"/>
+          <p:cNvPr id="41" name="Text 39"/>
           <p:cNvSpPr/>
           <p:nvPr/>
         </p:nvSpPr>
@@ -10046,73 +9218,7 @@
       </p:sp>
       <p:sp>
         <p:nvSpPr>
-          <p:cNvPr id="44" name="Shape 42"/>
-          <p:cNvSpPr/>
-          <p:nvPr/>
-        </p:nvSpPr>
-        <p:spPr>
-          <a:xfrm>
-            <a:off x="9601200" y="6355080"/>
-            <a:ext cx="1280160" cy="256032"/>
-          </a:xfrm>
-          <a:prstGeom prst="roundRect">
-            <a:avLst>
-              <a:gd name="adj" fmla="val 21429"/>
-            </a:avLst>
-          </a:prstGeom>
-          <a:solidFill>
-            <a:srgbClr val="1A1D27"/>
-          </a:solidFill>
-          <a:ln w="12700">
-            <a:solidFill>
-              <a:srgbClr val="2A2F3E"/>
-            </a:solidFill>
-            <a:prstDash val="solid"/>
-          </a:ln>
-        </p:spPr>
-      </p:sp>
-      <p:sp>
-        <p:nvSpPr>
-          <p:cNvPr id="45" name="Text 43"/>
-          <p:cNvSpPr/>
-          <p:nvPr/>
-        </p:nvSpPr>
-        <p:spPr>
-          <a:xfrm>
-            <a:off x="9601200" y="6355080"/>
-            <a:ext cx="1280160" cy="256032"/>
-          </a:xfrm>
-          <a:prstGeom prst="rect">
-            <a:avLst/>
-          </a:prstGeom>
-          <a:noFill/>
-          <a:ln/>
-        </p:spPr>
-        <p:txBody>
-          <a:bodyPr wrap="square" lIns="0" tIns="0" rIns="0" bIns="0" rtlCol="0" anchor="ctr"/>
-          <a:lstStyle/>
-          <a:p>
-            <a:pPr algn="ctr" indent="0" marL="0">
-              <a:buNone/>
-            </a:pPr>
-            <a:r>
-              <a:rPr lang="en-US" sz="900" b="1" dirty="0">
-                <a:solidFill>
-                  <a:srgbClr val="FFB347"/>
-                </a:solidFill>
-                <a:latin typeface="Calibri" pitchFamily="34" charset="0"/>
-                <a:ea typeface="Calibri" pitchFamily="34" charset="-122"/>
-                <a:cs typeface="Calibri" pitchFamily="34" charset="-120"/>
-              </a:rPr>
-              <a:t>Member 6</a:t>
-            </a:r>
-            <a:endParaRPr lang="en-US" sz="900" dirty="0"/>
-          </a:p>
-        </p:txBody>
-      </p:sp>
-      <p:sp>
-        <p:nvSpPr>
-          <p:cNvPr id="46" name="Text 44"/>
+          <p:cNvPr id="42" name="Text 40"/>
           <p:cNvSpPr/>
           <p:nvPr/>
         </p:nvSpPr>
@@ -10234,7 +9340,7 @@
                 <a:ea typeface="Calibri" pitchFamily="34" charset="-122"/>
                 <a:cs typeface="Calibri" pitchFamily="34" charset="-120"/>
               </a:rPr>
-              <a:t>MEMBER 6  ·  CONCLUSION</a:t>
+              <a:t>CONCLUSION</a:t>
             </a:r>
             <a:endParaRPr lang="en-US" sz="1200" dirty="0"/>
           </a:p>
@@ -10281,73 +9387,7 @@
       </p:sp>
       <p:sp>
         <p:nvSpPr>
-          <p:cNvPr id="5" name="Shape 3"/>
-          <p:cNvSpPr/>
-          <p:nvPr/>
-        </p:nvSpPr>
-        <p:spPr>
-          <a:xfrm>
-            <a:off x="9601200" y="384048"/>
-            <a:ext cx="1920240" cy="292608"/>
-          </a:xfrm>
-          <a:prstGeom prst="roundRect">
-            <a:avLst>
-              <a:gd name="adj" fmla="val 18750"/>
-            </a:avLst>
-          </a:prstGeom>
-          <a:solidFill>
-            <a:srgbClr val="1A1D27"/>
-          </a:solidFill>
-          <a:ln w="25400">
-            <a:solidFill>
-              <a:srgbClr val="FFB347"/>
-            </a:solidFill>
-            <a:prstDash val="solid"/>
-          </a:ln>
-        </p:spPr>
-      </p:sp>
-      <p:sp>
-        <p:nvSpPr>
-          <p:cNvPr id="6" name="Text 4"/>
-          <p:cNvSpPr/>
-          <p:nvPr/>
-        </p:nvSpPr>
-        <p:spPr>
-          <a:xfrm>
-            <a:off x="9601200" y="384048"/>
-            <a:ext cx="1920240" cy="292608"/>
-          </a:xfrm>
-          <a:prstGeom prst="rect">
-            <a:avLst/>
-          </a:prstGeom>
-          <a:noFill/>
-          <a:ln/>
-        </p:spPr>
-        <p:txBody>
-          <a:bodyPr wrap="square" lIns="0" tIns="0" rIns="0" bIns="0" rtlCol="0" anchor="ctr"/>
-          <a:lstStyle/>
-          <a:p>
-            <a:pPr algn="ctr" indent="0" marL="0">
-              <a:buNone/>
-            </a:pPr>
-            <a:r>
-              <a:rPr lang="en-US" sz="950" b="1" dirty="0">
-                <a:solidFill>
-                  <a:srgbClr val="FFB347"/>
-                </a:solidFill>
-                <a:latin typeface="Calibri" pitchFamily="34" charset="0"/>
-                <a:ea typeface="Calibri" pitchFamily="34" charset="-122"/>
-                <a:cs typeface="Calibri" pitchFamily="34" charset="-120"/>
-              </a:rPr>
-              <a:t>◀  Member 6  ·  Conclusion</a:t>
-            </a:r>
-            <a:endParaRPr lang="en-US" sz="950" dirty="0"/>
-          </a:p>
-        </p:txBody>
-      </p:sp>
-      <p:sp>
-        <p:nvSpPr>
-          <p:cNvPr id="7" name="Text 5"/>
+          <p:cNvPr id="5" name="Text 3"/>
           <p:cNvSpPr/>
           <p:nvPr/>
         </p:nvSpPr>
@@ -10386,7 +9426,7 @@
       </p:sp>
       <p:sp>
         <p:nvSpPr>
-          <p:cNvPr id="8" name="Text 6"/>
+          <p:cNvPr id="6" name="Text 4"/>
           <p:cNvSpPr/>
           <p:nvPr/>
         </p:nvSpPr>
@@ -10425,7 +9465,7 @@
       </p:sp>
       <p:sp>
         <p:nvSpPr>
-          <p:cNvPr id="9" name="Text 7"/>
+          <p:cNvPr id="7" name="Text 5"/>
           <p:cNvSpPr/>
           <p:nvPr/>
         </p:nvSpPr>
@@ -10464,7 +9504,7 @@
       </p:sp>
       <p:sp>
         <p:nvSpPr>
-          <p:cNvPr id="10" name="Text 8"/>
+          <p:cNvPr id="8" name="Text 6"/>
           <p:cNvSpPr/>
           <p:nvPr/>
         </p:nvSpPr>
@@ -10503,7 +9543,7 @@
       </p:sp>
       <p:sp>
         <p:nvSpPr>
-          <p:cNvPr id="11" name="Shape 9"/>
+          <p:cNvPr id="9" name="Shape 7"/>
           <p:cNvSpPr/>
           <p:nvPr/>
         </p:nvSpPr>
@@ -10523,7 +9563,7 @@
       </p:sp>
       <p:sp>
         <p:nvSpPr>
-          <p:cNvPr id="12" name="Text 10"/>
+          <p:cNvPr id="10" name="Text 8"/>
           <p:cNvSpPr/>
           <p:nvPr/>
         </p:nvSpPr>
@@ -10562,7 +9602,7 @@
       </p:sp>
       <p:sp>
         <p:nvSpPr>
-          <p:cNvPr id="13" name="Text 11"/>
+          <p:cNvPr id="11" name="Text 9"/>
           <p:cNvSpPr/>
           <p:nvPr/>
         </p:nvSpPr>
@@ -10601,7 +9641,7 @@
       </p:sp>
       <p:sp>
         <p:nvSpPr>
-          <p:cNvPr id="14" name="Text 12"/>
+          <p:cNvPr id="12" name="Text 10"/>
           <p:cNvSpPr/>
           <p:nvPr/>
         </p:nvSpPr>
@@ -10640,7 +9680,7 @@
       </p:sp>
       <p:sp>
         <p:nvSpPr>
-          <p:cNvPr id="15" name="Text 13"/>
+          <p:cNvPr id="13" name="Text 11"/>
           <p:cNvSpPr/>
           <p:nvPr/>
         </p:nvSpPr>
@@ -10679,7 +9719,7 @@
       </p:sp>
       <p:sp>
         <p:nvSpPr>
-          <p:cNvPr id="16" name="Shape 14"/>
+          <p:cNvPr id="14" name="Shape 12"/>
           <p:cNvSpPr/>
           <p:nvPr/>
         </p:nvSpPr>
@@ -10699,7 +9739,7 @@
       </p:sp>
       <p:sp>
         <p:nvSpPr>
-          <p:cNvPr id="17" name="Text 15"/>
+          <p:cNvPr id="15" name="Text 13"/>
           <p:cNvSpPr/>
           <p:nvPr/>
         </p:nvSpPr>
@@ -10738,7 +9778,7 @@
       </p:sp>
       <p:sp>
         <p:nvSpPr>
-          <p:cNvPr id="18" name="Text 16"/>
+          <p:cNvPr id="16" name="Text 14"/>
           <p:cNvSpPr/>
           <p:nvPr/>
         </p:nvSpPr>
@@ -10777,7 +9817,7 @@
       </p:sp>
       <p:sp>
         <p:nvSpPr>
-          <p:cNvPr id="19" name="Text 17"/>
+          <p:cNvPr id="17" name="Text 15"/>
           <p:cNvSpPr/>
           <p:nvPr/>
         </p:nvSpPr>
@@ -10816,7 +9856,7 @@
       </p:sp>
       <p:sp>
         <p:nvSpPr>
-          <p:cNvPr id="20" name="Text 18"/>
+          <p:cNvPr id="18" name="Text 16"/>
           <p:cNvSpPr/>
           <p:nvPr/>
         </p:nvSpPr>
@@ -10855,7 +9895,7 @@
       </p:sp>
       <p:sp>
         <p:nvSpPr>
-          <p:cNvPr id="21" name="Shape 19"/>
+          <p:cNvPr id="19" name="Shape 17"/>
           <p:cNvSpPr/>
           <p:nvPr/>
         </p:nvSpPr>
@@ -10875,7 +9915,7 @@
       </p:sp>
       <p:sp>
         <p:nvSpPr>
-          <p:cNvPr id="22" name="Text 20"/>
+          <p:cNvPr id="20" name="Text 18"/>
           <p:cNvSpPr/>
           <p:nvPr/>
         </p:nvSpPr>
@@ -10914,7 +9954,7 @@
       </p:sp>
       <p:sp>
         <p:nvSpPr>
-          <p:cNvPr id="23" name="Text 21"/>
+          <p:cNvPr id="21" name="Text 19"/>
           <p:cNvSpPr/>
           <p:nvPr/>
         </p:nvSpPr>
@@ -10953,7 +9993,7 @@
       </p:sp>
       <p:sp>
         <p:nvSpPr>
-          <p:cNvPr id="24" name="Text 22"/>
+          <p:cNvPr id="22" name="Text 20"/>
           <p:cNvSpPr/>
           <p:nvPr/>
         </p:nvSpPr>
@@ -10992,7 +10032,7 @@
       </p:sp>
       <p:sp>
         <p:nvSpPr>
-          <p:cNvPr id="25" name="Text 23"/>
+          <p:cNvPr id="23" name="Text 21"/>
           <p:cNvSpPr/>
           <p:nvPr/>
         </p:nvSpPr>
@@ -11031,7 +10071,7 @@
       </p:sp>
       <p:sp>
         <p:nvSpPr>
-          <p:cNvPr id="26" name="Shape 24"/>
+          <p:cNvPr id="24" name="Shape 22"/>
           <p:cNvSpPr/>
           <p:nvPr/>
         </p:nvSpPr>
@@ -11051,7 +10091,7 @@
       </p:sp>
       <p:sp>
         <p:nvSpPr>
-          <p:cNvPr id="27" name="Text 25"/>
+          <p:cNvPr id="25" name="Text 23"/>
           <p:cNvSpPr/>
           <p:nvPr/>
         </p:nvSpPr>
@@ -11090,7 +10130,7 @@
       </p:sp>
       <p:sp>
         <p:nvSpPr>
-          <p:cNvPr id="28" name="Text 26"/>
+          <p:cNvPr id="26" name="Text 24"/>
           <p:cNvSpPr/>
           <p:nvPr/>
         </p:nvSpPr>
@@ -11129,7 +10169,7 @@
       </p:sp>
       <p:sp>
         <p:nvSpPr>
-          <p:cNvPr id="29" name="Text 27"/>
+          <p:cNvPr id="27" name="Text 25"/>
           <p:cNvSpPr/>
           <p:nvPr/>
         </p:nvSpPr>
@@ -11168,7 +10208,7 @@
       </p:sp>
       <p:sp>
         <p:nvSpPr>
-          <p:cNvPr id="30" name="Text 28"/>
+          <p:cNvPr id="28" name="Text 26"/>
           <p:cNvSpPr/>
           <p:nvPr/>
         </p:nvSpPr>
@@ -11207,7 +10247,7 @@
       </p:sp>
       <p:sp>
         <p:nvSpPr>
-          <p:cNvPr id="31" name="Shape 29"/>
+          <p:cNvPr id="29" name="Shape 27"/>
           <p:cNvSpPr/>
           <p:nvPr/>
         </p:nvSpPr>
@@ -11227,7 +10267,7 @@
       </p:sp>
       <p:sp>
         <p:nvSpPr>
-          <p:cNvPr id="32" name="Text 30"/>
+          <p:cNvPr id="30" name="Text 28"/>
           <p:cNvSpPr/>
           <p:nvPr/>
         </p:nvSpPr>
@@ -11266,7 +10306,7 @@
       </p:sp>
       <p:sp>
         <p:nvSpPr>
-          <p:cNvPr id="33" name="Shape 31"/>
+          <p:cNvPr id="31" name="Shape 29"/>
           <p:cNvSpPr/>
           <p:nvPr/>
         </p:nvSpPr>
@@ -11300,7 +10340,7 @@
       </p:sp>
       <p:sp>
         <p:nvSpPr>
-          <p:cNvPr id="34" name="Text 32"/>
+          <p:cNvPr id="32" name="Text 30"/>
           <p:cNvSpPr/>
           <p:nvPr/>
         </p:nvSpPr>
@@ -11339,7 +10379,7 @@
       </p:sp>
       <p:sp>
         <p:nvSpPr>
-          <p:cNvPr id="35" name="Text 33"/>
+          <p:cNvPr id="33" name="Text 31"/>
           <p:cNvSpPr/>
           <p:nvPr/>
         </p:nvSpPr>
@@ -11381,7 +10421,7 @@
       </p:sp>
       <p:sp>
         <p:nvSpPr>
-          <p:cNvPr id="36" name="Shape 34"/>
+          <p:cNvPr id="34" name="Shape 32"/>
           <p:cNvSpPr/>
           <p:nvPr/>
         </p:nvSpPr>
@@ -11415,7 +10455,7 @@
       </p:sp>
       <p:sp>
         <p:nvSpPr>
-          <p:cNvPr id="37" name="Text 35"/>
+          <p:cNvPr id="35" name="Text 33"/>
           <p:cNvSpPr/>
           <p:nvPr/>
         </p:nvSpPr>
@@ -11454,7 +10494,7 @@
       </p:sp>
       <p:sp>
         <p:nvSpPr>
-          <p:cNvPr id="38" name="Text 36"/>
+          <p:cNvPr id="36" name="Text 34"/>
           <p:cNvSpPr/>
           <p:nvPr/>
         </p:nvSpPr>
@@ -11496,7 +10536,7 @@
       </p:sp>
       <p:sp>
         <p:nvSpPr>
-          <p:cNvPr id="39" name="Shape 37"/>
+          <p:cNvPr id="37" name="Shape 35"/>
           <p:cNvSpPr/>
           <p:nvPr/>
         </p:nvSpPr>
@@ -11530,7 +10570,7 @@
       </p:sp>
       <p:sp>
         <p:nvSpPr>
-          <p:cNvPr id="40" name="Text 38"/>
+          <p:cNvPr id="38" name="Text 36"/>
           <p:cNvSpPr/>
           <p:nvPr/>
         </p:nvSpPr>
@@ -11569,7 +10609,7 @@
       </p:sp>
       <p:sp>
         <p:nvSpPr>
-          <p:cNvPr id="41" name="Text 39"/>
+          <p:cNvPr id="39" name="Text 37"/>
           <p:cNvSpPr/>
           <p:nvPr/>
         </p:nvSpPr>
@@ -11611,7 +10651,7 @@
       </p:sp>
       <p:sp>
         <p:nvSpPr>
-          <p:cNvPr id="42" name="Shape 40"/>
+          <p:cNvPr id="40" name="Shape 38"/>
           <p:cNvSpPr/>
           <p:nvPr/>
         </p:nvSpPr>
@@ -11645,7 +10685,7 @@
       </p:sp>
       <p:sp>
         <p:nvSpPr>
-          <p:cNvPr id="43" name="Text 41"/>
+          <p:cNvPr id="41" name="Text 39"/>
           <p:cNvSpPr/>
           <p:nvPr/>
         </p:nvSpPr>
@@ -11684,7 +10724,7 @@
       </p:sp>
       <p:sp>
         <p:nvSpPr>
-          <p:cNvPr id="44" name="Text 42"/>
+          <p:cNvPr id="42" name="Text 40"/>
           <p:cNvSpPr/>
           <p:nvPr/>
         </p:nvSpPr>
@@ -11726,7 +10766,7 @@
       </p:sp>
       <p:sp>
         <p:nvSpPr>
-          <p:cNvPr id="45" name="Text 43"/>
+          <p:cNvPr id="43" name="Text 41"/>
           <p:cNvSpPr/>
           <p:nvPr/>
         </p:nvSpPr>
@@ -11779,73 +10819,7 @@
       </p:sp>
       <p:sp>
         <p:nvSpPr>
-          <p:cNvPr id="46" name="Shape 44"/>
-          <p:cNvSpPr/>
-          <p:nvPr/>
-        </p:nvSpPr>
-        <p:spPr>
-          <a:xfrm>
-            <a:off x="9601200" y="6355080"/>
-            <a:ext cx="1280160" cy="256032"/>
-          </a:xfrm>
-          <a:prstGeom prst="roundRect">
-            <a:avLst>
-              <a:gd name="adj" fmla="val 21429"/>
-            </a:avLst>
-          </a:prstGeom>
-          <a:solidFill>
-            <a:srgbClr val="1A1D27"/>
-          </a:solidFill>
-          <a:ln w="12700">
-            <a:solidFill>
-              <a:srgbClr val="2A2F3E"/>
-            </a:solidFill>
-            <a:prstDash val="solid"/>
-          </a:ln>
-        </p:spPr>
-      </p:sp>
-      <p:sp>
-        <p:nvSpPr>
-          <p:cNvPr id="47" name="Text 45"/>
-          <p:cNvSpPr/>
-          <p:nvPr/>
-        </p:nvSpPr>
-        <p:spPr>
-          <a:xfrm>
-            <a:off x="9601200" y="6355080"/>
-            <a:ext cx="1280160" cy="256032"/>
-          </a:xfrm>
-          <a:prstGeom prst="rect">
-            <a:avLst/>
-          </a:prstGeom>
-          <a:noFill/>
-          <a:ln/>
-        </p:spPr>
-        <p:txBody>
-          <a:bodyPr wrap="square" lIns="0" tIns="0" rIns="0" bIns="0" rtlCol="0" anchor="ctr"/>
-          <a:lstStyle/>
-          <a:p>
-            <a:pPr algn="ctr" indent="0" marL="0">
-              <a:buNone/>
-            </a:pPr>
-            <a:r>
-              <a:rPr lang="en-US" sz="900" b="1" dirty="0">
-                <a:solidFill>
-                  <a:srgbClr val="FFB347"/>
-                </a:solidFill>
-                <a:latin typeface="Calibri" pitchFamily="34" charset="0"/>
-                <a:ea typeface="Calibri" pitchFamily="34" charset="-122"/>
-                <a:cs typeface="Calibri" pitchFamily="34" charset="-120"/>
-              </a:rPr>
-              <a:t>Member 6</a:t>
-            </a:r>
-            <a:endParaRPr lang="en-US" sz="900" dirty="0"/>
-          </a:p>
-        </p:txBody>
-      </p:sp>
-      <p:sp>
-        <p:nvSpPr>
-          <p:cNvPr id="48" name="Text 46"/>
+          <p:cNvPr id="44" name="Text 42"/>
           <p:cNvSpPr/>
           <p:nvPr/>
         </p:nvSpPr>
@@ -11967,7 +10941,7 @@
                 <a:ea typeface="Calibri" pitchFamily="34" charset="-122"/>
                 <a:cs typeface="Calibri" pitchFamily="34" charset="-120"/>
               </a:rPr>
-              <a:t>MEMBER 6  ·  CONCLUSION</a:t>
+              <a:t>CONCLUSION</a:t>
             </a:r>
             <a:endParaRPr lang="en-US" sz="1200" dirty="0"/>
           </a:p>
@@ -12015,72 +10989,6 @@
       <p:sp>
         <p:nvSpPr>
           <p:cNvPr id="5" name="Shape 3"/>
-          <p:cNvSpPr/>
-          <p:nvPr/>
-        </p:nvSpPr>
-        <p:spPr>
-          <a:xfrm>
-            <a:off x="9601200" y="384048"/>
-            <a:ext cx="1920240" cy="292608"/>
-          </a:xfrm>
-          <a:prstGeom prst="roundRect">
-            <a:avLst>
-              <a:gd name="adj" fmla="val 18750"/>
-            </a:avLst>
-          </a:prstGeom>
-          <a:solidFill>
-            <a:srgbClr val="1A1D27"/>
-          </a:solidFill>
-          <a:ln w="25400">
-            <a:solidFill>
-              <a:srgbClr val="FFB347"/>
-            </a:solidFill>
-            <a:prstDash val="solid"/>
-          </a:ln>
-        </p:spPr>
-      </p:sp>
-      <p:sp>
-        <p:nvSpPr>
-          <p:cNvPr id="6" name="Text 4"/>
-          <p:cNvSpPr/>
-          <p:nvPr/>
-        </p:nvSpPr>
-        <p:spPr>
-          <a:xfrm>
-            <a:off x="9601200" y="384048"/>
-            <a:ext cx="1920240" cy="292608"/>
-          </a:xfrm>
-          <a:prstGeom prst="rect">
-            <a:avLst/>
-          </a:prstGeom>
-          <a:noFill/>
-          <a:ln/>
-        </p:spPr>
-        <p:txBody>
-          <a:bodyPr wrap="square" lIns="0" tIns="0" rIns="0" bIns="0" rtlCol="0" anchor="ctr"/>
-          <a:lstStyle/>
-          <a:p>
-            <a:pPr algn="ctr" indent="0" marL="0">
-              <a:buNone/>
-            </a:pPr>
-            <a:r>
-              <a:rPr lang="en-US" sz="950" b="1" dirty="0">
-                <a:solidFill>
-                  <a:srgbClr val="FFB347"/>
-                </a:solidFill>
-                <a:latin typeface="Calibri" pitchFamily="34" charset="0"/>
-                <a:ea typeface="Calibri" pitchFamily="34" charset="-122"/>
-                <a:cs typeface="Calibri" pitchFamily="34" charset="-120"/>
-              </a:rPr>
-              <a:t>◀  Member 6  ·  Conclusion</a:t>
-            </a:r>
-            <a:endParaRPr lang="en-US" sz="950" dirty="0"/>
-          </a:p>
-        </p:txBody>
-      </p:sp>
-      <p:sp>
-        <p:nvSpPr>
-          <p:cNvPr id="7" name="Shape 5"/>
           <p:cNvSpPr/>
           <p:nvPr/>
         </p:nvSpPr>
@@ -12114,7 +11022,7 @@
       </p:sp>
       <p:sp>
         <p:nvSpPr>
-          <p:cNvPr id="8" name="Text 6"/>
+          <p:cNvPr id="6" name="Text 4"/>
           <p:cNvSpPr/>
           <p:nvPr/>
         </p:nvSpPr>
@@ -12153,7 +11061,7 @@
       </p:sp>
       <p:sp>
         <p:nvSpPr>
-          <p:cNvPr id="9" name="Text 7"/>
+          <p:cNvPr id="7" name="Text 5"/>
           <p:cNvSpPr/>
           <p:nvPr/>
         </p:nvSpPr>
@@ -12259,7 +11167,7 @@
       </p:sp>
       <p:sp>
         <p:nvSpPr>
-          <p:cNvPr id="10" name="Shape 8"/>
+          <p:cNvPr id="8" name="Shape 6"/>
           <p:cNvSpPr/>
           <p:nvPr/>
         </p:nvSpPr>
@@ -12293,7 +11201,7 @@
       </p:sp>
       <p:sp>
         <p:nvSpPr>
-          <p:cNvPr id="11" name="Text 9"/>
+          <p:cNvPr id="9" name="Text 7"/>
           <p:cNvSpPr/>
           <p:nvPr/>
         </p:nvSpPr>
@@ -12332,7 +11240,7 @@
       </p:sp>
       <p:sp>
         <p:nvSpPr>
-          <p:cNvPr id="12" name="Text 10"/>
+          <p:cNvPr id="10" name="Text 8"/>
           <p:cNvSpPr/>
           <p:nvPr/>
         </p:nvSpPr>
@@ -12371,7 +11279,7 @@
       </p:sp>
       <p:sp>
         <p:nvSpPr>
-          <p:cNvPr id="13" name="Text 11"/>
+          <p:cNvPr id="11" name="Text 9"/>
           <p:cNvSpPr/>
           <p:nvPr/>
         </p:nvSpPr>
@@ -12410,7 +11318,7 @@
       </p:sp>
       <p:sp>
         <p:nvSpPr>
-          <p:cNvPr id="14" name="Text 12"/>
+          <p:cNvPr id="12" name="Text 10"/>
           <p:cNvSpPr/>
           <p:nvPr/>
         </p:nvSpPr>
@@ -12449,7 +11357,7 @@
       </p:sp>
       <p:sp>
         <p:nvSpPr>
-          <p:cNvPr id="15" name="Text 13"/>
+          <p:cNvPr id="13" name="Text 11"/>
           <p:cNvSpPr/>
           <p:nvPr/>
         </p:nvSpPr>
@@ -12488,7 +11396,7 @@
       </p:sp>
       <p:sp>
         <p:nvSpPr>
-          <p:cNvPr id="16" name="Text 14"/>
+          <p:cNvPr id="14" name="Text 12"/>
           <p:cNvSpPr/>
           <p:nvPr/>
         </p:nvSpPr>
@@ -12527,7 +11435,7 @@
       </p:sp>
       <p:sp>
         <p:nvSpPr>
-          <p:cNvPr id="17" name="Text 15"/>
+          <p:cNvPr id="15" name="Text 13"/>
           <p:cNvSpPr/>
           <p:nvPr/>
         </p:nvSpPr>
@@ -12566,7 +11474,7 @@
       </p:sp>
       <p:sp>
         <p:nvSpPr>
-          <p:cNvPr id="18" name="Text 16"/>
+          <p:cNvPr id="16" name="Text 14"/>
           <p:cNvSpPr/>
           <p:nvPr/>
         </p:nvSpPr>
@@ -12605,7 +11513,7 @@
       </p:sp>
       <p:sp>
         <p:nvSpPr>
-          <p:cNvPr id="19" name="Text 17"/>
+          <p:cNvPr id="17" name="Text 15"/>
           <p:cNvSpPr/>
           <p:nvPr/>
         </p:nvSpPr>
@@ -12644,7 +11552,7 @@
       </p:sp>
       <p:sp>
         <p:nvSpPr>
-          <p:cNvPr id="20" name="Text 18"/>
+          <p:cNvPr id="18" name="Text 16"/>
           <p:cNvSpPr/>
           <p:nvPr/>
         </p:nvSpPr>
@@ -12683,7 +11591,7 @@
       </p:sp>
       <p:sp>
         <p:nvSpPr>
-          <p:cNvPr id="21" name="Text 19"/>
+          <p:cNvPr id="19" name="Text 17"/>
           <p:cNvSpPr/>
           <p:nvPr/>
         </p:nvSpPr>
@@ -12722,7 +11630,7 @@
       </p:sp>
       <p:sp>
         <p:nvSpPr>
-          <p:cNvPr id="22" name="Text 20"/>
+          <p:cNvPr id="20" name="Text 18"/>
           <p:cNvSpPr/>
           <p:nvPr/>
         </p:nvSpPr>
@@ -12761,7 +11669,7 @@
       </p:sp>
       <p:sp>
         <p:nvSpPr>
-          <p:cNvPr id="23" name="Text 21"/>
+          <p:cNvPr id="21" name="Text 19"/>
           <p:cNvSpPr/>
           <p:nvPr/>
         </p:nvSpPr>
@@ -12800,7 +11708,7 @@
       </p:sp>
       <p:sp>
         <p:nvSpPr>
-          <p:cNvPr id="24" name="Text 22"/>
+          <p:cNvPr id="22" name="Text 20"/>
           <p:cNvSpPr/>
           <p:nvPr/>
         </p:nvSpPr>
@@ -12839,7 +11747,7 @@
       </p:sp>
       <p:sp>
         <p:nvSpPr>
-          <p:cNvPr id="25" name="Text 23"/>
+          <p:cNvPr id="23" name="Text 21"/>
           <p:cNvSpPr/>
           <p:nvPr/>
         </p:nvSpPr>
@@ -12878,7 +11786,7 @@
       </p:sp>
       <p:sp>
         <p:nvSpPr>
-          <p:cNvPr id="26" name="Text 24"/>
+          <p:cNvPr id="24" name="Text 22"/>
           <p:cNvSpPr/>
           <p:nvPr/>
         </p:nvSpPr>
@@ -12917,7 +11825,7 @@
       </p:sp>
       <p:sp>
         <p:nvSpPr>
-          <p:cNvPr id="27" name="Text 25"/>
+          <p:cNvPr id="25" name="Text 23"/>
           <p:cNvSpPr/>
           <p:nvPr/>
         </p:nvSpPr>
@@ -12970,73 +11878,7 @@
       </p:sp>
       <p:sp>
         <p:nvSpPr>
-          <p:cNvPr id="28" name="Shape 26"/>
-          <p:cNvSpPr/>
-          <p:nvPr/>
-        </p:nvSpPr>
-        <p:spPr>
-          <a:xfrm>
-            <a:off x="9601200" y="6355080"/>
-            <a:ext cx="1280160" cy="256032"/>
-          </a:xfrm>
-          <a:prstGeom prst="roundRect">
-            <a:avLst>
-              <a:gd name="adj" fmla="val 21429"/>
-            </a:avLst>
-          </a:prstGeom>
-          <a:solidFill>
-            <a:srgbClr val="1A1D27"/>
-          </a:solidFill>
-          <a:ln w="12700">
-            <a:solidFill>
-              <a:srgbClr val="2A2F3E"/>
-            </a:solidFill>
-            <a:prstDash val="solid"/>
-          </a:ln>
-        </p:spPr>
-      </p:sp>
-      <p:sp>
-        <p:nvSpPr>
-          <p:cNvPr id="29" name="Text 27"/>
-          <p:cNvSpPr/>
-          <p:nvPr/>
-        </p:nvSpPr>
-        <p:spPr>
-          <a:xfrm>
-            <a:off x="9601200" y="6355080"/>
-            <a:ext cx="1280160" cy="256032"/>
-          </a:xfrm>
-          <a:prstGeom prst="rect">
-            <a:avLst/>
-          </a:prstGeom>
-          <a:noFill/>
-          <a:ln/>
-        </p:spPr>
-        <p:txBody>
-          <a:bodyPr wrap="square" lIns="0" tIns="0" rIns="0" bIns="0" rtlCol="0" anchor="ctr"/>
-          <a:lstStyle/>
-          <a:p>
-            <a:pPr algn="ctr" indent="0" marL="0">
-              <a:buNone/>
-            </a:pPr>
-            <a:r>
-              <a:rPr lang="en-US" sz="900" b="1" dirty="0">
-                <a:solidFill>
-                  <a:srgbClr val="FFB347"/>
-                </a:solidFill>
-                <a:latin typeface="Calibri" pitchFamily="34" charset="0"/>
-                <a:ea typeface="Calibri" pitchFamily="34" charset="-122"/>
-                <a:cs typeface="Calibri" pitchFamily="34" charset="-120"/>
-              </a:rPr>
-              <a:t>Member 6</a:t>
-            </a:r>
-            <a:endParaRPr lang="en-US" sz="900" dirty="0"/>
-          </a:p>
-        </p:txBody>
-      </p:sp>
-      <p:sp>
-        <p:nvSpPr>
-          <p:cNvPr id="30" name="Text 28"/>
+          <p:cNvPr id="26" name="Text 24"/>
           <p:cNvSpPr/>
           <p:nvPr/>
         </p:nvSpPr>
@@ -13632,7 +12474,7 @@
                 <a:ea typeface="Calibri" pitchFamily="34" charset="-122"/>
                 <a:cs typeface="Calibri" pitchFamily="34" charset="-120"/>
               </a:rPr>
-              <a:t>MEMBER 1  ·  INTRODUCTION</a:t>
+              <a:t>INTRODUCTION</a:t>
             </a:r>
             <a:endParaRPr lang="en-US" sz="1200" dirty="0"/>
           </a:p>
@@ -13680,72 +12522,6 @@
       <p:sp>
         <p:nvSpPr>
           <p:cNvPr id="5" name="Shape 3"/>
-          <p:cNvSpPr/>
-          <p:nvPr/>
-        </p:nvSpPr>
-        <p:spPr>
-          <a:xfrm>
-            <a:off x="9601200" y="384048"/>
-            <a:ext cx="1920240" cy="292608"/>
-          </a:xfrm>
-          <a:prstGeom prst="roundRect">
-            <a:avLst>
-              <a:gd name="adj" fmla="val 18750"/>
-            </a:avLst>
-          </a:prstGeom>
-          <a:solidFill>
-            <a:srgbClr val="1A1D27"/>
-          </a:solidFill>
-          <a:ln w="25400">
-            <a:solidFill>
-              <a:srgbClr val="FFB347"/>
-            </a:solidFill>
-            <a:prstDash val="solid"/>
-          </a:ln>
-        </p:spPr>
-      </p:sp>
-      <p:sp>
-        <p:nvSpPr>
-          <p:cNvPr id="6" name="Text 4"/>
-          <p:cNvSpPr/>
-          <p:nvPr/>
-        </p:nvSpPr>
-        <p:spPr>
-          <a:xfrm>
-            <a:off x="9601200" y="384048"/>
-            <a:ext cx="1920240" cy="292608"/>
-          </a:xfrm>
-          <a:prstGeom prst="rect">
-            <a:avLst/>
-          </a:prstGeom>
-          <a:noFill/>
-          <a:ln/>
-        </p:spPr>
-        <p:txBody>
-          <a:bodyPr wrap="square" lIns="0" tIns="0" rIns="0" bIns="0" rtlCol="0" anchor="ctr"/>
-          <a:lstStyle/>
-          <a:p>
-            <a:pPr algn="ctr" indent="0" marL="0">
-              <a:buNone/>
-            </a:pPr>
-            <a:r>
-              <a:rPr lang="en-US" sz="950" b="1" dirty="0">
-                <a:solidFill>
-                  <a:srgbClr val="FFB347"/>
-                </a:solidFill>
-                <a:latin typeface="Calibri" pitchFamily="34" charset="0"/>
-                <a:ea typeface="Calibri" pitchFamily="34" charset="-122"/>
-                <a:cs typeface="Calibri" pitchFamily="34" charset="-120"/>
-              </a:rPr>
-              <a:t>◀  Member 1  ·  Introduction</a:t>
-            </a:r>
-            <a:endParaRPr lang="en-US" sz="950" dirty="0"/>
-          </a:p>
-        </p:txBody>
-      </p:sp>
-      <p:sp>
-        <p:nvSpPr>
-          <p:cNvPr id="7" name="Shape 5"/>
           <p:cNvSpPr/>
           <p:nvPr/>
         </p:nvSpPr>
@@ -13779,7 +12555,7 @@
       </p:sp>
       <p:sp>
         <p:nvSpPr>
-          <p:cNvPr id="8" name="Text 6"/>
+          <p:cNvPr id="6" name="Text 4"/>
           <p:cNvSpPr/>
           <p:nvPr/>
         </p:nvSpPr>
@@ -13818,7 +12594,7 @@
       </p:sp>
       <p:sp>
         <p:nvSpPr>
-          <p:cNvPr id="9" name="Shape 7"/>
+          <p:cNvPr id="7" name="Shape 5"/>
           <p:cNvSpPr/>
           <p:nvPr/>
         </p:nvSpPr>
@@ -13852,7 +12628,7 @@
       </p:sp>
       <p:sp>
         <p:nvSpPr>
-          <p:cNvPr id="10" name="Text 8"/>
+          <p:cNvPr id="8" name="Text 6"/>
           <p:cNvSpPr/>
           <p:nvPr/>
         </p:nvSpPr>
@@ -13888,7 +12664,7 @@
       </p:sp>
       <p:sp>
         <p:nvSpPr>
-          <p:cNvPr id="11" name="Text 9"/>
+          <p:cNvPr id="9" name="Text 7"/>
           <p:cNvSpPr/>
           <p:nvPr/>
         </p:nvSpPr>
@@ -13927,7 +12703,7 @@
       </p:sp>
       <p:sp>
         <p:nvSpPr>
-          <p:cNvPr id="12" name="Text 10"/>
+          <p:cNvPr id="10" name="Text 8"/>
           <p:cNvSpPr/>
           <p:nvPr/>
         </p:nvSpPr>
@@ -14009,7 +12785,7 @@
       </p:sp>
       <p:sp>
         <p:nvSpPr>
-          <p:cNvPr id="13" name="Shape 11"/>
+          <p:cNvPr id="11" name="Shape 9"/>
           <p:cNvSpPr/>
           <p:nvPr/>
         </p:nvSpPr>
@@ -14043,7 +12819,7 @@
       </p:sp>
       <p:sp>
         <p:nvSpPr>
-          <p:cNvPr id="14" name="Text 12"/>
+          <p:cNvPr id="12" name="Text 10"/>
           <p:cNvSpPr/>
           <p:nvPr/>
         </p:nvSpPr>
@@ -14079,7 +12855,7 @@
       </p:sp>
       <p:sp>
         <p:nvSpPr>
-          <p:cNvPr id="15" name="Text 13"/>
+          <p:cNvPr id="13" name="Text 11"/>
           <p:cNvSpPr/>
           <p:nvPr/>
         </p:nvSpPr>
@@ -14118,7 +12894,7 @@
       </p:sp>
       <p:sp>
         <p:nvSpPr>
-          <p:cNvPr id="16" name="Text 14"/>
+          <p:cNvPr id="14" name="Text 12"/>
           <p:cNvSpPr/>
           <p:nvPr/>
         </p:nvSpPr>
@@ -14200,7 +12976,7 @@
       </p:sp>
       <p:sp>
         <p:nvSpPr>
-          <p:cNvPr id="17" name="Shape 15"/>
+          <p:cNvPr id="15" name="Shape 13"/>
           <p:cNvSpPr/>
           <p:nvPr/>
         </p:nvSpPr>
@@ -14234,7 +13010,7 @@
       </p:sp>
       <p:sp>
         <p:nvSpPr>
-          <p:cNvPr id="18" name="Text 16"/>
+          <p:cNvPr id="16" name="Text 14"/>
           <p:cNvSpPr/>
           <p:nvPr/>
         </p:nvSpPr>
@@ -14270,7 +13046,7 @@
       </p:sp>
       <p:sp>
         <p:nvSpPr>
-          <p:cNvPr id="19" name="Text 17"/>
+          <p:cNvPr id="17" name="Text 15"/>
           <p:cNvSpPr/>
           <p:nvPr/>
         </p:nvSpPr>
@@ -14309,7 +13085,7 @@
       </p:sp>
       <p:sp>
         <p:nvSpPr>
-          <p:cNvPr id="20" name="Text 18"/>
+          <p:cNvPr id="18" name="Text 16"/>
           <p:cNvSpPr/>
           <p:nvPr/>
         </p:nvSpPr>
@@ -14391,7 +13167,7 @@
       </p:sp>
       <p:sp>
         <p:nvSpPr>
-          <p:cNvPr id="21" name="Text 19"/>
+          <p:cNvPr id="19" name="Text 17"/>
           <p:cNvSpPr/>
           <p:nvPr/>
         </p:nvSpPr>
@@ -14444,73 +13220,7 @@
       </p:sp>
       <p:sp>
         <p:nvSpPr>
-          <p:cNvPr id="22" name="Shape 20"/>
-          <p:cNvSpPr/>
-          <p:nvPr/>
-        </p:nvSpPr>
-        <p:spPr>
-          <a:xfrm>
-            <a:off x="9601200" y="6355080"/>
-            <a:ext cx="1280160" cy="256032"/>
-          </a:xfrm>
-          <a:prstGeom prst="roundRect">
-            <a:avLst>
-              <a:gd name="adj" fmla="val 21429"/>
-            </a:avLst>
-          </a:prstGeom>
-          <a:solidFill>
-            <a:srgbClr val="1A1D27"/>
-          </a:solidFill>
-          <a:ln w="12700">
-            <a:solidFill>
-              <a:srgbClr val="2A2F3E"/>
-            </a:solidFill>
-            <a:prstDash val="solid"/>
-          </a:ln>
-        </p:spPr>
-      </p:sp>
-      <p:sp>
-        <p:nvSpPr>
-          <p:cNvPr id="23" name="Text 21"/>
-          <p:cNvSpPr/>
-          <p:nvPr/>
-        </p:nvSpPr>
-        <p:spPr>
-          <a:xfrm>
-            <a:off x="9601200" y="6355080"/>
-            <a:ext cx="1280160" cy="256032"/>
-          </a:xfrm>
-          <a:prstGeom prst="rect">
-            <a:avLst/>
-          </a:prstGeom>
-          <a:noFill/>
-          <a:ln/>
-        </p:spPr>
-        <p:txBody>
-          <a:bodyPr wrap="square" lIns="0" tIns="0" rIns="0" bIns="0" rtlCol="0" anchor="ctr"/>
-          <a:lstStyle/>
-          <a:p>
-            <a:pPr algn="ctr" indent="0" marL="0">
-              <a:buNone/>
-            </a:pPr>
-            <a:r>
-              <a:rPr lang="en-US" sz="900" b="1" dirty="0">
-                <a:solidFill>
-                  <a:srgbClr val="FFB347"/>
-                </a:solidFill>
-                <a:latin typeface="Calibri" pitchFamily="34" charset="0"/>
-                <a:ea typeface="Calibri" pitchFamily="34" charset="-122"/>
-                <a:cs typeface="Calibri" pitchFamily="34" charset="-120"/>
-              </a:rPr>
-              <a:t>Member 1</a:t>
-            </a:r>
-            <a:endParaRPr lang="en-US" sz="900" dirty="0"/>
-          </a:p>
-        </p:txBody>
-      </p:sp>
-      <p:sp>
-        <p:nvSpPr>
-          <p:cNvPr id="24" name="Text 22"/>
+          <p:cNvPr id="20" name="Text 18"/>
           <p:cNvSpPr/>
           <p:nvPr/>
         </p:nvSpPr>
@@ -14632,7 +13342,7 @@
                 <a:ea typeface="Calibri" pitchFamily="34" charset="-122"/>
                 <a:cs typeface="Calibri" pitchFamily="34" charset="-120"/>
               </a:rPr>
-              <a:t>MEMBER 1  ·  INTRODUCTION</a:t>
+              <a:t>INTRODUCTION</a:t>
             </a:r>
             <a:endParaRPr lang="en-US" sz="1200" dirty="0"/>
           </a:p>
@@ -14680,72 +13390,6 @@
       <p:sp>
         <p:nvSpPr>
           <p:cNvPr id="5" name="Shape 3"/>
-          <p:cNvSpPr/>
-          <p:nvPr/>
-        </p:nvSpPr>
-        <p:spPr>
-          <a:xfrm>
-            <a:off x="9601200" y="384048"/>
-            <a:ext cx="1920240" cy="292608"/>
-          </a:xfrm>
-          <a:prstGeom prst="roundRect">
-            <a:avLst>
-              <a:gd name="adj" fmla="val 18750"/>
-            </a:avLst>
-          </a:prstGeom>
-          <a:solidFill>
-            <a:srgbClr val="1A1D27"/>
-          </a:solidFill>
-          <a:ln w="25400">
-            <a:solidFill>
-              <a:srgbClr val="FFB347"/>
-            </a:solidFill>
-            <a:prstDash val="solid"/>
-          </a:ln>
-        </p:spPr>
-      </p:sp>
-      <p:sp>
-        <p:nvSpPr>
-          <p:cNvPr id="6" name="Text 4"/>
-          <p:cNvSpPr/>
-          <p:nvPr/>
-        </p:nvSpPr>
-        <p:spPr>
-          <a:xfrm>
-            <a:off x="9601200" y="384048"/>
-            <a:ext cx="1920240" cy="292608"/>
-          </a:xfrm>
-          <a:prstGeom prst="rect">
-            <a:avLst/>
-          </a:prstGeom>
-          <a:noFill/>
-          <a:ln/>
-        </p:spPr>
-        <p:txBody>
-          <a:bodyPr wrap="square" lIns="0" tIns="0" rIns="0" bIns="0" rtlCol="0" anchor="ctr"/>
-          <a:lstStyle/>
-          <a:p>
-            <a:pPr algn="ctr" indent="0" marL="0">
-              <a:buNone/>
-            </a:pPr>
-            <a:r>
-              <a:rPr lang="en-US" sz="950" b="1" dirty="0">
-                <a:solidFill>
-                  <a:srgbClr val="FFB347"/>
-                </a:solidFill>
-                <a:latin typeface="Calibri" pitchFamily="34" charset="0"/>
-                <a:ea typeface="Calibri" pitchFamily="34" charset="-122"/>
-                <a:cs typeface="Calibri" pitchFamily="34" charset="-120"/>
-              </a:rPr>
-              <a:t>◀  Member 1  ·  Introduction</a:t>
-            </a:r>
-            <a:endParaRPr lang="en-US" sz="950" dirty="0"/>
-          </a:p>
-        </p:txBody>
-      </p:sp>
-      <p:sp>
-        <p:nvSpPr>
-          <p:cNvPr id="7" name="Shape 5"/>
           <p:cNvSpPr/>
           <p:nvPr/>
         </p:nvSpPr>
@@ -14779,7 +13423,7 @@
       </p:sp>
       <p:sp>
         <p:nvSpPr>
-          <p:cNvPr id="8" name="Text 6"/>
+          <p:cNvPr id="6" name="Text 4"/>
           <p:cNvSpPr/>
           <p:nvPr/>
         </p:nvSpPr>
@@ -14818,7 +13462,7 @@
       </p:sp>
       <p:sp>
         <p:nvSpPr>
-          <p:cNvPr id="9" name="Text 7"/>
+          <p:cNvPr id="7" name="Text 5"/>
           <p:cNvSpPr/>
           <p:nvPr/>
         </p:nvSpPr>
@@ -14857,7 +13501,7 @@
       </p:sp>
       <p:sp>
         <p:nvSpPr>
-          <p:cNvPr id="10" name="Shape 8"/>
+          <p:cNvPr id="8" name="Shape 6"/>
           <p:cNvSpPr/>
           <p:nvPr/>
         </p:nvSpPr>
@@ -14891,7 +13535,7 @@
       </p:sp>
       <p:sp>
         <p:nvSpPr>
-          <p:cNvPr id="11" name="Shape 9"/>
+          <p:cNvPr id="9" name="Shape 7"/>
           <p:cNvSpPr/>
           <p:nvPr/>
         </p:nvSpPr>
@@ -14916,7 +13560,7 @@
       </p:sp>
       <p:sp>
         <p:nvSpPr>
-          <p:cNvPr id="12" name="Text 10"/>
+          <p:cNvPr id="10" name="Text 8"/>
           <p:cNvSpPr/>
           <p:nvPr/>
         </p:nvSpPr>
@@ -14955,7 +13599,7 @@
       </p:sp>
       <p:sp>
         <p:nvSpPr>
-          <p:cNvPr id="13" name="Text 11"/>
+          <p:cNvPr id="11" name="Text 9"/>
           <p:cNvSpPr/>
           <p:nvPr/>
         </p:nvSpPr>
@@ -14994,7 +13638,7 @@
       </p:sp>
       <p:sp>
         <p:nvSpPr>
-          <p:cNvPr id="14" name="Text 12"/>
+          <p:cNvPr id="12" name="Text 10"/>
           <p:cNvSpPr/>
           <p:nvPr/>
         </p:nvSpPr>
@@ -15076,7 +13720,7 @@
       </p:sp>
       <p:sp>
         <p:nvSpPr>
-          <p:cNvPr id="15" name="Shape 13"/>
+          <p:cNvPr id="13" name="Shape 11"/>
           <p:cNvSpPr/>
           <p:nvPr/>
         </p:nvSpPr>
@@ -15101,7 +13745,7 @@
       </p:sp>
       <p:sp>
         <p:nvSpPr>
-          <p:cNvPr id="16" name="Shape 14"/>
+          <p:cNvPr id="14" name="Shape 12"/>
           <p:cNvSpPr/>
           <p:nvPr/>
         </p:nvSpPr>
@@ -15135,7 +13779,7 @@
       </p:sp>
       <p:sp>
         <p:nvSpPr>
-          <p:cNvPr id="17" name="Shape 15"/>
+          <p:cNvPr id="15" name="Shape 13"/>
           <p:cNvSpPr/>
           <p:nvPr/>
         </p:nvSpPr>
@@ -15160,7 +13804,7 @@
       </p:sp>
       <p:sp>
         <p:nvSpPr>
-          <p:cNvPr id="18" name="Text 16"/>
+          <p:cNvPr id="16" name="Text 14"/>
           <p:cNvSpPr/>
           <p:nvPr/>
         </p:nvSpPr>
@@ -15199,7 +13843,7 @@
       </p:sp>
       <p:sp>
         <p:nvSpPr>
-          <p:cNvPr id="19" name="Text 17"/>
+          <p:cNvPr id="17" name="Text 15"/>
           <p:cNvSpPr/>
           <p:nvPr/>
         </p:nvSpPr>
@@ -15238,7 +13882,7 @@
       </p:sp>
       <p:sp>
         <p:nvSpPr>
-          <p:cNvPr id="20" name="Text 18"/>
+          <p:cNvPr id="18" name="Text 16"/>
           <p:cNvSpPr/>
           <p:nvPr/>
         </p:nvSpPr>
@@ -15320,7 +13964,7 @@
       </p:sp>
       <p:sp>
         <p:nvSpPr>
-          <p:cNvPr id="21" name="Shape 19"/>
+          <p:cNvPr id="19" name="Shape 17"/>
           <p:cNvSpPr/>
           <p:nvPr/>
         </p:nvSpPr>
@@ -15345,7 +13989,7 @@
       </p:sp>
       <p:sp>
         <p:nvSpPr>
-          <p:cNvPr id="22" name="Shape 20"/>
+          <p:cNvPr id="20" name="Shape 18"/>
           <p:cNvSpPr/>
           <p:nvPr/>
         </p:nvSpPr>
@@ -15379,7 +14023,7 @@
       </p:sp>
       <p:sp>
         <p:nvSpPr>
-          <p:cNvPr id="23" name="Shape 21"/>
+          <p:cNvPr id="21" name="Shape 19"/>
           <p:cNvSpPr/>
           <p:nvPr/>
         </p:nvSpPr>
@@ -15404,7 +14048,7 @@
       </p:sp>
       <p:sp>
         <p:nvSpPr>
-          <p:cNvPr id="24" name="Text 22"/>
+          <p:cNvPr id="22" name="Text 20"/>
           <p:cNvSpPr/>
           <p:nvPr/>
         </p:nvSpPr>
@@ -15443,7 +14087,7 @@
       </p:sp>
       <p:sp>
         <p:nvSpPr>
-          <p:cNvPr id="25" name="Text 23"/>
+          <p:cNvPr id="23" name="Text 21"/>
           <p:cNvSpPr/>
           <p:nvPr/>
         </p:nvSpPr>
@@ -15482,7 +14126,7 @@
       </p:sp>
       <p:sp>
         <p:nvSpPr>
-          <p:cNvPr id="26" name="Text 24"/>
+          <p:cNvPr id="24" name="Text 22"/>
           <p:cNvSpPr/>
           <p:nvPr/>
         </p:nvSpPr>
@@ -15564,7 +14208,7 @@
       </p:sp>
       <p:sp>
         <p:nvSpPr>
-          <p:cNvPr id="27" name="Text 25"/>
+          <p:cNvPr id="25" name="Text 23"/>
           <p:cNvSpPr/>
           <p:nvPr/>
         </p:nvSpPr>
@@ -15617,73 +14261,7 @@
       </p:sp>
       <p:sp>
         <p:nvSpPr>
-          <p:cNvPr id="28" name="Shape 26"/>
-          <p:cNvSpPr/>
-          <p:nvPr/>
-        </p:nvSpPr>
-        <p:spPr>
-          <a:xfrm>
-            <a:off x="9601200" y="6355080"/>
-            <a:ext cx="1280160" cy="256032"/>
-          </a:xfrm>
-          <a:prstGeom prst="roundRect">
-            <a:avLst>
-              <a:gd name="adj" fmla="val 21429"/>
-            </a:avLst>
-          </a:prstGeom>
-          <a:solidFill>
-            <a:srgbClr val="1A1D27"/>
-          </a:solidFill>
-          <a:ln w="12700">
-            <a:solidFill>
-              <a:srgbClr val="2A2F3E"/>
-            </a:solidFill>
-            <a:prstDash val="solid"/>
-          </a:ln>
-        </p:spPr>
-      </p:sp>
-      <p:sp>
-        <p:nvSpPr>
-          <p:cNvPr id="29" name="Text 27"/>
-          <p:cNvSpPr/>
-          <p:nvPr/>
-        </p:nvSpPr>
-        <p:spPr>
-          <a:xfrm>
-            <a:off x="9601200" y="6355080"/>
-            <a:ext cx="1280160" cy="256032"/>
-          </a:xfrm>
-          <a:prstGeom prst="rect">
-            <a:avLst/>
-          </a:prstGeom>
-          <a:noFill/>
-          <a:ln/>
-        </p:spPr>
-        <p:txBody>
-          <a:bodyPr wrap="square" lIns="0" tIns="0" rIns="0" bIns="0" rtlCol="0" anchor="ctr"/>
-          <a:lstStyle/>
-          <a:p>
-            <a:pPr algn="ctr" indent="0" marL="0">
-              <a:buNone/>
-            </a:pPr>
-            <a:r>
-              <a:rPr lang="en-US" sz="900" b="1" dirty="0">
-                <a:solidFill>
-                  <a:srgbClr val="FFB347"/>
-                </a:solidFill>
-                <a:latin typeface="Calibri" pitchFamily="34" charset="0"/>
-                <a:ea typeface="Calibri" pitchFamily="34" charset="-122"/>
-                <a:cs typeface="Calibri" pitchFamily="34" charset="-120"/>
-              </a:rPr>
-              <a:t>Member 1</a:t>
-            </a:r>
-            <a:endParaRPr lang="en-US" sz="900" dirty="0"/>
-          </a:p>
-        </p:txBody>
-      </p:sp>
-      <p:sp>
-        <p:nvSpPr>
-          <p:cNvPr id="30" name="Text 28"/>
+          <p:cNvPr id="26" name="Text 24"/>
           <p:cNvSpPr/>
           <p:nvPr/>
         </p:nvSpPr>
@@ -15805,7 +14383,7 @@
                 <a:ea typeface="Calibri" pitchFamily="34" charset="-122"/>
                 <a:cs typeface="Calibri" pitchFamily="34" charset="-120"/>
               </a:rPr>
-              <a:t>MEMBER 2  ·  FEATURES</a:t>
+              <a:t>FEATURES</a:t>
             </a:r>
             <a:endParaRPr lang="en-US" sz="1200" dirty="0"/>
           </a:p>
@@ -15853,72 +14431,6 @@
       <p:sp>
         <p:nvSpPr>
           <p:cNvPr id="5" name="Shape 3"/>
-          <p:cNvSpPr/>
-          <p:nvPr/>
-        </p:nvSpPr>
-        <p:spPr>
-          <a:xfrm>
-            <a:off x="9601200" y="384048"/>
-            <a:ext cx="1920240" cy="292608"/>
-          </a:xfrm>
-          <a:prstGeom prst="roundRect">
-            <a:avLst>
-              <a:gd name="adj" fmla="val 18750"/>
-            </a:avLst>
-          </a:prstGeom>
-          <a:solidFill>
-            <a:srgbClr val="1A1D27"/>
-          </a:solidFill>
-          <a:ln w="25400">
-            <a:solidFill>
-              <a:srgbClr val="FFB347"/>
-            </a:solidFill>
-            <a:prstDash val="solid"/>
-          </a:ln>
-        </p:spPr>
-      </p:sp>
-      <p:sp>
-        <p:nvSpPr>
-          <p:cNvPr id="6" name="Text 4"/>
-          <p:cNvSpPr/>
-          <p:nvPr/>
-        </p:nvSpPr>
-        <p:spPr>
-          <a:xfrm>
-            <a:off x="9601200" y="384048"/>
-            <a:ext cx="1920240" cy="292608"/>
-          </a:xfrm>
-          <a:prstGeom prst="rect">
-            <a:avLst/>
-          </a:prstGeom>
-          <a:noFill/>
-          <a:ln/>
-        </p:spPr>
-        <p:txBody>
-          <a:bodyPr wrap="square" lIns="0" tIns="0" rIns="0" bIns="0" rtlCol="0" anchor="ctr"/>
-          <a:lstStyle/>
-          <a:p>
-            <a:pPr algn="ctr" indent="0" marL="0">
-              <a:buNone/>
-            </a:pPr>
-            <a:r>
-              <a:rPr lang="en-US" sz="950" b="1" dirty="0">
-                <a:solidFill>
-                  <a:srgbClr val="FFB347"/>
-                </a:solidFill>
-                <a:latin typeface="Calibri" pitchFamily="34" charset="0"/>
-                <a:ea typeface="Calibri" pitchFamily="34" charset="-122"/>
-                <a:cs typeface="Calibri" pitchFamily="34" charset="-120"/>
-              </a:rPr>
-              <a:t>◀  Member 2  ·  Features</a:t>
-            </a:r>
-            <a:endParaRPr lang="en-US" sz="950" dirty="0"/>
-          </a:p>
-        </p:txBody>
-      </p:sp>
-      <p:sp>
-        <p:nvSpPr>
-          <p:cNvPr id="7" name="Shape 5"/>
           <p:cNvSpPr/>
           <p:nvPr/>
         </p:nvSpPr>
@@ -15952,7 +14464,7 @@
       </p:sp>
       <p:sp>
         <p:nvSpPr>
-          <p:cNvPr id="8" name="Text 6"/>
+          <p:cNvPr id="6" name="Text 4"/>
           <p:cNvSpPr/>
           <p:nvPr/>
         </p:nvSpPr>
@@ -15988,7 +14500,7 @@
       </p:sp>
       <p:sp>
         <p:nvSpPr>
-          <p:cNvPr id="9" name="Text 7"/>
+          <p:cNvPr id="7" name="Text 5"/>
           <p:cNvSpPr/>
           <p:nvPr/>
         </p:nvSpPr>
@@ -16027,7 +14539,7 @@
       </p:sp>
       <p:sp>
         <p:nvSpPr>
-          <p:cNvPr id="10" name="Text 8"/>
+          <p:cNvPr id="8" name="Text 6"/>
           <p:cNvSpPr/>
           <p:nvPr/>
         </p:nvSpPr>
@@ -16109,7 +14621,7 @@
       </p:sp>
       <p:sp>
         <p:nvSpPr>
-          <p:cNvPr id="11" name="Shape 9"/>
+          <p:cNvPr id="9" name="Shape 7"/>
           <p:cNvSpPr/>
           <p:nvPr/>
         </p:nvSpPr>
@@ -16129,7 +14641,7 @@
       </p:sp>
       <p:sp>
         <p:nvSpPr>
-          <p:cNvPr id="12" name="Shape 10"/>
+          <p:cNvPr id="10" name="Shape 8"/>
           <p:cNvSpPr/>
           <p:nvPr/>
         </p:nvSpPr>
@@ -16163,7 +14675,7 @@
       </p:sp>
       <p:sp>
         <p:nvSpPr>
-          <p:cNvPr id="13" name="Text 11"/>
+          <p:cNvPr id="11" name="Text 9"/>
           <p:cNvSpPr/>
           <p:nvPr/>
         </p:nvSpPr>
@@ -16199,7 +14711,7 @@
       </p:sp>
       <p:sp>
         <p:nvSpPr>
-          <p:cNvPr id="14" name="Text 12"/>
+          <p:cNvPr id="12" name="Text 10"/>
           <p:cNvSpPr/>
           <p:nvPr/>
         </p:nvSpPr>
@@ -16238,7 +14750,7 @@
       </p:sp>
       <p:sp>
         <p:nvSpPr>
-          <p:cNvPr id="15" name="Text 13"/>
+          <p:cNvPr id="13" name="Text 11"/>
           <p:cNvSpPr/>
           <p:nvPr/>
         </p:nvSpPr>
@@ -16320,7 +14832,7 @@
       </p:sp>
       <p:sp>
         <p:nvSpPr>
-          <p:cNvPr id="16" name="Shape 14"/>
+          <p:cNvPr id="14" name="Shape 12"/>
           <p:cNvSpPr/>
           <p:nvPr/>
         </p:nvSpPr>
@@ -16340,7 +14852,7 @@
       </p:sp>
       <p:sp>
         <p:nvSpPr>
-          <p:cNvPr id="17" name="Shape 15"/>
+          <p:cNvPr id="15" name="Shape 13"/>
           <p:cNvSpPr/>
           <p:nvPr/>
         </p:nvSpPr>
@@ -16374,7 +14886,7 @@
       </p:sp>
       <p:sp>
         <p:nvSpPr>
-          <p:cNvPr id="18" name="Text 16"/>
+          <p:cNvPr id="16" name="Text 14"/>
           <p:cNvSpPr/>
           <p:nvPr/>
         </p:nvSpPr>
@@ -16410,7 +14922,7 @@
       </p:sp>
       <p:sp>
         <p:nvSpPr>
-          <p:cNvPr id="19" name="Text 17"/>
+          <p:cNvPr id="17" name="Text 15"/>
           <p:cNvSpPr/>
           <p:nvPr/>
         </p:nvSpPr>
@@ -16449,7 +14961,7 @@
       </p:sp>
       <p:sp>
         <p:nvSpPr>
-          <p:cNvPr id="20" name="Text 18"/>
+          <p:cNvPr id="18" name="Text 16"/>
           <p:cNvSpPr/>
           <p:nvPr/>
         </p:nvSpPr>
@@ -16531,7 +15043,7 @@
       </p:sp>
       <p:sp>
         <p:nvSpPr>
-          <p:cNvPr id="21" name="Shape 19"/>
+          <p:cNvPr id="19" name="Shape 17"/>
           <p:cNvSpPr/>
           <p:nvPr/>
         </p:nvSpPr>
@@ -16551,7 +15063,7 @@
       </p:sp>
       <p:sp>
         <p:nvSpPr>
-          <p:cNvPr id="22" name="Shape 20"/>
+          <p:cNvPr id="20" name="Shape 18"/>
           <p:cNvSpPr/>
           <p:nvPr/>
         </p:nvSpPr>
@@ -16585,7 +15097,7 @@
       </p:sp>
       <p:sp>
         <p:nvSpPr>
-          <p:cNvPr id="23" name="Text 21"/>
+          <p:cNvPr id="21" name="Text 19"/>
           <p:cNvSpPr/>
           <p:nvPr/>
         </p:nvSpPr>
@@ -16621,7 +15133,7 @@
       </p:sp>
       <p:sp>
         <p:nvSpPr>
-          <p:cNvPr id="24" name="Text 22"/>
+          <p:cNvPr id="22" name="Text 20"/>
           <p:cNvSpPr/>
           <p:nvPr/>
         </p:nvSpPr>
@@ -16660,7 +15172,7 @@
       </p:sp>
       <p:sp>
         <p:nvSpPr>
-          <p:cNvPr id="25" name="Text 23"/>
+          <p:cNvPr id="23" name="Text 21"/>
           <p:cNvSpPr/>
           <p:nvPr/>
         </p:nvSpPr>
@@ -16742,7 +15254,7 @@
       </p:sp>
       <p:sp>
         <p:nvSpPr>
-          <p:cNvPr id="26" name="Shape 24"/>
+          <p:cNvPr id="24" name="Shape 22"/>
           <p:cNvSpPr/>
           <p:nvPr/>
         </p:nvSpPr>
@@ -16762,7 +15274,7 @@
       </p:sp>
       <p:sp>
         <p:nvSpPr>
-          <p:cNvPr id="27" name="Shape 25"/>
+          <p:cNvPr id="25" name="Shape 23"/>
           <p:cNvSpPr/>
           <p:nvPr/>
         </p:nvSpPr>
@@ -16796,7 +15308,7 @@
       </p:sp>
       <p:sp>
         <p:nvSpPr>
-          <p:cNvPr id="28" name="Text 26"/>
+          <p:cNvPr id="26" name="Text 24"/>
           <p:cNvSpPr/>
           <p:nvPr/>
         </p:nvSpPr>
@@ -16832,7 +15344,7 @@
       </p:sp>
       <p:sp>
         <p:nvSpPr>
-          <p:cNvPr id="29" name="Text 27"/>
+          <p:cNvPr id="27" name="Text 25"/>
           <p:cNvSpPr/>
           <p:nvPr/>
         </p:nvSpPr>
@@ -16871,7 +15383,7 @@
       </p:sp>
       <p:sp>
         <p:nvSpPr>
-          <p:cNvPr id="30" name="Text 28"/>
+          <p:cNvPr id="28" name="Text 26"/>
           <p:cNvSpPr/>
           <p:nvPr/>
         </p:nvSpPr>
@@ -16953,7 +15465,7 @@
       </p:sp>
       <p:sp>
         <p:nvSpPr>
-          <p:cNvPr id="31" name="Shape 29"/>
+          <p:cNvPr id="29" name="Shape 27"/>
           <p:cNvSpPr/>
           <p:nvPr/>
         </p:nvSpPr>
@@ -16973,7 +15485,7 @@
       </p:sp>
       <p:sp>
         <p:nvSpPr>
-          <p:cNvPr id="32" name="Text 30"/>
+          <p:cNvPr id="30" name="Text 28"/>
           <p:cNvSpPr/>
           <p:nvPr/>
         </p:nvSpPr>
@@ -17026,73 +15538,7 @@
       </p:sp>
       <p:sp>
         <p:nvSpPr>
-          <p:cNvPr id="33" name="Shape 31"/>
-          <p:cNvSpPr/>
-          <p:nvPr/>
-        </p:nvSpPr>
-        <p:spPr>
-          <a:xfrm>
-            <a:off x="9601200" y="6355080"/>
-            <a:ext cx="1280160" cy="256032"/>
-          </a:xfrm>
-          <a:prstGeom prst="roundRect">
-            <a:avLst>
-              <a:gd name="adj" fmla="val 21429"/>
-            </a:avLst>
-          </a:prstGeom>
-          <a:solidFill>
-            <a:srgbClr val="1A1D27"/>
-          </a:solidFill>
-          <a:ln w="12700">
-            <a:solidFill>
-              <a:srgbClr val="2A2F3E"/>
-            </a:solidFill>
-            <a:prstDash val="solid"/>
-          </a:ln>
-        </p:spPr>
-      </p:sp>
-      <p:sp>
-        <p:nvSpPr>
-          <p:cNvPr id="34" name="Text 32"/>
-          <p:cNvSpPr/>
-          <p:nvPr/>
-        </p:nvSpPr>
-        <p:spPr>
-          <a:xfrm>
-            <a:off x="9601200" y="6355080"/>
-            <a:ext cx="1280160" cy="256032"/>
-          </a:xfrm>
-          <a:prstGeom prst="rect">
-            <a:avLst/>
-          </a:prstGeom>
-          <a:noFill/>
-          <a:ln/>
-        </p:spPr>
-        <p:txBody>
-          <a:bodyPr wrap="square" lIns="0" tIns="0" rIns="0" bIns="0" rtlCol="0" anchor="ctr"/>
-          <a:lstStyle/>
-          <a:p>
-            <a:pPr algn="ctr" indent="0" marL="0">
-              <a:buNone/>
-            </a:pPr>
-            <a:r>
-              <a:rPr lang="en-US" sz="900" b="1" dirty="0">
-                <a:solidFill>
-                  <a:srgbClr val="FFB347"/>
-                </a:solidFill>
-                <a:latin typeface="Calibri" pitchFamily="34" charset="0"/>
-                <a:ea typeface="Calibri" pitchFamily="34" charset="-122"/>
-                <a:cs typeface="Calibri" pitchFamily="34" charset="-120"/>
-              </a:rPr>
-              <a:t>Member 2</a:t>
-            </a:r>
-            <a:endParaRPr lang="en-US" sz="900" dirty="0"/>
-          </a:p>
-        </p:txBody>
-      </p:sp>
-      <p:sp>
-        <p:nvSpPr>
-          <p:cNvPr id="35" name="Text 33"/>
+          <p:cNvPr id="31" name="Text 29"/>
           <p:cNvSpPr/>
           <p:nvPr/>
         </p:nvSpPr>
@@ -17214,7 +15660,7 @@
                 <a:ea typeface="Calibri" pitchFamily="34" charset="-122"/>
                 <a:cs typeface="Calibri" pitchFamily="34" charset="-120"/>
               </a:rPr>
-              <a:t>MEMBER 2  ·  FEATURES</a:t>
+              <a:t>FEATURES</a:t>
             </a:r>
             <a:endParaRPr lang="en-US" sz="1200" dirty="0"/>
           </a:p>
@@ -17262,72 +15708,6 @@
       <p:sp>
         <p:nvSpPr>
           <p:cNvPr id="5" name="Shape 3"/>
-          <p:cNvSpPr/>
-          <p:nvPr/>
-        </p:nvSpPr>
-        <p:spPr>
-          <a:xfrm>
-            <a:off x="9601200" y="384048"/>
-            <a:ext cx="1920240" cy="292608"/>
-          </a:xfrm>
-          <a:prstGeom prst="roundRect">
-            <a:avLst>
-              <a:gd name="adj" fmla="val 18750"/>
-            </a:avLst>
-          </a:prstGeom>
-          <a:solidFill>
-            <a:srgbClr val="1A1D27"/>
-          </a:solidFill>
-          <a:ln w="25400">
-            <a:solidFill>
-              <a:srgbClr val="FFB347"/>
-            </a:solidFill>
-            <a:prstDash val="solid"/>
-          </a:ln>
-        </p:spPr>
-      </p:sp>
-      <p:sp>
-        <p:nvSpPr>
-          <p:cNvPr id="6" name="Text 4"/>
-          <p:cNvSpPr/>
-          <p:nvPr/>
-        </p:nvSpPr>
-        <p:spPr>
-          <a:xfrm>
-            <a:off x="9601200" y="384048"/>
-            <a:ext cx="1920240" cy="292608"/>
-          </a:xfrm>
-          <a:prstGeom prst="rect">
-            <a:avLst/>
-          </a:prstGeom>
-          <a:noFill/>
-          <a:ln/>
-        </p:spPr>
-        <p:txBody>
-          <a:bodyPr wrap="square" lIns="0" tIns="0" rIns="0" bIns="0" rtlCol="0" anchor="ctr"/>
-          <a:lstStyle/>
-          <a:p>
-            <a:pPr algn="ctr" indent="0" marL="0">
-              <a:buNone/>
-            </a:pPr>
-            <a:r>
-              <a:rPr lang="en-US" sz="950" b="1" dirty="0">
-                <a:solidFill>
-                  <a:srgbClr val="FFB347"/>
-                </a:solidFill>
-                <a:latin typeface="Calibri" pitchFamily="34" charset="0"/>
-                <a:ea typeface="Calibri" pitchFamily="34" charset="-122"/>
-                <a:cs typeface="Calibri" pitchFamily="34" charset="-120"/>
-              </a:rPr>
-              <a:t>◀  Member 2  ·  Features</a:t>
-            </a:r>
-            <a:endParaRPr lang="en-US" sz="950" dirty="0"/>
-          </a:p>
-        </p:txBody>
-      </p:sp>
-      <p:sp>
-        <p:nvSpPr>
-          <p:cNvPr id="7" name="Shape 5"/>
           <p:cNvSpPr/>
           <p:nvPr/>
         </p:nvSpPr>
@@ -17361,7 +15741,7 @@
       </p:sp>
       <p:sp>
         <p:nvSpPr>
-          <p:cNvPr id="8" name="Text 6"/>
+          <p:cNvPr id="6" name="Text 4"/>
           <p:cNvSpPr/>
           <p:nvPr/>
         </p:nvSpPr>
@@ -17400,7 +15780,7 @@
       </p:sp>
       <p:sp>
         <p:nvSpPr>
-          <p:cNvPr id="9" name="Text 7"/>
+          <p:cNvPr id="7" name="Text 5"/>
           <p:cNvSpPr/>
           <p:nvPr/>
         </p:nvSpPr>
@@ -17442,7 +15822,7 @@
       </p:sp>
       <p:sp>
         <p:nvSpPr>
-          <p:cNvPr id="10" name="Shape 8"/>
+          <p:cNvPr id="8" name="Shape 6"/>
           <p:cNvSpPr/>
           <p:nvPr/>
         </p:nvSpPr>
@@ -17476,7 +15856,7 @@
       </p:sp>
       <p:sp>
         <p:nvSpPr>
-          <p:cNvPr id="11" name="Text 9"/>
+          <p:cNvPr id="9" name="Text 7"/>
           <p:cNvSpPr/>
           <p:nvPr/>
         </p:nvSpPr>
@@ -17515,7 +15895,7 @@
       </p:sp>
       <p:sp>
         <p:nvSpPr>
-          <p:cNvPr id="12" name="Text 10"/>
+          <p:cNvPr id="10" name="Text 8"/>
           <p:cNvSpPr/>
           <p:nvPr/>
         </p:nvSpPr>
@@ -17557,7 +15937,7 @@
       </p:sp>
       <p:sp>
         <p:nvSpPr>
-          <p:cNvPr id="13" name="Shape 11"/>
+          <p:cNvPr id="11" name="Shape 9"/>
           <p:cNvSpPr/>
           <p:nvPr/>
         </p:nvSpPr>
@@ -17591,7 +15971,7 @@
       </p:sp>
       <p:sp>
         <p:nvSpPr>
-          <p:cNvPr id="14" name="Text 12"/>
+          <p:cNvPr id="12" name="Text 10"/>
           <p:cNvSpPr/>
           <p:nvPr/>
         </p:nvSpPr>
@@ -17630,7 +16010,7 @@
       </p:sp>
       <p:sp>
         <p:nvSpPr>
-          <p:cNvPr id="15" name="Text 13"/>
+          <p:cNvPr id="13" name="Text 11"/>
           <p:cNvSpPr/>
           <p:nvPr/>
         </p:nvSpPr>
@@ -17672,7 +16052,7 @@
       </p:sp>
       <p:sp>
         <p:nvSpPr>
-          <p:cNvPr id="16" name="Shape 14"/>
+          <p:cNvPr id="14" name="Shape 12"/>
           <p:cNvSpPr/>
           <p:nvPr/>
         </p:nvSpPr>
@@ -17706,7 +16086,7 @@
       </p:sp>
       <p:sp>
         <p:nvSpPr>
-          <p:cNvPr id="17" name="Text 15"/>
+          <p:cNvPr id="15" name="Text 13"/>
           <p:cNvSpPr/>
           <p:nvPr/>
         </p:nvSpPr>
@@ -17745,7 +16125,7 @@
       </p:sp>
       <p:sp>
         <p:nvSpPr>
-          <p:cNvPr id="18" name="Text 16"/>
+          <p:cNvPr id="16" name="Text 14"/>
           <p:cNvSpPr/>
           <p:nvPr/>
         </p:nvSpPr>
@@ -17787,7 +16167,7 @@
       </p:sp>
       <p:sp>
         <p:nvSpPr>
-          <p:cNvPr id="19" name="Shape 17"/>
+          <p:cNvPr id="17" name="Shape 15"/>
           <p:cNvSpPr/>
           <p:nvPr/>
         </p:nvSpPr>
@@ -17821,7 +16201,7 @@
       </p:sp>
       <p:sp>
         <p:nvSpPr>
-          <p:cNvPr id="20" name="Text 18"/>
+          <p:cNvPr id="18" name="Text 16"/>
           <p:cNvSpPr/>
           <p:nvPr/>
         </p:nvSpPr>
@@ -17860,7 +16240,7 @@
       </p:sp>
       <p:sp>
         <p:nvSpPr>
-          <p:cNvPr id="21" name="Text 19"/>
+          <p:cNvPr id="19" name="Text 17"/>
           <p:cNvSpPr/>
           <p:nvPr/>
         </p:nvSpPr>
@@ -17902,7 +16282,7 @@
       </p:sp>
       <p:sp>
         <p:nvSpPr>
-          <p:cNvPr id="22" name="Shape 20"/>
+          <p:cNvPr id="20" name="Shape 18"/>
           <p:cNvSpPr/>
           <p:nvPr/>
         </p:nvSpPr>
@@ -17936,7 +16316,7 @@
       </p:sp>
       <p:sp>
         <p:nvSpPr>
-          <p:cNvPr id="23" name="Text 21"/>
+          <p:cNvPr id="21" name="Text 19"/>
           <p:cNvSpPr/>
           <p:nvPr/>
         </p:nvSpPr>
@@ -17975,7 +16355,7 @@
       </p:sp>
       <p:sp>
         <p:nvSpPr>
-          <p:cNvPr id="24" name="Text 22"/>
+          <p:cNvPr id="22" name="Text 20"/>
           <p:cNvSpPr/>
           <p:nvPr/>
         </p:nvSpPr>
@@ -18017,7 +16397,7 @@
       </p:sp>
       <p:sp>
         <p:nvSpPr>
-          <p:cNvPr id="25" name="Text 23"/>
+          <p:cNvPr id="23" name="Text 21"/>
           <p:cNvSpPr/>
           <p:nvPr/>
         </p:nvSpPr>
@@ -18070,73 +16450,7 @@
       </p:sp>
       <p:sp>
         <p:nvSpPr>
-          <p:cNvPr id="26" name="Shape 24"/>
-          <p:cNvSpPr/>
-          <p:nvPr/>
-        </p:nvSpPr>
-        <p:spPr>
-          <a:xfrm>
-            <a:off x="9601200" y="6355080"/>
-            <a:ext cx="1280160" cy="256032"/>
-          </a:xfrm>
-          <a:prstGeom prst="roundRect">
-            <a:avLst>
-              <a:gd name="adj" fmla="val 21429"/>
-            </a:avLst>
-          </a:prstGeom>
-          <a:solidFill>
-            <a:srgbClr val="1A1D27"/>
-          </a:solidFill>
-          <a:ln w="12700">
-            <a:solidFill>
-              <a:srgbClr val="2A2F3E"/>
-            </a:solidFill>
-            <a:prstDash val="solid"/>
-          </a:ln>
-        </p:spPr>
-      </p:sp>
-      <p:sp>
-        <p:nvSpPr>
-          <p:cNvPr id="27" name="Text 25"/>
-          <p:cNvSpPr/>
-          <p:nvPr/>
-        </p:nvSpPr>
-        <p:spPr>
-          <a:xfrm>
-            <a:off x="9601200" y="6355080"/>
-            <a:ext cx="1280160" cy="256032"/>
-          </a:xfrm>
-          <a:prstGeom prst="rect">
-            <a:avLst/>
-          </a:prstGeom>
-          <a:noFill/>
-          <a:ln/>
-        </p:spPr>
-        <p:txBody>
-          <a:bodyPr wrap="square" lIns="0" tIns="0" rIns="0" bIns="0" rtlCol="0" anchor="ctr"/>
-          <a:lstStyle/>
-          <a:p>
-            <a:pPr algn="ctr" indent="0" marL="0">
-              <a:buNone/>
-            </a:pPr>
-            <a:r>
-              <a:rPr lang="en-US" sz="900" b="1" dirty="0">
-                <a:solidFill>
-                  <a:srgbClr val="FFB347"/>
-                </a:solidFill>
-                <a:latin typeface="Calibri" pitchFamily="34" charset="0"/>
-                <a:ea typeface="Calibri" pitchFamily="34" charset="-122"/>
-                <a:cs typeface="Calibri" pitchFamily="34" charset="-120"/>
-              </a:rPr>
-              <a:t>Member 2</a:t>
-            </a:r>
-            <a:endParaRPr lang="en-US" sz="900" dirty="0"/>
-          </a:p>
-        </p:txBody>
-      </p:sp>
-      <p:sp>
-        <p:nvSpPr>
-          <p:cNvPr id="28" name="Text 26"/>
+          <p:cNvPr id="24" name="Text 22"/>
           <p:cNvSpPr/>
           <p:nvPr/>
         </p:nvSpPr>
@@ -18258,7 +16572,7 @@
                 <a:ea typeface="Calibri" pitchFamily="34" charset="-122"/>
                 <a:cs typeface="Calibri" pitchFamily="34" charset="-120"/>
               </a:rPr>
-              <a:t>MEMBER 3  ·  ARCHITECTURE &amp; C ENGINE</a:t>
+              <a:t>ARCHITECTURE &amp; C ENGINE</a:t>
             </a:r>
             <a:endParaRPr lang="en-US" sz="1200" dirty="0"/>
           </a:p>
@@ -18306,72 +16620,6 @@
       <p:sp>
         <p:nvSpPr>
           <p:cNvPr id="5" name="Shape 3"/>
-          <p:cNvSpPr/>
-          <p:nvPr/>
-        </p:nvSpPr>
-        <p:spPr>
-          <a:xfrm>
-            <a:off x="9601200" y="384048"/>
-            <a:ext cx="1920240" cy="292608"/>
-          </a:xfrm>
-          <a:prstGeom prst="roundRect">
-            <a:avLst>
-              <a:gd name="adj" fmla="val 18750"/>
-            </a:avLst>
-          </a:prstGeom>
-          <a:solidFill>
-            <a:srgbClr val="1A1D27"/>
-          </a:solidFill>
-          <a:ln w="25400">
-            <a:solidFill>
-              <a:srgbClr val="FFB347"/>
-            </a:solidFill>
-            <a:prstDash val="solid"/>
-          </a:ln>
-        </p:spPr>
-      </p:sp>
-      <p:sp>
-        <p:nvSpPr>
-          <p:cNvPr id="6" name="Text 4"/>
-          <p:cNvSpPr/>
-          <p:nvPr/>
-        </p:nvSpPr>
-        <p:spPr>
-          <a:xfrm>
-            <a:off x="9601200" y="384048"/>
-            <a:ext cx="1920240" cy="292608"/>
-          </a:xfrm>
-          <a:prstGeom prst="rect">
-            <a:avLst/>
-          </a:prstGeom>
-          <a:noFill/>
-          <a:ln/>
-        </p:spPr>
-        <p:txBody>
-          <a:bodyPr wrap="square" lIns="0" tIns="0" rIns="0" bIns="0" rtlCol="0" anchor="ctr"/>
-          <a:lstStyle/>
-          <a:p>
-            <a:pPr algn="ctr" indent="0" marL="0">
-              <a:buNone/>
-            </a:pPr>
-            <a:r>
-              <a:rPr lang="en-US" sz="950" b="1" dirty="0">
-                <a:solidFill>
-                  <a:srgbClr val="FFB347"/>
-                </a:solidFill>
-                <a:latin typeface="Calibri" pitchFamily="34" charset="0"/>
-                <a:ea typeface="Calibri" pitchFamily="34" charset="-122"/>
-                <a:cs typeface="Calibri" pitchFamily="34" charset="-120"/>
-              </a:rPr>
-              <a:t>◀  Member 3  ·  C Engine</a:t>
-            </a:r>
-            <a:endParaRPr lang="en-US" sz="950" dirty="0"/>
-          </a:p>
-        </p:txBody>
-      </p:sp>
-      <p:sp>
-        <p:nvSpPr>
-          <p:cNvPr id="7" name="Shape 5"/>
           <p:cNvSpPr/>
           <p:nvPr/>
         </p:nvSpPr>
@@ -18405,7 +16653,7 @@
       </p:sp>
       <p:sp>
         <p:nvSpPr>
-          <p:cNvPr id="8" name="Shape 6"/>
+          <p:cNvPr id="6" name="Shape 4"/>
           <p:cNvSpPr/>
           <p:nvPr/>
         </p:nvSpPr>
@@ -18430,7 +16678,7 @@
       </p:sp>
       <p:sp>
         <p:nvSpPr>
-          <p:cNvPr id="9" name="Text 7"/>
+          <p:cNvPr id="7" name="Text 5"/>
           <p:cNvSpPr/>
           <p:nvPr/>
         </p:nvSpPr>
@@ -18469,7 +16717,7 @@
       </p:sp>
       <p:sp>
         <p:nvSpPr>
-          <p:cNvPr id="10" name="Shape 8"/>
+          <p:cNvPr id="8" name="Shape 6"/>
           <p:cNvSpPr/>
           <p:nvPr/>
         </p:nvSpPr>
@@ -18489,7 +16737,7 @@
       </p:sp>
       <p:sp>
         <p:nvSpPr>
-          <p:cNvPr id="11" name="Text 9"/>
+          <p:cNvPr id="9" name="Text 7"/>
           <p:cNvSpPr/>
           <p:nvPr/>
         </p:nvSpPr>
@@ -18609,7 +16857,7 @@
       </p:sp>
       <p:sp>
         <p:nvSpPr>
-          <p:cNvPr id="12" name="Shape 10"/>
+          <p:cNvPr id="10" name="Shape 8"/>
           <p:cNvSpPr/>
           <p:nvPr/>
         </p:nvSpPr>
@@ -18643,7 +16891,7 @@
       </p:sp>
       <p:sp>
         <p:nvSpPr>
-          <p:cNvPr id="13" name="Shape 11"/>
+          <p:cNvPr id="11" name="Shape 9"/>
           <p:cNvSpPr/>
           <p:nvPr/>
         </p:nvSpPr>
@@ -18668,7 +16916,7 @@
       </p:sp>
       <p:sp>
         <p:nvSpPr>
-          <p:cNvPr id="14" name="Text 12"/>
+          <p:cNvPr id="12" name="Text 10"/>
           <p:cNvSpPr/>
           <p:nvPr/>
         </p:nvSpPr>
@@ -18707,7 +16955,7 @@
       </p:sp>
       <p:sp>
         <p:nvSpPr>
-          <p:cNvPr id="15" name="Shape 13"/>
+          <p:cNvPr id="13" name="Shape 11"/>
           <p:cNvSpPr/>
           <p:nvPr/>
         </p:nvSpPr>
@@ -18727,7 +16975,7 @@
       </p:sp>
       <p:sp>
         <p:nvSpPr>
-          <p:cNvPr id="16" name="Text 14"/>
+          <p:cNvPr id="14" name="Text 12"/>
           <p:cNvSpPr/>
           <p:nvPr/>
         </p:nvSpPr>
@@ -18858,7 +17106,7 @@
       </p:sp>
       <p:sp>
         <p:nvSpPr>
-          <p:cNvPr id="17" name="Shape 15"/>
+          <p:cNvPr id="15" name="Shape 13"/>
           <p:cNvSpPr/>
           <p:nvPr/>
         </p:nvSpPr>
@@ -18892,7 +17140,7 @@
       </p:sp>
       <p:sp>
         <p:nvSpPr>
-          <p:cNvPr id="18" name="Shape 16"/>
+          <p:cNvPr id="16" name="Shape 14"/>
           <p:cNvSpPr/>
           <p:nvPr/>
         </p:nvSpPr>
@@ -18917,7 +17165,7 @@
       </p:sp>
       <p:sp>
         <p:nvSpPr>
-          <p:cNvPr id="19" name="Text 17"/>
+          <p:cNvPr id="17" name="Text 15"/>
           <p:cNvSpPr/>
           <p:nvPr/>
         </p:nvSpPr>
@@ -18956,7 +17204,7 @@
       </p:sp>
       <p:sp>
         <p:nvSpPr>
-          <p:cNvPr id="20" name="Shape 18"/>
+          <p:cNvPr id="18" name="Shape 16"/>
           <p:cNvSpPr/>
           <p:nvPr/>
         </p:nvSpPr>
@@ -18976,7 +17224,7 @@
       </p:sp>
       <p:sp>
         <p:nvSpPr>
-          <p:cNvPr id="21" name="Text 19"/>
+          <p:cNvPr id="19" name="Text 17"/>
           <p:cNvSpPr/>
           <p:nvPr/>
         </p:nvSpPr>
@@ -19087,7 +17335,7 @@
       </p:sp>
       <p:sp>
         <p:nvSpPr>
-          <p:cNvPr id="22" name="Shape 20"/>
+          <p:cNvPr id="20" name="Shape 18"/>
           <p:cNvSpPr/>
           <p:nvPr/>
         </p:nvSpPr>
@@ -19121,7 +17369,7 @@
       </p:sp>
       <p:sp>
         <p:nvSpPr>
-          <p:cNvPr id="23" name="Text 21"/>
+          <p:cNvPr id="21" name="Text 19"/>
           <p:cNvSpPr/>
           <p:nvPr/>
         </p:nvSpPr>
@@ -19160,7 +17408,7 @@
       </p:sp>
       <p:sp>
         <p:nvSpPr>
-          <p:cNvPr id="24" name="Shape 22"/>
+          <p:cNvPr id="22" name="Shape 20"/>
           <p:cNvSpPr/>
           <p:nvPr/>
         </p:nvSpPr>
@@ -19180,7 +17428,7 @@
       </p:sp>
       <p:sp>
         <p:nvSpPr>
-          <p:cNvPr id="25" name="Text 23"/>
+          <p:cNvPr id="23" name="Text 21"/>
           <p:cNvSpPr/>
           <p:nvPr/>
         </p:nvSpPr>
@@ -19291,7 +17539,7 @@
       </p:sp>
       <p:sp>
         <p:nvSpPr>
-          <p:cNvPr id="26" name="Shape 24"/>
+          <p:cNvPr id="24" name="Shape 22"/>
           <p:cNvSpPr/>
           <p:nvPr/>
         </p:nvSpPr>
@@ -19325,7 +17573,7 @@
       </p:sp>
       <p:sp>
         <p:nvSpPr>
-          <p:cNvPr id="27" name="Text 25"/>
+          <p:cNvPr id="25" name="Text 23"/>
           <p:cNvSpPr/>
           <p:nvPr/>
         </p:nvSpPr>
@@ -19364,7 +17612,7 @@
       </p:sp>
       <p:sp>
         <p:nvSpPr>
-          <p:cNvPr id="28" name="Text 26"/>
+          <p:cNvPr id="26" name="Text 24"/>
           <p:cNvSpPr/>
           <p:nvPr/>
         </p:nvSpPr>
@@ -19417,73 +17665,7 @@
       </p:sp>
       <p:sp>
         <p:nvSpPr>
-          <p:cNvPr id="29" name="Shape 27"/>
-          <p:cNvSpPr/>
-          <p:nvPr/>
-        </p:nvSpPr>
-        <p:spPr>
-          <a:xfrm>
-            <a:off x="9601200" y="6355080"/>
-            <a:ext cx="1280160" cy="256032"/>
-          </a:xfrm>
-          <a:prstGeom prst="roundRect">
-            <a:avLst>
-              <a:gd name="adj" fmla="val 21429"/>
-            </a:avLst>
-          </a:prstGeom>
-          <a:solidFill>
-            <a:srgbClr val="1A1D27"/>
-          </a:solidFill>
-          <a:ln w="12700">
-            <a:solidFill>
-              <a:srgbClr val="2A2F3E"/>
-            </a:solidFill>
-            <a:prstDash val="solid"/>
-          </a:ln>
-        </p:spPr>
-      </p:sp>
-      <p:sp>
-        <p:nvSpPr>
-          <p:cNvPr id="30" name="Text 28"/>
-          <p:cNvSpPr/>
-          <p:nvPr/>
-        </p:nvSpPr>
-        <p:spPr>
-          <a:xfrm>
-            <a:off x="9601200" y="6355080"/>
-            <a:ext cx="1280160" cy="256032"/>
-          </a:xfrm>
-          <a:prstGeom prst="rect">
-            <a:avLst/>
-          </a:prstGeom>
-          <a:noFill/>
-          <a:ln/>
-        </p:spPr>
-        <p:txBody>
-          <a:bodyPr wrap="square" lIns="0" tIns="0" rIns="0" bIns="0" rtlCol="0" anchor="ctr"/>
-          <a:lstStyle/>
-          <a:p>
-            <a:pPr algn="ctr" indent="0" marL="0">
-              <a:buNone/>
-            </a:pPr>
-            <a:r>
-              <a:rPr lang="en-US" sz="900" b="1" dirty="0">
-                <a:solidFill>
-                  <a:srgbClr val="FFB347"/>
-                </a:solidFill>
-                <a:latin typeface="Calibri" pitchFamily="34" charset="0"/>
-                <a:ea typeface="Calibri" pitchFamily="34" charset="-122"/>
-                <a:cs typeface="Calibri" pitchFamily="34" charset="-120"/>
-              </a:rPr>
-              <a:t>Member 3</a:t>
-            </a:r>
-            <a:endParaRPr lang="en-US" sz="900" dirty="0"/>
-          </a:p>
-        </p:txBody>
-      </p:sp>
-      <p:sp>
-        <p:nvSpPr>
-          <p:cNvPr id="31" name="Text 29"/>
+          <p:cNvPr id="27" name="Text 25"/>
           <p:cNvSpPr/>
           <p:nvPr/>
         </p:nvSpPr>
@@ -19605,7 +17787,7 @@
                 <a:ea typeface="Calibri" pitchFamily="34" charset="-122"/>
                 <a:cs typeface="Calibri" pitchFamily="34" charset="-120"/>
               </a:rPr>
-              <a:t>MEMBER 3  ·  ARCHITECTURE &amp; C ENGINE</a:t>
+              <a:t>ARCHITECTURE &amp; C ENGINE</a:t>
             </a:r>
             <a:endParaRPr lang="en-US" sz="1200" dirty="0"/>
           </a:p>
@@ -19653,72 +17835,6 @@
       <p:sp>
         <p:nvSpPr>
           <p:cNvPr id="5" name="Shape 3"/>
-          <p:cNvSpPr/>
-          <p:nvPr/>
-        </p:nvSpPr>
-        <p:spPr>
-          <a:xfrm>
-            <a:off x="9601200" y="384048"/>
-            <a:ext cx="1920240" cy="292608"/>
-          </a:xfrm>
-          <a:prstGeom prst="roundRect">
-            <a:avLst>
-              <a:gd name="adj" fmla="val 18750"/>
-            </a:avLst>
-          </a:prstGeom>
-          <a:solidFill>
-            <a:srgbClr val="1A1D27"/>
-          </a:solidFill>
-          <a:ln w="25400">
-            <a:solidFill>
-              <a:srgbClr val="FFB347"/>
-            </a:solidFill>
-            <a:prstDash val="solid"/>
-          </a:ln>
-        </p:spPr>
-      </p:sp>
-      <p:sp>
-        <p:nvSpPr>
-          <p:cNvPr id="6" name="Text 4"/>
-          <p:cNvSpPr/>
-          <p:nvPr/>
-        </p:nvSpPr>
-        <p:spPr>
-          <a:xfrm>
-            <a:off x="9601200" y="384048"/>
-            <a:ext cx="1920240" cy="292608"/>
-          </a:xfrm>
-          <a:prstGeom prst="rect">
-            <a:avLst/>
-          </a:prstGeom>
-          <a:noFill/>
-          <a:ln/>
-        </p:spPr>
-        <p:txBody>
-          <a:bodyPr wrap="square" lIns="0" tIns="0" rIns="0" bIns="0" rtlCol="0" anchor="ctr"/>
-          <a:lstStyle/>
-          <a:p>
-            <a:pPr algn="ctr" indent="0" marL="0">
-              <a:buNone/>
-            </a:pPr>
-            <a:r>
-              <a:rPr lang="en-US" sz="950" b="1" dirty="0">
-                <a:solidFill>
-                  <a:srgbClr val="FFB347"/>
-                </a:solidFill>
-                <a:latin typeface="Calibri" pitchFamily="34" charset="0"/>
-                <a:ea typeface="Calibri" pitchFamily="34" charset="-122"/>
-                <a:cs typeface="Calibri" pitchFamily="34" charset="-120"/>
-              </a:rPr>
-              <a:t>◀  Member 3  ·  C Engine</a:t>
-            </a:r>
-            <a:endParaRPr lang="en-US" sz="950" dirty="0"/>
-          </a:p>
-        </p:txBody>
-      </p:sp>
-      <p:sp>
-        <p:nvSpPr>
-          <p:cNvPr id="7" name="Shape 5"/>
           <p:cNvSpPr/>
           <p:nvPr/>
         </p:nvSpPr>
@@ -19752,7 +17868,7 @@
       </p:sp>
       <p:sp>
         <p:nvSpPr>
-          <p:cNvPr id="8" name="Shape 6"/>
+          <p:cNvPr id="6" name="Shape 4"/>
           <p:cNvSpPr/>
           <p:nvPr/>
         </p:nvSpPr>
@@ -19772,7 +17888,7 @@
       </p:sp>
       <p:sp>
         <p:nvSpPr>
-          <p:cNvPr id="9" name="Shape 7"/>
+          <p:cNvPr id="7" name="Shape 5"/>
           <p:cNvSpPr/>
           <p:nvPr/>
         </p:nvSpPr>
@@ -19792,7 +17908,7 @@
       </p:sp>
       <p:sp>
         <p:nvSpPr>
-          <p:cNvPr id="10" name="Shape 8"/>
+          <p:cNvPr id="8" name="Shape 6"/>
           <p:cNvSpPr/>
           <p:nvPr/>
         </p:nvSpPr>
@@ -19812,7 +17928,7 @@
       </p:sp>
       <p:sp>
         <p:nvSpPr>
-          <p:cNvPr id="11" name="Text 9"/>
+          <p:cNvPr id="9" name="Text 7"/>
           <p:cNvSpPr/>
           <p:nvPr/>
         </p:nvSpPr>
@@ -20094,7 +18210,7 @@
       </p:sp>
       <p:sp>
         <p:nvSpPr>
-          <p:cNvPr id="12" name="Shape 10"/>
+          <p:cNvPr id="10" name="Shape 8"/>
           <p:cNvSpPr/>
           <p:nvPr/>
         </p:nvSpPr>
@@ -20128,7 +18244,7 @@
       </p:sp>
       <p:sp>
         <p:nvSpPr>
-          <p:cNvPr id="13" name="Shape 11"/>
+          <p:cNvPr id="11" name="Shape 9"/>
           <p:cNvSpPr/>
           <p:nvPr/>
         </p:nvSpPr>
@@ -20148,7 +18264,7 @@
       </p:sp>
       <p:sp>
         <p:nvSpPr>
-          <p:cNvPr id="14" name="Shape 12"/>
+          <p:cNvPr id="12" name="Shape 10"/>
           <p:cNvSpPr/>
           <p:nvPr/>
         </p:nvSpPr>
@@ -20168,7 +18284,7 @@
       </p:sp>
       <p:sp>
         <p:nvSpPr>
-          <p:cNvPr id="15" name="Shape 13"/>
+          <p:cNvPr id="13" name="Shape 11"/>
           <p:cNvSpPr/>
           <p:nvPr/>
         </p:nvSpPr>
@@ -20188,7 +18304,7 @@
       </p:sp>
       <p:sp>
         <p:nvSpPr>
-          <p:cNvPr id="16" name="Text 14"/>
+          <p:cNvPr id="14" name="Text 12"/>
           <p:cNvSpPr/>
           <p:nvPr/>
         </p:nvSpPr>
@@ -20370,7 +18486,7 @@
       </p:sp>
       <p:sp>
         <p:nvSpPr>
-          <p:cNvPr id="17" name="Shape 15"/>
+          <p:cNvPr id="15" name="Shape 13"/>
           <p:cNvSpPr/>
           <p:nvPr/>
         </p:nvSpPr>
@@ -20404,7 +18520,7 @@
       </p:sp>
       <p:sp>
         <p:nvSpPr>
-          <p:cNvPr id="18" name="Text 16"/>
+          <p:cNvPr id="16" name="Text 14"/>
           <p:cNvSpPr/>
           <p:nvPr/>
         </p:nvSpPr>
@@ -20443,7 +18559,7 @@
       </p:sp>
       <p:sp>
         <p:nvSpPr>
-          <p:cNvPr id="19" name="Text 17"/>
+          <p:cNvPr id="17" name="Text 15"/>
           <p:cNvSpPr/>
           <p:nvPr/>
         </p:nvSpPr>
@@ -20482,7 +18598,7 @@
       </p:sp>
       <p:sp>
         <p:nvSpPr>
-          <p:cNvPr id="20" name="Text 18"/>
+          <p:cNvPr id="18" name="Text 16"/>
           <p:cNvSpPr/>
           <p:nvPr/>
         </p:nvSpPr>
@@ -20521,7 +18637,7 @@
       </p:sp>
       <p:sp>
         <p:nvSpPr>
-          <p:cNvPr id="21" name="Text 19"/>
+          <p:cNvPr id="19" name="Text 17"/>
           <p:cNvSpPr/>
           <p:nvPr/>
         </p:nvSpPr>
@@ -20560,7 +18676,7 @@
       </p:sp>
       <p:sp>
         <p:nvSpPr>
-          <p:cNvPr id="22" name="Text 20"/>
+          <p:cNvPr id="20" name="Text 18"/>
           <p:cNvSpPr/>
           <p:nvPr/>
         </p:nvSpPr>
@@ -20599,7 +18715,7 @@
       </p:sp>
       <p:sp>
         <p:nvSpPr>
-          <p:cNvPr id="23" name="Text 21"/>
+          <p:cNvPr id="21" name="Text 19"/>
           <p:cNvSpPr/>
           <p:nvPr/>
         </p:nvSpPr>
@@ -20638,7 +18754,7 @@
       </p:sp>
       <p:sp>
         <p:nvSpPr>
-          <p:cNvPr id="24" name="Text 22"/>
+          <p:cNvPr id="22" name="Text 20"/>
           <p:cNvSpPr/>
           <p:nvPr/>
         </p:nvSpPr>
@@ -20677,7 +18793,7 @@
       </p:sp>
       <p:sp>
         <p:nvSpPr>
-          <p:cNvPr id="25" name="Shape 23"/>
+          <p:cNvPr id="23" name="Shape 21"/>
           <p:cNvSpPr/>
           <p:nvPr/>
         </p:nvSpPr>
@@ -20697,7 +18813,7 @@
       </p:sp>
       <p:sp>
         <p:nvSpPr>
-          <p:cNvPr id="26" name="Text 24"/>
+          <p:cNvPr id="24" name="Text 22"/>
           <p:cNvSpPr/>
           <p:nvPr/>
         </p:nvSpPr>
@@ -20736,7 +18852,7 @@
       </p:sp>
       <p:sp>
         <p:nvSpPr>
-          <p:cNvPr id="27" name="Text 25"/>
+          <p:cNvPr id="25" name="Text 23"/>
           <p:cNvSpPr/>
           <p:nvPr/>
         </p:nvSpPr>
@@ -20775,7 +18891,7 @@
       </p:sp>
       <p:sp>
         <p:nvSpPr>
-          <p:cNvPr id="28" name="Text 26"/>
+          <p:cNvPr id="26" name="Text 24"/>
           <p:cNvSpPr/>
           <p:nvPr/>
         </p:nvSpPr>
@@ -20814,7 +18930,7 @@
       </p:sp>
       <p:sp>
         <p:nvSpPr>
-          <p:cNvPr id="29" name="Shape 27"/>
+          <p:cNvPr id="27" name="Shape 25"/>
           <p:cNvSpPr/>
           <p:nvPr/>
         </p:nvSpPr>
@@ -20834,7 +18950,7 @@
       </p:sp>
       <p:sp>
         <p:nvSpPr>
-          <p:cNvPr id="30" name="Text 28"/>
+          <p:cNvPr id="28" name="Text 26"/>
           <p:cNvSpPr/>
           <p:nvPr/>
         </p:nvSpPr>
@@ -20873,7 +18989,7 @@
       </p:sp>
       <p:sp>
         <p:nvSpPr>
-          <p:cNvPr id="31" name="Text 29"/>
+          <p:cNvPr id="29" name="Text 27"/>
           <p:cNvSpPr/>
           <p:nvPr/>
         </p:nvSpPr>
@@ -20912,7 +19028,7 @@
       </p:sp>
       <p:sp>
         <p:nvSpPr>
-          <p:cNvPr id="32" name="Text 30"/>
+          <p:cNvPr id="30" name="Text 28"/>
           <p:cNvSpPr/>
           <p:nvPr/>
         </p:nvSpPr>
@@ -20951,7 +19067,7 @@
       </p:sp>
       <p:sp>
         <p:nvSpPr>
-          <p:cNvPr id="33" name="Shape 31"/>
+          <p:cNvPr id="31" name="Shape 29"/>
           <p:cNvSpPr/>
           <p:nvPr/>
         </p:nvSpPr>
@@ -20971,7 +19087,7 @@
       </p:sp>
       <p:sp>
         <p:nvSpPr>
-          <p:cNvPr id="34" name="Text 32"/>
+          <p:cNvPr id="32" name="Text 30"/>
           <p:cNvSpPr/>
           <p:nvPr/>
         </p:nvSpPr>
@@ -21010,7 +19126,7 @@
       </p:sp>
       <p:sp>
         <p:nvSpPr>
-          <p:cNvPr id="35" name="Text 33"/>
+          <p:cNvPr id="33" name="Text 31"/>
           <p:cNvSpPr/>
           <p:nvPr/>
         </p:nvSpPr>
@@ -21049,7 +19165,7 @@
       </p:sp>
       <p:sp>
         <p:nvSpPr>
-          <p:cNvPr id="36" name="Text 34"/>
+          <p:cNvPr id="34" name="Text 32"/>
           <p:cNvSpPr/>
           <p:nvPr/>
         </p:nvSpPr>
@@ -21088,7 +19204,7 @@
       </p:sp>
       <p:sp>
         <p:nvSpPr>
-          <p:cNvPr id="37" name="Shape 35"/>
+          <p:cNvPr id="35" name="Shape 33"/>
           <p:cNvSpPr/>
           <p:nvPr/>
         </p:nvSpPr>
@@ -21108,7 +19224,7 @@
       </p:sp>
       <p:sp>
         <p:nvSpPr>
-          <p:cNvPr id="38" name="Text 36"/>
+          <p:cNvPr id="36" name="Text 34"/>
           <p:cNvSpPr/>
           <p:nvPr/>
         </p:nvSpPr>
@@ -21147,7 +19263,7 @@
       </p:sp>
       <p:sp>
         <p:nvSpPr>
-          <p:cNvPr id="39" name="Text 37"/>
+          <p:cNvPr id="37" name="Text 35"/>
           <p:cNvSpPr/>
           <p:nvPr/>
         </p:nvSpPr>
@@ -21186,7 +19302,7 @@
       </p:sp>
       <p:sp>
         <p:nvSpPr>
-          <p:cNvPr id="40" name="Text 38"/>
+          <p:cNvPr id="38" name="Text 36"/>
           <p:cNvSpPr/>
           <p:nvPr/>
         </p:nvSpPr>
@@ -21225,7 +19341,7 @@
       </p:sp>
       <p:sp>
         <p:nvSpPr>
-          <p:cNvPr id="41" name="Shape 39"/>
+          <p:cNvPr id="39" name="Shape 37"/>
           <p:cNvSpPr/>
           <p:nvPr/>
         </p:nvSpPr>
@@ -21245,7 +19361,7 @@
       </p:sp>
       <p:sp>
         <p:nvSpPr>
-          <p:cNvPr id="42" name="Text 40"/>
+          <p:cNvPr id="40" name="Text 38"/>
           <p:cNvSpPr/>
           <p:nvPr/>
         </p:nvSpPr>
@@ -21284,7 +19400,7 @@
       </p:sp>
       <p:sp>
         <p:nvSpPr>
-          <p:cNvPr id="43" name="Text 41"/>
+          <p:cNvPr id="41" name="Text 39"/>
           <p:cNvSpPr/>
           <p:nvPr/>
         </p:nvSpPr>
@@ -21323,7 +19439,7 @@
       </p:sp>
       <p:sp>
         <p:nvSpPr>
-          <p:cNvPr id="44" name="Text 42"/>
+          <p:cNvPr id="42" name="Text 40"/>
           <p:cNvSpPr/>
           <p:nvPr/>
         </p:nvSpPr>
@@ -21362,7 +19478,7 @@
       </p:sp>
       <p:sp>
         <p:nvSpPr>
-          <p:cNvPr id="45" name="Shape 43"/>
+          <p:cNvPr id="43" name="Shape 41"/>
           <p:cNvSpPr/>
           <p:nvPr/>
         </p:nvSpPr>
@@ -21382,7 +19498,7 @@
       </p:sp>
       <p:sp>
         <p:nvSpPr>
-          <p:cNvPr id="46" name="Text 44"/>
+          <p:cNvPr id="44" name="Text 42"/>
           <p:cNvSpPr/>
           <p:nvPr/>
         </p:nvSpPr>
@@ -21421,7 +19537,7 @@
       </p:sp>
       <p:sp>
         <p:nvSpPr>
-          <p:cNvPr id="47" name="Text 45"/>
+          <p:cNvPr id="45" name="Text 43"/>
           <p:cNvSpPr/>
           <p:nvPr/>
         </p:nvSpPr>
@@ -21460,7 +19576,7 @@
       </p:sp>
       <p:sp>
         <p:nvSpPr>
-          <p:cNvPr id="48" name="Text 46"/>
+          <p:cNvPr id="46" name="Text 44"/>
           <p:cNvSpPr/>
           <p:nvPr/>
         </p:nvSpPr>
@@ -21499,7 +19615,7 @@
       </p:sp>
       <p:sp>
         <p:nvSpPr>
-          <p:cNvPr id="49" name="Shape 47"/>
+          <p:cNvPr id="47" name="Shape 45"/>
           <p:cNvSpPr/>
           <p:nvPr/>
         </p:nvSpPr>
@@ -21519,7 +19635,7 @@
       </p:sp>
       <p:sp>
         <p:nvSpPr>
-          <p:cNvPr id="50" name="Text 48"/>
+          <p:cNvPr id="48" name="Text 46"/>
           <p:cNvSpPr/>
           <p:nvPr/>
         </p:nvSpPr>
@@ -21572,73 +19688,7 @@
       </p:sp>
       <p:sp>
         <p:nvSpPr>
-          <p:cNvPr id="51" name="Shape 49"/>
-          <p:cNvSpPr/>
-          <p:nvPr/>
-        </p:nvSpPr>
-        <p:spPr>
-          <a:xfrm>
-            <a:off x="9601200" y="6355080"/>
-            <a:ext cx="1280160" cy="256032"/>
-          </a:xfrm>
-          <a:prstGeom prst="roundRect">
-            <a:avLst>
-              <a:gd name="adj" fmla="val 21429"/>
-            </a:avLst>
-          </a:prstGeom>
-          <a:solidFill>
-            <a:srgbClr val="1A1D27"/>
-          </a:solidFill>
-          <a:ln w="12700">
-            <a:solidFill>
-              <a:srgbClr val="2A2F3E"/>
-            </a:solidFill>
-            <a:prstDash val="solid"/>
-          </a:ln>
-        </p:spPr>
-      </p:sp>
-      <p:sp>
-        <p:nvSpPr>
-          <p:cNvPr id="52" name="Text 50"/>
-          <p:cNvSpPr/>
-          <p:nvPr/>
-        </p:nvSpPr>
-        <p:spPr>
-          <a:xfrm>
-            <a:off x="9601200" y="6355080"/>
-            <a:ext cx="1280160" cy="256032"/>
-          </a:xfrm>
-          <a:prstGeom prst="rect">
-            <a:avLst/>
-          </a:prstGeom>
-          <a:noFill/>
-          <a:ln/>
-        </p:spPr>
-        <p:txBody>
-          <a:bodyPr wrap="square" lIns="0" tIns="0" rIns="0" bIns="0" rtlCol="0" anchor="ctr"/>
-          <a:lstStyle/>
-          <a:p>
-            <a:pPr algn="ctr" indent="0" marL="0">
-              <a:buNone/>
-            </a:pPr>
-            <a:r>
-              <a:rPr lang="en-US" sz="900" b="1" dirty="0">
-                <a:solidFill>
-                  <a:srgbClr val="FFB347"/>
-                </a:solidFill>
-                <a:latin typeface="Calibri" pitchFamily="34" charset="0"/>
-                <a:ea typeface="Calibri" pitchFamily="34" charset="-122"/>
-                <a:cs typeface="Calibri" pitchFamily="34" charset="-120"/>
-              </a:rPr>
-              <a:t>Member 3</a:t>
-            </a:r>
-            <a:endParaRPr lang="en-US" sz="900" dirty="0"/>
-          </a:p>
-        </p:txBody>
-      </p:sp>
-      <p:sp>
-        <p:nvSpPr>
-          <p:cNvPr id="53" name="Text 51"/>
+          <p:cNvPr id="49" name="Text 47"/>
           <p:cNvSpPr/>
           <p:nvPr/>
         </p:nvSpPr>
@@ -21760,7 +19810,7 @@
                 <a:ea typeface="Calibri" pitchFamily="34" charset="-122"/>
                 <a:cs typeface="Calibri" pitchFamily="34" charset="-120"/>
               </a:rPr>
-              <a:t>MEMBER 3  ·  ARCHITECTURE &amp; C ENGINE</a:t>
+              <a:t>ARCHITECTURE &amp; C ENGINE</a:t>
             </a:r>
             <a:endParaRPr lang="en-US" sz="1200" dirty="0"/>
           </a:p>
@@ -21808,72 +19858,6 @@
       <p:sp>
         <p:nvSpPr>
           <p:cNvPr id="5" name="Shape 3"/>
-          <p:cNvSpPr/>
-          <p:nvPr/>
-        </p:nvSpPr>
-        <p:spPr>
-          <a:xfrm>
-            <a:off x="9601200" y="384048"/>
-            <a:ext cx="1920240" cy="292608"/>
-          </a:xfrm>
-          <a:prstGeom prst="roundRect">
-            <a:avLst>
-              <a:gd name="adj" fmla="val 18750"/>
-            </a:avLst>
-          </a:prstGeom>
-          <a:solidFill>
-            <a:srgbClr val="1A1D27"/>
-          </a:solidFill>
-          <a:ln w="25400">
-            <a:solidFill>
-              <a:srgbClr val="FFB347"/>
-            </a:solidFill>
-            <a:prstDash val="solid"/>
-          </a:ln>
-        </p:spPr>
-      </p:sp>
-      <p:sp>
-        <p:nvSpPr>
-          <p:cNvPr id="6" name="Text 4"/>
-          <p:cNvSpPr/>
-          <p:nvPr/>
-        </p:nvSpPr>
-        <p:spPr>
-          <a:xfrm>
-            <a:off x="9601200" y="384048"/>
-            <a:ext cx="1920240" cy="292608"/>
-          </a:xfrm>
-          <a:prstGeom prst="rect">
-            <a:avLst/>
-          </a:prstGeom>
-          <a:noFill/>
-          <a:ln/>
-        </p:spPr>
-        <p:txBody>
-          <a:bodyPr wrap="square" lIns="0" tIns="0" rIns="0" bIns="0" rtlCol="0" anchor="ctr"/>
-          <a:lstStyle/>
-          <a:p>
-            <a:pPr algn="ctr" indent="0" marL="0">
-              <a:buNone/>
-            </a:pPr>
-            <a:r>
-              <a:rPr lang="en-US" sz="950" b="1" dirty="0">
-                <a:solidFill>
-                  <a:srgbClr val="FFB347"/>
-                </a:solidFill>
-                <a:latin typeface="Calibri" pitchFamily="34" charset="0"/>
-                <a:ea typeface="Calibri" pitchFamily="34" charset="-122"/>
-                <a:cs typeface="Calibri" pitchFamily="34" charset="-120"/>
-              </a:rPr>
-              <a:t>◀  Member 3  ·  C Engine</a:t>
-            </a:r>
-            <a:endParaRPr lang="en-US" sz="950" dirty="0"/>
-          </a:p>
-        </p:txBody>
-      </p:sp>
-      <p:sp>
-        <p:nvSpPr>
-          <p:cNvPr id="7" name="Shape 5"/>
           <p:cNvSpPr/>
           <p:nvPr/>
         </p:nvSpPr>
@@ -21907,7 +19891,7 @@
       </p:sp>
       <p:sp>
         <p:nvSpPr>
-          <p:cNvPr id="8" name="Shape 6"/>
+          <p:cNvPr id="6" name="Shape 4"/>
           <p:cNvSpPr/>
           <p:nvPr/>
         </p:nvSpPr>
@@ -21927,7 +19911,7 @@
       </p:sp>
       <p:sp>
         <p:nvSpPr>
-          <p:cNvPr id="9" name="Shape 7"/>
+          <p:cNvPr id="7" name="Shape 5"/>
           <p:cNvSpPr/>
           <p:nvPr/>
         </p:nvSpPr>
@@ -21947,7 +19931,7 @@
       </p:sp>
       <p:sp>
         <p:nvSpPr>
-          <p:cNvPr id="10" name="Shape 8"/>
+          <p:cNvPr id="8" name="Shape 6"/>
           <p:cNvSpPr/>
           <p:nvPr/>
         </p:nvSpPr>
@@ -21967,7 +19951,7 @@
       </p:sp>
       <p:sp>
         <p:nvSpPr>
-          <p:cNvPr id="11" name="Text 9"/>
+          <p:cNvPr id="9" name="Text 7"/>
           <p:cNvSpPr/>
           <p:nvPr/>
         </p:nvSpPr>
@@ -22249,7 +20233,7 @@
       </p:sp>
       <p:sp>
         <p:nvSpPr>
-          <p:cNvPr id="12" name="Shape 10"/>
+          <p:cNvPr id="10" name="Shape 8"/>
           <p:cNvSpPr/>
           <p:nvPr/>
         </p:nvSpPr>
@@ -22283,7 +20267,7 @@
       </p:sp>
       <p:sp>
         <p:nvSpPr>
-          <p:cNvPr id="13" name="Shape 11"/>
+          <p:cNvPr id="11" name="Shape 9"/>
           <p:cNvSpPr/>
           <p:nvPr/>
         </p:nvSpPr>
@@ -22303,7 +20287,7 @@
       </p:sp>
       <p:sp>
         <p:nvSpPr>
-          <p:cNvPr id="14" name="Shape 12"/>
+          <p:cNvPr id="12" name="Shape 10"/>
           <p:cNvSpPr/>
           <p:nvPr/>
         </p:nvSpPr>
@@ -22323,7 +20307,7 @@
       </p:sp>
       <p:sp>
         <p:nvSpPr>
-          <p:cNvPr id="15" name="Shape 13"/>
+          <p:cNvPr id="13" name="Shape 11"/>
           <p:cNvSpPr/>
           <p:nvPr/>
         </p:nvSpPr>
@@ -22343,7 +20327,7 @@
       </p:sp>
       <p:sp>
         <p:nvSpPr>
-          <p:cNvPr id="16" name="Text 14"/>
+          <p:cNvPr id="14" name="Text 12"/>
           <p:cNvSpPr/>
           <p:nvPr/>
         </p:nvSpPr>
@@ -22445,7 +20429,7 @@
       </p:sp>
       <p:sp>
         <p:nvSpPr>
-          <p:cNvPr id="17" name="Shape 15"/>
+          <p:cNvPr id="15" name="Shape 13"/>
           <p:cNvSpPr/>
           <p:nvPr/>
         </p:nvSpPr>
@@ -22479,7 +20463,7 @@
       </p:sp>
       <p:sp>
         <p:nvSpPr>
-          <p:cNvPr id="18" name="Shape 16"/>
+          <p:cNvPr id="16" name="Shape 14"/>
           <p:cNvSpPr/>
           <p:nvPr/>
         </p:nvSpPr>
@@ -22499,7 +20483,7 @@
       </p:sp>
       <p:sp>
         <p:nvSpPr>
-          <p:cNvPr id="19" name="Shape 17"/>
+          <p:cNvPr id="17" name="Shape 15"/>
           <p:cNvSpPr/>
           <p:nvPr/>
         </p:nvSpPr>
@@ -22519,7 +20503,7 @@
       </p:sp>
       <p:sp>
         <p:nvSpPr>
-          <p:cNvPr id="20" name="Shape 18"/>
+          <p:cNvPr id="18" name="Shape 16"/>
           <p:cNvSpPr/>
           <p:nvPr/>
         </p:nvSpPr>
@@ -22539,7 +20523,7 @@
       </p:sp>
       <p:sp>
         <p:nvSpPr>
-          <p:cNvPr id="21" name="Text 19"/>
+          <p:cNvPr id="19" name="Text 17"/>
           <p:cNvSpPr/>
           <p:nvPr/>
         </p:nvSpPr>
@@ -22781,7 +20765,7 @@
       </p:sp>
       <p:sp>
         <p:nvSpPr>
-          <p:cNvPr id="22" name="Shape 20"/>
+          <p:cNvPr id="20" name="Shape 18"/>
           <p:cNvSpPr/>
           <p:nvPr/>
         </p:nvSpPr>
@@ -22815,7 +20799,7 @@
       </p:sp>
       <p:sp>
         <p:nvSpPr>
-          <p:cNvPr id="23" name="Text 21"/>
+          <p:cNvPr id="21" name="Text 19"/>
           <p:cNvSpPr/>
           <p:nvPr/>
         </p:nvSpPr>
@@ -22854,7 +20838,7 @@
       </p:sp>
       <p:sp>
         <p:nvSpPr>
-          <p:cNvPr id="24" name="Text 22"/>
+          <p:cNvPr id="22" name="Text 20"/>
           <p:cNvSpPr/>
           <p:nvPr/>
         </p:nvSpPr>
@@ -22960,7 +20944,7 @@
       </p:sp>
       <p:sp>
         <p:nvSpPr>
-          <p:cNvPr id="25" name="Text 23"/>
+          <p:cNvPr id="23" name="Text 21"/>
           <p:cNvSpPr/>
           <p:nvPr/>
         </p:nvSpPr>
@@ -23013,73 +20997,7 @@
       </p:sp>
       <p:sp>
         <p:nvSpPr>
-          <p:cNvPr id="26" name="Shape 24"/>
-          <p:cNvSpPr/>
-          <p:nvPr/>
-        </p:nvSpPr>
-        <p:spPr>
-          <a:xfrm>
-            <a:off x="9601200" y="6355080"/>
-            <a:ext cx="1280160" cy="256032"/>
-          </a:xfrm>
-          <a:prstGeom prst="roundRect">
-            <a:avLst>
-              <a:gd name="adj" fmla="val 21429"/>
-            </a:avLst>
-          </a:prstGeom>
-          <a:solidFill>
-            <a:srgbClr val="1A1D27"/>
-          </a:solidFill>
-          <a:ln w="12700">
-            <a:solidFill>
-              <a:srgbClr val="2A2F3E"/>
-            </a:solidFill>
-            <a:prstDash val="solid"/>
-          </a:ln>
-        </p:spPr>
-      </p:sp>
-      <p:sp>
-        <p:nvSpPr>
-          <p:cNvPr id="27" name="Text 25"/>
-          <p:cNvSpPr/>
-          <p:nvPr/>
-        </p:nvSpPr>
-        <p:spPr>
-          <a:xfrm>
-            <a:off x="9601200" y="6355080"/>
-            <a:ext cx="1280160" cy="256032"/>
-          </a:xfrm>
-          <a:prstGeom prst="rect">
-            <a:avLst/>
-          </a:prstGeom>
-          <a:noFill/>
-          <a:ln/>
-        </p:spPr>
-        <p:txBody>
-          <a:bodyPr wrap="square" lIns="0" tIns="0" rIns="0" bIns="0" rtlCol="0" anchor="ctr"/>
-          <a:lstStyle/>
-          <a:p>
-            <a:pPr algn="ctr" indent="0" marL="0">
-              <a:buNone/>
-            </a:pPr>
-            <a:r>
-              <a:rPr lang="en-US" sz="900" b="1" dirty="0">
-                <a:solidFill>
-                  <a:srgbClr val="FFB347"/>
-                </a:solidFill>
-                <a:latin typeface="Calibri" pitchFamily="34" charset="0"/>
-                <a:ea typeface="Calibri" pitchFamily="34" charset="-122"/>
-                <a:cs typeface="Calibri" pitchFamily="34" charset="-120"/>
-              </a:rPr>
-              <a:t>Member 3</a:t>
-            </a:r>
-            <a:endParaRPr lang="en-US" sz="900" dirty="0"/>
-          </a:p>
-        </p:txBody>
-      </p:sp>
-      <p:sp>
-        <p:nvSpPr>
-          <p:cNvPr id="28" name="Text 26"/>
+          <p:cNvPr id="24" name="Text 22"/>
           <p:cNvSpPr/>
           <p:nvPr/>
         </p:nvSpPr>
@@ -23201,7 +21119,7 @@
                 <a:ea typeface="Calibri" pitchFamily="34" charset="-122"/>
                 <a:cs typeface="Calibri" pitchFamily="34" charset="-120"/>
               </a:rPr>
-              <a:t>MEMBER 4  ·  AI &amp; APIS</a:t>
+              <a:t>AI &amp; APIS</a:t>
             </a:r>
             <a:endParaRPr lang="en-US" sz="1200" dirty="0"/>
           </a:p>
@@ -23249,72 +21167,6 @@
       <p:sp>
         <p:nvSpPr>
           <p:cNvPr id="5" name="Shape 3"/>
-          <p:cNvSpPr/>
-          <p:nvPr/>
-        </p:nvSpPr>
-        <p:spPr>
-          <a:xfrm>
-            <a:off x="9601200" y="384048"/>
-            <a:ext cx="1920240" cy="292608"/>
-          </a:xfrm>
-          <a:prstGeom prst="roundRect">
-            <a:avLst>
-              <a:gd name="adj" fmla="val 18750"/>
-            </a:avLst>
-          </a:prstGeom>
-          <a:solidFill>
-            <a:srgbClr val="1A1D27"/>
-          </a:solidFill>
-          <a:ln w="25400">
-            <a:solidFill>
-              <a:srgbClr val="FFB347"/>
-            </a:solidFill>
-            <a:prstDash val="solid"/>
-          </a:ln>
-        </p:spPr>
-      </p:sp>
-      <p:sp>
-        <p:nvSpPr>
-          <p:cNvPr id="6" name="Text 4"/>
-          <p:cNvSpPr/>
-          <p:nvPr/>
-        </p:nvSpPr>
-        <p:spPr>
-          <a:xfrm>
-            <a:off x="9601200" y="384048"/>
-            <a:ext cx="1920240" cy="292608"/>
-          </a:xfrm>
-          <a:prstGeom prst="rect">
-            <a:avLst/>
-          </a:prstGeom>
-          <a:noFill/>
-          <a:ln/>
-        </p:spPr>
-        <p:txBody>
-          <a:bodyPr wrap="square" lIns="0" tIns="0" rIns="0" bIns="0" rtlCol="0" anchor="ctr"/>
-          <a:lstStyle/>
-          <a:p>
-            <a:pPr algn="ctr" indent="0" marL="0">
-              <a:buNone/>
-            </a:pPr>
-            <a:r>
-              <a:rPr lang="en-US" sz="950" b="1" dirty="0">
-                <a:solidFill>
-                  <a:srgbClr val="FFB347"/>
-                </a:solidFill>
-                <a:latin typeface="Calibri" pitchFamily="34" charset="0"/>
-                <a:ea typeface="Calibri" pitchFamily="34" charset="-122"/>
-                <a:cs typeface="Calibri" pitchFamily="34" charset="-120"/>
-              </a:rPr>
-              <a:t>◀  Member 4  ·  AI &amp; APIs</a:t>
-            </a:r>
-            <a:endParaRPr lang="en-US" sz="950" dirty="0"/>
-          </a:p>
-        </p:txBody>
-      </p:sp>
-      <p:sp>
-        <p:nvSpPr>
-          <p:cNvPr id="7" name="Shape 5"/>
           <p:cNvSpPr/>
           <p:nvPr/>
         </p:nvSpPr>
@@ -23348,7 +21200,7 @@
       </p:sp>
       <p:sp>
         <p:nvSpPr>
-          <p:cNvPr id="8" name="Text 6"/>
+          <p:cNvPr id="6" name="Text 4"/>
           <p:cNvSpPr/>
           <p:nvPr/>
         </p:nvSpPr>
@@ -23387,7 +21239,7 @@
       </p:sp>
       <p:sp>
         <p:nvSpPr>
-          <p:cNvPr id="9" name="Text 7"/>
+          <p:cNvPr id="7" name="Text 5"/>
           <p:cNvSpPr/>
           <p:nvPr/>
         </p:nvSpPr>
@@ -23449,7 +21301,7 @@
       </p:sp>
       <p:sp>
         <p:nvSpPr>
-          <p:cNvPr id="10" name="Text 8"/>
+          <p:cNvPr id="8" name="Text 6"/>
           <p:cNvSpPr/>
           <p:nvPr/>
         </p:nvSpPr>
@@ -23488,7 +21340,7 @@
       </p:sp>
       <p:sp>
         <p:nvSpPr>
-          <p:cNvPr id="11" name="Shape 9"/>
+          <p:cNvPr id="9" name="Shape 7"/>
           <p:cNvSpPr/>
           <p:nvPr/>
         </p:nvSpPr>
@@ -23522,7 +21374,7 @@
       </p:sp>
       <p:sp>
         <p:nvSpPr>
-          <p:cNvPr id="12" name="Shape 10"/>
+          <p:cNvPr id="10" name="Shape 8"/>
           <p:cNvSpPr/>
           <p:nvPr/>
         </p:nvSpPr>
@@ -23542,7 +21394,7 @@
       </p:sp>
       <p:sp>
         <p:nvSpPr>
-          <p:cNvPr id="13" name="Text 11"/>
+          <p:cNvPr id="11" name="Text 9"/>
           <p:cNvSpPr/>
           <p:nvPr/>
         </p:nvSpPr>
@@ -23581,7 +21433,7 @@
       </p:sp>
       <p:sp>
         <p:nvSpPr>
-          <p:cNvPr id="14" name="Text 12"/>
+          <p:cNvPr id="12" name="Text 10"/>
           <p:cNvSpPr/>
           <p:nvPr/>
         </p:nvSpPr>
@@ -23620,7 +21472,7 @@
       </p:sp>
       <p:sp>
         <p:nvSpPr>
-          <p:cNvPr id="15" name="Text 13"/>
+          <p:cNvPr id="13" name="Text 11"/>
           <p:cNvSpPr/>
           <p:nvPr/>
         </p:nvSpPr>
@@ -23676,7 +21528,7 @@
       </p:sp>
       <p:sp>
         <p:nvSpPr>
-          <p:cNvPr id="16" name="Text 14"/>
+          <p:cNvPr id="14" name="Text 12"/>
           <p:cNvSpPr/>
           <p:nvPr/>
         </p:nvSpPr>
@@ -23715,7 +21567,7 @@
       </p:sp>
       <p:sp>
         <p:nvSpPr>
-          <p:cNvPr id="17" name="Shape 15"/>
+          <p:cNvPr id="15" name="Shape 13"/>
           <p:cNvSpPr/>
           <p:nvPr/>
         </p:nvSpPr>
@@ -23735,7 +21587,7 @@
       </p:sp>
       <p:sp>
         <p:nvSpPr>
-          <p:cNvPr id="18" name="Shape 16"/>
+          <p:cNvPr id="16" name="Shape 14"/>
           <p:cNvSpPr/>
           <p:nvPr/>
         </p:nvSpPr>
@@ -23769,7 +21621,7 @@
       </p:sp>
       <p:sp>
         <p:nvSpPr>
-          <p:cNvPr id="19" name="Shape 17"/>
+          <p:cNvPr id="17" name="Shape 15"/>
           <p:cNvSpPr/>
           <p:nvPr/>
         </p:nvSpPr>
@@ -23789,7 +21641,7 @@
       </p:sp>
       <p:sp>
         <p:nvSpPr>
-          <p:cNvPr id="20" name="Text 18"/>
+          <p:cNvPr id="18" name="Text 16"/>
           <p:cNvSpPr/>
           <p:nvPr/>
         </p:nvSpPr>
@@ -23828,7 +21680,7 @@
       </p:sp>
       <p:sp>
         <p:nvSpPr>
-          <p:cNvPr id="21" name="Text 19"/>
+          <p:cNvPr id="19" name="Text 17"/>
           <p:cNvSpPr/>
           <p:nvPr/>
         </p:nvSpPr>
@@ -23867,7 +21719,7 @@
       </p:sp>
       <p:sp>
         <p:nvSpPr>
-          <p:cNvPr id="22" name="Text 20"/>
+          <p:cNvPr id="20" name="Text 18"/>
           <p:cNvSpPr/>
           <p:nvPr/>
         </p:nvSpPr>
@@ -23923,7 +21775,7 @@
       </p:sp>
       <p:sp>
         <p:nvSpPr>
-          <p:cNvPr id="23" name="Text 21"/>
+          <p:cNvPr id="21" name="Text 19"/>
           <p:cNvSpPr/>
           <p:nvPr/>
         </p:nvSpPr>
@@ -23962,7 +21814,7 @@
       </p:sp>
       <p:sp>
         <p:nvSpPr>
-          <p:cNvPr id="24" name="Shape 22"/>
+          <p:cNvPr id="22" name="Shape 20"/>
           <p:cNvSpPr/>
           <p:nvPr/>
         </p:nvSpPr>
@@ -23982,7 +21834,7 @@
       </p:sp>
       <p:sp>
         <p:nvSpPr>
-          <p:cNvPr id="25" name="Shape 23"/>
+          <p:cNvPr id="23" name="Shape 21"/>
           <p:cNvSpPr/>
           <p:nvPr/>
         </p:nvSpPr>
@@ -24016,7 +21868,7 @@
       </p:sp>
       <p:sp>
         <p:nvSpPr>
-          <p:cNvPr id="26" name="Shape 24"/>
+          <p:cNvPr id="24" name="Shape 22"/>
           <p:cNvSpPr/>
           <p:nvPr/>
         </p:nvSpPr>
@@ -24036,7 +21888,7 @@
       </p:sp>
       <p:sp>
         <p:nvSpPr>
-          <p:cNvPr id="27" name="Text 25"/>
+          <p:cNvPr id="25" name="Text 23"/>
           <p:cNvSpPr/>
           <p:nvPr/>
         </p:nvSpPr>
@@ -24075,7 +21927,7 @@
       </p:sp>
       <p:sp>
         <p:nvSpPr>
-          <p:cNvPr id="28" name="Text 26"/>
+          <p:cNvPr id="26" name="Text 24"/>
           <p:cNvSpPr/>
           <p:nvPr/>
         </p:nvSpPr>
@@ -24114,7 +21966,7 @@
       </p:sp>
       <p:sp>
         <p:nvSpPr>
-          <p:cNvPr id="29" name="Text 27"/>
+          <p:cNvPr id="27" name="Text 25"/>
           <p:cNvSpPr/>
           <p:nvPr/>
         </p:nvSpPr>
@@ -24170,7 +22022,7 @@
       </p:sp>
       <p:sp>
         <p:nvSpPr>
-          <p:cNvPr id="30" name="Text 28"/>
+          <p:cNvPr id="28" name="Text 26"/>
           <p:cNvSpPr/>
           <p:nvPr/>
         </p:nvSpPr>
@@ -24209,7 +22061,7 @@
       </p:sp>
       <p:sp>
         <p:nvSpPr>
-          <p:cNvPr id="31" name="Shape 29"/>
+          <p:cNvPr id="29" name="Shape 27"/>
           <p:cNvSpPr/>
           <p:nvPr/>
         </p:nvSpPr>
@@ -24229,7 +22081,7 @@
       </p:sp>
       <p:sp>
         <p:nvSpPr>
-          <p:cNvPr id="32" name="Shape 30"/>
+          <p:cNvPr id="30" name="Shape 28"/>
           <p:cNvSpPr/>
           <p:nvPr/>
         </p:nvSpPr>
@@ -24263,7 +22115,7 @@
       </p:sp>
       <p:sp>
         <p:nvSpPr>
-          <p:cNvPr id="33" name="Shape 31"/>
+          <p:cNvPr id="31" name="Shape 29"/>
           <p:cNvSpPr/>
           <p:nvPr/>
         </p:nvSpPr>
@@ -24283,7 +22135,7 @@
       </p:sp>
       <p:sp>
         <p:nvSpPr>
-          <p:cNvPr id="34" name="Text 32"/>
+          <p:cNvPr id="32" name="Text 30"/>
           <p:cNvSpPr/>
           <p:nvPr/>
         </p:nvSpPr>
@@ -24322,7 +22174,7 @@
       </p:sp>
       <p:sp>
         <p:nvSpPr>
-          <p:cNvPr id="35" name="Text 33"/>
+          <p:cNvPr id="33" name="Text 31"/>
           <p:cNvSpPr/>
           <p:nvPr/>
         </p:nvSpPr>
@@ -24361,7 +22213,7 @@
       </p:sp>
       <p:sp>
         <p:nvSpPr>
-          <p:cNvPr id="36" name="Text 34"/>
+          <p:cNvPr id="34" name="Text 32"/>
           <p:cNvSpPr/>
           <p:nvPr/>
         </p:nvSpPr>
@@ -24417,7 +22269,7 @@
       </p:sp>
       <p:sp>
         <p:nvSpPr>
-          <p:cNvPr id="37" name="Text 35"/>
+          <p:cNvPr id="35" name="Text 33"/>
           <p:cNvSpPr/>
           <p:nvPr/>
         </p:nvSpPr>
@@ -24456,7 +22308,7 @@
       </p:sp>
       <p:sp>
         <p:nvSpPr>
-          <p:cNvPr id="38" name="Shape 36"/>
+          <p:cNvPr id="36" name="Shape 34"/>
           <p:cNvSpPr/>
           <p:nvPr/>
         </p:nvSpPr>
@@ -24490,7 +22342,7 @@
       </p:sp>
       <p:sp>
         <p:nvSpPr>
-          <p:cNvPr id="39" name="Text 37"/>
+          <p:cNvPr id="37" name="Text 35"/>
           <p:cNvSpPr/>
           <p:nvPr/>
         </p:nvSpPr>
@@ -24529,7 +22381,7 @@
       </p:sp>
       <p:sp>
         <p:nvSpPr>
-          <p:cNvPr id="40" name="Text 38"/>
+          <p:cNvPr id="38" name="Text 36"/>
           <p:cNvSpPr/>
           <p:nvPr/>
         </p:nvSpPr>
@@ -24571,7 +22423,7 @@
       </p:sp>
       <p:sp>
         <p:nvSpPr>
-          <p:cNvPr id="41" name="Text 39"/>
+          <p:cNvPr id="39" name="Text 37"/>
           <p:cNvSpPr/>
           <p:nvPr/>
         </p:nvSpPr>
@@ -24624,73 +22476,7 @@
       </p:sp>
       <p:sp>
         <p:nvSpPr>
-          <p:cNvPr id="42" name="Shape 40"/>
-          <p:cNvSpPr/>
-          <p:nvPr/>
-        </p:nvSpPr>
-        <p:spPr>
-          <a:xfrm>
-            <a:off x="9601200" y="6355080"/>
-            <a:ext cx="1280160" cy="256032"/>
-          </a:xfrm>
-          <a:prstGeom prst="roundRect">
-            <a:avLst>
-              <a:gd name="adj" fmla="val 21429"/>
-            </a:avLst>
-          </a:prstGeom>
-          <a:solidFill>
-            <a:srgbClr val="1A1D27"/>
-          </a:solidFill>
-          <a:ln w="12700">
-            <a:solidFill>
-              <a:srgbClr val="2A2F3E"/>
-            </a:solidFill>
-            <a:prstDash val="solid"/>
-          </a:ln>
-        </p:spPr>
-      </p:sp>
-      <p:sp>
-        <p:nvSpPr>
-          <p:cNvPr id="43" name="Text 41"/>
-          <p:cNvSpPr/>
-          <p:nvPr/>
-        </p:nvSpPr>
-        <p:spPr>
-          <a:xfrm>
-            <a:off x="9601200" y="6355080"/>
-            <a:ext cx="1280160" cy="256032"/>
-          </a:xfrm>
-          <a:prstGeom prst="rect">
-            <a:avLst/>
-          </a:prstGeom>
-          <a:noFill/>
-          <a:ln/>
-        </p:spPr>
-        <p:txBody>
-          <a:bodyPr wrap="square" lIns="0" tIns="0" rIns="0" bIns="0" rtlCol="0" anchor="ctr"/>
-          <a:lstStyle/>
-          <a:p>
-            <a:pPr algn="ctr" indent="0" marL="0">
-              <a:buNone/>
-            </a:pPr>
-            <a:r>
-              <a:rPr lang="en-US" sz="900" b="1" dirty="0">
-                <a:solidFill>
-                  <a:srgbClr val="FFB347"/>
-                </a:solidFill>
-                <a:latin typeface="Calibri" pitchFamily="34" charset="0"/>
-                <a:ea typeface="Calibri" pitchFamily="34" charset="-122"/>
-                <a:cs typeface="Calibri" pitchFamily="34" charset="-120"/>
-              </a:rPr>
-              <a:t>Member 4</a:t>
-            </a:r>
-            <a:endParaRPr lang="en-US" sz="900" dirty="0"/>
-          </a:p>
-        </p:txBody>
-      </p:sp>
-      <p:sp>
-        <p:nvSpPr>
-          <p:cNvPr id="44" name="Text 42"/>
+          <p:cNvPr id="40" name="Text 38"/>
           <p:cNvSpPr/>
           <p:nvPr/>
         </p:nvSpPr>

--- a/deliverables/CINEMATCH-Presentation.pptx
+++ b/deliverables/CINEMATCH-Presentation.pptx
@@ -2451,240 +2451,6 @@
         </p:nvSpPr>
         <p:spPr>
           <a:xfrm>
-            <a:off x="3474720" y="4160520"/>
-            <a:ext cx="2560320" cy="329184"/>
-          </a:xfrm>
-          <a:prstGeom prst="rect">
-            <a:avLst/>
-          </a:prstGeom>
-          <a:noFill/>
-          <a:ln/>
-        </p:spPr>
-        <p:txBody>
-          <a:bodyPr wrap="square" lIns="0" tIns="0" rIns="0" bIns="0" rtlCol="0" anchor="ctr"/>
-          <a:lstStyle/>
-          <a:p>
-            <a:pPr algn="ctr" indent="0" marL="0">
-              <a:buNone/>
-            </a:pPr>
-            <a:r>
-              <a:rPr lang="en-US" sz="1300" dirty="0">
-                <a:solidFill>
-                  <a:srgbClr val="ECECF3"/>
-                </a:solidFill>
-                <a:latin typeface="Calibri" pitchFamily="34" charset="0"/>
-                <a:ea typeface="Calibri" pitchFamily="34" charset="-122"/>
-                <a:cs typeface="Calibri" pitchFamily="34" charset="-120"/>
-              </a:rPr>
-              <a:t>[Name]</a:t>
-            </a:r>
-            <a:endParaRPr lang="en-US" sz="1300" dirty="0"/>
-          </a:p>
-        </p:txBody>
-      </p:sp>
-      <p:sp>
-        <p:nvSpPr>
-          <p:cNvPr id="7" name="Text 5"/>
-          <p:cNvSpPr/>
-          <p:nvPr/>
-        </p:nvSpPr>
-        <p:spPr>
-          <a:xfrm>
-            <a:off x="6400800" y="4160520"/>
-            <a:ext cx="2560320" cy="329184"/>
-          </a:xfrm>
-          <a:prstGeom prst="rect">
-            <a:avLst/>
-          </a:prstGeom>
-          <a:noFill/>
-          <a:ln/>
-        </p:spPr>
-        <p:txBody>
-          <a:bodyPr wrap="square" lIns="0" tIns="0" rIns="0" bIns="0" rtlCol="0" anchor="ctr"/>
-          <a:lstStyle/>
-          <a:p>
-            <a:pPr algn="ctr" indent="0" marL="0">
-              <a:buNone/>
-            </a:pPr>
-            <a:r>
-              <a:rPr lang="en-US" sz="1300" dirty="0">
-                <a:solidFill>
-                  <a:srgbClr val="ECECF3"/>
-                </a:solidFill>
-                <a:latin typeface="Calibri" pitchFamily="34" charset="0"/>
-                <a:ea typeface="Calibri" pitchFamily="34" charset="-122"/>
-                <a:cs typeface="Calibri" pitchFamily="34" charset="-120"/>
-              </a:rPr>
-              <a:t>[Name]</a:t>
-            </a:r>
-            <a:endParaRPr lang="en-US" sz="1300" dirty="0"/>
-          </a:p>
-        </p:txBody>
-      </p:sp>
-      <p:sp>
-        <p:nvSpPr>
-          <p:cNvPr id="8" name="Text 6"/>
-          <p:cNvSpPr/>
-          <p:nvPr/>
-        </p:nvSpPr>
-        <p:spPr>
-          <a:xfrm>
-            <a:off x="3474720" y="4544568"/>
-            <a:ext cx="2560320" cy="329184"/>
-          </a:xfrm>
-          <a:prstGeom prst="rect">
-            <a:avLst/>
-          </a:prstGeom>
-          <a:noFill/>
-          <a:ln/>
-        </p:spPr>
-        <p:txBody>
-          <a:bodyPr wrap="square" lIns="0" tIns="0" rIns="0" bIns="0" rtlCol="0" anchor="ctr"/>
-          <a:lstStyle/>
-          <a:p>
-            <a:pPr algn="ctr" indent="0" marL="0">
-              <a:buNone/>
-            </a:pPr>
-            <a:r>
-              <a:rPr lang="en-US" sz="1300" dirty="0">
-                <a:solidFill>
-                  <a:srgbClr val="ECECF3"/>
-                </a:solidFill>
-                <a:latin typeface="Calibri" pitchFamily="34" charset="0"/>
-                <a:ea typeface="Calibri" pitchFamily="34" charset="-122"/>
-                <a:cs typeface="Calibri" pitchFamily="34" charset="-120"/>
-              </a:rPr>
-              <a:t>[Name]</a:t>
-            </a:r>
-            <a:endParaRPr lang="en-US" sz="1300" dirty="0"/>
-          </a:p>
-        </p:txBody>
-      </p:sp>
-      <p:sp>
-        <p:nvSpPr>
-          <p:cNvPr id="9" name="Text 7"/>
-          <p:cNvSpPr/>
-          <p:nvPr/>
-        </p:nvSpPr>
-        <p:spPr>
-          <a:xfrm>
-            <a:off x="6400800" y="4544568"/>
-            <a:ext cx="2560320" cy="329184"/>
-          </a:xfrm>
-          <a:prstGeom prst="rect">
-            <a:avLst/>
-          </a:prstGeom>
-          <a:noFill/>
-          <a:ln/>
-        </p:spPr>
-        <p:txBody>
-          <a:bodyPr wrap="square" lIns="0" tIns="0" rIns="0" bIns="0" rtlCol="0" anchor="ctr"/>
-          <a:lstStyle/>
-          <a:p>
-            <a:pPr algn="ctr" indent="0" marL="0">
-              <a:buNone/>
-            </a:pPr>
-            <a:r>
-              <a:rPr lang="en-US" sz="1300" dirty="0">
-                <a:solidFill>
-                  <a:srgbClr val="ECECF3"/>
-                </a:solidFill>
-                <a:latin typeface="Calibri" pitchFamily="34" charset="0"/>
-                <a:ea typeface="Calibri" pitchFamily="34" charset="-122"/>
-                <a:cs typeface="Calibri" pitchFamily="34" charset="-120"/>
-              </a:rPr>
-              <a:t>[Name]</a:t>
-            </a:r>
-            <a:endParaRPr lang="en-US" sz="1300" dirty="0"/>
-          </a:p>
-        </p:txBody>
-      </p:sp>
-      <p:sp>
-        <p:nvSpPr>
-          <p:cNvPr id="10" name="Text 8"/>
-          <p:cNvSpPr/>
-          <p:nvPr/>
-        </p:nvSpPr>
-        <p:spPr>
-          <a:xfrm>
-            <a:off x="3474720" y="4928616"/>
-            <a:ext cx="2560320" cy="329184"/>
-          </a:xfrm>
-          <a:prstGeom prst="rect">
-            <a:avLst/>
-          </a:prstGeom>
-          <a:noFill/>
-          <a:ln/>
-        </p:spPr>
-        <p:txBody>
-          <a:bodyPr wrap="square" lIns="0" tIns="0" rIns="0" bIns="0" rtlCol="0" anchor="ctr"/>
-          <a:lstStyle/>
-          <a:p>
-            <a:pPr algn="ctr" indent="0" marL="0">
-              <a:buNone/>
-            </a:pPr>
-            <a:r>
-              <a:rPr lang="en-US" sz="1300" dirty="0">
-                <a:solidFill>
-                  <a:srgbClr val="ECECF3"/>
-                </a:solidFill>
-                <a:latin typeface="Calibri" pitchFamily="34" charset="0"/>
-                <a:ea typeface="Calibri" pitchFamily="34" charset="-122"/>
-                <a:cs typeface="Calibri" pitchFamily="34" charset="-120"/>
-              </a:rPr>
-              <a:t>[Name]</a:t>
-            </a:r>
-            <a:endParaRPr lang="en-US" sz="1300" dirty="0"/>
-          </a:p>
-        </p:txBody>
-      </p:sp>
-      <p:sp>
-        <p:nvSpPr>
-          <p:cNvPr id="11" name="Text 9"/>
-          <p:cNvSpPr/>
-          <p:nvPr/>
-        </p:nvSpPr>
-        <p:spPr>
-          <a:xfrm>
-            <a:off x="6400800" y="4928616"/>
-            <a:ext cx="2560320" cy="329184"/>
-          </a:xfrm>
-          <a:prstGeom prst="rect">
-            <a:avLst/>
-          </a:prstGeom>
-          <a:noFill/>
-          <a:ln/>
-        </p:spPr>
-        <p:txBody>
-          <a:bodyPr wrap="square" lIns="0" tIns="0" rIns="0" bIns="0" rtlCol="0" anchor="ctr"/>
-          <a:lstStyle/>
-          <a:p>
-            <a:pPr algn="ctr" indent="0" marL="0">
-              <a:buNone/>
-            </a:pPr>
-            <a:r>
-              <a:rPr lang="en-US" sz="1300" dirty="0">
-                <a:solidFill>
-                  <a:srgbClr val="ECECF3"/>
-                </a:solidFill>
-                <a:latin typeface="Calibri" pitchFamily="34" charset="0"/>
-                <a:ea typeface="Calibri" pitchFamily="34" charset="-122"/>
-                <a:cs typeface="Calibri" pitchFamily="34" charset="-120"/>
-              </a:rPr>
-              <a:t>[Name]</a:t>
-            </a:r>
-            <a:endParaRPr lang="en-US" sz="1300" dirty="0"/>
-          </a:p>
-        </p:txBody>
-      </p:sp>
-      <p:sp>
-        <p:nvSpPr>
-          <p:cNvPr id="12" name="Text 10"/>
-          <p:cNvSpPr/>
-          <p:nvPr/>
-        </p:nvSpPr>
-        <p:spPr>
-          <a:xfrm>
             <a:off x="640080" y="6400800"/>
             <a:ext cx="8229600" cy="274320"/>
           </a:xfrm>
@@ -2732,7 +2498,7 @@
       </p:sp>
       <p:sp>
         <p:nvSpPr>
-          <p:cNvPr id="13" name="Text 11"/>
+          <p:cNvPr id="7" name="Text 5"/>
           <p:cNvSpPr/>
           <p:nvPr/>
         </p:nvSpPr>
